--- a/docs/pptx/carbo/jx-carbo-linsubhr-ratio-anyhosp.pptx
+++ b/docs/pptx/carbo/jx-carbo-linsubhr-ratio-anyhosp.pptx
@@ -2271,7 +2271,7 @@
           </p:nvSpPr>
           <p:spPr>
             <a:xfrm>
-              <a:off x="817517" y="5114368"/>
+              <a:off x="817517" y="5142518"/>
               <a:ext cx="7799693" cy="0"/>
             </a:xfrm>
             <a:custGeom>
@@ -2314,7 +2314,7 @@
           </p:nvSpPr>
           <p:spPr>
             <a:xfrm>
-              <a:off x="817517" y="4244691"/>
+              <a:off x="817517" y="4313054"/>
               <a:ext cx="7799693" cy="0"/>
             </a:xfrm>
             <a:custGeom>
@@ -2357,7 +2357,7 @@
           </p:nvSpPr>
           <p:spPr>
             <a:xfrm>
-              <a:off x="817517" y="3375014"/>
+              <a:off x="817517" y="3483591"/>
               <a:ext cx="7799693" cy="0"/>
             </a:xfrm>
             <a:custGeom>
@@ -2400,7 +2400,7 @@
           </p:nvSpPr>
           <p:spPr>
             <a:xfrm>
-              <a:off x="817517" y="2505337"/>
+              <a:off x="817517" y="2654127"/>
               <a:ext cx="7799693" cy="0"/>
             </a:xfrm>
             <a:custGeom>
@@ -2443,15 +2443,15 @@
           </p:nvSpPr>
           <p:spPr>
             <a:xfrm>
-              <a:off x="1615213" y="1896563"/>
-              <a:ext cx="0" cy="3826579"/>
+              <a:off x="1615213" y="2073503"/>
+              <a:ext cx="0" cy="3649639"/>
             </a:xfrm>
             <a:custGeom>
               <a:avLst/>
               <a:pathLst>
-                <a:path w="0" h="3826579">
+                <a:path w="0" h="3649639">
                   <a:moveTo>
-                    <a:pt x="0" y="3826579"/>
+                    <a:pt x="0" y="3649639"/>
                   </a:moveTo>
                   <a:lnTo>
                     <a:pt x="0" y="0"/>
@@ -2486,15 +2486,15 @@
           </p:nvSpPr>
           <p:spPr>
             <a:xfrm>
-              <a:off x="3387871" y="1896563"/>
-              <a:ext cx="0" cy="3826579"/>
+              <a:off x="3387871" y="2073503"/>
+              <a:ext cx="0" cy="3649639"/>
             </a:xfrm>
             <a:custGeom>
               <a:avLst/>
               <a:pathLst>
-                <a:path w="0" h="3826579">
+                <a:path w="0" h="3649639">
                   <a:moveTo>
-                    <a:pt x="0" y="3826579"/>
+                    <a:pt x="0" y="3649639"/>
                   </a:moveTo>
                   <a:lnTo>
                     <a:pt x="0" y="0"/>
@@ -2529,15 +2529,15 @@
           </p:nvSpPr>
           <p:spPr>
             <a:xfrm>
-              <a:off x="5160528" y="1896563"/>
-              <a:ext cx="0" cy="3826579"/>
+              <a:off x="5160528" y="2073503"/>
+              <a:ext cx="0" cy="3649639"/>
             </a:xfrm>
             <a:custGeom>
               <a:avLst/>
               <a:pathLst>
-                <a:path w="0" h="3826579">
+                <a:path w="0" h="3649639">
                   <a:moveTo>
-                    <a:pt x="0" y="3826579"/>
+                    <a:pt x="0" y="3649639"/>
                   </a:moveTo>
                   <a:lnTo>
                     <a:pt x="0" y="0"/>
@@ -2572,15 +2572,15 @@
           </p:nvSpPr>
           <p:spPr>
             <a:xfrm>
-              <a:off x="6933186" y="1896563"/>
-              <a:ext cx="0" cy="3826579"/>
+              <a:off x="6933186" y="2073503"/>
+              <a:ext cx="0" cy="3649639"/>
             </a:xfrm>
             <a:custGeom>
               <a:avLst/>
               <a:pathLst>
-                <a:path w="0" h="3826579">
+                <a:path w="0" h="3649639">
                   <a:moveTo>
-                    <a:pt x="0" y="3826579"/>
+                    <a:pt x="0" y="3649639"/>
                   </a:moveTo>
                   <a:lnTo>
                     <a:pt x="0" y="0"/>
@@ -2615,7 +2615,7 @@
           </p:nvSpPr>
           <p:spPr>
             <a:xfrm>
-              <a:off x="817517" y="5549207"/>
+              <a:off x="817517" y="5557249"/>
               <a:ext cx="7799693" cy="0"/>
             </a:xfrm>
             <a:custGeom>
@@ -2658,7 +2658,7 @@
           </p:nvSpPr>
           <p:spPr>
             <a:xfrm>
-              <a:off x="817517" y="4679530"/>
+              <a:off x="817517" y="4727786"/>
               <a:ext cx="7799693" cy="0"/>
             </a:xfrm>
             <a:custGeom>
@@ -2701,7 +2701,7 @@
           </p:nvSpPr>
           <p:spPr>
             <a:xfrm>
-              <a:off x="817517" y="3809853"/>
+              <a:off x="817517" y="3898322"/>
               <a:ext cx="7799693" cy="0"/>
             </a:xfrm>
             <a:custGeom>
@@ -2744,7 +2744,7 @@
           </p:nvSpPr>
           <p:spPr>
             <a:xfrm>
-              <a:off x="817517" y="2940175"/>
+              <a:off x="817517" y="3068859"/>
               <a:ext cx="7799693" cy="0"/>
             </a:xfrm>
             <a:custGeom>
@@ -2787,7 +2787,7 @@
           </p:nvSpPr>
           <p:spPr>
             <a:xfrm>
-              <a:off x="817517" y="2070498"/>
+              <a:off x="817517" y="2239395"/>
               <a:ext cx="7799693" cy="0"/>
             </a:xfrm>
             <a:custGeom>
@@ -2830,15 +2830,15 @@
           </p:nvSpPr>
           <p:spPr>
             <a:xfrm>
-              <a:off x="2501542" y="1896563"/>
-              <a:ext cx="0" cy="3826579"/>
+              <a:off x="2501542" y="2073503"/>
+              <a:ext cx="0" cy="3649639"/>
             </a:xfrm>
             <a:custGeom>
               <a:avLst/>
               <a:pathLst>
-                <a:path w="0" h="3826579">
+                <a:path w="0" h="3649639">
                   <a:moveTo>
-                    <a:pt x="0" y="3826579"/>
+                    <a:pt x="0" y="3649639"/>
                   </a:moveTo>
                   <a:lnTo>
                     <a:pt x="0" y="0"/>
@@ -2873,15 +2873,15 @@
           </p:nvSpPr>
           <p:spPr>
             <a:xfrm>
-              <a:off x="4274200" y="1896563"/>
-              <a:ext cx="0" cy="3826579"/>
+              <a:off x="4274200" y="2073503"/>
+              <a:ext cx="0" cy="3649639"/>
             </a:xfrm>
             <a:custGeom>
               <a:avLst/>
               <a:pathLst>
-                <a:path w="0" h="3826579">
+                <a:path w="0" h="3649639">
                   <a:moveTo>
-                    <a:pt x="0" y="3826579"/>
+                    <a:pt x="0" y="3649639"/>
                   </a:moveTo>
                   <a:lnTo>
                     <a:pt x="0" y="0"/>
@@ -2916,15 +2916,15 @@
           </p:nvSpPr>
           <p:spPr>
             <a:xfrm>
-              <a:off x="6046857" y="1896563"/>
-              <a:ext cx="0" cy="3826579"/>
+              <a:off x="6046857" y="2073503"/>
+              <a:ext cx="0" cy="3649639"/>
             </a:xfrm>
             <a:custGeom>
               <a:avLst/>
               <a:pathLst>
-                <a:path w="0" h="3826579">
+                <a:path w="0" h="3649639">
                   <a:moveTo>
-                    <a:pt x="0" y="3826579"/>
+                    <a:pt x="0" y="3649639"/>
                   </a:moveTo>
                   <a:lnTo>
                     <a:pt x="0" y="0"/>
@@ -2959,15 +2959,15 @@
           </p:nvSpPr>
           <p:spPr>
             <a:xfrm>
-              <a:off x="7819515" y="1896563"/>
-              <a:ext cx="0" cy="3826579"/>
+              <a:off x="7819515" y="2073503"/>
+              <a:ext cx="0" cy="3649639"/>
             </a:xfrm>
             <a:custGeom>
               <a:avLst/>
               <a:pathLst>
-                <a:path w="0" h="3826579">
+                <a:path w="0" h="3649639">
                   <a:moveTo>
-                    <a:pt x="0" y="3826579"/>
+                    <a:pt x="0" y="3649639"/>
                   </a:moveTo>
                   <a:lnTo>
                     <a:pt x="0" y="0"/>
@@ -3002,600 +3002,600 @@
           </p:nvSpPr>
           <p:spPr>
             <a:xfrm>
-              <a:off x="817517" y="2651918"/>
-              <a:ext cx="7403783" cy="2685349"/>
+              <a:off x="817517" y="2793931"/>
+              <a:ext cx="7403783" cy="2561180"/>
             </a:xfrm>
             <a:custGeom>
               <a:avLst/>
               <a:pathLst>
-                <a:path w="7403783" h="2685349">
+                <a:path w="7403783" h="2561180">
                   <a:moveTo>
                     <a:pt x="0" y="0"/>
                   </a:moveTo>
                   <a:lnTo>
-                    <a:pt x="47058" y="48007"/>
-                  </a:lnTo>
-                  <a:lnTo>
-                    <a:pt x="123691" y="124097"/>
-                  </a:lnTo>
-                  <a:lnTo>
-                    <a:pt x="200323" y="198154"/>
-                  </a:lnTo>
-                  <a:lnTo>
-                    <a:pt x="276956" y="270234"/>
-                  </a:lnTo>
-                  <a:lnTo>
-                    <a:pt x="353588" y="340390"/>
-                  </a:lnTo>
-                  <a:lnTo>
-                    <a:pt x="430221" y="408671"/>
-                  </a:lnTo>
-                  <a:lnTo>
-                    <a:pt x="506853" y="475130"/>
-                  </a:lnTo>
-                  <a:lnTo>
-                    <a:pt x="583486" y="539813"/>
-                  </a:lnTo>
-                  <a:lnTo>
-                    <a:pt x="660118" y="602769"/>
-                  </a:lnTo>
-                  <a:lnTo>
-                    <a:pt x="736751" y="664044"/>
-                  </a:lnTo>
-                  <a:lnTo>
-                    <a:pt x="813384" y="723683"/>
-                  </a:lnTo>
-                  <a:lnTo>
-                    <a:pt x="890016" y="781729"/>
-                  </a:lnTo>
-                  <a:lnTo>
-                    <a:pt x="966649" y="838225"/>
-                  </a:lnTo>
-                  <a:lnTo>
-                    <a:pt x="1043281" y="893212"/>
-                  </a:lnTo>
-                  <a:lnTo>
-                    <a:pt x="1119914" y="946730"/>
-                  </a:lnTo>
-                  <a:lnTo>
-                    <a:pt x="1196546" y="998820"/>
-                  </a:lnTo>
-                  <a:lnTo>
-                    <a:pt x="1273179" y="1049518"/>
-                  </a:lnTo>
-                  <a:lnTo>
-                    <a:pt x="1349811" y="1098863"/>
-                  </a:lnTo>
-                  <a:lnTo>
-                    <a:pt x="1426444" y="1146890"/>
-                  </a:lnTo>
-                  <a:lnTo>
-                    <a:pt x="1503076" y="1193634"/>
-                  </a:lnTo>
-                  <a:lnTo>
-                    <a:pt x="1579709" y="1239130"/>
-                  </a:lnTo>
-                  <a:lnTo>
-                    <a:pt x="1656342" y="1283411"/>
-                  </a:lnTo>
-                  <a:lnTo>
-                    <a:pt x="1732974" y="1326509"/>
-                  </a:lnTo>
-                  <a:lnTo>
-                    <a:pt x="1809607" y="1368457"/>
-                  </a:lnTo>
-                  <a:lnTo>
-                    <a:pt x="1886239" y="1409284"/>
-                  </a:lnTo>
-                  <a:lnTo>
-                    <a:pt x="1962872" y="1449021"/>
-                  </a:lnTo>
-                  <a:lnTo>
-                    <a:pt x="2039504" y="1487697"/>
-                  </a:lnTo>
-                  <a:lnTo>
-                    <a:pt x="2116137" y="1525340"/>
-                  </a:lnTo>
-                  <a:lnTo>
-                    <a:pt x="2192769" y="1561978"/>
-                  </a:lnTo>
-                  <a:lnTo>
-                    <a:pt x="2269402" y="1597637"/>
-                  </a:lnTo>
-                  <a:lnTo>
-                    <a:pt x="2346034" y="1632344"/>
-                  </a:lnTo>
-                  <a:lnTo>
-                    <a:pt x="2422667" y="1666124"/>
-                  </a:lnTo>
-                  <a:lnTo>
-                    <a:pt x="2499300" y="1699002"/>
-                  </a:lnTo>
-                  <a:lnTo>
-                    <a:pt x="2575932" y="1731002"/>
-                  </a:lnTo>
-                  <a:lnTo>
-                    <a:pt x="2652565" y="1762148"/>
-                  </a:lnTo>
-                  <a:lnTo>
-                    <a:pt x="2729197" y="1792462"/>
-                  </a:lnTo>
-                  <a:lnTo>
-                    <a:pt x="2805830" y="1821966"/>
-                  </a:lnTo>
-                  <a:lnTo>
-                    <a:pt x="2882462" y="1850682"/>
-                  </a:lnTo>
-                  <a:lnTo>
-                    <a:pt x="2959095" y="1878632"/>
-                  </a:lnTo>
-                  <a:lnTo>
-                    <a:pt x="3035727" y="1905835"/>
-                  </a:lnTo>
-                  <a:lnTo>
-                    <a:pt x="3112360" y="1932312"/>
-                  </a:lnTo>
-                  <a:lnTo>
-                    <a:pt x="3188993" y="1958081"/>
-                  </a:lnTo>
-                  <a:lnTo>
-                    <a:pt x="3265625" y="1983163"/>
-                  </a:lnTo>
-                  <a:lnTo>
-                    <a:pt x="3342258" y="2007574"/>
-                  </a:lnTo>
-                  <a:lnTo>
-                    <a:pt x="3418890" y="2028643"/>
-                  </a:lnTo>
-                  <a:lnTo>
-                    <a:pt x="3495523" y="2035128"/>
-                  </a:lnTo>
-                  <a:lnTo>
-                    <a:pt x="3572155" y="2041565"/>
-                  </a:lnTo>
-                  <a:lnTo>
-                    <a:pt x="3648788" y="2047954"/>
-                  </a:lnTo>
-                  <a:lnTo>
-                    <a:pt x="3725420" y="2054295"/>
-                  </a:lnTo>
-                  <a:lnTo>
-                    <a:pt x="3802053" y="2060588"/>
-                  </a:lnTo>
-                  <a:lnTo>
-                    <a:pt x="3878685" y="2066835"/>
-                  </a:lnTo>
-                  <a:lnTo>
-                    <a:pt x="3955318" y="2073035"/>
-                  </a:lnTo>
-                  <a:lnTo>
-                    <a:pt x="4031951" y="2079188"/>
-                  </a:lnTo>
-                  <a:lnTo>
-                    <a:pt x="4108583" y="2085296"/>
-                  </a:lnTo>
-                  <a:lnTo>
-                    <a:pt x="4185216" y="2091358"/>
-                  </a:lnTo>
-                  <a:lnTo>
-                    <a:pt x="4261848" y="2097375"/>
-                  </a:lnTo>
-                  <a:lnTo>
-                    <a:pt x="4338481" y="2103347"/>
-                  </a:lnTo>
-                  <a:lnTo>
-                    <a:pt x="4415113" y="2109274"/>
-                  </a:lnTo>
-                  <a:lnTo>
-                    <a:pt x="4491746" y="2115158"/>
-                  </a:lnTo>
-                  <a:lnTo>
-                    <a:pt x="4568378" y="2120997"/>
-                  </a:lnTo>
-                  <a:lnTo>
-                    <a:pt x="4645011" y="2126792"/>
-                  </a:lnTo>
-                  <a:lnTo>
-                    <a:pt x="4721644" y="2132545"/>
-                  </a:lnTo>
-                  <a:lnTo>
-                    <a:pt x="4798276" y="2138254"/>
-                  </a:lnTo>
-                  <a:lnTo>
-                    <a:pt x="4874909" y="2143921"/>
-                  </a:lnTo>
-                  <a:lnTo>
-                    <a:pt x="4951541" y="2149545"/>
-                  </a:lnTo>
-                  <a:lnTo>
-                    <a:pt x="5028174" y="2155128"/>
-                  </a:lnTo>
-                  <a:lnTo>
-                    <a:pt x="5104806" y="2160669"/>
-                  </a:lnTo>
-                  <a:lnTo>
-                    <a:pt x="5181439" y="2166168"/>
-                  </a:lnTo>
-                  <a:lnTo>
-                    <a:pt x="5258071" y="2171626"/>
-                  </a:lnTo>
-                  <a:lnTo>
-                    <a:pt x="5334704" y="2177044"/>
-                  </a:lnTo>
-                  <a:lnTo>
-                    <a:pt x="5411336" y="2182421"/>
-                  </a:lnTo>
-                  <a:lnTo>
-                    <a:pt x="5487969" y="2187758"/>
-                  </a:lnTo>
-                  <a:lnTo>
-                    <a:pt x="5564602" y="2193055"/>
-                  </a:lnTo>
-                  <a:lnTo>
-                    <a:pt x="5641234" y="2198313"/>
-                  </a:lnTo>
-                  <a:lnTo>
-                    <a:pt x="5717867" y="2203531"/>
-                  </a:lnTo>
-                  <a:lnTo>
-                    <a:pt x="5794499" y="2208711"/>
-                  </a:lnTo>
-                  <a:lnTo>
-                    <a:pt x="5871132" y="2213852"/>
-                  </a:lnTo>
-                  <a:lnTo>
-                    <a:pt x="5947764" y="2218954"/>
-                  </a:lnTo>
-                  <a:lnTo>
-                    <a:pt x="6024397" y="2224018"/>
-                  </a:lnTo>
-                  <a:lnTo>
-                    <a:pt x="6101029" y="2229045"/>
-                  </a:lnTo>
-                  <a:lnTo>
-                    <a:pt x="6177662" y="2234034"/>
-                  </a:lnTo>
-                  <a:lnTo>
-                    <a:pt x="6254294" y="2238985"/>
-                  </a:lnTo>
-                  <a:lnTo>
-                    <a:pt x="6330927" y="2243900"/>
-                  </a:lnTo>
-                  <a:lnTo>
-                    <a:pt x="6407560" y="2248778"/>
-                  </a:lnTo>
-                  <a:lnTo>
-                    <a:pt x="6484192" y="2253620"/>
-                  </a:lnTo>
-                  <a:lnTo>
-                    <a:pt x="6560825" y="2258425"/>
-                  </a:lnTo>
-                  <a:lnTo>
-                    <a:pt x="6637457" y="2263195"/>
-                  </a:lnTo>
-                  <a:lnTo>
-                    <a:pt x="6714090" y="2267929"/>
-                  </a:lnTo>
-                  <a:lnTo>
-                    <a:pt x="6790722" y="2272628"/>
-                  </a:lnTo>
-                  <a:lnTo>
-                    <a:pt x="6867355" y="2277291"/>
-                  </a:lnTo>
-                  <a:lnTo>
-                    <a:pt x="6943987" y="2281920"/>
-                  </a:lnTo>
-                  <a:lnTo>
-                    <a:pt x="7020620" y="2286514"/>
-                  </a:lnTo>
-                  <a:lnTo>
-                    <a:pt x="7097253" y="2291074"/>
-                  </a:lnTo>
-                  <a:lnTo>
-                    <a:pt x="7173885" y="2295600"/>
-                  </a:lnTo>
-                  <a:lnTo>
-                    <a:pt x="7250518" y="2300092"/>
-                  </a:lnTo>
-                  <a:lnTo>
-                    <a:pt x="7327150" y="2304550"/>
-                  </a:lnTo>
-                  <a:lnTo>
-                    <a:pt x="7403783" y="2308976"/>
-                  </a:lnTo>
-                  <a:lnTo>
-                    <a:pt x="7403783" y="2685349"/>
-                  </a:lnTo>
-                  <a:lnTo>
-                    <a:pt x="7327150" y="2679534"/>
-                  </a:lnTo>
-                  <a:lnTo>
-                    <a:pt x="7250518" y="2673559"/>
-                  </a:lnTo>
-                  <a:lnTo>
-                    <a:pt x="7173885" y="2667421"/>
-                  </a:lnTo>
-                  <a:lnTo>
-                    <a:pt x="7097253" y="2661114"/>
-                  </a:lnTo>
-                  <a:lnTo>
-                    <a:pt x="7020620" y="2654634"/>
-                  </a:lnTo>
-                  <a:lnTo>
-                    <a:pt x="6943987" y="2647976"/>
-                  </a:lnTo>
-                  <a:lnTo>
-                    <a:pt x="6867355" y="2641135"/>
-                  </a:lnTo>
-                  <a:lnTo>
-                    <a:pt x="6790722" y="2634107"/>
-                  </a:lnTo>
-                  <a:lnTo>
-                    <a:pt x="6714090" y="2626886"/>
-                  </a:lnTo>
-                  <a:lnTo>
-                    <a:pt x="6637457" y="2619467"/>
-                  </a:lnTo>
-                  <a:lnTo>
-                    <a:pt x="6560825" y="2611844"/>
-                  </a:lnTo>
-                  <a:lnTo>
-                    <a:pt x="6484192" y="2604012"/>
-                  </a:lnTo>
-                  <a:lnTo>
-                    <a:pt x="6407560" y="2595965"/>
-                  </a:lnTo>
-                  <a:lnTo>
-                    <a:pt x="6330927" y="2587698"/>
-                  </a:lnTo>
-                  <a:lnTo>
-                    <a:pt x="6254294" y="2579203"/>
-                  </a:lnTo>
-                  <a:lnTo>
-                    <a:pt x="6177662" y="2570476"/>
-                  </a:lnTo>
-                  <a:lnTo>
-                    <a:pt x="6101029" y="2561509"/>
-                  </a:lnTo>
-                  <a:lnTo>
-                    <a:pt x="6024397" y="2552296"/>
-                  </a:lnTo>
-                  <a:lnTo>
-                    <a:pt x="5947764" y="2542830"/>
-                  </a:lnTo>
-                  <a:lnTo>
-                    <a:pt x="5871132" y="2533105"/>
-                  </a:lnTo>
-                  <a:lnTo>
-                    <a:pt x="5794499" y="2523113"/>
-                  </a:lnTo>
-                  <a:lnTo>
-                    <a:pt x="5717867" y="2512846"/>
-                  </a:lnTo>
-                  <a:lnTo>
-                    <a:pt x="5641234" y="2502298"/>
-                  </a:lnTo>
-                  <a:lnTo>
-                    <a:pt x="5564602" y="2491460"/>
-                  </a:lnTo>
-                  <a:lnTo>
-                    <a:pt x="5487969" y="2480325"/>
-                  </a:lnTo>
-                  <a:lnTo>
-                    <a:pt x="5411336" y="2468885"/>
-                  </a:lnTo>
-                  <a:lnTo>
-                    <a:pt x="5334704" y="2457130"/>
-                  </a:lnTo>
-                  <a:lnTo>
-                    <a:pt x="5258071" y="2445054"/>
-                  </a:lnTo>
-                  <a:lnTo>
-                    <a:pt x="5181439" y="2432645"/>
-                  </a:lnTo>
-                  <a:lnTo>
-                    <a:pt x="5104806" y="2419897"/>
-                  </a:lnTo>
-                  <a:lnTo>
-                    <a:pt x="5028174" y="2406798"/>
-                  </a:lnTo>
-                  <a:lnTo>
-                    <a:pt x="4951541" y="2393340"/>
-                  </a:lnTo>
-                  <a:lnTo>
-                    <a:pt x="4874909" y="2379513"/>
-                  </a:lnTo>
-                  <a:lnTo>
-                    <a:pt x="4798276" y="2365307"/>
-                  </a:lnTo>
-                  <a:lnTo>
-                    <a:pt x="4721644" y="2350710"/>
-                  </a:lnTo>
-                  <a:lnTo>
-                    <a:pt x="4645011" y="2335714"/>
-                  </a:lnTo>
-                  <a:lnTo>
-                    <a:pt x="4568378" y="2320305"/>
-                  </a:lnTo>
-                  <a:lnTo>
-                    <a:pt x="4491746" y="2304474"/>
-                  </a:lnTo>
-                  <a:lnTo>
-                    <a:pt x="4415113" y="2288209"/>
-                  </a:lnTo>
-                  <a:lnTo>
-                    <a:pt x="4338481" y="2271497"/>
-                  </a:lnTo>
-                  <a:lnTo>
-                    <a:pt x="4261848" y="2254327"/>
-                  </a:lnTo>
-                  <a:lnTo>
-                    <a:pt x="4185216" y="2236686"/>
-                  </a:lnTo>
-                  <a:lnTo>
-                    <a:pt x="4108583" y="2218560"/>
-                  </a:lnTo>
-                  <a:lnTo>
-                    <a:pt x="4031951" y="2199938"/>
-                  </a:lnTo>
-                  <a:lnTo>
-                    <a:pt x="3955318" y="2180804"/>
-                  </a:lnTo>
-                  <a:lnTo>
-                    <a:pt x="3878685" y="2161145"/>
-                  </a:lnTo>
-                  <a:lnTo>
-                    <a:pt x="3802053" y="2140947"/>
-                  </a:lnTo>
-                  <a:lnTo>
-                    <a:pt x="3725420" y="2120195"/>
-                  </a:lnTo>
-                  <a:lnTo>
-                    <a:pt x="3648788" y="2098874"/>
-                  </a:lnTo>
-                  <a:lnTo>
-                    <a:pt x="3572155" y="2076967"/>
-                  </a:lnTo>
-                  <a:lnTo>
-                    <a:pt x="3495523" y="2054459"/>
-                  </a:lnTo>
-                  <a:lnTo>
-                    <a:pt x="3418890" y="2031334"/>
-                  </a:lnTo>
-                  <a:lnTo>
-                    <a:pt x="3342258" y="2022109"/>
-                  </a:lnTo>
-                  <a:lnTo>
-                    <a:pt x="3265625" y="2015526"/>
-                  </a:lnTo>
-                  <a:lnTo>
-                    <a:pt x="3188993" y="2008894"/>
-                  </a:lnTo>
-                  <a:lnTo>
-                    <a:pt x="3112360" y="2002211"/>
-                  </a:lnTo>
-                  <a:lnTo>
-                    <a:pt x="3035727" y="1995479"/>
-                  </a:lnTo>
-                  <a:lnTo>
-                    <a:pt x="2959095" y="1988695"/>
-                  </a:lnTo>
-                  <a:lnTo>
-                    <a:pt x="2882462" y="1981861"/>
-                  </a:lnTo>
-                  <a:lnTo>
-                    <a:pt x="2805830" y="1974975"/>
-                  </a:lnTo>
-                  <a:lnTo>
-                    <a:pt x="2729197" y="1968038"/>
-                  </a:lnTo>
-                  <a:lnTo>
-                    <a:pt x="2652565" y="1961048"/>
-                  </a:lnTo>
-                  <a:lnTo>
-                    <a:pt x="2575932" y="1954006"/>
-                  </a:lnTo>
-                  <a:lnTo>
-                    <a:pt x="2499300" y="1946910"/>
-                  </a:lnTo>
-                  <a:lnTo>
-                    <a:pt x="2422667" y="1939762"/>
-                  </a:lnTo>
-                  <a:lnTo>
-                    <a:pt x="2346034" y="1932559"/>
-                  </a:lnTo>
-                  <a:lnTo>
-                    <a:pt x="2269402" y="1925302"/>
-                  </a:lnTo>
-                  <a:lnTo>
-                    <a:pt x="2192769" y="1917991"/>
-                  </a:lnTo>
-                  <a:lnTo>
-                    <a:pt x="2116137" y="1910625"/>
-                  </a:lnTo>
-                  <a:lnTo>
-                    <a:pt x="2039504" y="1903203"/>
-                  </a:lnTo>
-                  <a:lnTo>
-                    <a:pt x="1962872" y="1895726"/>
-                  </a:lnTo>
-                  <a:lnTo>
-                    <a:pt x="1886239" y="1888192"/>
-                  </a:lnTo>
-                  <a:lnTo>
-                    <a:pt x="1809607" y="1880602"/>
-                  </a:lnTo>
-                  <a:lnTo>
-                    <a:pt x="1732974" y="1872955"/>
-                  </a:lnTo>
-                  <a:lnTo>
-                    <a:pt x="1656342" y="1865250"/>
-                  </a:lnTo>
-                  <a:lnTo>
-                    <a:pt x="1579709" y="1857487"/>
-                  </a:lnTo>
-                  <a:lnTo>
-                    <a:pt x="1503076" y="1849665"/>
-                  </a:lnTo>
-                  <a:lnTo>
-                    <a:pt x="1426444" y="1841785"/>
-                  </a:lnTo>
-                  <a:lnTo>
-                    <a:pt x="1349811" y="1833846"/>
-                  </a:lnTo>
-                  <a:lnTo>
-                    <a:pt x="1273179" y="1825847"/>
-                  </a:lnTo>
-                  <a:lnTo>
-                    <a:pt x="1196546" y="1817787"/>
-                  </a:lnTo>
-                  <a:lnTo>
-                    <a:pt x="1119914" y="1809668"/>
-                  </a:lnTo>
-                  <a:lnTo>
-                    <a:pt x="1043281" y="1801487"/>
-                  </a:lnTo>
-                  <a:lnTo>
-                    <a:pt x="966649" y="1793244"/>
-                  </a:lnTo>
-                  <a:lnTo>
-                    <a:pt x="890016" y="1784939"/>
-                  </a:lnTo>
-                  <a:lnTo>
-                    <a:pt x="813384" y="1776572"/>
-                  </a:lnTo>
-                  <a:lnTo>
-                    <a:pt x="736751" y="1768143"/>
-                  </a:lnTo>
-                  <a:lnTo>
-                    <a:pt x="660118" y="1759649"/>
-                  </a:lnTo>
-                  <a:lnTo>
-                    <a:pt x="583486" y="1751092"/>
-                  </a:lnTo>
-                  <a:lnTo>
-                    <a:pt x="506853" y="1742470"/>
-                  </a:lnTo>
-                  <a:lnTo>
-                    <a:pt x="430221" y="1733784"/>
-                  </a:lnTo>
-                  <a:lnTo>
-                    <a:pt x="353588" y="1725032"/>
-                  </a:lnTo>
-                  <a:lnTo>
-                    <a:pt x="276956" y="1716215"/>
-                  </a:lnTo>
-                  <a:lnTo>
-                    <a:pt x="200323" y="1707331"/>
-                  </a:lnTo>
-                  <a:lnTo>
-                    <a:pt x="123691" y="1698380"/>
-                  </a:lnTo>
-                  <a:lnTo>
-                    <a:pt x="47058" y="1689362"/>
-                  </a:lnTo>
-                  <a:lnTo>
-                    <a:pt x="0" y="1683782"/>
+                    <a:pt x="47058" y="45787"/>
+                  </a:lnTo>
+                  <a:lnTo>
+                    <a:pt x="123691" y="118358"/>
+                  </a:lnTo>
+                  <a:lnTo>
+                    <a:pt x="200323" y="188992"/>
+                  </a:lnTo>
+                  <a:lnTo>
+                    <a:pt x="276956" y="257739"/>
+                  </a:lnTo>
+                  <a:lnTo>
+                    <a:pt x="353588" y="324650"/>
+                  </a:lnTo>
+                  <a:lnTo>
+                    <a:pt x="430221" y="389775"/>
+                  </a:lnTo>
+                  <a:lnTo>
+                    <a:pt x="506853" y="453160"/>
+                  </a:lnTo>
+                  <a:lnTo>
+                    <a:pt x="583486" y="514852"/>
+                  </a:lnTo>
+                  <a:lnTo>
+                    <a:pt x="660118" y="574898"/>
+                  </a:lnTo>
+                  <a:lnTo>
+                    <a:pt x="736751" y="633339"/>
+                  </a:lnTo>
+                  <a:lnTo>
+                    <a:pt x="813384" y="690220"/>
+                  </a:lnTo>
+                  <a:lnTo>
+                    <a:pt x="890016" y="745582"/>
+                  </a:lnTo>
+                  <a:lnTo>
+                    <a:pt x="966649" y="799465"/>
+                  </a:lnTo>
+                  <a:lnTo>
+                    <a:pt x="1043281" y="851910"/>
+                  </a:lnTo>
+                  <a:lnTo>
+                    <a:pt x="1119914" y="902954"/>
+                  </a:lnTo>
+                  <a:lnTo>
+                    <a:pt x="1196546" y="952635"/>
+                  </a:lnTo>
+                  <a:lnTo>
+                    <a:pt x="1273179" y="1000989"/>
+                  </a:lnTo>
+                  <a:lnTo>
+                    <a:pt x="1349811" y="1048052"/>
+                  </a:lnTo>
+                  <a:lnTo>
+                    <a:pt x="1426444" y="1093858"/>
+                  </a:lnTo>
+                  <a:lnTo>
+                    <a:pt x="1503076" y="1138441"/>
+                  </a:lnTo>
+                  <a:lnTo>
+                    <a:pt x="1579709" y="1181833"/>
+                  </a:lnTo>
+                  <a:lnTo>
+                    <a:pt x="1656342" y="1224066"/>
+                  </a:lnTo>
+                  <a:lnTo>
+                    <a:pt x="1732974" y="1265172"/>
+                  </a:lnTo>
+                  <a:lnTo>
+                    <a:pt x="1809607" y="1305180"/>
+                  </a:lnTo>
+                  <a:lnTo>
+                    <a:pt x="1886239" y="1344119"/>
+                  </a:lnTo>
+                  <a:lnTo>
+                    <a:pt x="1962872" y="1382019"/>
+                  </a:lnTo>
+                  <a:lnTo>
+                    <a:pt x="2039504" y="1418906"/>
+                  </a:lnTo>
+                  <a:lnTo>
+                    <a:pt x="2116137" y="1454809"/>
+                  </a:lnTo>
+                  <a:lnTo>
+                    <a:pt x="2192769" y="1489752"/>
+                  </a:lnTo>
+                  <a:lnTo>
+                    <a:pt x="2269402" y="1523763"/>
+                  </a:lnTo>
+                  <a:lnTo>
+                    <a:pt x="2346034" y="1556865"/>
+                  </a:lnTo>
+                  <a:lnTo>
+                    <a:pt x="2422667" y="1589083"/>
+                  </a:lnTo>
+                  <a:lnTo>
+                    <a:pt x="2499300" y="1620441"/>
+                  </a:lnTo>
+                  <a:lnTo>
+                    <a:pt x="2575932" y="1650961"/>
+                  </a:lnTo>
+                  <a:lnTo>
+                    <a:pt x="2652565" y="1680667"/>
+                  </a:lnTo>
+                  <a:lnTo>
+                    <a:pt x="2729197" y="1709579"/>
+                  </a:lnTo>
+                  <a:lnTo>
+                    <a:pt x="2805830" y="1737719"/>
+                  </a:lnTo>
+                  <a:lnTo>
+                    <a:pt x="2882462" y="1765108"/>
+                  </a:lnTo>
+                  <a:lnTo>
+                    <a:pt x="2959095" y="1791765"/>
+                  </a:lnTo>
+                  <a:lnTo>
+                    <a:pt x="3035727" y="1817710"/>
+                  </a:lnTo>
+                  <a:lnTo>
+                    <a:pt x="3112360" y="1842962"/>
+                  </a:lnTo>
+                  <a:lnTo>
+                    <a:pt x="3188993" y="1867540"/>
+                  </a:lnTo>
+                  <a:lnTo>
+                    <a:pt x="3265625" y="1891462"/>
+                  </a:lnTo>
+                  <a:lnTo>
+                    <a:pt x="3342258" y="1914745"/>
+                  </a:lnTo>
+                  <a:lnTo>
+                    <a:pt x="3418890" y="1934839"/>
+                  </a:lnTo>
+                  <a:lnTo>
+                    <a:pt x="3495523" y="1941025"/>
+                  </a:lnTo>
+                  <a:lnTo>
+                    <a:pt x="3572155" y="1947164"/>
+                  </a:lnTo>
+                  <a:lnTo>
+                    <a:pt x="3648788" y="1953257"/>
+                  </a:lnTo>
+                  <a:lnTo>
+                    <a:pt x="3725420" y="1959305"/>
+                  </a:lnTo>
+                  <a:lnTo>
+                    <a:pt x="3802053" y="1965307"/>
+                  </a:lnTo>
+                  <a:lnTo>
+                    <a:pt x="3878685" y="1971265"/>
+                  </a:lnTo>
+                  <a:lnTo>
+                    <a:pt x="3955318" y="1977178"/>
+                  </a:lnTo>
+                  <a:lnTo>
+                    <a:pt x="4031951" y="1983047"/>
+                  </a:lnTo>
+                  <a:lnTo>
+                    <a:pt x="4108583" y="1988873"/>
+                  </a:lnTo>
+                  <a:lnTo>
+                    <a:pt x="4185216" y="1994655"/>
+                  </a:lnTo>
+                  <a:lnTo>
+                    <a:pt x="4261848" y="2000393"/>
+                  </a:lnTo>
+                  <a:lnTo>
+                    <a:pt x="4338481" y="2006089"/>
+                  </a:lnTo>
+                  <a:lnTo>
+                    <a:pt x="4415113" y="2011742"/>
+                  </a:lnTo>
+                  <a:lnTo>
+                    <a:pt x="4491746" y="2017353"/>
+                  </a:lnTo>
+                  <a:lnTo>
+                    <a:pt x="4568378" y="2022923"/>
+                  </a:lnTo>
+                  <a:lnTo>
+                    <a:pt x="4645011" y="2028450"/>
+                  </a:lnTo>
+                  <a:lnTo>
+                    <a:pt x="4721644" y="2033937"/>
+                  </a:lnTo>
+                  <a:lnTo>
+                    <a:pt x="4798276" y="2039382"/>
+                  </a:lnTo>
+                  <a:lnTo>
+                    <a:pt x="4874909" y="2044787"/>
+                  </a:lnTo>
+                  <a:lnTo>
+                    <a:pt x="4951541" y="2050151"/>
+                  </a:lnTo>
+                  <a:lnTo>
+                    <a:pt x="5028174" y="2055476"/>
+                  </a:lnTo>
+                  <a:lnTo>
+                    <a:pt x="5104806" y="2060760"/>
+                  </a:lnTo>
+                  <a:lnTo>
+                    <a:pt x="5181439" y="2066005"/>
+                  </a:lnTo>
+                  <a:lnTo>
+                    <a:pt x="5258071" y="2071211"/>
+                  </a:lnTo>
+                  <a:lnTo>
+                    <a:pt x="5334704" y="2076378"/>
+                  </a:lnTo>
+                  <a:lnTo>
+                    <a:pt x="5411336" y="2081507"/>
+                  </a:lnTo>
+                  <a:lnTo>
+                    <a:pt x="5487969" y="2086597"/>
+                  </a:lnTo>
+                  <a:lnTo>
+                    <a:pt x="5564602" y="2091649"/>
+                  </a:lnTo>
+                  <a:lnTo>
+                    <a:pt x="5641234" y="2096664"/>
+                  </a:lnTo>
+                  <a:lnTo>
+                    <a:pt x="5717867" y="2101641"/>
+                  </a:lnTo>
+                  <a:lnTo>
+                    <a:pt x="5794499" y="2106581"/>
+                  </a:lnTo>
+                  <a:lnTo>
+                    <a:pt x="5871132" y="2111484"/>
+                  </a:lnTo>
+                  <a:lnTo>
+                    <a:pt x="5947764" y="2116350"/>
+                  </a:lnTo>
+                  <a:lnTo>
+                    <a:pt x="6024397" y="2121181"/>
+                  </a:lnTo>
+                  <a:lnTo>
+                    <a:pt x="6101029" y="2125975"/>
+                  </a:lnTo>
+                  <a:lnTo>
+                    <a:pt x="6177662" y="2130733"/>
+                  </a:lnTo>
+                  <a:lnTo>
+                    <a:pt x="6254294" y="2135456"/>
+                  </a:lnTo>
+                  <a:lnTo>
+                    <a:pt x="6330927" y="2140143"/>
+                  </a:lnTo>
+                  <a:lnTo>
+                    <a:pt x="6407560" y="2144796"/>
+                  </a:lnTo>
+                  <a:lnTo>
+                    <a:pt x="6484192" y="2149413"/>
+                  </a:lnTo>
+                  <a:lnTo>
+                    <a:pt x="6560825" y="2153997"/>
+                  </a:lnTo>
+                  <a:lnTo>
+                    <a:pt x="6637457" y="2158546"/>
+                  </a:lnTo>
+                  <a:lnTo>
+                    <a:pt x="6714090" y="2163061"/>
+                  </a:lnTo>
+                  <a:lnTo>
+                    <a:pt x="6790722" y="2167542"/>
+                  </a:lnTo>
+                  <a:lnTo>
+                    <a:pt x="6867355" y="2171990"/>
+                  </a:lnTo>
+                  <a:lnTo>
+                    <a:pt x="6943987" y="2176405"/>
+                  </a:lnTo>
+                  <a:lnTo>
+                    <a:pt x="7020620" y="2180786"/>
+                  </a:lnTo>
+                  <a:lnTo>
+                    <a:pt x="7097253" y="2185136"/>
+                  </a:lnTo>
+                  <a:lnTo>
+                    <a:pt x="7173885" y="2189452"/>
+                  </a:lnTo>
+                  <a:lnTo>
+                    <a:pt x="7250518" y="2193736"/>
+                  </a:lnTo>
+                  <a:lnTo>
+                    <a:pt x="7327150" y="2197989"/>
+                  </a:lnTo>
+                  <a:lnTo>
+                    <a:pt x="7403783" y="2202209"/>
+                  </a:lnTo>
+                  <a:lnTo>
+                    <a:pt x="7403783" y="2561180"/>
+                  </a:lnTo>
+                  <a:lnTo>
+                    <a:pt x="7327150" y="2555633"/>
+                  </a:lnTo>
+                  <a:lnTo>
+                    <a:pt x="7250518" y="2549935"/>
+                  </a:lnTo>
+                  <a:lnTo>
+                    <a:pt x="7173885" y="2544080"/>
+                  </a:lnTo>
+                  <a:lnTo>
+                    <a:pt x="7097253" y="2538065"/>
+                  </a:lnTo>
+                  <a:lnTo>
+                    <a:pt x="7020620" y="2531884"/>
+                  </a:lnTo>
+                  <a:lnTo>
+                    <a:pt x="6943987" y="2525534"/>
+                  </a:lnTo>
+                  <a:lnTo>
+                    <a:pt x="6867355" y="2519010"/>
+                  </a:lnTo>
+                  <a:lnTo>
+                    <a:pt x="6790722" y="2512307"/>
+                  </a:lnTo>
+                  <a:lnTo>
+                    <a:pt x="6714090" y="2505420"/>
+                  </a:lnTo>
+                  <a:lnTo>
+                    <a:pt x="6637457" y="2498344"/>
+                  </a:lnTo>
+                  <a:lnTo>
+                    <a:pt x="6560825" y="2491073"/>
+                  </a:lnTo>
+                  <a:lnTo>
+                    <a:pt x="6484192" y="2483604"/>
+                  </a:lnTo>
+                  <a:lnTo>
+                    <a:pt x="6407560" y="2475929"/>
+                  </a:lnTo>
+                  <a:lnTo>
+                    <a:pt x="6330927" y="2468044"/>
+                  </a:lnTo>
+                  <a:lnTo>
+                    <a:pt x="6254294" y="2459942"/>
+                  </a:lnTo>
+                  <a:lnTo>
+                    <a:pt x="6177662" y="2451618"/>
+                  </a:lnTo>
+                  <a:lnTo>
+                    <a:pt x="6101029" y="2443066"/>
+                  </a:lnTo>
+                  <a:lnTo>
+                    <a:pt x="6024397" y="2434279"/>
+                  </a:lnTo>
+                  <a:lnTo>
+                    <a:pt x="5947764" y="2425251"/>
+                  </a:lnTo>
+                  <a:lnTo>
+                    <a:pt x="5871132" y="2415975"/>
+                  </a:lnTo>
+                  <a:lnTo>
+                    <a:pt x="5794499" y="2406445"/>
+                  </a:lnTo>
+                  <a:lnTo>
+                    <a:pt x="5717867" y="2396653"/>
+                  </a:lnTo>
+                  <a:lnTo>
+                    <a:pt x="5641234" y="2386593"/>
+                  </a:lnTo>
+                  <a:lnTo>
+                    <a:pt x="5564602" y="2376256"/>
+                  </a:lnTo>
+                  <a:lnTo>
+                    <a:pt x="5487969" y="2365636"/>
+                  </a:lnTo>
+                  <a:lnTo>
+                    <a:pt x="5411336" y="2354725"/>
+                  </a:lnTo>
+                  <a:lnTo>
+                    <a:pt x="5334704" y="2343514"/>
+                  </a:lnTo>
+                  <a:lnTo>
+                    <a:pt x="5258071" y="2331995"/>
+                  </a:lnTo>
+                  <a:lnTo>
+                    <a:pt x="5181439" y="2320161"/>
+                  </a:lnTo>
+                  <a:lnTo>
+                    <a:pt x="5104806" y="2308002"/>
+                  </a:lnTo>
+                  <a:lnTo>
+                    <a:pt x="5028174" y="2295509"/>
+                  </a:lnTo>
+                  <a:lnTo>
+                    <a:pt x="4951541" y="2282673"/>
+                  </a:lnTo>
+                  <a:lnTo>
+                    <a:pt x="4874909" y="2269485"/>
+                  </a:lnTo>
+                  <a:lnTo>
+                    <a:pt x="4798276" y="2255936"/>
+                  </a:lnTo>
+                  <a:lnTo>
+                    <a:pt x="4721644" y="2242014"/>
+                  </a:lnTo>
+                  <a:lnTo>
+                    <a:pt x="4645011" y="2227711"/>
+                  </a:lnTo>
+                  <a:lnTo>
+                    <a:pt x="4568378" y="2213015"/>
+                  </a:lnTo>
+                  <a:lnTo>
+                    <a:pt x="4491746" y="2197916"/>
+                  </a:lnTo>
+                  <a:lnTo>
+                    <a:pt x="4415113" y="2182403"/>
+                  </a:lnTo>
+                  <a:lnTo>
+                    <a:pt x="4338481" y="2166464"/>
+                  </a:lnTo>
+                  <a:lnTo>
+                    <a:pt x="4261848" y="2150088"/>
+                  </a:lnTo>
+                  <a:lnTo>
+                    <a:pt x="4185216" y="2133262"/>
+                  </a:lnTo>
+                  <a:lnTo>
+                    <a:pt x="4108583" y="2115975"/>
+                  </a:lnTo>
+                  <a:lnTo>
+                    <a:pt x="4031951" y="2098213"/>
+                  </a:lnTo>
+                  <a:lnTo>
+                    <a:pt x="3955318" y="2079964"/>
+                  </a:lnTo>
+                  <a:lnTo>
+                    <a:pt x="3878685" y="2061215"/>
+                  </a:lnTo>
+                  <a:lnTo>
+                    <a:pt x="3802053" y="2041951"/>
+                  </a:lnTo>
+                  <a:lnTo>
+                    <a:pt x="3725420" y="2022158"/>
+                  </a:lnTo>
+                  <a:lnTo>
+                    <a:pt x="3648788" y="2001822"/>
+                  </a:lnTo>
+                  <a:lnTo>
+                    <a:pt x="3572155" y="1980929"/>
+                  </a:lnTo>
+                  <a:lnTo>
+                    <a:pt x="3495523" y="1959462"/>
+                  </a:lnTo>
+                  <a:lnTo>
+                    <a:pt x="3418890" y="1937406"/>
+                  </a:lnTo>
+                  <a:lnTo>
+                    <a:pt x="3342258" y="1928608"/>
+                  </a:lnTo>
+                  <a:lnTo>
+                    <a:pt x="3265625" y="1922329"/>
+                  </a:lnTo>
+                  <a:lnTo>
+                    <a:pt x="3188993" y="1916003"/>
+                  </a:lnTo>
+                  <a:lnTo>
+                    <a:pt x="3112360" y="1909630"/>
+                  </a:lnTo>
+                  <a:lnTo>
+                    <a:pt x="3035727" y="1903208"/>
+                  </a:lnTo>
+                  <a:lnTo>
+                    <a:pt x="2959095" y="1896739"/>
+                  </a:lnTo>
+                  <a:lnTo>
+                    <a:pt x="2882462" y="1890220"/>
+                  </a:lnTo>
+                  <a:lnTo>
+                    <a:pt x="2805830" y="1883653"/>
+                  </a:lnTo>
+                  <a:lnTo>
+                    <a:pt x="2729197" y="1877036"/>
+                  </a:lnTo>
+                  <a:lnTo>
+                    <a:pt x="2652565" y="1870370"/>
+                  </a:lnTo>
+                  <a:lnTo>
+                    <a:pt x="2575932" y="1863653"/>
+                  </a:lnTo>
+                  <a:lnTo>
+                    <a:pt x="2499300" y="1856886"/>
+                  </a:lnTo>
+                  <a:lnTo>
+                    <a:pt x="2422667" y="1850068"/>
+                  </a:lnTo>
+                  <a:lnTo>
+                    <a:pt x="2346034" y="1843198"/>
+                  </a:lnTo>
+                  <a:lnTo>
+                    <a:pt x="2269402" y="1836277"/>
+                  </a:lnTo>
+                  <a:lnTo>
+                    <a:pt x="2192769" y="1829304"/>
+                  </a:lnTo>
+                  <a:lnTo>
+                    <a:pt x="2116137" y="1822278"/>
+                  </a:lnTo>
+                  <a:lnTo>
+                    <a:pt x="2039504" y="1815200"/>
+                  </a:lnTo>
+                  <a:lnTo>
+                    <a:pt x="1962872" y="1808068"/>
+                  </a:lnTo>
+                  <a:lnTo>
+                    <a:pt x="1886239" y="1800883"/>
+                  </a:lnTo>
+                  <a:lnTo>
+                    <a:pt x="1809607" y="1793644"/>
+                  </a:lnTo>
+                  <a:lnTo>
+                    <a:pt x="1732974" y="1786350"/>
+                  </a:lnTo>
+                  <a:lnTo>
+                    <a:pt x="1656342" y="1779001"/>
+                  </a:lnTo>
+                  <a:lnTo>
+                    <a:pt x="1579709" y="1771597"/>
+                  </a:lnTo>
+                  <a:lnTo>
+                    <a:pt x="1503076" y="1764138"/>
+                  </a:lnTo>
+                  <a:lnTo>
+                    <a:pt x="1426444" y="1756622"/>
+                  </a:lnTo>
+                  <a:lnTo>
+                    <a:pt x="1349811" y="1749050"/>
+                  </a:lnTo>
+                  <a:lnTo>
+                    <a:pt x="1273179" y="1741420"/>
+                  </a:lnTo>
+                  <a:lnTo>
+                    <a:pt x="1196546" y="1733734"/>
+                  </a:lnTo>
+                  <a:lnTo>
+                    <a:pt x="1119914" y="1725989"/>
+                  </a:lnTo>
+                  <a:lnTo>
+                    <a:pt x="1043281" y="1718186"/>
+                  </a:lnTo>
+                  <a:lnTo>
+                    <a:pt x="966649" y="1710325"/>
+                  </a:lnTo>
+                  <a:lnTo>
+                    <a:pt x="890016" y="1702405"/>
+                  </a:lnTo>
+                  <a:lnTo>
+                    <a:pt x="813384" y="1694424"/>
+                  </a:lnTo>
+                  <a:lnTo>
+                    <a:pt x="736751" y="1686384"/>
+                  </a:lnTo>
+                  <a:lnTo>
+                    <a:pt x="660118" y="1678284"/>
+                  </a:lnTo>
+                  <a:lnTo>
+                    <a:pt x="583486" y="1670122"/>
+                  </a:lnTo>
+                  <a:lnTo>
+                    <a:pt x="506853" y="1661899"/>
+                  </a:lnTo>
+                  <a:lnTo>
+                    <a:pt x="430221" y="1653614"/>
+                  </a:lnTo>
+                  <a:lnTo>
+                    <a:pt x="353588" y="1645267"/>
+                  </a:lnTo>
+                  <a:lnTo>
+                    <a:pt x="276956" y="1636857"/>
+                  </a:lnTo>
+                  <a:lnTo>
+                    <a:pt x="200323" y="1628384"/>
+                  </a:lnTo>
+                  <a:lnTo>
+                    <a:pt x="123691" y="1619847"/>
+                  </a:lnTo>
+                  <a:lnTo>
+                    <a:pt x="47058" y="1611246"/>
+                  </a:lnTo>
+                  <a:lnTo>
+                    <a:pt x="0" y="1605925"/>
                   </a:lnTo>
                   <a:close/>
                 </a:path>
@@ -3621,306 +3621,306 @@
           </p:nvSpPr>
           <p:spPr>
             <a:xfrm>
-              <a:off x="817517" y="2651918"/>
-              <a:ext cx="7403783" cy="2308976"/>
+              <a:off x="817517" y="2793931"/>
+              <a:ext cx="7403783" cy="2202209"/>
             </a:xfrm>
             <a:custGeom>
               <a:avLst/>
               <a:pathLst>
-                <a:path w="7403783" h="2308976">
+                <a:path w="7403783" h="2202209">
                   <a:moveTo>
                     <a:pt x="0" y="0"/>
                   </a:moveTo>
                   <a:lnTo>
-                    <a:pt x="47058" y="48007"/>
-                  </a:lnTo>
-                  <a:lnTo>
-                    <a:pt x="123691" y="124097"/>
-                  </a:lnTo>
-                  <a:lnTo>
-                    <a:pt x="200323" y="198154"/>
-                  </a:lnTo>
-                  <a:lnTo>
-                    <a:pt x="276956" y="270234"/>
-                  </a:lnTo>
-                  <a:lnTo>
-                    <a:pt x="353588" y="340390"/>
-                  </a:lnTo>
-                  <a:lnTo>
-                    <a:pt x="430221" y="408671"/>
-                  </a:lnTo>
-                  <a:lnTo>
-                    <a:pt x="506853" y="475130"/>
-                  </a:lnTo>
-                  <a:lnTo>
-                    <a:pt x="583486" y="539813"/>
-                  </a:lnTo>
-                  <a:lnTo>
-                    <a:pt x="660118" y="602769"/>
-                  </a:lnTo>
-                  <a:lnTo>
-                    <a:pt x="736751" y="664044"/>
-                  </a:lnTo>
-                  <a:lnTo>
-                    <a:pt x="813384" y="723683"/>
-                  </a:lnTo>
-                  <a:lnTo>
-                    <a:pt x="890016" y="781729"/>
-                  </a:lnTo>
-                  <a:lnTo>
-                    <a:pt x="966649" y="838225"/>
-                  </a:lnTo>
-                  <a:lnTo>
-                    <a:pt x="1043281" y="893212"/>
-                  </a:lnTo>
-                  <a:lnTo>
-                    <a:pt x="1119914" y="946730"/>
-                  </a:lnTo>
-                  <a:lnTo>
-                    <a:pt x="1196546" y="998820"/>
-                  </a:lnTo>
-                  <a:lnTo>
-                    <a:pt x="1273179" y="1049518"/>
-                  </a:lnTo>
-                  <a:lnTo>
-                    <a:pt x="1349811" y="1098863"/>
-                  </a:lnTo>
-                  <a:lnTo>
-                    <a:pt x="1426444" y="1146890"/>
-                  </a:lnTo>
-                  <a:lnTo>
-                    <a:pt x="1503076" y="1193634"/>
-                  </a:lnTo>
-                  <a:lnTo>
-                    <a:pt x="1579709" y="1239130"/>
-                  </a:lnTo>
-                  <a:lnTo>
-                    <a:pt x="1656342" y="1283411"/>
-                  </a:lnTo>
-                  <a:lnTo>
-                    <a:pt x="1732974" y="1326509"/>
-                  </a:lnTo>
-                  <a:lnTo>
-                    <a:pt x="1809607" y="1368457"/>
-                  </a:lnTo>
-                  <a:lnTo>
-                    <a:pt x="1886239" y="1409284"/>
-                  </a:lnTo>
-                  <a:lnTo>
-                    <a:pt x="1962872" y="1449021"/>
-                  </a:lnTo>
-                  <a:lnTo>
-                    <a:pt x="2039504" y="1487697"/>
-                  </a:lnTo>
-                  <a:lnTo>
-                    <a:pt x="2116137" y="1525340"/>
-                  </a:lnTo>
-                  <a:lnTo>
-                    <a:pt x="2192769" y="1561978"/>
-                  </a:lnTo>
-                  <a:lnTo>
-                    <a:pt x="2269402" y="1597637"/>
-                  </a:lnTo>
-                  <a:lnTo>
-                    <a:pt x="2346034" y="1632344"/>
-                  </a:lnTo>
-                  <a:lnTo>
-                    <a:pt x="2422667" y="1666124"/>
-                  </a:lnTo>
-                  <a:lnTo>
-                    <a:pt x="2499300" y="1699002"/>
-                  </a:lnTo>
-                  <a:lnTo>
-                    <a:pt x="2575932" y="1731002"/>
-                  </a:lnTo>
-                  <a:lnTo>
-                    <a:pt x="2652565" y="1762148"/>
-                  </a:lnTo>
-                  <a:lnTo>
-                    <a:pt x="2729197" y="1792462"/>
-                  </a:lnTo>
-                  <a:lnTo>
-                    <a:pt x="2805830" y="1821966"/>
-                  </a:lnTo>
-                  <a:lnTo>
-                    <a:pt x="2882462" y="1850682"/>
-                  </a:lnTo>
-                  <a:lnTo>
-                    <a:pt x="2959095" y="1878632"/>
-                  </a:lnTo>
-                  <a:lnTo>
-                    <a:pt x="3035727" y="1905835"/>
-                  </a:lnTo>
-                  <a:lnTo>
-                    <a:pt x="3112360" y="1932312"/>
-                  </a:lnTo>
-                  <a:lnTo>
-                    <a:pt x="3188993" y="1958081"/>
-                  </a:lnTo>
-                  <a:lnTo>
-                    <a:pt x="3265625" y="1983163"/>
-                  </a:lnTo>
-                  <a:lnTo>
-                    <a:pt x="3342258" y="2007574"/>
-                  </a:lnTo>
-                  <a:lnTo>
-                    <a:pt x="3418890" y="2028643"/>
-                  </a:lnTo>
-                  <a:lnTo>
-                    <a:pt x="3495523" y="2035128"/>
-                  </a:lnTo>
-                  <a:lnTo>
-                    <a:pt x="3572155" y="2041565"/>
-                  </a:lnTo>
-                  <a:lnTo>
-                    <a:pt x="3648788" y="2047954"/>
-                  </a:lnTo>
-                  <a:lnTo>
-                    <a:pt x="3725420" y="2054295"/>
-                  </a:lnTo>
-                  <a:lnTo>
-                    <a:pt x="3802053" y="2060588"/>
-                  </a:lnTo>
-                  <a:lnTo>
-                    <a:pt x="3878685" y="2066835"/>
-                  </a:lnTo>
-                  <a:lnTo>
-                    <a:pt x="3955318" y="2073035"/>
-                  </a:lnTo>
-                  <a:lnTo>
-                    <a:pt x="4031951" y="2079188"/>
-                  </a:lnTo>
-                  <a:lnTo>
-                    <a:pt x="4108583" y="2085296"/>
-                  </a:lnTo>
-                  <a:lnTo>
-                    <a:pt x="4185216" y="2091358"/>
-                  </a:lnTo>
-                  <a:lnTo>
-                    <a:pt x="4261848" y="2097375"/>
-                  </a:lnTo>
-                  <a:lnTo>
-                    <a:pt x="4338481" y="2103347"/>
-                  </a:lnTo>
-                  <a:lnTo>
-                    <a:pt x="4415113" y="2109274"/>
-                  </a:lnTo>
-                  <a:lnTo>
-                    <a:pt x="4491746" y="2115158"/>
-                  </a:lnTo>
-                  <a:lnTo>
-                    <a:pt x="4568378" y="2120997"/>
-                  </a:lnTo>
-                  <a:lnTo>
-                    <a:pt x="4645011" y="2126792"/>
-                  </a:lnTo>
-                  <a:lnTo>
-                    <a:pt x="4721644" y="2132545"/>
-                  </a:lnTo>
-                  <a:lnTo>
-                    <a:pt x="4798276" y="2138254"/>
-                  </a:lnTo>
-                  <a:lnTo>
-                    <a:pt x="4874909" y="2143921"/>
-                  </a:lnTo>
-                  <a:lnTo>
-                    <a:pt x="4951541" y="2149545"/>
-                  </a:lnTo>
-                  <a:lnTo>
-                    <a:pt x="5028174" y="2155128"/>
-                  </a:lnTo>
-                  <a:lnTo>
-                    <a:pt x="5104806" y="2160669"/>
-                  </a:lnTo>
-                  <a:lnTo>
-                    <a:pt x="5181439" y="2166168"/>
-                  </a:lnTo>
-                  <a:lnTo>
-                    <a:pt x="5258071" y="2171626"/>
-                  </a:lnTo>
-                  <a:lnTo>
-                    <a:pt x="5334704" y="2177044"/>
-                  </a:lnTo>
-                  <a:lnTo>
-                    <a:pt x="5411336" y="2182421"/>
-                  </a:lnTo>
-                  <a:lnTo>
-                    <a:pt x="5487969" y="2187758"/>
-                  </a:lnTo>
-                  <a:lnTo>
-                    <a:pt x="5564602" y="2193055"/>
-                  </a:lnTo>
-                  <a:lnTo>
-                    <a:pt x="5641234" y="2198313"/>
-                  </a:lnTo>
-                  <a:lnTo>
-                    <a:pt x="5717867" y="2203531"/>
-                  </a:lnTo>
-                  <a:lnTo>
-                    <a:pt x="5794499" y="2208711"/>
-                  </a:lnTo>
-                  <a:lnTo>
-                    <a:pt x="5871132" y="2213852"/>
-                  </a:lnTo>
-                  <a:lnTo>
-                    <a:pt x="5947764" y="2218954"/>
-                  </a:lnTo>
-                  <a:lnTo>
-                    <a:pt x="6024397" y="2224018"/>
-                  </a:lnTo>
-                  <a:lnTo>
-                    <a:pt x="6101029" y="2229045"/>
-                  </a:lnTo>
-                  <a:lnTo>
-                    <a:pt x="6177662" y="2234034"/>
-                  </a:lnTo>
-                  <a:lnTo>
-                    <a:pt x="6254294" y="2238985"/>
-                  </a:lnTo>
-                  <a:lnTo>
-                    <a:pt x="6330927" y="2243900"/>
-                  </a:lnTo>
-                  <a:lnTo>
-                    <a:pt x="6407560" y="2248778"/>
-                  </a:lnTo>
-                  <a:lnTo>
-                    <a:pt x="6484192" y="2253620"/>
-                  </a:lnTo>
-                  <a:lnTo>
-                    <a:pt x="6560825" y="2258425"/>
-                  </a:lnTo>
-                  <a:lnTo>
-                    <a:pt x="6637457" y="2263195"/>
-                  </a:lnTo>
-                  <a:lnTo>
-                    <a:pt x="6714090" y="2267929"/>
-                  </a:lnTo>
-                  <a:lnTo>
-                    <a:pt x="6790722" y="2272628"/>
-                  </a:lnTo>
-                  <a:lnTo>
-                    <a:pt x="6867355" y="2277291"/>
-                  </a:lnTo>
-                  <a:lnTo>
-                    <a:pt x="6943987" y="2281920"/>
-                  </a:lnTo>
-                  <a:lnTo>
-                    <a:pt x="7020620" y="2286514"/>
-                  </a:lnTo>
-                  <a:lnTo>
-                    <a:pt x="7097253" y="2291074"/>
-                  </a:lnTo>
-                  <a:lnTo>
-                    <a:pt x="7173885" y="2295600"/>
-                  </a:lnTo>
-                  <a:lnTo>
-                    <a:pt x="7250518" y="2300092"/>
-                  </a:lnTo>
-                  <a:lnTo>
-                    <a:pt x="7327150" y="2304550"/>
-                  </a:lnTo>
-                  <a:lnTo>
-                    <a:pt x="7403783" y="2308976"/>
+                    <a:pt x="47058" y="45787"/>
+                  </a:lnTo>
+                  <a:lnTo>
+                    <a:pt x="123691" y="118358"/>
+                  </a:lnTo>
+                  <a:lnTo>
+                    <a:pt x="200323" y="188992"/>
+                  </a:lnTo>
+                  <a:lnTo>
+                    <a:pt x="276956" y="257739"/>
+                  </a:lnTo>
+                  <a:lnTo>
+                    <a:pt x="353588" y="324650"/>
+                  </a:lnTo>
+                  <a:lnTo>
+                    <a:pt x="430221" y="389775"/>
+                  </a:lnTo>
+                  <a:lnTo>
+                    <a:pt x="506853" y="453160"/>
+                  </a:lnTo>
+                  <a:lnTo>
+                    <a:pt x="583486" y="514852"/>
+                  </a:lnTo>
+                  <a:lnTo>
+                    <a:pt x="660118" y="574898"/>
+                  </a:lnTo>
+                  <a:lnTo>
+                    <a:pt x="736751" y="633339"/>
+                  </a:lnTo>
+                  <a:lnTo>
+                    <a:pt x="813384" y="690220"/>
+                  </a:lnTo>
+                  <a:lnTo>
+                    <a:pt x="890016" y="745582"/>
+                  </a:lnTo>
+                  <a:lnTo>
+                    <a:pt x="966649" y="799465"/>
+                  </a:lnTo>
+                  <a:lnTo>
+                    <a:pt x="1043281" y="851910"/>
+                  </a:lnTo>
+                  <a:lnTo>
+                    <a:pt x="1119914" y="902954"/>
+                  </a:lnTo>
+                  <a:lnTo>
+                    <a:pt x="1196546" y="952635"/>
+                  </a:lnTo>
+                  <a:lnTo>
+                    <a:pt x="1273179" y="1000989"/>
+                  </a:lnTo>
+                  <a:lnTo>
+                    <a:pt x="1349811" y="1048052"/>
+                  </a:lnTo>
+                  <a:lnTo>
+                    <a:pt x="1426444" y="1093858"/>
+                  </a:lnTo>
+                  <a:lnTo>
+                    <a:pt x="1503076" y="1138441"/>
+                  </a:lnTo>
+                  <a:lnTo>
+                    <a:pt x="1579709" y="1181833"/>
+                  </a:lnTo>
+                  <a:lnTo>
+                    <a:pt x="1656342" y="1224066"/>
+                  </a:lnTo>
+                  <a:lnTo>
+                    <a:pt x="1732974" y="1265172"/>
+                  </a:lnTo>
+                  <a:lnTo>
+                    <a:pt x="1809607" y="1305180"/>
+                  </a:lnTo>
+                  <a:lnTo>
+                    <a:pt x="1886239" y="1344119"/>
+                  </a:lnTo>
+                  <a:lnTo>
+                    <a:pt x="1962872" y="1382019"/>
+                  </a:lnTo>
+                  <a:lnTo>
+                    <a:pt x="2039504" y="1418906"/>
+                  </a:lnTo>
+                  <a:lnTo>
+                    <a:pt x="2116137" y="1454809"/>
+                  </a:lnTo>
+                  <a:lnTo>
+                    <a:pt x="2192769" y="1489752"/>
+                  </a:lnTo>
+                  <a:lnTo>
+                    <a:pt x="2269402" y="1523763"/>
+                  </a:lnTo>
+                  <a:lnTo>
+                    <a:pt x="2346034" y="1556865"/>
+                  </a:lnTo>
+                  <a:lnTo>
+                    <a:pt x="2422667" y="1589083"/>
+                  </a:lnTo>
+                  <a:lnTo>
+                    <a:pt x="2499300" y="1620441"/>
+                  </a:lnTo>
+                  <a:lnTo>
+                    <a:pt x="2575932" y="1650961"/>
+                  </a:lnTo>
+                  <a:lnTo>
+                    <a:pt x="2652565" y="1680667"/>
+                  </a:lnTo>
+                  <a:lnTo>
+                    <a:pt x="2729197" y="1709579"/>
+                  </a:lnTo>
+                  <a:lnTo>
+                    <a:pt x="2805830" y="1737719"/>
+                  </a:lnTo>
+                  <a:lnTo>
+                    <a:pt x="2882462" y="1765108"/>
+                  </a:lnTo>
+                  <a:lnTo>
+                    <a:pt x="2959095" y="1791765"/>
+                  </a:lnTo>
+                  <a:lnTo>
+                    <a:pt x="3035727" y="1817710"/>
+                  </a:lnTo>
+                  <a:lnTo>
+                    <a:pt x="3112360" y="1842962"/>
+                  </a:lnTo>
+                  <a:lnTo>
+                    <a:pt x="3188993" y="1867540"/>
+                  </a:lnTo>
+                  <a:lnTo>
+                    <a:pt x="3265625" y="1891462"/>
+                  </a:lnTo>
+                  <a:lnTo>
+                    <a:pt x="3342258" y="1914745"/>
+                  </a:lnTo>
+                  <a:lnTo>
+                    <a:pt x="3418890" y="1934839"/>
+                  </a:lnTo>
+                  <a:lnTo>
+                    <a:pt x="3495523" y="1941025"/>
+                  </a:lnTo>
+                  <a:lnTo>
+                    <a:pt x="3572155" y="1947164"/>
+                  </a:lnTo>
+                  <a:lnTo>
+                    <a:pt x="3648788" y="1953257"/>
+                  </a:lnTo>
+                  <a:lnTo>
+                    <a:pt x="3725420" y="1959305"/>
+                  </a:lnTo>
+                  <a:lnTo>
+                    <a:pt x="3802053" y="1965307"/>
+                  </a:lnTo>
+                  <a:lnTo>
+                    <a:pt x="3878685" y="1971265"/>
+                  </a:lnTo>
+                  <a:lnTo>
+                    <a:pt x="3955318" y="1977178"/>
+                  </a:lnTo>
+                  <a:lnTo>
+                    <a:pt x="4031951" y="1983047"/>
+                  </a:lnTo>
+                  <a:lnTo>
+                    <a:pt x="4108583" y="1988873"/>
+                  </a:lnTo>
+                  <a:lnTo>
+                    <a:pt x="4185216" y="1994655"/>
+                  </a:lnTo>
+                  <a:lnTo>
+                    <a:pt x="4261848" y="2000393"/>
+                  </a:lnTo>
+                  <a:lnTo>
+                    <a:pt x="4338481" y="2006089"/>
+                  </a:lnTo>
+                  <a:lnTo>
+                    <a:pt x="4415113" y="2011742"/>
+                  </a:lnTo>
+                  <a:lnTo>
+                    <a:pt x="4491746" y="2017353"/>
+                  </a:lnTo>
+                  <a:lnTo>
+                    <a:pt x="4568378" y="2022923"/>
+                  </a:lnTo>
+                  <a:lnTo>
+                    <a:pt x="4645011" y="2028450"/>
+                  </a:lnTo>
+                  <a:lnTo>
+                    <a:pt x="4721644" y="2033937"/>
+                  </a:lnTo>
+                  <a:lnTo>
+                    <a:pt x="4798276" y="2039382"/>
+                  </a:lnTo>
+                  <a:lnTo>
+                    <a:pt x="4874909" y="2044787"/>
+                  </a:lnTo>
+                  <a:lnTo>
+                    <a:pt x="4951541" y="2050151"/>
+                  </a:lnTo>
+                  <a:lnTo>
+                    <a:pt x="5028174" y="2055476"/>
+                  </a:lnTo>
+                  <a:lnTo>
+                    <a:pt x="5104806" y="2060760"/>
+                  </a:lnTo>
+                  <a:lnTo>
+                    <a:pt x="5181439" y="2066005"/>
+                  </a:lnTo>
+                  <a:lnTo>
+                    <a:pt x="5258071" y="2071211"/>
+                  </a:lnTo>
+                  <a:lnTo>
+                    <a:pt x="5334704" y="2076378"/>
+                  </a:lnTo>
+                  <a:lnTo>
+                    <a:pt x="5411336" y="2081507"/>
+                  </a:lnTo>
+                  <a:lnTo>
+                    <a:pt x="5487969" y="2086597"/>
+                  </a:lnTo>
+                  <a:lnTo>
+                    <a:pt x="5564602" y="2091649"/>
+                  </a:lnTo>
+                  <a:lnTo>
+                    <a:pt x="5641234" y="2096664"/>
+                  </a:lnTo>
+                  <a:lnTo>
+                    <a:pt x="5717867" y="2101641"/>
+                  </a:lnTo>
+                  <a:lnTo>
+                    <a:pt x="5794499" y="2106581"/>
+                  </a:lnTo>
+                  <a:lnTo>
+                    <a:pt x="5871132" y="2111484"/>
+                  </a:lnTo>
+                  <a:lnTo>
+                    <a:pt x="5947764" y="2116350"/>
+                  </a:lnTo>
+                  <a:lnTo>
+                    <a:pt x="6024397" y="2121181"/>
+                  </a:lnTo>
+                  <a:lnTo>
+                    <a:pt x="6101029" y="2125975"/>
+                  </a:lnTo>
+                  <a:lnTo>
+                    <a:pt x="6177662" y="2130733"/>
+                  </a:lnTo>
+                  <a:lnTo>
+                    <a:pt x="6254294" y="2135456"/>
+                  </a:lnTo>
+                  <a:lnTo>
+                    <a:pt x="6330927" y="2140143"/>
+                  </a:lnTo>
+                  <a:lnTo>
+                    <a:pt x="6407560" y="2144796"/>
+                  </a:lnTo>
+                  <a:lnTo>
+                    <a:pt x="6484192" y="2149413"/>
+                  </a:lnTo>
+                  <a:lnTo>
+                    <a:pt x="6560825" y="2153997"/>
+                  </a:lnTo>
+                  <a:lnTo>
+                    <a:pt x="6637457" y="2158546"/>
+                  </a:lnTo>
+                  <a:lnTo>
+                    <a:pt x="6714090" y="2163061"/>
+                  </a:lnTo>
+                  <a:lnTo>
+                    <a:pt x="6790722" y="2167542"/>
+                  </a:lnTo>
+                  <a:lnTo>
+                    <a:pt x="6867355" y="2171990"/>
+                  </a:lnTo>
+                  <a:lnTo>
+                    <a:pt x="6943987" y="2176405"/>
+                  </a:lnTo>
+                  <a:lnTo>
+                    <a:pt x="7020620" y="2180786"/>
+                  </a:lnTo>
+                  <a:lnTo>
+                    <a:pt x="7097253" y="2185136"/>
+                  </a:lnTo>
+                  <a:lnTo>
+                    <a:pt x="7173885" y="2189452"/>
+                  </a:lnTo>
+                  <a:lnTo>
+                    <a:pt x="7250518" y="2193736"/>
+                  </a:lnTo>
+                  <a:lnTo>
+                    <a:pt x="7327150" y="2197989"/>
+                  </a:lnTo>
+                  <a:lnTo>
+                    <a:pt x="7403783" y="2202209"/>
                   </a:lnTo>
                 </a:path>
               </a:pathLst>
@@ -3940,303 +3940,303 @@
           </p:nvSpPr>
           <p:spPr>
             <a:xfrm>
-              <a:off x="817517" y="4335701"/>
-              <a:ext cx="7403783" cy="1001566"/>
+              <a:off x="817517" y="4399856"/>
+              <a:ext cx="7403783" cy="955254"/>
             </a:xfrm>
             <a:custGeom>
               <a:avLst/>
               <a:pathLst>
-                <a:path w="7403783" h="1001566">
+                <a:path w="7403783" h="955254">
                   <a:moveTo>
-                    <a:pt x="7403783" y="1001566"/>
+                    <a:pt x="7403783" y="955254"/>
                   </a:moveTo>
                   <a:lnTo>
-                    <a:pt x="7327150" y="995751"/>
-                  </a:lnTo>
-                  <a:lnTo>
-                    <a:pt x="7250518" y="989777"/>
-                  </a:lnTo>
-                  <a:lnTo>
-                    <a:pt x="7173885" y="983638"/>
-                  </a:lnTo>
-                  <a:lnTo>
-                    <a:pt x="7097253" y="977331"/>
-                  </a:lnTo>
-                  <a:lnTo>
-                    <a:pt x="7020620" y="970851"/>
-                  </a:lnTo>
-                  <a:lnTo>
-                    <a:pt x="6943987" y="964193"/>
-                  </a:lnTo>
-                  <a:lnTo>
-                    <a:pt x="6867355" y="957353"/>
-                  </a:lnTo>
-                  <a:lnTo>
-                    <a:pt x="6790722" y="950324"/>
-                  </a:lnTo>
-                  <a:lnTo>
-                    <a:pt x="6714090" y="943103"/>
-                  </a:lnTo>
-                  <a:lnTo>
-                    <a:pt x="6637457" y="935684"/>
-                  </a:lnTo>
-                  <a:lnTo>
-                    <a:pt x="6560825" y="928061"/>
-                  </a:lnTo>
-                  <a:lnTo>
-                    <a:pt x="6484192" y="920230"/>
-                  </a:lnTo>
-                  <a:lnTo>
-                    <a:pt x="6407560" y="912183"/>
-                  </a:lnTo>
-                  <a:lnTo>
-                    <a:pt x="6330927" y="903915"/>
-                  </a:lnTo>
-                  <a:lnTo>
-                    <a:pt x="6254294" y="895421"/>
-                  </a:lnTo>
-                  <a:lnTo>
-                    <a:pt x="6177662" y="886693"/>
-                  </a:lnTo>
-                  <a:lnTo>
-                    <a:pt x="6101029" y="877726"/>
-                  </a:lnTo>
-                  <a:lnTo>
-                    <a:pt x="6024397" y="868513"/>
-                  </a:lnTo>
-                  <a:lnTo>
-                    <a:pt x="5947764" y="859048"/>
-                  </a:lnTo>
-                  <a:lnTo>
-                    <a:pt x="5871132" y="849322"/>
-                  </a:lnTo>
-                  <a:lnTo>
-                    <a:pt x="5794499" y="839330"/>
-                  </a:lnTo>
-                  <a:lnTo>
-                    <a:pt x="5717867" y="829063"/>
-                  </a:lnTo>
-                  <a:lnTo>
-                    <a:pt x="5641234" y="818515"/>
-                  </a:lnTo>
-                  <a:lnTo>
-                    <a:pt x="5564602" y="807678"/>
-                  </a:lnTo>
-                  <a:lnTo>
-                    <a:pt x="5487969" y="796543"/>
-                  </a:lnTo>
-                  <a:lnTo>
-                    <a:pt x="5411336" y="785102"/>
-                  </a:lnTo>
-                  <a:lnTo>
-                    <a:pt x="5334704" y="773348"/>
-                  </a:lnTo>
-                  <a:lnTo>
-                    <a:pt x="5258071" y="761271"/>
-                  </a:lnTo>
-                  <a:lnTo>
-                    <a:pt x="5181439" y="748863"/>
-                  </a:lnTo>
-                  <a:lnTo>
-                    <a:pt x="5104806" y="736114"/>
-                  </a:lnTo>
-                  <a:lnTo>
-                    <a:pt x="5028174" y="723015"/>
-                  </a:lnTo>
-                  <a:lnTo>
-                    <a:pt x="4951541" y="709558"/>
-                  </a:lnTo>
-                  <a:lnTo>
-                    <a:pt x="4874909" y="695730"/>
-                  </a:lnTo>
-                  <a:lnTo>
-                    <a:pt x="4798276" y="681524"/>
-                  </a:lnTo>
-                  <a:lnTo>
-                    <a:pt x="4721644" y="666928"/>
-                  </a:lnTo>
-                  <a:lnTo>
-                    <a:pt x="4645011" y="651931"/>
-                  </a:lnTo>
-                  <a:lnTo>
-                    <a:pt x="4568378" y="636523"/>
-                  </a:lnTo>
-                  <a:lnTo>
-                    <a:pt x="4491746" y="620692"/>
-                  </a:lnTo>
-                  <a:lnTo>
-                    <a:pt x="4415113" y="604426"/>
-                  </a:lnTo>
-                  <a:lnTo>
-                    <a:pt x="4338481" y="587714"/>
-                  </a:lnTo>
-                  <a:lnTo>
-                    <a:pt x="4261848" y="570544"/>
-                  </a:lnTo>
-                  <a:lnTo>
-                    <a:pt x="4185216" y="552903"/>
-                  </a:lnTo>
-                  <a:lnTo>
-                    <a:pt x="4108583" y="534778"/>
-                  </a:lnTo>
-                  <a:lnTo>
-                    <a:pt x="4031951" y="516155"/>
-                  </a:lnTo>
-                  <a:lnTo>
-                    <a:pt x="3955318" y="497021"/>
-                  </a:lnTo>
-                  <a:lnTo>
-                    <a:pt x="3878685" y="477363"/>
-                  </a:lnTo>
-                  <a:lnTo>
-                    <a:pt x="3802053" y="457165"/>
-                  </a:lnTo>
-                  <a:lnTo>
-                    <a:pt x="3725420" y="436412"/>
-                  </a:lnTo>
-                  <a:lnTo>
-                    <a:pt x="3648788" y="415091"/>
-                  </a:lnTo>
-                  <a:lnTo>
-                    <a:pt x="3572155" y="393184"/>
-                  </a:lnTo>
-                  <a:lnTo>
-                    <a:pt x="3495523" y="370677"/>
-                  </a:lnTo>
-                  <a:lnTo>
-                    <a:pt x="3418890" y="347551"/>
-                  </a:lnTo>
-                  <a:lnTo>
-                    <a:pt x="3342258" y="338327"/>
-                  </a:lnTo>
-                  <a:lnTo>
-                    <a:pt x="3265625" y="331744"/>
-                  </a:lnTo>
-                  <a:lnTo>
-                    <a:pt x="3188993" y="325111"/>
-                  </a:lnTo>
-                  <a:lnTo>
-                    <a:pt x="3112360" y="318429"/>
-                  </a:lnTo>
-                  <a:lnTo>
-                    <a:pt x="3035727" y="311696"/>
-                  </a:lnTo>
-                  <a:lnTo>
-                    <a:pt x="2959095" y="304913"/>
-                  </a:lnTo>
-                  <a:lnTo>
-                    <a:pt x="2882462" y="298078"/>
-                  </a:lnTo>
-                  <a:lnTo>
-                    <a:pt x="2805830" y="291192"/>
-                  </a:lnTo>
-                  <a:lnTo>
-                    <a:pt x="2729197" y="284255"/>
-                  </a:lnTo>
-                  <a:lnTo>
-                    <a:pt x="2652565" y="277265"/>
-                  </a:lnTo>
-                  <a:lnTo>
-                    <a:pt x="2575932" y="270223"/>
-                  </a:lnTo>
-                  <a:lnTo>
-                    <a:pt x="2499300" y="263127"/>
-                  </a:lnTo>
-                  <a:lnTo>
-                    <a:pt x="2422667" y="255979"/>
-                  </a:lnTo>
-                  <a:lnTo>
-                    <a:pt x="2346034" y="248776"/>
-                  </a:lnTo>
-                  <a:lnTo>
-                    <a:pt x="2269402" y="241520"/>
-                  </a:lnTo>
-                  <a:lnTo>
-                    <a:pt x="2192769" y="234209"/>
-                  </a:lnTo>
-                  <a:lnTo>
-                    <a:pt x="2116137" y="226842"/>
-                  </a:lnTo>
-                  <a:lnTo>
-                    <a:pt x="2039504" y="219421"/>
-                  </a:lnTo>
-                  <a:lnTo>
-                    <a:pt x="1962872" y="211943"/>
-                  </a:lnTo>
-                  <a:lnTo>
-                    <a:pt x="1886239" y="204410"/>
-                  </a:lnTo>
-                  <a:lnTo>
-                    <a:pt x="1809607" y="196819"/>
-                  </a:lnTo>
-                  <a:lnTo>
-                    <a:pt x="1732974" y="189172"/>
-                  </a:lnTo>
-                  <a:lnTo>
-                    <a:pt x="1656342" y="181467"/>
-                  </a:lnTo>
-                  <a:lnTo>
-                    <a:pt x="1579709" y="173704"/>
-                  </a:lnTo>
-                  <a:lnTo>
-                    <a:pt x="1503076" y="165883"/>
-                  </a:lnTo>
-                  <a:lnTo>
-                    <a:pt x="1426444" y="158003"/>
-                  </a:lnTo>
-                  <a:lnTo>
-                    <a:pt x="1349811" y="150063"/>
-                  </a:lnTo>
-                  <a:lnTo>
-                    <a:pt x="1273179" y="142064"/>
-                  </a:lnTo>
-                  <a:lnTo>
-                    <a:pt x="1196546" y="134005"/>
-                  </a:lnTo>
-                  <a:lnTo>
-                    <a:pt x="1119914" y="125885"/>
-                  </a:lnTo>
-                  <a:lnTo>
-                    <a:pt x="1043281" y="117704"/>
-                  </a:lnTo>
-                  <a:lnTo>
-                    <a:pt x="966649" y="109461"/>
-                  </a:lnTo>
-                  <a:lnTo>
-                    <a:pt x="890016" y="101157"/>
-                  </a:lnTo>
-                  <a:lnTo>
-                    <a:pt x="813384" y="92790"/>
-                  </a:lnTo>
-                  <a:lnTo>
-                    <a:pt x="736751" y="84360"/>
-                  </a:lnTo>
-                  <a:lnTo>
-                    <a:pt x="660118" y="75866"/>
-                  </a:lnTo>
-                  <a:lnTo>
-                    <a:pt x="583486" y="67309"/>
-                  </a:lnTo>
-                  <a:lnTo>
-                    <a:pt x="506853" y="58688"/>
-                  </a:lnTo>
-                  <a:lnTo>
-                    <a:pt x="430221" y="50001"/>
-                  </a:lnTo>
-                  <a:lnTo>
-                    <a:pt x="353588" y="41249"/>
-                  </a:lnTo>
-                  <a:lnTo>
-                    <a:pt x="276956" y="32432"/>
-                  </a:lnTo>
-                  <a:lnTo>
-                    <a:pt x="200323" y="23548"/>
-                  </a:lnTo>
-                  <a:lnTo>
-                    <a:pt x="123691" y="14597"/>
-                  </a:lnTo>
-                  <a:lnTo>
-                    <a:pt x="47058" y="5579"/>
+                    <a:pt x="7327150" y="949708"/>
+                  </a:lnTo>
+                  <a:lnTo>
+                    <a:pt x="7250518" y="944010"/>
+                  </a:lnTo>
+                  <a:lnTo>
+                    <a:pt x="7173885" y="938155"/>
+                  </a:lnTo>
+                  <a:lnTo>
+                    <a:pt x="7097253" y="932140"/>
+                  </a:lnTo>
+                  <a:lnTo>
+                    <a:pt x="7020620" y="925959"/>
+                  </a:lnTo>
+                  <a:lnTo>
+                    <a:pt x="6943987" y="919609"/>
+                  </a:lnTo>
+                  <a:lnTo>
+                    <a:pt x="6867355" y="913085"/>
+                  </a:lnTo>
+                  <a:lnTo>
+                    <a:pt x="6790722" y="906382"/>
+                  </a:lnTo>
+                  <a:lnTo>
+                    <a:pt x="6714090" y="899495"/>
+                  </a:lnTo>
+                  <a:lnTo>
+                    <a:pt x="6637457" y="892418"/>
+                  </a:lnTo>
+                  <a:lnTo>
+                    <a:pt x="6560825" y="885148"/>
+                  </a:lnTo>
+                  <a:lnTo>
+                    <a:pt x="6484192" y="877678"/>
+                  </a:lnTo>
+                  <a:lnTo>
+                    <a:pt x="6407560" y="870004"/>
+                  </a:lnTo>
+                  <a:lnTo>
+                    <a:pt x="6330927" y="862118"/>
+                  </a:lnTo>
+                  <a:lnTo>
+                    <a:pt x="6254294" y="854017"/>
+                  </a:lnTo>
+                  <a:lnTo>
+                    <a:pt x="6177662" y="845693"/>
+                  </a:lnTo>
+                  <a:lnTo>
+                    <a:pt x="6101029" y="837141"/>
+                  </a:lnTo>
+                  <a:lnTo>
+                    <a:pt x="6024397" y="828354"/>
+                  </a:lnTo>
+                  <a:lnTo>
+                    <a:pt x="5947764" y="819326"/>
+                  </a:lnTo>
+                  <a:lnTo>
+                    <a:pt x="5871132" y="810050"/>
+                  </a:lnTo>
+                  <a:lnTo>
+                    <a:pt x="5794499" y="800519"/>
+                  </a:lnTo>
+                  <a:lnTo>
+                    <a:pt x="5717867" y="790728"/>
+                  </a:lnTo>
+                  <a:lnTo>
+                    <a:pt x="5641234" y="780667"/>
+                  </a:lnTo>
+                  <a:lnTo>
+                    <a:pt x="5564602" y="770331"/>
+                  </a:lnTo>
+                  <a:lnTo>
+                    <a:pt x="5487969" y="759711"/>
+                  </a:lnTo>
+                  <a:lnTo>
+                    <a:pt x="5411336" y="748799"/>
+                  </a:lnTo>
+                  <a:lnTo>
+                    <a:pt x="5334704" y="737588"/>
+                  </a:lnTo>
+                  <a:lnTo>
+                    <a:pt x="5258071" y="726070"/>
+                  </a:lnTo>
+                  <a:lnTo>
+                    <a:pt x="5181439" y="714235"/>
+                  </a:lnTo>
+                  <a:lnTo>
+                    <a:pt x="5104806" y="702076"/>
+                  </a:lnTo>
+                  <a:lnTo>
+                    <a:pt x="5028174" y="689583"/>
+                  </a:lnTo>
+                  <a:lnTo>
+                    <a:pt x="4951541" y="676748"/>
+                  </a:lnTo>
+                  <a:lnTo>
+                    <a:pt x="4874909" y="663560"/>
+                  </a:lnTo>
+                  <a:lnTo>
+                    <a:pt x="4798276" y="650011"/>
+                  </a:lnTo>
+                  <a:lnTo>
+                    <a:pt x="4721644" y="636089"/>
+                  </a:lnTo>
+                  <a:lnTo>
+                    <a:pt x="4645011" y="621786"/>
+                  </a:lnTo>
+                  <a:lnTo>
+                    <a:pt x="4568378" y="607090"/>
+                  </a:lnTo>
+                  <a:lnTo>
+                    <a:pt x="4491746" y="591991"/>
+                  </a:lnTo>
+                  <a:lnTo>
+                    <a:pt x="4415113" y="576478"/>
+                  </a:lnTo>
+                  <a:lnTo>
+                    <a:pt x="4338481" y="560539"/>
+                  </a:lnTo>
+                  <a:lnTo>
+                    <a:pt x="4261848" y="544162"/>
+                  </a:lnTo>
+                  <a:lnTo>
+                    <a:pt x="4185216" y="527337"/>
+                  </a:lnTo>
+                  <a:lnTo>
+                    <a:pt x="4108583" y="510050"/>
+                  </a:lnTo>
+                  <a:lnTo>
+                    <a:pt x="4031951" y="492288"/>
+                  </a:lnTo>
+                  <a:lnTo>
+                    <a:pt x="3955318" y="474039"/>
+                  </a:lnTo>
+                  <a:lnTo>
+                    <a:pt x="3878685" y="455290"/>
+                  </a:lnTo>
+                  <a:lnTo>
+                    <a:pt x="3802053" y="436025"/>
+                  </a:lnTo>
+                  <a:lnTo>
+                    <a:pt x="3725420" y="416233"/>
+                  </a:lnTo>
+                  <a:lnTo>
+                    <a:pt x="3648788" y="395897"/>
+                  </a:lnTo>
+                  <a:lnTo>
+                    <a:pt x="3572155" y="375004"/>
+                  </a:lnTo>
+                  <a:lnTo>
+                    <a:pt x="3495523" y="353537"/>
+                  </a:lnTo>
+                  <a:lnTo>
+                    <a:pt x="3418890" y="331481"/>
+                  </a:lnTo>
+                  <a:lnTo>
+                    <a:pt x="3342258" y="322682"/>
+                  </a:lnTo>
+                  <a:lnTo>
+                    <a:pt x="3265625" y="316404"/>
+                  </a:lnTo>
+                  <a:lnTo>
+                    <a:pt x="3188993" y="310078"/>
+                  </a:lnTo>
+                  <a:lnTo>
+                    <a:pt x="3112360" y="303705"/>
+                  </a:lnTo>
+                  <a:lnTo>
+                    <a:pt x="3035727" y="297283"/>
+                  </a:lnTo>
+                  <a:lnTo>
+                    <a:pt x="2959095" y="290813"/>
+                  </a:lnTo>
+                  <a:lnTo>
+                    <a:pt x="2882462" y="284295"/>
+                  </a:lnTo>
+                  <a:lnTo>
+                    <a:pt x="2805830" y="277728"/>
+                  </a:lnTo>
+                  <a:lnTo>
+                    <a:pt x="2729197" y="271111"/>
+                  </a:lnTo>
+                  <a:lnTo>
+                    <a:pt x="2652565" y="264444"/>
+                  </a:lnTo>
+                  <a:lnTo>
+                    <a:pt x="2575932" y="257728"/>
+                  </a:lnTo>
+                  <a:lnTo>
+                    <a:pt x="2499300" y="250961"/>
+                  </a:lnTo>
+                  <a:lnTo>
+                    <a:pt x="2422667" y="244142"/>
+                  </a:lnTo>
+                  <a:lnTo>
+                    <a:pt x="2346034" y="237273"/>
+                  </a:lnTo>
+                  <a:lnTo>
+                    <a:pt x="2269402" y="230352"/>
+                  </a:lnTo>
+                  <a:lnTo>
+                    <a:pt x="2192769" y="223379"/>
+                  </a:lnTo>
+                  <a:lnTo>
+                    <a:pt x="2116137" y="216353"/>
+                  </a:lnTo>
+                  <a:lnTo>
+                    <a:pt x="2039504" y="209275"/>
+                  </a:lnTo>
+                  <a:lnTo>
+                    <a:pt x="1962872" y="202143"/>
+                  </a:lnTo>
+                  <a:lnTo>
+                    <a:pt x="1886239" y="194958"/>
+                  </a:lnTo>
+                  <a:lnTo>
+                    <a:pt x="1809607" y="187718"/>
+                  </a:lnTo>
+                  <a:lnTo>
+                    <a:pt x="1732974" y="180425"/>
+                  </a:lnTo>
+                  <a:lnTo>
+                    <a:pt x="1656342" y="173076"/>
+                  </a:lnTo>
+                  <a:lnTo>
+                    <a:pt x="1579709" y="165672"/>
+                  </a:lnTo>
+                  <a:lnTo>
+                    <a:pt x="1503076" y="158212"/>
+                  </a:lnTo>
+                  <a:lnTo>
+                    <a:pt x="1426444" y="150697"/>
+                  </a:lnTo>
+                  <a:lnTo>
+                    <a:pt x="1349811" y="143124"/>
+                  </a:lnTo>
+                  <a:lnTo>
+                    <a:pt x="1273179" y="135495"/>
+                  </a:lnTo>
+                  <a:lnTo>
+                    <a:pt x="1196546" y="127808"/>
+                  </a:lnTo>
+                  <a:lnTo>
+                    <a:pt x="1119914" y="120064"/>
+                  </a:lnTo>
+                  <a:lnTo>
+                    <a:pt x="1043281" y="112261"/>
+                  </a:lnTo>
+                  <a:lnTo>
+                    <a:pt x="966649" y="104400"/>
+                  </a:lnTo>
+                  <a:lnTo>
+                    <a:pt x="890016" y="96479"/>
+                  </a:lnTo>
+                  <a:lnTo>
+                    <a:pt x="813384" y="88499"/>
+                  </a:lnTo>
+                  <a:lnTo>
+                    <a:pt x="736751" y="80459"/>
+                  </a:lnTo>
+                  <a:lnTo>
+                    <a:pt x="660118" y="72358"/>
+                  </a:lnTo>
+                  <a:lnTo>
+                    <a:pt x="583486" y="64197"/>
+                  </a:lnTo>
+                  <a:lnTo>
+                    <a:pt x="506853" y="55974"/>
+                  </a:lnTo>
+                  <a:lnTo>
+                    <a:pt x="430221" y="47689"/>
+                  </a:lnTo>
+                  <a:lnTo>
+                    <a:pt x="353588" y="39342"/>
+                  </a:lnTo>
+                  <a:lnTo>
+                    <a:pt x="276956" y="30932"/>
+                  </a:lnTo>
+                  <a:lnTo>
+                    <a:pt x="200323" y="22459"/>
+                  </a:lnTo>
+                  <a:lnTo>
+                    <a:pt x="123691" y="13922"/>
+                  </a:lnTo>
+                  <a:lnTo>
+                    <a:pt x="47058" y="5321"/>
                   </a:lnTo>
                   <a:lnTo>
                     <a:pt x="0" y="0"/>
@@ -4259,306 +4259,306 @@
           </p:nvSpPr>
           <p:spPr>
             <a:xfrm>
-              <a:off x="817517" y="3674161"/>
-              <a:ext cx="7403783" cy="1521936"/>
+              <a:off x="817517" y="3768905"/>
+              <a:ext cx="7403783" cy="1451562"/>
             </a:xfrm>
             <a:custGeom>
               <a:avLst/>
               <a:pathLst>
-                <a:path w="7403783" h="1521936">
+                <a:path w="7403783" h="1451562">
                   <a:moveTo>
                     <a:pt x="0" y="0"/>
                   </a:moveTo>
                   <a:lnTo>
-                    <a:pt x="47058" y="19858"/>
-                  </a:lnTo>
-                  <a:lnTo>
-                    <a:pt x="123691" y="51641"/>
-                  </a:lnTo>
-                  <a:lnTo>
-                    <a:pt x="200323" y="82881"/>
-                  </a:lnTo>
-                  <a:lnTo>
-                    <a:pt x="276956" y="113585"/>
-                  </a:lnTo>
-                  <a:lnTo>
-                    <a:pt x="353588" y="143763"/>
-                  </a:lnTo>
-                  <a:lnTo>
-                    <a:pt x="430221" y="173424"/>
-                  </a:lnTo>
-                  <a:lnTo>
-                    <a:pt x="506853" y="202577"/>
-                  </a:lnTo>
-                  <a:lnTo>
-                    <a:pt x="583486" y="231230"/>
-                  </a:lnTo>
-                  <a:lnTo>
-                    <a:pt x="660118" y="259393"/>
-                  </a:lnTo>
-                  <a:lnTo>
-                    <a:pt x="736751" y="287073"/>
-                  </a:lnTo>
-                  <a:lnTo>
-                    <a:pt x="813384" y="314279"/>
-                  </a:lnTo>
-                  <a:lnTo>
-                    <a:pt x="890016" y="341018"/>
-                  </a:lnTo>
-                  <a:lnTo>
-                    <a:pt x="966649" y="367300"/>
-                  </a:lnTo>
-                  <a:lnTo>
-                    <a:pt x="1043281" y="393131"/>
-                  </a:lnTo>
-                  <a:lnTo>
-                    <a:pt x="1119914" y="418520"/>
-                  </a:lnTo>
-                  <a:lnTo>
-                    <a:pt x="1196546" y="443474"/>
-                  </a:lnTo>
-                  <a:lnTo>
-                    <a:pt x="1273179" y="468000"/>
-                  </a:lnTo>
-                  <a:lnTo>
-                    <a:pt x="1349811" y="492106"/>
-                  </a:lnTo>
-                  <a:lnTo>
-                    <a:pt x="1426444" y="515799"/>
-                  </a:lnTo>
-                  <a:lnTo>
-                    <a:pt x="1503076" y="539086"/>
-                  </a:lnTo>
-                  <a:lnTo>
-                    <a:pt x="1579709" y="561974"/>
-                  </a:lnTo>
-                  <a:lnTo>
-                    <a:pt x="1656342" y="584471"/>
-                  </a:lnTo>
-                  <a:lnTo>
-                    <a:pt x="1732974" y="606581"/>
-                  </a:lnTo>
-                  <a:lnTo>
-                    <a:pt x="1809607" y="628313"/>
-                  </a:lnTo>
-                  <a:lnTo>
-                    <a:pt x="1886239" y="649673"/>
-                  </a:lnTo>
-                  <a:lnTo>
-                    <a:pt x="1962872" y="670666"/>
-                  </a:lnTo>
-                  <a:lnTo>
-                    <a:pt x="2039504" y="691300"/>
-                  </a:lnTo>
-                  <a:lnTo>
-                    <a:pt x="2116137" y="711580"/>
-                  </a:lnTo>
-                  <a:lnTo>
-                    <a:pt x="2192769" y="731513"/>
-                  </a:lnTo>
-                  <a:lnTo>
-                    <a:pt x="2269402" y="751105"/>
-                  </a:lnTo>
-                  <a:lnTo>
-                    <a:pt x="2346034" y="770361"/>
-                  </a:lnTo>
-                  <a:lnTo>
-                    <a:pt x="2422667" y="789287"/>
-                  </a:lnTo>
-                  <a:lnTo>
-                    <a:pt x="2499300" y="807888"/>
-                  </a:lnTo>
-                  <a:lnTo>
-                    <a:pt x="2575932" y="826171"/>
-                  </a:lnTo>
-                  <a:lnTo>
-                    <a:pt x="2652565" y="844141"/>
-                  </a:lnTo>
-                  <a:lnTo>
-                    <a:pt x="2729197" y="861803"/>
-                  </a:lnTo>
-                  <a:lnTo>
-                    <a:pt x="2805830" y="879162"/>
-                  </a:lnTo>
-                  <a:lnTo>
-                    <a:pt x="2882462" y="896224"/>
-                  </a:lnTo>
-                  <a:lnTo>
-                    <a:pt x="2959095" y="912994"/>
-                  </a:lnTo>
-                  <a:lnTo>
-                    <a:pt x="3035727" y="929476"/>
-                  </a:lnTo>
-                  <a:lnTo>
-                    <a:pt x="3112360" y="945676"/>
-                  </a:lnTo>
-                  <a:lnTo>
-                    <a:pt x="3188993" y="961598"/>
-                  </a:lnTo>
-                  <a:lnTo>
-                    <a:pt x="3265625" y="977248"/>
-                  </a:lnTo>
-                  <a:lnTo>
-                    <a:pt x="3342258" y="992629"/>
-                  </a:lnTo>
-                  <a:lnTo>
-                    <a:pt x="3418890" y="1007747"/>
-                  </a:lnTo>
-                  <a:lnTo>
-                    <a:pt x="3495523" y="1022606"/>
-                  </a:lnTo>
-                  <a:lnTo>
-                    <a:pt x="3572155" y="1037210"/>
-                  </a:lnTo>
-                  <a:lnTo>
-                    <a:pt x="3648788" y="1051564"/>
-                  </a:lnTo>
-                  <a:lnTo>
-                    <a:pt x="3725420" y="1065673"/>
-                  </a:lnTo>
-                  <a:lnTo>
-                    <a:pt x="3802053" y="1079539"/>
-                  </a:lnTo>
-                  <a:lnTo>
-                    <a:pt x="3878685" y="1093168"/>
-                  </a:lnTo>
-                  <a:lnTo>
-                    <a:pt x="3955318" y="1106563"/>
-                  </a:lnTo>
-                  <a:lnTo>
-                    <a:pt x="4031951" y="1119729"/>
-                  </a:lnTo>
-                  <a:lnTo>
-                    <a:pt x="4108583" y="1132670"/>
-                  </a:lnTo>
-                  <a:lnTo>
-                    <a:pt x="4185216" y="1145388"/>
-                  </a:lnTo>
-                  <a:lnTo>
-                    <a:pt x="4261848" y="1157889"/>
-                  </a:lnTo>
-                  <a:lnTo>
-                    <a:pt x="4338481" y="1170176"/>
-                  </a:lnTo>
-                  <a:lnTo>
-                    <a:pt x="4415113" y="1182252"/>
-                  </a:lnTo>
-                  <a:lnTo>
-                    <a:pt x="4491746" y="1194121"/>
-                  </a:lnTo>
-                  <a:lnTo>
-                    <a:pt x="4568378" y="1205787"/>
-                  </a:lnTo>
-                  <a:lnTo>
-                    <a:pt x="4645011" y="1217253"/>
-                  </a:lnTo>
-                  <a:lnTo>
-                    <a:pt x="4721644" y="1228523"/>
-                  </a:lnTo>
-                  <a:lnTo>
-                    <a:pt x="4798276" y="1239599"/>
-                  </a:lnTo>
-                  <a:lnTo>
-                    <a:pt x="4874909" y="1250486"/>
-                  </a:lnTo>
-                  <a:lnTo>
-                    <a:pt x="4951541" y="1261186"/>
-                  </a:lnTo>
-                  <a:lnTo>
-                    <a:pt x="5028174" y="1271703"/>
-                  </a:lnTo>
-                  <a:lnTo>
-                    <a:pt x="5104806" y="1282040"/>
-                  </a:lnTo>
-                  <a:lnTo>
-                    <a:pt x="5181439" y="1292199"/>
-                  </a:lnTo>
-                  <a:lnTo>
-                    <a:pt x="5258071" y="1302185"/>
-                  </a:lnTo>
-                  <a:lnTo>
-                    <a:pt x="5334704" y="1311999"/>
-                  </a:lnTo>
-                  <a:lnTo>
-                    <a:pt x="5411336" y="1321646"/>
-                  </a:lnTo>
-                  <a:lnTo>
-                    <a:pt x="5487969" y="1331127"/>
-                  </a:lnTo>
-                  <a:lnTo>
-                    <a:pt x="5564602" y="1340445"/>
-                  </a:lnTo>
-                  <a:lnTo>
-                    <a:pt x="5641234" y="1349604"/>
-                  </a:lnTo>
-                  <a:lnTo>
-                    <a:pt x="5717867" y="1358606"/>
-                  </a:lnTo>
-                  <a:lnTo>
-                    <a:pt x="5794499" y="1367454"/>
-                  </a:lnTo>
-                  <a:lnTo>
-                    <a:pt x="5871132" y="1376151"/>
-                  </a:lnTo>
-                  <a:lnTo>
-                    <a:pt x="5947764" y="1384698"/>
-                  </a:lnTo>
-                  <a:lnTo>
-                    <a:pt x="6024397" y="1393099"/>
-                  </a:lnTo>
-                  <a:lnTo>
-                    <a:pt x="6101029" y="1401356"/>
-                  </a:lnTo>
-                  <a:lnTo>
-                    <a:pt x="6177662" y="1409471"/>
-                  </a:lnTo>
-                  <a:lnTo>
-                    <a:pt x="6254294" y="1417447"/>
-                  </a:lnTo>
-                  <a:lnTo>
-                    <a:pt x="6330927" y="1425287"/>
-                  </a:lnTo>
-                  <a:lnTo>
-                    <a:pt x="6407560" y="1432993"/>
-                  </a:lnTo>
-                  <a:lnTo>
-                    <a:pt x="6484192" y="1440566"/>
-                  </a:lnTo>
-                  <a:lnTo>
-                    <a:pt x="6560825" y="1448010"/>
-                  </a:lnTo>
-                  <a:lnTo>
-                    <a:pt x="6637457" y="1455326"/>
-                  </a:lnTo>
-                  <a:lnTo>
-                    <a:pt x="6714090" y="1462517"/>
-                  </a:lnTo>
-                  <a:lnTo>
-                    <a:pt x="6790722" y="1469584"/>
-                  </a:lnTo>
-                  <a:lnTo>
-                    <a:pt x="6867355" y="1476531"/>
-                  </a:lnTo>
-                  <a:lnTo>
-                    <a:pt x="6943987" y="1483358"/>
-                  </a:lnTo>
-                  <a:lnTo>
-                    <a:pt x="7020620" y="1490069"/>
-                  </a:lnTo>
-                  <a:lnTo>
-                    <a:pt x="7097253" y="1496664"/>
-                  </a:lnTo>
-                  <a:lnTo>
-                    <a:pt x="7173885" y="1503147"/>
-                  </a:lnTo>
-                  <a:lnTo>
-                    <a:pt x="7250518" y="1509518"/>
-                  </a:lnTo>
-                  <a:lnTo>
-                    <a:pt x="7327150" y="1515781"/>
-                  </a:lnTo>
-                  <a:lnTo>
-                    <a:pt x="7403783" y="1521936"/>
+                    <a:pt x="47058" y="18939"/>
+                  </a:lnTo>
+                  <a:lnTo>
+                    <a:pt x="123691" y="49253"/>
+                  </a:lnTo>
+                  <a:lnTo>
+                    <a:pt x="200323" y="79048"/>
+                  </a:lnTo>
+                  <a:lnTo>
+                    <a:pt x="276956" y="108333"/>
+                  </a:lnTo>
+                  <a:lnTo>
+                    <a:pt x="353588" y="137115"/>
+                  </a:lnTo>
+                  <a:lnTo>
+                    <a:pt x="430221" y="165405"/>
+                  </a:lnTo>
+                  <a:lnTo>
+                    <a:pt x="506853" y="193210"/>
+                  </a:lnTo>
+                  <a:lnTo>
+                    <a:pt x="583486" y="220538"/>
+                  </a:lnTo>
+                  <a:lnTo>
+                    <a:pt x="660118" y="247398"/>
+                  </a:lnTo>
+                  <a:lnTo>
+                    <a:pt x="736751" y="273799"/>
+                  </a:lnTo>
+                  <a:lnTo>
+                    <a:pt x="813384" y="299746"/>
+                  </a:lnTo>
+                  <a:lnTo>
+                    <a:pt x="890016" y="325250"/>
+                  </a:lnTo>
+                  <a:lnTo>
+                    <a:pt x="966649" y="350316"/>
+                  </a:lnTo>
+                  <a:lnTo>
+                    <a:pt x="1043281" y="374953"/>
+                  </a:lnTo>
+                  <a:lnTo>
+                    <a:pt x="1119914" y="399168"/>
+                  </a:lnTo>
+                  <a:lnTo>
+                    <a:pt x="1196546" y="422968"/>
+                  </a:lnTo>
+                  <a:lnTo>
+                    <a:pt x="1273179" y="446360"/>
+                  </a:lnTo>
+                  <a:lnTo>
+                    <a:pt x="1349811" y="469351"/>
+                  </a:lnTo>
+                  <a:lnTo>
+                    <a:pt x="1426444" y="491949"/>
+                  </a:lnTo>
+                  <a:lnTo>
+                    <a:pt x="1503076" y="514159"/>
+                  </a:lnTo>
+                  <a:lnTo>
+                    <a:pt x="1579709" y="535989"/>
+                  </a:lnTo>
+                  <a:lnTo>
+                    <a:pt x="1656342" y="557445"/>
+                  </a:lnTo>
+                  <a:lnTo>
+                    <a:pt x="1732974" y="578533"/>
+                  </a:lnTo>
+                  <a:lnTo>
+                    <a:pt x="1809607" y="599260"/>
+                  </a:lnTo>
+                  <a:lnTo>
+                    <a:pt x="1886239" y="619632"/>
+                  </a:lnTo>
+                  <a:lnTo>
+                    <a:pt x="1962872" y="639655"/>
+                  </a:lnTo>
+                  <a:lnTo>
+                    <a:pt x="2039504" y="659335"/>
+                  </a:lnTo>
+                  <a:lnTo>
+                    <a:pt x="2116137" y="678677"/>
+                  </a:lnTo>
+                  <a:lnTo>
+                    <a:pt x="2192769" y="697689"/>
+                  </a:lnTo>
+                  <a:lnTo>
+                    <a:pt x="2269402" y="716374"/>
+                  </a:lnTo>
+                  <a:lnTo>
+                    <a:pt x="2346034" y="734740"/>
+                  </a:lnTo>
+                  <a:lnTo>
+                    <a:pt x="2422667" y="752790"/>
+                  </a:lnTo>
+                  <a:lnTo>
+                    <a:pt x="2499300" y="770532"/>
+                  </a:lnTo>
+                  <a:lnTo>
+                    <a:pt x="2575932" y="787969"/>
+                  </a:lnTo>
+                  <a:lnTo>
+                    <a:pt x="2652565" y="805108"/>
+                  </a:lnTo>
+                  <a:lnTo>
+                    <a:pt x="2729197" y="821953"/>
+                  </a:lnTo>
+                  <a:lnTo>
+                    <a:pt x="2805830" y="838510"/>
+                  </a:lnTo>
+                  <a:lnTo>
+                    <a:pt x="2882462" y="854783"/>
+                  </a:lnTo>
+                  <a:lnTo>
+                    <a:pt x="2959095" y="870777"/>
+                  </a:lnTo>
+                  <a:lnTo>
+                    <a:pt x="3035727" y="886497"/>
+                  </a:lnTo>
+                  <a:lnTo>
+                    <a:pt x="3112360" y="901948"/>
+                  </a:lnTo>
+                  <a:lnTo>
+                    <a:pt x="3188993" y="917134"/>
+                  </a:lnTo>
+                  <a:lnTo>
+                    <a:pt x="3265625" y="932060"/>
+                  </a:lnTo>
+                  <a:lnTo>
+                    <a:pt x="3342258" y="946730"/>
+                  </a:lnTo>
+                  <a:lnTo>
+                    <a:pt x="3418890" y="961149"/>
+                  </a:lnTo>
+                  <a:lnTo>
+                    <a:pt x="3495523" y="975321"/>
+                  </a:lnTo>
+                  <a:lnTo>
+                    <a:pt x="3572155" y="989250"/>
+                  </a:lnTo>
+                  <a:lnTo>
+                    <a:pt x="3648788" y="1002940"/>
+                  </a:lnTo>
+                  <a:lnTo>
+                    <a:pt x="3725420" y="1016396"/>
+                  </a:lnTo>
+                  <a:lnTo>
+                    <a:pt x="3802053" y="1029622"/>
+                  </a:lnTo>
+                  <a:lnTo>
+                    <a:pt x="3878685" y="1042620"/>
+                  </a:lnTo>
+                  <a:lnTo>
+                    <a:pt x="3955318" y="1055396"/>
+                  </a:lnTo>
+                  <a:lnTo>
+                    <a:pt x="4031951" y="1067954"/>
+                  </a:lnTo>
+                  <a:lnTo>
+                    <a:pt x="4108583" y="1080296"/>
+                  </a:lnTo>
+                  <a:lnTo>
+                    <a:pt x="4185216" y="1092426"/>
+                  </a:lnTo>
+                  <a:lnTo>
+                    <a:pt x="4261848" y="1104349"/>
+                  </a:lnTo>
+                  <a:lnTo>
+                    <a:pt x="4338481" y="1116067"/>
+                  </a:lnTo>
+                  <a:lnTo>
+                    <a:pt x="4415113" y="1127585"/>
+                  </a:lnTo>
+                  <a:lnTo>
+                    <a:pt x="4491746" y="1138905"/>
+                  </a:lnTo>
+                  <a:lnTo>
+                    <a:pt x="4568378" y="1150032"/>
+                  </a:lnTo>
+                  <a:lnTo>
+                    <a:pt x="4645011" y="1160968"/>
+                  </a:lnTo>
+                  <a:lnTo>
+                    <a:pt x="4721644" y="1171716"/>
+                  </a:lnTo>
+                  <a:lnTo>
+                    <a:pt x="4798276" y="1182281"/>
+                  </a:lnTo>
+                  <a:lnTo>
+                    <a:pt x="4874909" y="1192664"/>
+                  </a:lnTo>
+                  <a:lnTo>
+                    <a:pt x="4951541" y="1202869"/>
+                  </a:lnTo>
+                  <a:lnTo>
+                    <a:pt x="5028174" y="1212900"/>
+                  </a:lnTo>
+                  <a:lnTo>
+                    <a:pt x="5104806" y="1222759"/>
+                  </a:lnTo>
+                  <a:lnTo>
+                    <a:pt x="5181439" y="1232448"/>
+                  </a:lnTo>
+                  <a:lnTo>
+                    <a:pt x="5258071" y="1241972"/>
+                  </a:lnTo>
+                  <a:lnTo>
+                    <a:pt x="5334704" y="1251333"/>
+                  </a:lnTo>
+                  <a:lnTo>
+                    <a:pt x="5411336" y="1260533"/>
+                  </a:lnTo>
+                  <a:lnTo>
+                    <a:pt x="5487969" y="1269576"/>
+                  </a:lnTo>
+                  <a:lnTo>
+                    <a:pt x="5564602" y="1278464"/>
+                  </a:lnTo>
+                  <a:lnTo>
+                    <a:pt x="5641234" y="1287199"/>
+                  </a:lnTo>
+                  <a:lnTo>
+                    <a:pt x="5717867" y="1295785"/>
+                  </a:lnTo>
+                  <a:lnTo>
+                    <a:pt x="5794499" y="1304224"/>
+                  </a:lnTo>
+                  <a:lnTo>
+                    <a:pt x="5871132" y="1312518"/>
+                  </a:lnTo>
+                  <a:lnTo>
+                    <a:pt x="5947764" y="1320670"/>
+                  </a:lnTo>
+                  <a:lnTo>
+                    <a:pt x="6024397" y="1328682"/>
+                  </a:lnTo>
+                  <a:lnTo>
+                    <a:pt x="6101029" y="1336557"/>
+                  </a:lnTo>
+                  <a:lnTo>
+                    <a:pt x="6177662" y="1344298"/>
+                  </a:lnTo>
+                  <a:lnTo>
+                    <a:pt x="6254294" y="1351905"/>
+                  </a:lnTo>
+                  <a:lnTo>
+                    <a:pt x="6330927" y="1359382"/>
+                  </a:lnTo>
+                  <a:lnTo>
+                    <a:pt x="6407560" y="1366732"/>
+                  </a:lnTo>
+                  <a:lnTo>
+                    <a:pt x="6484192" y="1373955"/>
+                  </a:lnTo>
+                  <a:lnTo>
+                    <a:pt x="6560825" y="1381054"/>
+                  </a:lnTo>
+                  <a:lnTo>
+                    <a:pt x="6637457" y="1388032"/>
+                  </a:lnTo>
+                  <a:lnTo>
+                    <a:pt x="6714090" y="1394890"/>
+                  </a:lnTo>
+                  <a:lnTo>
+                    <a:pt x="6790722" y="1401631"/>
+                  </a:lnTo>
+                  <a:lnTo>
+                    <a:pt x="6867355" y="1408257"/>
+                  </a:lnTo>
+                  <a:lnTo>
+                    <a:pt x="6943987" y="1414768"/>
+                  </a:lnTo>
+                  <a:lnTo>
+                    <a:pt x="7020620" y="1421169"/>
+                  </a:lnTo>
+                  <a:lnTo>
+                    <a:pt x="7097253" y="1427459"/>
+                  </a:lnTo>
+                  <a:lnTo>
+                    <a:pt x="7173885" y="1433642"/>
+                  </a:lnTo>
+                  <a:lnTo>
+                    <a:pt x="7250518" y="1439719"/>
+                  </a:lnTo>
+                  <a:lnTo>
+                    <a:pt x="7327150" y="1445692"/>
+                  </a:lnTo>
+                  <a:lnTo>
+                    <a:pt x="7403783" y="1451562"/>
                   </a:lnTo>
                 </a:path>
               </a:pathLst>
@@ -4587,7 +4587,7 @@
           </p:nvSpPr>
           <p:spPr>
             <a:xfrm>
-              <a:off x="817517" y="4679530"/>
+              <a:off x="817517" y="4727786"/>
               <a:ext cx="7799693" cy="0"/>
             </a:xfrm>
             <a:custGeom>
@@ -4630,15 +4630,15 @@
           </p:nvSpPr>
           <p:spPr>
             <a:xfrm>
-              <a:off x="4224261" y="1896563"/>
-              <a:ext cx="0" cy="3826579"/>
+              <a:off x="4224261" y="2073503"/>
+              <a:ext cx="0" cy="3649639"/>
             </a:xfrm>
             <a:custGeom>
               <a:avLst/>
               <a:pathLst>
-                <a:path w="0" h="3826579">
+                <a:path w="0" h="3649639">
                   <a:moveTo>
-                    <a:pt x="0" y="3826579"/>
+                    <a:pt x="0" y="3649639"/>
                   </a:moveTo>
                   <a:lnTo>
                     <a:pt x="0" y="0"/>
@@ -4673,7 +4673,7 @@
           </p:nvSpPr>
           <p:spPr>
             <a:xfrm>
-              <a:off x="692708" y="5509156"/>
+              <a:off x="692708" y="5517199"/>
               <a:ext cx="62179" cy="80101"/>
             </a:xfrm>
             <a:prstGeom prst="rect">
@@ -4719,7 +4719,7 @@
           </p:nvSpPr>
           <p:spPr>
             <a:xfrm>
-              <a:off x="692708" y="4639479"/>
+              <a:off x="692708" y="4687735"/>
               <a:ext cx="62179" cy="80101"/>
             </a:xfrm>
             <a:prstGeom prst="rect">
@@ -4765,7 +4765,7 @@
           </p:nvSpPr>
           <p:spPr>
             <a:xfrm>
-              <a:off x="692708" y="3769802"/>
+              <a:off x="692708" y="3858272"/>
               <a:ext cx="62179" cy="80101"/>
             </a:xfrm>
             <a:prstGeom prst="rect">
@@ -4811,7 +4811,7 @@
           </p:nvSpPr>
           <p:spPr>
             <a:xfrm>
-              <a:off x="692708" y="2900125"/>
+              <a:off x="692708" y="3028808"/>
               <a:ext cx="62179" cy="80101"/>
             </a:xfrm>
             <a:prstGeom prst="rect">
@@ -4857,7 +4857,7 @@
           </p:nvSpPr>
           <p:spPr>
             <a:xfrm>
-              <a:off x="692708" y="2030448"/>
+              <a:off x="692708" y="2199345"/>
               <a:ext cx="62179" cy="80101"/>
             </a:xfrm>
             <a:prstGeom prst="rect">
@@ -5133,7 +5133,7 @@
           </p:nvSpPr>
           <p:spPr>
             <a:xfrm rot="-5400000">
-              <a:off x="68446" y="3759743"/>
+              <a:off x="68446" y="3848213"/>
               <a:ext cx="1016904" cy="100218"/>
             </a:xfrm>
             <a:prstGeom prst="rect">
@@ -5174,6 +5174,52 @@
         <p:sp>
           <p:nvSpPr>
             <p:cNvPr id="38" name="tx38"/>
+            <p:cNvSpPr/>
+            <p:nvPr/>
+          </p:nvSpPr>
+          <p:spPr>
+            <a:xfrm>
+              <a:off x="817517" y="1896563"/>
+              <a:ext cx="5626211" cy="82021"/>
+            </a:xfrm>
+            <a:prstGeom prst="rect">
+              <a:avLst/>
+            </a:prstGeom>
+            <a:noFill/>
+          </p:spPr>
+          <p:txBody>
+            <a:bodyPr lIns="0" rIns="0" tIns="0" bIns="0" anchorCtr="1" anchor="ctr" wrap="none"/>
+            <a:lstStyle/>
+            <a:p>
+              <a:pPr algn="l" marL="0" marR="0" indent="0">
+                <a:lnSpc>
+                  <a:spcPts val="900"/>
+                </a:lnSpc>
+                <a:spcBef>
+                  <a:spcPts val="0"/>
+                </a:spcBef>
+                <a:spcAft>
+                  <a:spcPts val="0"/>
+                </a:spcAft>
+              </a:pPr>
+              <a:r>
+                <a:rPr sz="900">
+                  <a:solidFill>
+                    <a:srgbClr val="404040">
+                      <a:alpha val="100000"/>
+                    </a:srgbClr>
+                  </a:solidFill>
+                  <a:latin typeface="Helvetica"/>
+                  <a:cs typeface="Helvetica"/>
+                </a:rPr>
+                <a:t>subHR per 0.1 ratio decline: 1.22 (1.09-1.37)  |  per IQR decline (Δ = 0.30): 1.82 (1.30-2.55)  |  IQR: [0.85, 1.15]</a:t>
+              </a:r>
+            </a:p>
+          </p:txBody>
+        </p:sp>
+        <p:sp>
+          <p:nvSpPr>
+            <p:cNvPr id="39" name="tx39"/>
             <p:cNvSpPr/>
             <p:nvPr/>
           </p:nvSpPr>

--- a/docs/pptx/carbo/jx-carbo-linsubhr-ratio-anyhosp.pptx
+++ b/docs/pptx/carbo/jx-carbo-linsubhr-ratio-anyhosp.pptx
@@ -5180,7 +5180,7 @@
           <p:spPr>
             <a:xfrm>
               <a:off x="817517" y="1896563"/>
-              <a:ext cx="5626211" cy="82021"/>
+              <a:ext cx="6236116" cy="82021"/>
             </a:xfrm>
             <a:prstGeom prst="rect">
               <a:avLst/>
@@ -5212,7 +5212,7 @@
                   <a:latin typeface="Helvetica"/>
                   <a:cs typeface="Helvetica"/>
                 </a:rPr>
-                <a:t>subHR per 0.1 ratio decline: 1.22 (1.09-1.37)  |  per IQR decline (Δ = 0.30): 1.82 (1.30-2.55)  |  IQR: [0.85, 1.15]</a:t>
+                <a:t>subHR per 0.1 ratio decline: 1.22 (1.09-1.37), p = &lt;0.001  |  per IQR decline (Δ = 0.30): 1.82 (1.30-2.55)  |  IQR: [0.85, 1.15]</a:t>
               </a:r>
             </a:p>
           </p:txBody>

--- a/docs/pptx/carbo/jx-carbo-linsubhr-ratio-anyhosp.pptx
+++ b/docs/pptx/carbo/jx-carbo-linsubhr-ratio-anyhosp.pptx
@@ -5180,7 +5180,7 @@
           <p:spPr>
             <a:xfrm>
               <a:off x="817517" y="1896563"/>
-              <a:ext cx="6236116" cy="82021"/>
+              <a:ext cx="6833128" cy="82021"/>
             </a:xfrm>
             <a:prstGeom prst="rect">
               <a:avLst/>
@@ -5212,7 +5212,7 @@
                   <a:latin typeface="Helvetica"/>
                   <a:cs typeface="Helvetica"/>
                 </a:rPr>
-                <a:t>subHR per 0.1 ratio decline: 1.22 (1.09-1.37), p = &lt;0.001  |  per IQR decline (Δ = 0.30): 1.82 (1.30-2.55)  |  IQR: [0.85, 1.15]</a:t>
+                <a:t>subHR per 0.1 ratio decline: 1.22 (1.09-1.37), p_Bonf = 0.003 (n = 6)  |  per IQR decline (Δ = 0.30): 1.82 (1.30-2.55)  |  IQR: [0.85, 1.15]</a:t>
               </a:r>
             </a:p>
           </p:txBody>

--- a/docs/pptx/carbo/jx-carbo-linsubhr-ratio-anyhosp.pptx
+++ b/docs/pptx/carbo/jx-carbo-linsubhr-ratio-anyhosp.pptx
@@ -2443,7 +2443,7 @@
           </p:nvSpPr>
           <p:spPr>
             <a:xfrm>
-              <a:off x="1615213" y="2073503"/>
+              <a:off x="1467192" y="2073503"/>
               <a:ext cx="0" cy="3649639"/>
             </a:xfrm>
             <a:custGeom>
@@ -2486,7 +2486,7 @@
           </p:nvSpPr>
           <p:spPr>
             <a:xfrm>
-              <a:off x="3387871" y="2073503"/>
+              <a:off x="3538150" y="2073503"/>
               <a:ext cx="0" cy="3649639"/>
             </a:xfrm>
             <a:custGeom>
@@ -2529,7 +2529,7 @@
           </p:nvSpPr>
           <p:spPr>
             <a:xfrm>
-              <a:off x="5160528" y="2073503"/>
+              <a:off x="5609107" y="2073503"/>
               <a:ext cx="0" cy="3649639"/>
             </a:xfrm>
             <a:custGeom>
@@ -2572,7 +2572,7 @@
           </p:nvSpPr>
           <p:spPr>
             <a:xfrm>
-              <a:off x="6933186" y="2073503"/>
+              <a:off x="7680065" y="2073503"/>
               <a:ext cx="0" cy="3649639"/>
             </a:xfrm>
             <a:custGeom>
@@ -2830,7 +2830,7 @@
           </p:nvSpPr>
           <p:spPr>
             <a:xfrm>
-              <a:off x="2501542" y="2073503"/>
+              <a:off x="2502671" y="2073503"/>
               <a:ext cx="0" cy="3649639"/>
             </a:xfrm>
             <a:custGeom>
@@ -2873,7 +2873,7 @@
           </p:nvSpPr>
           <p:spPr>
             <a:xfrm>
-              <a:off x="4274200" y="2073503"/>
+              <a:off x="4573628" y="2073503"/>
               <a:ext cx="0" cy="3649639"/>
             </a:xfrm>
             <a:custGeom>
@@ -2916,7 +2916,7 @@
           </p:nvSpPr>
           <p:spPr>
             <a:xfrm>
-              <a:off x="6046857" y="2073503"/>
+              <a:off x="6644586" y="2073503"/>
               <a:ext cx="0" cy="3649639"/>
             </a:xfrm>
             <a:custGeom>
@@ -2953,649 +2953,618 @@
         </p:sp>
         <p:sp>
           <p:nvSpPr>
-            <p:cNvPr id="20" name="pl20"/>
+            <p:cNvPr id="20" name="pg20"/>
             <p:cNvSpPr/>
             <p:nvPr/>
           </p:nvSpPr>
           <p:spPr>
             <a:xfrm>
-              <a:off x="7819515" y="2073503"/>
-              <a:ext cx="0" cy="3649639"/>
+              <a:off x="1172049" y="2609837"/>
+              <a:ext cx="7090630" cy="2745274"/>
             </a:xfrm>
             <a:custGeom>
               <a:avLst/>
               <a:pathLst>
-                <a:path w="0" h="3649639">
-                  <a:moveTo>
-                    <a:pt x="0" y="3649639"/>
-                  </a:moveTo>
-                  <a:lnTo>
-                    <a:pt x="0" y="0"/>
-                  </a:lnTo>
-                  <a:lnTo>
-                    <a:pt x="0" y="0"/>
-                  </a:lnTo>
-                </a:path>
-              </a:pathLst>
-            </a:custGeom>
-            <a:ln w="13550" cap="flat">
-              <a:solidFill>
-                <a:srgbClr val="EBEBEB">
-                  <a:alpha val="100000"/>
-                </a:srgbClr>
-              </a:solidFill>
-              <a:prstDash val="solid"/>
-              <a:round/>
-            </a:ln>
-          </p:spPr>
-          <p:txBody>
-            <a:bodyPr/>
-            <a:lstStyle/>
-            <a:p/>
-          </p:txBody>
-        </p:sp>
-        <p:sp>
-          <p:nvSpPr>
-            <p:cNvPr id="21" name="pg21"/>
-            <p:cNvSpPr/>
-            <p:nvPr/>
-          </p:nvSpPr>
-          <p:spPr>
-            <a:xfrm>
-              <a:off x="817517" y="2793931"/>
-              <a:ext cx="7403783" cy="2561180"/>
-            </a:xfrm>
-            <a:custGeom>
-              <a:avLst/>
-              <a:pathLst>
-                <a:path w="7403783" h="2561180">
+                <a:path w="7090630" h="2745274">
                   <a:moveTo>
                     <a:pt x="0" y="0"/>
                   </a:moveTo>
                   <a:lnTo>
-                    <a:pt x="47058" y="45787"/>
-                  </a:lnTo>
-                  <a:lnTo>
-                    <a:pt x="123691" y="118358"/>
-                  </a:lnTo>
-                  <a:lnTo>
-                    <a:pt x="200323" y="188992"/>
-                  </a:lnTo>
-                  <a:lnTo>
-                    <a:pt x="276956" y="257739"/>
-                  </a:lnTo>
-                  <a:lnTo>
-                    <a:pt x="353588" y="324650"/>
-                  </a:lnTo>
-                  <a:lnTo>
-                    <a:pt x="430221" y="389775"/>
-                  </a:lnTo>
-                  <a:lnTo>
-                    <a:pt x="506853" y="453160"/>
-                  </a:lnTo>
-                  <a:lnTo>
-                    <a:pt x="583486" y="514852"/>
-                  </a:lnTo>
-                  <a:lnTo>
-                    <a:pt x="660118" y="574898"/>
-                  </a:lnTo>
-                  <a:lnTo>
-                    <a:pt x="736751" y="633339"/>
-                  </a:lnTo>
-                  <a:lnTo>
-                    <a:pt x="813384" y="690220"/>
-                  </a:lnTo>
-                  <a:lnTo>
-                    <a:pt x="890016" y="745582"/>
-                  </a:lnTo>
-                  <a:lnTo>
-                    <a:pt x="966649" y="799465"/>
-                  </a:lnTo>
-                  <a:lnTo>
-                    <a:pt x="1043281" y="851910"/>
-                  </a:lnTo>
-                  <a:lnTo>
-                    <a:pt x="1119914" y="902954"/>
-                  </a:lnTo>
-                  <a:lnTo>
-                    <a:pt x="1196546" y="952635"/>
-                  </a:lnTo>
-                  <a:lnTo>
-                    <a:pt x="1273179" y="1000989"/>
-                  </a:lnTo>
-                  <a:lnTo>
-                    <a:pt x="1349811" y="1048052"/>
-                  </a:lnTo>
-                  <a:lnTo>
-                    <a:pt x="1426444" y="1093858"/>
-                  </a:lnTo>
-                  <a:lnTo>
-                    <a:pt x="1503076" y="1138441"/>
-                  </a:lnTo>
-                  <a:lnTo>
-                    <a:pt x="1579709" y="1181833"/>
-                  </a:lnTo>
-                  <a:lnTo>
-                    <a:pt x="1656342" y="1224066"/>
-                  </a:lnTo>
-                  <a:lnTo>
-                    <a:pt x="1732974" y="1265172"/>
-                  </a:lnTo>
-                  <a:lnTo>
-                    <a:pt x="1809607" y="1305180"/>
-                  </a:lnTo>
-                  <a:lnTo>
-                    <a:pt x="1886239" y="1344119"/>
-                  </a:lnTo>
-                  <a:lnTo>
-                    <a:pt x="1962872" y="1382019"/>
-                  </a:lnTo>
-                  <a:lnTo>
-                    <a:pt x="2039504" y="1418906"/>
-                  </a:lnTo>
-                  <a:lnTo>
-                    <a:pt x="2116137" y="1454809"/>
-                  </a:lnTo>
-                  <a:lnTo>
-                    <a:pt x="2192769" y="1489752"/>
-                  </a:lnTo>
-                  <a:lnTo>
-                    <a:pt x="2269402" y="1523763"/>
-                  </a:lnTo>
-                  <a:lnTo>
-                    <a:pt x="2346034" y="1556865"/>
-                  </a:lnTo>
-                  <a:lnTo>
-                    <a:pt x="2422667" y="1589083"/>
-                  </a:lnTo>
-                  <a:lnTo>
-                    <a:pt x="2499300" y="1620441"/>
-                  </a:lnTo>
-                  <a:lnTo>
-                    <a:pt x="2575932" y="1650961"/>
-                  </a:lnTo>
-                  <a:lnTo>
-                    <a:pt x="2652565" y="1680667"/>
-                  </a:lnTo>
-                  <a:lnTo>
-                    <a:pt x="2729197" y="1709579"/>
-                  </a:lnTo>
-                  <a:lnTo>
-                    <a:pt x="2805830" y="1737719"/>
-                  </a:lnTo>
-                  <a:lnTo>
-                    <a:pt x="2882462" y="1765108"/>
-                  </a:lnTo>
-                  <a:lnTo>
-                    <a:pt x="2959095" y="1791765"/>
-                  </a:lnTo>
-                  <a:lnTo>
-                    <a:pt x="3035727" y="1817710"/>
-                  </a:lnTo>
-                  <a:lnTo>
-                    <a:pt x="3112360" y="1842962"/>
-                  </a:lnTo>
-                  <a:lnTo>
-                    <a:pt x="3188993" y="1867540"/>
-                  </a:lnTo>
-                  <a:lnTo>
-                    <a:pt x="3265625" y="1891462"/>
-                  </a:lnTo>
-                  <a:lnTo>
-                    <a:pt x="3342258" y="1914745"/>
-                  </a:lnTo>
-                  <a:lnTo>
-                    <a:pt x="3418890" y="1934839"/>
-                  </a:lnTo>
-                  <a:lnTo>
-                    <a:pt x="3495523" y="1941025"/>
-                  </a:lnTo>
-                  <a:lnTo>
-                    <a:pt x="3572155" y="1947164"/>
-                  </a:lnTo>
-                  <a:lnTo>
-                    <a:pt x="3648788" y="1953257"/>
-                  </a:lnTo>
-                  <a:lnTo>
-                    <a:pt x="3725420" y="1959305"/>
-                  </a:lnTo>
-                  <a:lnTo>
-                    <a:pt x="3802053" y="1965307"/>
-                  </a:lnTo>
-                  <a:lnTo>
-                    <a:pt x="3878685" y="1971265"/>
-                  </a:lnTo>
-                  <a:lnTo>
-                    <a:pt x="3955318" y="1977178"/>
-                  </a:lnTo>
-                  <a:lnTo>
-                    <a:pt x="4031951" y="1983047"/>
-                  </a:lnTo>
-                  <a:lnTo>
-                    <a:pt x="4108583" y="1988873"/>
-                  </a:lnTo>
-                  <a:lnTo>
-                    <a:pt x="4185216" y="1994655"/>
-                  </a:lnTo>
-                  <a:lnTo>
-                    <a:pt x="4261848" y="2000393"/>
-                  </a:lnTo>
-                  <a:lnTo>
-                    <a:pt x="4338481" y="2006089"/>
-                  </a:lnTo>
-                  <a:lnTo>
-                    <a:pt x="4415113" y="2011742"/>
-                  </a:lnTo>
-                  <a:lnTo>
-                    <a:pt x="4491746" y="2017353"/>
-                  </a:lnTo>
-                  <a:lnTo>
-                    <a:pt x="4568378" y="2022923"/>
-                  </a:lnTo>
-                  <a:lnTo>
-                    <a:pt x="4645011" y="2028450"/>
-                  </a:lnTo>
-                  <a:lnTo>
-                    <a:pt x="4721644" y="2033937"/>
-                  </a:lnTo>
-                  <a:lnTo>
-                    <a:pt x="4798276" y="2039382"/>
-                  </a:lnTo>
-                  <a:lnTo>
-                    <a:pt x="4874909" y="2044787"/>
-                  </a:lnTo>
-                  <a:lnTo>
-                    <a:pt x="4951541" y="2050151"/>
-                  </a:lnTo>
-                  <a:lnTo>
-                    <a:pt x="5028174" y="2055476"/>
-                  </a:lnTo>
-                  <a:lnTo>
-                    <a:pt x="5104806" y="2060760"/>
-                  </a:lnTo>
-                  <a:lnTo>
-                    <a:pt x="5181439" y="2066005"/>
-                  </a:lnTo>
-                  <a:lnTo>
-                    <a:pt x="5258071" y="2071211"/>
-                  </a:lnTo>
-                  <a:lnTo>
-                    <a:pt x="5334704" y="2076378"/>
-                  </a:lnTo>
-                  <a:lnTo>
-                    <a:pt x="5411336" y="2081507"/>
-                  </a:lnTo>
-                  <a:lnTo>
-                    <a:pt x="5487969" y="2086597"/>
-                  </a:lnTo>
-                  <a:lnTo>
-                    <a:pt x="5564602" y="2091649"/>
-                  </a:lnTo>
-                  <a:lnTo>
-                    <a:pt x="5641234" y="2096664"/>
-                  </a:lnTo>
-                  <a:lnTo>
-                    <a:pt x="5717867" y="2101641"/>
-                  </a:lnTo>
-                  <a:lnTo>
-                    <a:pt x="5794499" y="2106581"/>
-                  </a:lnTo>
-                  <a:lnTo>
-                    <a:pt x="5871132" y="2111484"/>
-                  </a:lnTo>
-                  <a:lnTo>
-                    <a:pt x="5947764" y="2116350"/>
-                  </a:lnTo>
-                  <a:lnTo>
-                    <a:pt x="6024397" y="2121181"/>
-                  </a:lnTo>
-                  <a:lnTo>
-                    <a:pt x="6101029" y="2125975"/>
-                  </a:lnTo>
-                  <a:lnTo>
-                    <a:pt x="6177662" y="2130733"/>
-                  </a:lnTo>
-                  <a:lnTo>
-                    <a:pt x="6254294" y="2135456"/>
-                  </a:lnTo>
-                  <a:lnTo>
-                    <a:pt x="6330927" y="2140143"/>
-                  </a:lnTo>
-                  <a:lnTo>
-                    <a:pt x="6407560" y="2144796"/>
-                  </a:lnTo>
-                  <a:lnTo>
-                    <a:pt x="6484192" y="2149413"/>
-                  </a:lnTo>
-                  <a:lnTo>
-                    <a:pt x="6560825" y="2153997"/>
-                  </a:lnTo>
-                  <a:lnTo>
-                    <a:pt x="6637457" y="2158546"/>
-                  </a:lnTo>
-                  <a:lnTo>
-                    <a:pt x="6714090" y="2163061"/>
-                  </a:lnTo>
-                  <a:lnTo>
-                    <a:pt x="6790722" y="2167542"/>
-                  </a:lnTo>
-                  <a:lnTo>
-                    <a:pt x="6867355" y="2171990"/>
-                  </a:lnTo>
-                  <a:lnTo>
-                    <a:pt x="6943987" y="2176405"/>
-                  </a:lnTo>
-                  <a:lnTo>
-                    <a:pt x="7020620" y="2180786"/>
-                  </a:lnTo>
-                  <a:lnTo>
-                    <a:pt x="7097253" y="2185136"/>
-                  </a:lnTo>
-                  <a:lnTo>
-                    <a:pt x="7173885" y="2189452"/>
-                  </a:lnTo>
-                  <a:lnTo>
-                    <a:pt x="7250518" y="2193736"/>
-                  </a:lnTo>
-                  <a:lnTo>
-                    <a:pt x="7327150" y="2197989"/>
-                  </a:lnTo>
-                  <a:lnTo>
-                    <a:pt x="7403783" y="2202209"/>
-                  </a:lnTo>
-                  <a:lnTo>
-                    <a:pt x="7403783" y="2561180"/>
-                  </a:lnTo>
-                  <a:lnTo>
-                    <a:pt x="7327150" y="2555633"/>
-                  </a:lnTo>
-                  <a:lnTo>
-                    <a:pt x="7250518" y="2549935"/>
-                  </a:lnTo>
-                  <a:lnTo>
-                    <a:pt x="7173885" y="2544080"/>
-                  </a:lnTo>
-                  <a:lnTo>
-                    <a:pt x="7097253" y="2538065"/>
-                  </a:lnTo>
-                  <a:lnTo>
-                    <a:pt x="7020620" y="2531884"/>
-                  </a:lnTo>
-                  <a:lnTo>
-                    <a:pt x="6943987" y="2525534"/>
-                  </a:lnTo>
-                  <a:lnTo>
-                    <a:pt x="6867355" y="2519010"/>
-                  </a:lnTo>
-                  <a:lnTo>
-                    <a:pt x="6790722" y="2512307"/>
-                  </a:lnTo>
-                  <a:lnTo>
-                    <a:pt x="6714090" y="2505420"/>
-                  </a:lnTo>
-                  <a:lnTo>
-                    <a:pt x="6637457" y="2498344"/>
-                  </a:lnTo>
-                  <a:lnTo>
-                    <a:pt x="6560825" y="2491073"/>
-                  </a:lnTo>
-                  <a:lnTo>
-                    <a:pt x="6484192" y="2483604"/>
-                  </a:lnTo>
-                  <a:lnTo>
-                    <a:pt x="6407560" y="2475929"/>
-                  </a:lnTo>
-                  <a:lnTo>
-                    <a:pt x="6330927" y="2468044"/>
-                  </a:lnTo>
-                  <a:lnTo>
-                    <a:pt x="6254294" y="2459942"/>
-                  </a:lnTo>
-                  <a:lnTo>
-                    <a:pt x="6177662" y="2451618"/>
-                  </a:lnTo>
-                  <a:lnTo>
-                    <a:pt x="6101029" y="2443066"/>
-                  </a:lnTo>
-                  <a:lnTo>
-                    <a:pt x="6024397" y="2434279"/>
-                  </a:lnTo>
-                  <a:lnTo>
-                    <a:pt x="5947764" y="2425251"/>
-                  </a:lnTo>
-                  <a:lnTo>
-                    <a:pt x="5871132" y="2415975"/>
-                  </a:lnTo>
-                  <a:lnTo>
-                    <a:pt x="5794499" y="2406445"/>
-                  </a:lnTo>
-                  <a:lnTo>
-                    <a:pt x="5717867" y="2396653"/>
-                  </a:lnTo>
-                  <a:lnTo>
-                    <a:pt x="5641234" y="2386593"/>
-                  </a:lnTo>
-                  <a:lnTo>
-                    <a:pt x="5564602" y="2376256"/>
-                  </a:lnTo>
-                  <a:lnTo>
-                    <a:pt x="5487969" y="2365636"/>
-                  </a:lnTo>
-                  <a:lnTo>
-                    <a:pt x="5411336" y="2354725"/>
-                  </a:lnTo>
-                  <a:lnTo>
-                    <a:pt x="5334704" y="2343514"/>
-                  </a:lnTo>
-                  <a:lnTo>
-                    <a:pt x="5258071" y="2331995"/>
-                  </a:lnTo>
-                  <a:lnTo>
-                    <a:pt x="5181439" y="2320161"/>
-                  </a:lnTo>
-                  <a:lnTo>
-                    <a:pt x="5104806" y="2308002"/>
-                  </a:lnTo>
-                  <a:lnTo>
-                    <a:pt x="5028174" y="2295509"/>
-                  </a:lnTo>
-                  <a:lnTo>
-                    <a:pt x="4951541" y="2282673"/>
-                  </a:lnTo>
-                  <a:lnTo>
-                    <a:pt x="4874909" y="2269485"/>
-                  </a:lnTo>
-                  <a:lnTo>
-                    <a:pt x="4798276" y="2255936"/>
-                  </a:lnTo>
-                  <a:lnTo>
-                    <a:pt x="4721644" y="2242014"/>
-                  </a:lnTo>
-                  <a:lnTo>
-                    <a:pt x="4645011" y="2227711"/>
-                  </a:lnTo>
-                  <a:lnTo>
-                    <a:pt x="4568378" y="2213015"/>
-                  </a:lnTo>
-                  <a:lnTo>
-                    <a:pt x="4491746" y="2197916"/>
-                  </a:lnTo>
-                  <a:lnTo>
-                    <a:pt x="4415113" y="2182403"/>
-                  </a:lnTo>
-                  <a:lnTo>
-                    <a:pt x="4338481" y="2166464"/>
-                  </a:lnTo>
-                  <a:lnTo>
-                    <a:pt x="4261848" y="2150088"/>
-                  </a:lnTo>
-                  <a:lnTo>
-                    <a:pt x="4185216" y="2133262"/>
-                  </a:lnTo>
-                  <a:lnTo>
-                    <a:pt x="4108583" y="2115975"/>
-                  </a:lnTo>
-                  <a:lnTo>
-                    <a:pt x="4031951" y="2098213"/>
-                  </a:lnTo>
-                  <a:lnTo>
-                    <a:pt x="3955318" y="2079964"/>
-                  </a:lnTo>
-                  <a:lnTo>
-                    <a:pt x="3878685" y="2061215"/>
-                  </a:lnTo>
-                  <a:lnTo>
-                    <a:pt x="3802053" y="2041951"/>
-                  </a:lnTo>
-                  <a:lnTo>
-                    <a:pt x="3725420" y="2022158"/>
-                  </a:lnTo>
-                  <a:lnTo>
-                    <a:pt x="3648788" y="2001822"/>
-                  </a:lnTo>
-                  <a:lnTo>
-                    <a:pt x="3572155" y="1980929"/>
-                  </a:lnTo>
-                  <a:lnTo>
-                    <a:pt x="3495523" y="1959462"/>
-                  </a:lnTo>
-                  <a:lnTo>
-                    <a:pt x="3418890" y="1937406"/>
-                  </a:lnTo>
-                  <a:lnTo>
-                    <a:pt x="3342258" y="1928608"/>
-                  </a:lnTo>
-                  <a:lnTo>
-                    <a:pt x="3265625" y="1922329"/>
-                  </a:lnTo>
-                  <a:lnTo>
-                    <a:pt x="3188993" y="1916003"/>
-                  </a:lnTo>
-                  <a:lnTo>
-                    <a:pt x="3112360" y="1909630"/>
-                  </a:lnTo>
-                  <a:lnTo>
-                    <a:pt x="3035727" y="1903208"/>
-                  </a:lnTo>
-                  <a:lnTo>
-                    <a:pt x="2959095" y="1896739"/>
-                  </a:lnTo>
-                  <a:lnTo>
-                    <a:pt x="2882462" y="1890220"/>
-                  </a:lnTo>
-                  <a:lnTo>
-                    <a:pt x="2805830" y="1883653"/>
-                  </a:lnTo>
-                  <a:lnTo>
-                    <a:pt x="2729197" y="1877036"/>
-                  </a:lnTo>
-                  <a:lnTo>
-                    <a:pt x="2652565" y="1870370"/>
-                  </a:lnTo>
-                  <a:lnTo>
-                    <a:pt x="2575932" y="1863653"/>
-                  </a:lnTo>
-                  <a:lnTo>
-                    <a:pt x="2499300" y="1856886"/>
-                  </a:lnTo>
-                  <a:lnTo>
-                    <a:pt x="2422667" y="1850068"/>
-                  </a:lnTo>
-                  <a:lnTo>
-                    <a:pt x="2346034" y="1843198"/>
-                  </a:lnTo>
-                  <a:lnTo>
-                    <a:pt x="2269402" y="1836277"/>
-                  </a:lnTo>
-                  <a:lnTo>
-                    <a:pt x="2192769" y="1829304"/>
-                  </a:lnTo>
-                  <a:lnTo>
-                    <a:pt x="2116137" y="1822278"/>
-                  </a:lnTo>
-                  <a:lnTo>
-                    <a:pt x="2039504" y="1815200"/>
-                  </a:lnTo>
-                  <a:lnTo>
-                    <a:pt x="1962872" y="1808068"/>
-                  </a:lnTo>
-                  <a:lnTo>
-                    <a:pt x="1886239" y="1800883"/>
-                  </a:lnTo>
-                  <a:lnTo>
-                    <a:pt x="1809607" y="1793644"/>
-                  </a:lnTo>
-                  <a:lnTo>
-                    <a:pt x="1732974" y="1786350"/>
-                  </a:lnTo>
-                  <a:lnTo>
-                    <a:pt x="1656342" y="1779001"/>
-                  </a:lnTo>
-                  <a:lnTo>
-                    <a:pt x="1579709" y="1771597"/>
-                  </a:lnTo>
-                  <a:lnTo>
-                    <a:pt x="1503076" y="1764138"/>
-                  </a:lnTo>
-                  <a:lnTo>
-                    <a:pt x="1426444" y="1756622"/>
-                  </a:lnTo>
-                  <a:lnTo>
-                    <a:pt x="1349811" y="1749050"/>
-                  </a:lnTo>
-                  <a:lnTo>
-                    <a:pt x="1273179" y="1741420"/>
-                  </a:lnTo>
-                  <a:lnTo>
-                    <a:pt x="1196546" y="1733734"/>
-                  </a:lnTo>
-                  <a:lnTo>
-                    <a:pt x="1119914" y="1725989"/>
-                  </a:lnTo>
-                  <a:lnTo>
-                    <a:pt x="1043281" y="1718186"/>
-                  </a:lnTo>
-                  <a:lnTo>
-                    <a:pt x="966649" y="1710325"/>
-                  </a:lnTo>
-                  <a:lnTo>
-                    <a:pt x="890016" y="1702405"/>
-                  </a:lnTo>
-                  <a:lnTo>
-                    <a:pt x="813384" y="1694424"/>
-                  </a:lnTo>
-                  <a:lnTo>
-                    <a:pt x="736751" y="1686384"/>
-                  </a:lnTo>
-                  <a:lnTo>
-                    <a:pt x="660118" y="1678284"/>
-                  </a:lnTo>
-                  <a:lnTo>
-                    <a:pt x="583486" y="1670122"/>
-                  </a:lnTo>
-                  <a:lnTo>
-                    <a:pt x="506853" y="1661899"/>
-                  </a:lnTo>
-                  <a:lnTo>
-                    <a:pt x="430221" y="1653614"/>
-                  </a:lnTo>
-                  <a:lnTo>
-                    <a:pt x="353588" y="1645267"/>
-                  </a:lnTo>
-                  <a:lnTo>
-                    <a:pt x="276956" y="1636857"/>
-                  </a:lnTo>
-                  <a:lnTo>
-                    <a:pt x="200323" y="1628384"/>
-                  </a:lnTo>
-                  <a:lnTo>
-                    <a:pt x="123691" y="1619847"/>
-                  </a:lnTo>
-                  <a:lnTo>
-                    <a:pt x="47058" y="1611246"/>
-                  </a:lnTo>
-                  <a:lnTo>
-                    <a:pt x="0" y="1605925"/>
+                    <a:pt x="71622" y="78710"/>
+                  </a:lnTo>
+                  <a:lnTo>
+                    <a:pt x="143245" y="155318"/>
+                  </a:lnTo>
+                  <a:lnTo>
+                    <a:pt x="214867" y="229881"/>
+                  </a:lnTo>
+                  <a:lnTo>
+                    <a:pt x="286490" y="302452"/>
+                  </a:lnTo>
+                  <a:lnTo>
+                    <a:pt x="358112" y="373086"/>
+                  </a:lnTo>
+                  <a:lnTo>
+                    <a:pt x="429735" y="441833"/>
+                  </a:lnTo>
+                  <a:lnTo>
+                    <a:pt x="501357" y="508744"/>
+                  </a:lnTo>
+                  <a:lnTo>
+                    <a:pt x="572980" y="573869"/>
+                  </a:lnTo>
+                  <a:lnTo>
+                    <a:pt x="644602" y="637254"/>
+                  </a:lnTo>
+                  <a:lnTo>
+                    <a:pt x="716225" y="698947"/>
+                  </a:lnTo>
+                  <a:lnTo>
+                    <a:pt x="787847" y="758992"/>
+                  </a:lnTo>
+                  <a:lnTo>
+                    <a:pt x="859470" y="817433"/>
+                  </a:lnTo>
+                  <a:lnTo>
+                    <a:pt x="931092" y="874314"/>
+                  </a:lnTo>
+                  <a:lnTo>
+                    <a:pt x="1002715" y="929676"/>
+                  </a:lnTo>
+                  <a:lnTo>
+                    <a:pt x="1074337" y="983559"/>
+                  </a:lnTo>
+                  <a:lnTo>
+                    <a:pt x="1145960" y="1036004"/>
+                  </a:lnTo>
+                  <a:lnTo>
+                    <a:pt x="1217582" y="1087048"/>
+                  </a:lnTo>
+                  <a:lnTo>
+                    <a:pt x="1289205" y="1136729"/>
+                  </a:lnTo>
+                  <a:lnTo>
+                    <a:pt x="1360827" y="1185083"/>
+                  </a:lnTo>
+                  <a:lnTo>
+                    <a:pt x="1432450" y="1232146"/>
+                  </a:lnTo>
+                  <a:lnTo>
+                    <a:pt x="1504073" y="1277952"/>
+                  </a:lnTo>
+                  <a:lnTo>
+                    <a:pt x="1575695" y="1322535"/>
+                  </a:lnTo>
+                  <a:lnTo>
+                    <a:pt x="1647318" y="1365927"/>
+                  </a:lnTo>
+                  <a:lnTo>
+                    <a:pt x="1718940" y="1408160"/>
+                  </a:lnTo>
+                  <a:lnTo>
+                    <a:pt x="1790563" y="1449266"/>
+                  </a:lnTo>
+                  <a:lnTo>
+                    <a:pt x="1862185" y="1489274"/>
+                  </a:lnTo>
+                  <a:lnTo>
+                    <a:pt x="1933808" y="1528213"/>
+                  </a:lnTo>
+                  <a:lnTo>
+                    <a:pt x="2005430" y="1566113"/>
+                  </a:lnTo>
+                  <a:lnTo>
+                    <a:pt x="2077053" y="1603000"/>
+                  </a:lnTo>
+                  <a:lnTo>
+                    <a:pt x="2148675" y="1638903"/>
+                  </a:lnTo>
+                  <a:lnTo>
+                    <a:pt x="2220298" y="1673846"/>
+                  </a:lnTo>
+                  <a:lnTo>
+                    <a:pt x="2291920" y="1707857"/>
+                  </a:lnTo>
+                  <a:lnTo>
+                    <a:pt x="2363543" y="1740959"/>
+                  </a:lnTo>
+                  <a:lnTo>
+                    <a:pt x="2435165" y="1773177"/>
+                  </a:lnTo>
+                  <a:lnTo>
+                    <a:pt x="2506788" y="1804535"/>
+                  </a:lnTo>
+                  <a:lnTo>
+                    <a:pt x="2578410" y="1835056"/>
+                  </a:lnTo>
+                  <a:lnTo>
+                    <a:pt x="2650033" y="1864761"/>
+                  </a:lnTo>
+                  <a:lnTo>
+                    <a:pt x="2721655" y="1893673"/>
+                  </a:lnTo>
+                  <a:lnTo>
+                    <a:pt x="2793278" y="1921813"/>
+                  </a:lnTo>
+                  <a:lnTo>
+                    <a:pt x="2864901" y="1949202"/>
+                  </a:lnTo>
+                  <a:lnTo>
+                    <a:pt x="2936523" y="1975859"/>
+                  </a:lnTo>
+                  <a:lnTo>
+                    <a:pt x="3008146" y="2001804"/>
+                  </a:lnTo>
+                  <a:lnTo>
+                    <a:pt x="3079768" y="2027056"/>
+                  </a:lnTo>
+                  <a:lnTo>
+                    <a:pt x="3151391" y="2051634"/>
+                  </a:lnTo>
+                  <a:lnTo>
+                    <a:pt x="3223013" y="2075556"/>
+                  </a:lnTo>
+                  <a:lnTo>
+                    <a:pt x="3294636" y="2098839"/>
+                  </a:lnTo>
+                  <a:lnTo>
+                    <a:pt x="3366258" y="2118934"/>
+                  </a:lnTo>
+                  <a:lnTo>
+                    <a:pt x="3437881" y="2125119"/>
+                  </a:lnTo>
+                  <a:lnTo>
+                    <a:pt x="3509503" y="2131258"/>
+                  </a:lnTo>
+                  <a:lnTo>
+                    <a:pt x="3581126" y="2137351"/>
+                  </a:lnTo>
+                  <a:lnTo>
+                    <a:pt x="3652748" y="2143399"/>
+                  </a:lnTo>
+                  <a:lnTo>
+                    <a:pt x="3724371" y="2149401"/>
+                  </a:lnTo>
+                  <a:lnTo>
+                    <a:pt x="3795993" y="2155359"/>
+                  </a:lnTo>
+                  <a:lnTo>
+                    <a:pt x="3867616" y="2161272"/>
+                  </a:lnTo>
+                  <a:lnTo>
+                    <a:pt x="3939238" y="2167142"/>
+                  </a:lnTo>
+                  <a:lnTo>
+                    <a:pt x="4010861" y="2172967"/>
+                  </a:lnTo>
+                  <a:lnTo>
+                    <a:pt x="4082483" y="2178749"/>
+                  </a:lnTo>
+                  <a:lnTo>
+                    <a:pt x="4154106" y="2184487"/>
+                  </a:lnTo>
+                  <a:lnTo>
+                    <a:pt x="4225729" y="2190183"/>
+                  </a:lnTo>
+                  <a:lnTo>
+                    <a:pt x="4297351" y="2195836"/>
+                  </a:lnTo>
+                  <a:lnTo>
+                    <a:pt x="4368974" y="2201448"/>
+                  </a:lnTo>
+                  <a:lnTo>
+                    <a:pt x="4440596" y="2207017"/>
+                  </a:lnTo>
+                  <a:lnTo>
+                    <a:pt x="4512219" y="2212544"/>
+                  </a:lnTo>
+                  <a:lnTo>
+                    <a:pt x="4583841" y="2218031"/>
+                  </a:lnTo>
+                  <a:lnTo>
+                    <a:pt x="4655464" y="2223476"/>
+                  </a:lnTo>
+                  <a:lnTo>
+                    <a:pt x="4727086" y="2228881"/>
+                  </a:lnTo>
+                  <a:lnTo>
+                    <a:pt x="4798709" y="2234245"/>
+                  </a:lnTo>
+                  <a:lnTo>
+                    <a:pt x="4870331" y="2239570"/>
+                  </a:lnTo>
+                  <a:lnTo>
+                    <a:pt x="4941954" y="2244854"/>
+                  </a:lnTo>
+                  <a:lnTo>
+                    <a:pt x="5013576" y="2250099"/>
+                  </a:lnTo>
+                  <a:lnTo>
+                    <a:pt x="5085199" y="2255305"/>
+                  </a:lnTo>
+                  <a:lnTo>
+                    <a:pt x="5156821" y="2260472"/>
+                  </a:lnTo>
+                  <a:lnTo>
+                    <a:pt x="5228444" y="2265601"/>
+                  </a:lnTo>
+                  <a:lnTo>
+                    <a:pt x="5300066" y="2270691"/>
+                  </a:lnTo>
+                  <a:lnTo>
+                    <a:pt x="5371689" y="2275743"/>
+                  </a:lnTo>
+                  <a:lnTo>
+                    <a:pt x="5443311" y="2280758"/>
+                  </a:lnTo>
+                  <a:lnTo>
+                    <a:pt x="5514934" y="2285735"/>
+                  </a:lnTo>
+                  <a:lnTo>
+                    <a:pt x="5586557" y="2290675"/>
+                  </a:lnTo>
+                  <a:lnTo>
+                    <a:pt x="5658179" y="2295578"/>
+                  </a:lnTo>
+                  <a:lnTo>
+                    <a:pt x="5729802" y="2300444"/>
+                  </a:lnTo>
+                  <a:lnTo>
+                    <a:pt x="5801424" y="2305275"/>
+                  </a:lnTo>
+                  <a:lnTo>
+                    <a:pt x="5873047" y="2310069"/>
+                  </a:lnTo>
+                  <a:lnTo>
+                    <a:pt x="5944669" y="2314827"/>
+                  </a:lnTo>
+                  <a:lnTo>
+                    <a:pt x="6016292" y="2319550"/>
+                  </a:lnTo>
+                  <a:lnTo>
+                    <a:pt x="6087914" y="2324237"/>
+                  </a:lnTo>
+                  <a:lnTo>
+                    <a:pt x="6159537" y="2328890"/>
+                  </a:lnTo>
+                  <a:lnTo>
+                    <a:pt x="6231159" y="2333507"/>
+                  </a:lnTo>
+                  <a:lnTo>
+                    <a:pt x="6302782" y="2338091"/>
+                  </a:lnTo>
+                  <a:lnTo>
+                    <a:pt x="6374404" y="2342640"/>
+                  </a:lnTo>
+                  <a:lnTo>
+                    <a:pt x="6446027" y="2347155"/>
+                  </a:lnTo>
+                  <a:lnTo>
+                    <a:pt x="6517649" y="2351636"/>
+                  </a:lnTo>
+                  <a:lnTo>
+                    <a:pt x="6589272" y="2356084"/>
+                  </a:lnTo>
+                  <a:lnTo>
+                    <a:pt x="6660894" y="2360499"/>
+                  </a:lnTo>
+                  <a:lnTo>
+                    <a:pt x="6732517" y="2364881"/>
+                  </a:lnTo>
+                  <a:lnTo>
+                    <a:pt x="6804139" y="2369230"/>
+                  </a:lnTo>
+                  <a:lnTo>
+                    <a:pt x="6875762" y="2373546"/>
+                  </a:lnTo>
+                  <a:lnTo>
+                    <a:pt x="6947385" y="2377830"/>
+                  </a:lnTo>
+                  <a:lnTo>
+                    <a:pt x="7019007" y="2382083"/>
+                  </a:lnTo>
+                  <a:lnTo>
+                    <a:pt x="7090630" y="2386303"/>
+                  </a:lnTo>
+                  <a:lnTo>
+                    <a:pt x="7090630" y="2745274"/>
+                  </a:lnTo>
+                  <a:lnTo>
+                    <a:pt x="7019007" y="2739727"/>
+                  </a:lnTo>
+                  <a:lnTo>
+                    <a:pt x="6947385" y="2734029"/>
+                  </a:lnTo>
+                  <a:lnTo>
+                    <a:pt x="6875762" y="2728174"/>
+                  </a:lnTo>
+                  <a:lnTo>
+                    <a:pt x="6804139" y="2722159"/>
+                  </a:lnTo>
+                  <a:lnTo>
+                    <a:pt x="6732517" y="2715978"/>
+                  </a:lnTo>
+                  <a:lnTo>
+                    <a:pt x="6660894" y="2709628"/>
+                  </a:lnTo>
+                  <a:lnTo>
+                    <a:pt x="6589272" y="2703104"/>
+                  </a:lnTo>
+                  <a:lnTo>
+                    <a:pt x="6517649" y="2696401"/>
+                  </a:lnTo>
+                  <a:lnTo>
+                    <a:pt x="6446027" y="2689514"/>
+                  </a:lnTo>
+                  <a:lnTo>
+                    <a:pt x="6374404" y="2682438"/>
+                  </a:lnTo>
+                  <a:lnTo>
+                    <a:pt x="6302782" y="2675167"/>
+                  </a:lnTo>
+                  <a:lnTo>
+                    <a:pt x="6231159" y="2667698"/>
+                  </a:lnTo>
+                  <a:lnTo>
+                    <a:pt x="6159537" y="2660023"/>
+                  </a:lnTo>
+                  <a:lnTo>
+                    <a:pt x="6087914" y="2652138"/>
+                  </a:lnTo>
+                  <a:lnTo>
+                    <a:pt x="6016292" y="2644036"/>
+                  </a:lnTo>
+                  <a:lnTo>
+                    <a:pt x="5944669" y="2635712"/>
+                  </a:lnTo>
+                  <a:lnTo>
+                    <a:pt x="5873047" y="2627160"/>
+                  </a:lnTo>
+                  <a:lnTo>
+                    <a:pt x="5801424" y="2618373"/>
+                  </a:lnTo>
+                  <a:lnTo>
+                    <a:pt x="5729802" y="2609345"/>
+                  </a:lnTo>
+                  <a:lnTo>
+                    <a:pt x="5658179" y="2600069"/>
+                  </a:lnTo>
+                  <a:lnTo>
+                    <a:pt x="5586557" y="2590539"/>
+                  </a:lnTo>
+                  <a:lnTo>
+                    <a:pt x="5514934" y="2580747"/>
+                  </a:lnTo>
+                  <a:lnTo>
+                    <a:pt x="5443311" y="2570687"/>
+                  </a:lnTo>
+                  <a:lnTo>
+                    <a:pt x="5371689" y="2560350"/>
+                  </a:lnTo>
+                  <a:lnTo>
+                    <a:pt x="5300066" y="2549730"/>
+                  </a:lnTo>
+                  <a:lnTo>
+                    <a:pt x="5228444" y="2538819"/>
+                  </a:lnTo>
+                  <a:lnTo>
+                    <a:pt x="5156821" y="2527608"/>
+                  </a:lnTo>
+                  <a:lnTo>
+                    <a:pt x="5085199" y="2516089"/>
+                  </a:lnTo>
+                  <a:lnTo>
+                    <a:pt x="5013576" y="2504255"/>
+                  </a:lnTo>
+                  <a:lnTo>
+                    <a:pt x="4941954" y="2492096"/>
+                  </a:lnTo>
+                  <a:lnTo>
+                    <a:pt x="4870331" y="2479603"/>
+                  </a:lnTo>
+                  <a:lnTo>
+                    <a:pt x="4798709" y="2466767"/>
+                  </a:lnTo>
+                  <a:lnTo>
+                    <a:pt x="4727086" y="2453579"/>
+                  </a:lnTo>
+                  <a:lnTo>
+                    <a:pt x="4655464" y="2440030"/>
+                  </a:lnTo>
+                  <a:lnTo>
+                    <a:pt x="4583841" y="2426108"/>
+                  </a:lnTo>
+                  <a:lnTo>
+                    <a:pt x="4512219" y="2411805"/>
+                  </a:lnTo>
+                  <a:lnTo>
+                    <a:pt x="4440596" y="2397109"/>
+                  </a:lnTo>
+                  <a:lnTo>
+                    <a:pt x="4368974" y="2382010"/>
+                  </a:lnTo>
+                  <a:lnTo>
+                    <a:pt x="4297351" y="2366497"/>
+                  </a:lnTo>
+                  <a:lnTo>
+                    <a:pt x="4225729" y="2350558"/>
+                  </a:lnTo>
+                  <a:lnTo>
+                    <a:pt x="4154106" y="2334182"/>
+                  </a:lnTo>
+                  <a:lnTo>
+                    <a:pt x="4082483" y="2317356"/>
+                  </a:lnTo>
+                  <a:lnTo>
+                    <a:pt x="4010861" y="2300069"/>
+                  </a:lnTo>
+                  <a:lnTo>
+                    <a:pt x="3939238" y="2282307"/>
+                  </a:lnTo>
+                  <a:lnTo>
+                    <a:pt x="3867616" y="2264058"/>
+                  </a:lnTo>
+                  <a:lnTo>
+                    <a:pt x="3795993" y="2245309"/>
+                  </a:lnTo>
+                  <a:lnTo>
+                    <a:pt x="3724371" y="2226045"/>
+                  </a:lnTo>
+                  <a:lnTo>
+                    <a:pt x="3652748" y="2206252"/>
+                  </a:lnTo>
+                  <a:lnTo>
+                    <a:pt x="3581126" y="2185916"/>
+                  </a:lnTo>
+                  <a:lnTo>
+                    <a:pt x="3509503" y="2165023"/>
+                  </a:lnTo>
+                  <a:lnTo>
+                    <a:pt x="3437881" y="2143556"/>
+                  </a:lnTo>
+                  <a:lnTo>
+                    <a:pt x="3366258" y="2121500"/>
+                  </a:lnTo>
+                  <a:lnTo>
+                    <a:pt x="3294636" y="2112702"/>
+                  </a:lnTo>
+                  <a:lnTo>
+                    <a:pt x="3223013" y="2106423"/>
+                  </a:lnTo>
+                  <a:lnTo>
+                    <a:pt x="3151391" y="2100097"/>
+                  </a:lnTo>
+                  <a:lnTo>
+                    <a:pt x="3079768" y="2093724"/>
+                  </a:lnTo>
+                  <a:lnTo>
+                    <a:pt x="3008146" y="2087302"/>
+                  </a:lnTo>
+                  <a:lnTo>
+                    <a:pt x="2936523" y="2080833"/>
+                  </a:lnTo>
+                  <a:lnTo>
+                    <a:pt x="2864901" y="2074314"/>
+                  </a:lnTo>
+                  <a:lnTo>
+                    <a:pt x="2793278" y="2067747"/>
+                  </a:lnTo>
+                  <a:lnTo>
+                    <a:pt x="2721655" y="2061130"/>
+                  </a:lnTo>
+                  <a:lnTo>
+                    <a:pt x="2650033" y="2054464"/>
+                  </a:lnTo>
+                  <a:lnTo>
+                    <a:pt x="2578410" y="2047747"/>
+                  </a:lnTo>
+                  <a:lnTo>
+                    <a:pt x="2506788" y="2040980"/>
+                  </a:lnTo>
+                  <a:lnTo>
+                    <a:pt x="2435165" y="2034162"/>
+                  </a:lnTo>
+                  <a:lnTo>
+                    <a:pt x="2363543" y="2027292"/>
+                  </a:lnTo>
+                  <a:lnTo>
+                    <a:pt x="2291920" y="2020371"/>
+                  </a:lnTo>
+                  <a:lnTo>
+                    <a:pt x="2220298" y="2013398"/>
+                  </a:lnTo>
+                  <a:lnTo>
+                    <a:pt x="2148675" y="2006373"/>
+                  </a:lnTo>
+                  <a:lnTo>
+                    <a:pt x="2077053" y="1999294"/>
+                  </a:lnTo>
+                  <a:lnTo>
+                    <a:pt x="2005430" y="1992162"/>
+                  </a:lnTo>
+                  <a:lnTo>
+                    <a:pt x="1933808" y="1984977"/>
+                  </a:lnTo>
+                  <a:lnTo>
+                    <a:pt x="1862185" y="1977738"/>
+                  </a:lnTo>
+                  <a:lnTo>
+                    <a:pt x="1790563" y="1970444"/>
+                  </a:lnTo>
+                  <a:lnTo>
+                    <a:pt x="1718940" y="1963095"/>
+                  </a:lnTo>
+                  <a:lnTo>
+                    <a:pt x="1647318" y="1955691"/>
+                  </a:lnTo>
+                  <a:lnTo>
+                    <a:pt x="1575695" y="1948232"/>
+                  </a:lnTo>
+                  <a:lnTo>
+                    <a:pt x="1504073" y="1940716"/>
+                  </a:lnTo>
+                  <a:lnTo>
+                    <a:pt x="1432450" y="1933144"/>
+                  </a:lnTo>
+                  <a:lnTo>
+                    <a:pt x="1360827" y="1925514"/>
+                  </a:lnTo>
+                  <a:lnTo>
+                    <a:pt x="1289205" y="1917828"/>
+                  </a:lnTo>
+                  <a:lnTo>
+                    <a:pt x="1217582" y="1910083"/>
+                  </a:lnTo>
+                  <a:lnTo>
+                    <a:pt x="1145960" y="1902281"/>
+                  </a:lnTo>
+                  <a:lnTo>
+                    <a:pt x="1074337" y="1894419"/>
+                  </a:lnTo>
+                  <a:lnTo>
+                    <a:pt x="1002715" y="1886499"/>
+                  </a:lnTo>
+                  <a:lnTo>
+                    <a:pt x="931092" y="1878518"/>
+                  </a:lnTo>
+                  <a:lnTo>
+                    <a:pt x="859470" y="1870478"/>
+                  </a:lnTo>
+                  <a:lnTo>
+                    <a:pt x="787847" y="1862378"/>
+                  </a:lnTo>
+                  <a:lnTo>
+                    <a:pt x="716225" y="1854216"/>
+                  </a:lnTo>
+                  <a:lnTo>
+                    <a:pt x="644602" y="1845993"/>
+                  </a:lnTo>
+                  <a:lnTo>
+                    <a:pt x="572980" y="1837708"/>
+                  </a:lnTo>
+                  <a:lnTo>
+                    <a:pt x="501357" y="1829361"/>
+                  </a:lnTo>
+                  <a:lnTo>
+                    <a:pt x="429735" y="1820951"/>
+                  </a:lnTo>
+                  <a:lnTo>
+                    <a:pt x="358112" y="1812478"/>
+                  </a:lnTo>
+                  <a:lnTo>
+                    <a:pt x="286490" y="1803941"/>
+                  </a:lnTo>
+                  <a:lnTo>
+                    <a:pt x="214867" y="1795340"/>
+                  </a:lnTo>
+                  <a:lnTo>
+                    <a:pt x="143245" y="1786674"/>
+                  </a:lnTo>
+                  <a:lnTo>
+                    <a:pt x="71622" y="1777944"/>
+                  </a:lnTo>
+                  <a:lnTo>
+                    <a:pt x="0" y="1769147"/>
                   </a:lnTo>
                   <a:close/>
                 </a:path>
@@ -3615,312 +3584,643 @@
         </p:sp>
         <p:sp>
           <p:nvSpPr>
+            <p:cNvPr id="21" name="pl21"/>
+            <p:cNvSpPr/>
+            <p:nvPr/>
+          </p:nvSpPr>
+          <p:spPr>
+            <a:xfrm>
+              <a:off x="1172049" y="2609837"/>
+              <a:ext cx="7090630" cy="2386303"/>
+            </a:xfrm>
+            <a:custGeom>
+              <a:avLst/>
+              <a:pathLst>
+                <a:path w="7090630" h="2386303">
+                  <a:moveTo>
+                    <a:pt x="0" y="0"/>
+                  </a:moveTo>
+                  <a:lnTo>
+                    <a:pt x="71622" y="78710"/>
+                  </a:lnTo>
+                  <a:lnTo>
+                    <a:pt x="143245" y="155318"/>
+                  </a:lnTo>
+                  <a:lnTo>
+                    <a:pt x="214867" y="229881"/>
+                  </a:lnTo>
+                  <a:lnTo>
+                    <a:pt x="286490" y="302452"/>
+                  </a:lnTo>
+                  <a:lnTo>
+                    <a:pt x="358112" y="373086"/>
+                  </a:lnTo>
+                  <a:lnTo>
+                    <a:pt x="429735" y="441833"/>
+                  </a:lnTo>
+                  <a:lnTo>
+                    <a:pt x="501357" y="508744"/>
+                  </a:lnTo>
+                  <a:lnTo>
+                    <a:pt x="572980" y="573869"/>
+                  </a:lnTo>
+                  <a:lnTo>
+                    <a:pt x="644602" y="637254"/>
+                  </a:lnTo>
+                  <a:lnTo>
+                    <a:pt x="716225" y="698947"/>
+                  </a:lnTo>
+                  <a:lnTo>
+                    <a:pt x="787847" y="758992"/>
+                  </a:lnTo>
+                  <a:lnTo>
+                    <a:pt x="859470" y="817433"/>
+                  </a:lnTo>
+                  <a:lnTo>
+                    <a:pt x="931092" y="874314"/>
+                  </a:lnTo>
+                  <a:lnTo>
+                    <a:pt x="1002715" y="929676"/>
+                  </a:lnTo>
+                  <a:lnTo>
+                    <a:pt x="1074337" y="983559"/>
+                  </a:lnTo>
+                  <a:lnTo>
+                    <a:pt x="1145960" y="1036004"/>
+                  </a:lnTo>
+                  <a:lnTo>
+                    <a:pt x="1217582" y="1087048"/>
+                  </a:lnTo>
+                  <a:lnTo>
+                    <a:pt x="1289205" y="1136729"/>
+                  </a:lnTo>
+                  <a:lnTo>
+                    <a:pt x="1360827" y="1185083"/>
+                  </a:lnTo>
+                  <a:lnTo>
+                    <a:pt x="1432450" y="1232146"/>
+                  </a:lnTo>
+                  <a:lnTo>
+                    <a:pt x="1504073" y="1277952"/>
+                  </a:lnTo>
+                  <a:lnTo>
+                    <a:pt x="1575695" y="1322535"/>
+                  </a:lnTo>
+                  <a:lnTo>
+                    <a:pt x="1647318" y="1365927"/>
+                  </a:lnTo>
+                  <a:lnTo>
+                    <a:pt x="1718940" y="1408160"/>
+                  </a:lnTo>
+                  <a:lnTo>
+                    <a:pt x="1790563" y="1449266"/>
+                  </a:lnTo>
+                  <a:lnTo>
+                    <a:pt x="1862185" y="1489274"/>
+                  </a:lnTo>
+                  <a:lnTo>
+                    <a:pt x="1933808" y="1528213"/>
+                  </a:lnTo>
+                  <a:lnTo>
+                    <a:pt x="2005430" y="1566113"/>
+                  </a:lnTo>
+                  <a:lnTo>
+                    <a:pt x="2077053" y="1603000"/>
+                  </a:lnTo>
+                  <a:lnTo>
+                    <a:pt x="2148675" y="1638903"/>
+                  </a:lnTo>
+                  <a:lnTo>
+                    <a:pt x="2220298" y="1673846"/>
+                  </a:lnTo>
+                  <a:lnTo>
+                    <a:pt x="2291920" y="1707857"/>
+                  </a:lnTo>
+                  <a:lnTo>
+                    <a:pt x="2363543" y="1740959"/>
+                  </a:lnTo>
+                  <a:lnTo>
+                    <a:pt x="2435165" y="1773177"/>
+                  </a:lnTo>
+                  <a:lnTo>
+                    <a:pt x="2506788" y="1804535"/>
+                  </a:lnTo>
+                  <a:lnTo>
+                    <a:pt x="2578410" y="1835056"/>
+                  </a:lnTo>
+                  <a:lnTo>
+                    <a:pt x="2650033" y="1864761"/>
+                  </a:lnTo>
+                  <a:lnTo>
+                    <a:pt x="2721655" y="1893673"/>
+                  </a:lnTo>
+                  <a:lnTo>
+                    <a:pt x="2793278" y="1921813"/>
+                  </a:lnTo>
+                  <a:lnTo>
+                    <a:pt x="2864901" y="1949202"/>
+                  </a:lnTo>
+                  <a:lnTo>
+                    <a:pt x="2936523" y="1975859"/>
+                  </a:lnTo>
+                  <a:lnTo>
+                    <a:pt x="3008146" y="2001804"/>
+                  </a:lnTo>
+                  <a:lnTo>
+                    <a:pt x="3079768" y="2027056"/>
+                  </a:lnTo>
+                  <a:lnTo>
+                    <a:pt x="3151391" y="2051634"/>
+                  </a:lnTo>
+                  <a:lnTo>
+                    <a:pt x="3223013" y="2075556"/>
+                  </a:lnTo>
+                  <a:lnTo>
+                    <a:pt x="3294636" y="2098839"/>
+                  </a:lnTo>
+                  <a:lnTo>
+                    <a:pt x="3366258" y="2118934"/>
+                  </a:lnTo>
+                  <a:lnTo>
+                    <a:pt x="3437881" y="2125119"/>
+                  </a:lnTo>
+                  <a:lnTo>
+                    <a:pt x="3509503" y="2131258"/>
+                  </a:lnTo>
+                  <a:lnTo>
+                    <a:pt x="3581126" y="2137351"/>
+                  </a:lnTo>
+                  <a:lnTo>
+                    <a:pt x="3652748" y="2143399"/>
+                  </a:lnTo>
+                  <a:lnTo>
+                    <a:pt x="3724371" y="2149401"/>
+                  </a:lnTo>
+                  <a:lnTo>
+                    <a:pt x="3795993" y="2155359"/>
+                  </a:lnTo>
+                  <a:lnTo>
+                    <a:pt x="3867616" y="2161272"/>
+                  </a:lnTo>
+                  <a:lnTo>
+                    <a:pt x="3939238" y="2167142"/>
+                  </a:lnTo>
+                  <a:lnTo>
+                    <a:pt x="4010861" y="2172967"/>
+                  </a:lnTo>
+                  <a:lnTo>
+                    <a:pt x="4082483" y="2178749"/>
+                  </a:lnTo>
+                  <a:lnTo>
+                    <a:pt x="4154106" y="2184487"/>
+                  </a:lnTo>
+                  <a:lnTo>
+                    <a:pt x="4225729" y="2190183"/>
+                  </a:lnTo>
+                  <a:lnTo>
+                    <a:pt x="4297351" y="2195836"/>
+                  </a:lnTo>
+                  <a:lnTo>
+                    <a:pt x="4368974" y="2201448"/>
+                  </a:lnTo>
+                  <a:lnTo>
+                    <a:pt x="4440596" y="2207017"/>
+                  </a:lnTo>
+                  <a:lnTo>
+                    <a:pt x="4512219" y="2212544"/>
+                  </a:lnTo>
+                  <a:lnTo>
+                    <a:pt x="4583841" y="2218031"/>
+                  </a:lnTo>
+                  <a:lnTo>
+                    <a:pt x="4655464" y="2223476"/>
+                  </a:lnTo>
+                  <a:lnTo>
+                    <a:pt x="4727086" y="2228881"/>
+                  </a:lnTo>
+                  <a:lnTo>
+                    <a:pt x="4798709" y="2234245"/>
+                  </a:lnTo>
+                  <a:lnTo>
+                    <a:pt x="4870331" y="2239570"/>
+                  </a:lnTo>
+                  <a:lnTo>
+                    <a:pt x="4941954" y="2244854"/>
+                  </a:lnTo>
+                  <a:lnTo>
+                    <a:pt x="5013576" y="2250099"/>
+                  </a:lnTo>
+                  <a:lnTo>
+                    <a:pt x="5085199" y="2255305"/>
+                  </a:lnTo>
+                  <a:lnTo>
+                    <a:pt x="5156821" y="2260472"/>
+                  </a:lnTo>
+                  <a:lnTo>
+                    <a:pt x="5228444" y="2265601"/>
+                  </a:lnTo>
+                  <a:lnTo>
+                    <a:pt x="5300066" y="2270691"/>
+                  </a:lnTo>
+                  <a:lnTo>
+                    <a:pt x="5371689" y="2275743"/>
+                  </a:lnTo>
+                  <a:lnTo>
+                    <a:pt x="5443311" y="2280758"/>
+                  </a:lnTo>
+                  <a:lnTo>
+                    <a:pt x="5514934" y="2285735"/>
+                  </a:lnTo>
+                  <a:lnTo>
+                    <a:pt x="5586557" y="2290675"/>
+                  </a:lnTo>
+                  <a:lnTo>
+                    <a:pt x="5658179" y="2295578"/>
+                  </a:lnTo>
+                  <a:lnTo>
+                    <a:pt x="5729802" y="2300444"/>
+                  </a:lnTo>
+                  <a:lnTo>
+                    <a:pt x="5801424" y="2305275"/>
+                  </a:lnTo>
+                  <a:lnTo>
+                    <a:pt x="5873047" y="2310069"/>
+                  </a:lnTo>
+                  <a:lnTo>
+                    <a:pt x="5944669" y="2314827"/>
+                  </a:lnTo>
+                  <a:lnTo>
+                    <a:pt x="6016292" y="2319550"/>
+                  </a:lnTo>
+                  <a:lnTo>
+                    <a:pt x="6087914" y="2324237"/>
+                  </a:lnTo>
+                  <a:lnTo>
+                    <a:pt x="6159537" y="2328890"/>
+                  </a:lnTo>
+                  <a:lnTo>
+                    <a:pt x="6231159" y="2333507"/>
+                  </a:lnTo>
+                  <a:lnTo>
+                    <a:pt x="6302782" y="2338091"/>
+                  </a:lnTo>
+                  <a:lnTo>
+                    <a:pt x="6374404" y="2342640"/>
+                  </a:lnTo>
+                  <a:lnTo>
+                    <a:pt x="6446027" y="2347155"/>
+                  </a:lnTo>
+                  <a:lnTo>
+                    <a:pt x="6517649" y="2351636"/>
+                  </a:lnTo>
+                  <a:lnTo>
+                    <a:pt x="6589272" y="2356084"/>
+                  </a:lnTo>
+                  <a:lnTo>
+                    <a:pt x="6660894" y="2360499"/>
+                  </a:lnTo>
+                  <a:lnTo>
+                    <a:pt x="6732517" y="2364881"/>
+                  </a:lnTo>
+                  <a:lnTo>
+                    <a:pt x="6804139" y="2369230"/>
+                  </a:lnTo>
+                  <a:lnTo>
+                    <a:pt x="6875762" y="2373546"/>
+                  </a:lnTo>
+                  <a:lnTo>
+                    <a:pt x="6947385" y="2377830"/>
+                  </a:lnTo>
+                  <a:lnTo>
+                    <a:pt x="7019007" y="2382083"/>
+                  </a:lnTo>
+                  <a:lnTo>
+                    <a:pt x="7090630" y="2386303"/>
+                  </a:lnTo>
+                </a:path>
+              </a:pathLst>
+            </a:custGeom>
+          </p:spPr>
+          <p:txBody>
+            <a:bodyPr/>
+            <a:lstStyle/>
+            <a:p/>
+          </p:txBody>
+        </p:sp>
+        <p:sp>
+          <p:nvSpPr>
             <p:cNvPr id="22" name="pl22"/>
             <p:cNvSpPr/>
             <p:nvPr/>
           </p:nvSpPr>
           <p:spPr>
             <a:xfrm>
-              <a:off x="817517" y="2793931"/>
-              <a:ext cx="7403783" cy="2202209"/>
+              <a:off x="1172049" y="4378984"/>
+              <a:ext cx="7090630" cy="976126"/>
             </a:xfrm>
             <a:custGeom>
               <a:avLst/>
               <a:pathLst>
-                <a:path w="7403783" h="2202209">
+                <a:path w="7090630" h="976126">
                   <a:moveTo>
+                    <a:pt x="7090630" y="976126"/>
+                  </a:moveTo>
+                  <a:lnTo>
+                    <a:pt x="7019007" y="970580"/>
+                  </a:lnTo>
+                  <a:lnTo>
+                    <a:pt x="6947385" y="964882"/>
+                  </a:lnTo>
+                  <a:lnTo>
+                    <a:pt x="6875762" y="959027"/>
+                  </a:lnTo>
+                  <a:lnTo>
+                    <a:pt x="6804139" y="953012"/>
+                  </a:lnTo>
+                  <a:lnTo>
+                    <a:pt x="6732517" y="946831"/>
+                  </a:lnTo>
+                  <a:lnTo>
+                    <a:pt x="6660894" y="940481"/>
+                  </a:lnTo>
+                  <a:lnTo>
+                    <a:pt x="6589272" y="933957"/>
+                  </a:lnTo>
+                  <a:lnTo>
+                    <a:pt x="6517649" y="927254"/>
+                  </a:lnTo>
+                  <a:lnTo>
+                    <a:pt x="6446027" y="920367"/>
+                  </a:lnTo>
+                  <a:lnTo>
+                    <a:pt x="6374404" y="913290"/>
+                  </a:lnTo>
+                  <a:lnTo>
+                    <a:pt x="6302782" y="906020"/>
+                  </a:lnTo>
+                  <a:lnTo>
+                    <a:pt x="6231159" y="898550"/>
+                  </a:lnTo>
+                  <a:lnTo>
+                    <a:pt x="6159537" y="890876"/>
+                  </a:lnTo>
+                  <a:lnTo>
+                    <a:pt x="6087914" y="882990"/>
+                  </a:lnTo>
+                  <a:lnTo>
+                    <a:pt x="6016292" y="874889"/>
+                  </a:lnTo>
+                  <a:lnTo>
+                    <a:pt x="5944669" y="866565"/>
+                  </a:lnTo>
+                  <a:lnTo>
+                    <a:pt x="5873047" y="858012"/>
+                  </a:lnTo>
+                  <a:lnTo>
+                    <a:pt x="5801424" y="849226"/>
+                  </a:lnTo>
+                  <a:lnTo>
+                    <a:pt x="5729802" y="840197"/>
+                  </a:lnTo>
+                  <a:lnTo>
+                    <a:pt x="5658179" y="830922"/>
+                  </a:lnTo>
+                  <a:lnTo>
+                    <a:pt x="5586557" y="821391"/>
+                  </a:lnTo>
+                  <a:lnTo>
+                    <a:pt x="5514934" y="811600"/>
+                  </a:lnTo>
+                  <a:lnTo>
+                    <a:pt x="5443311" y="801539"/>
+                  </a:lnTo>
+                  <a:lnTo>
+                    <a:pt x="5371689" y="791203"/>
+                  </a:lnTo>
+                  <a:lnTo>
+                    <a:pt x="5300066" y="780583"/>
+                  </a:lnTo>
+                  <a:lnTo>
+                    <a:pt x="5228444" y="769671"/>
+                  </a:lnTo>
+                  <a:lnTo>
+                    <a:pt x="5156821" y="758460"/>
+                  </a:lnTo>
+                  <a:lnTo>
+                    <a:pt x="5085199" y="746942"/>
+                  </a:lnTo>
+                  <a:lnTo>
+                    <a:pt x="5013576" y="735107"/>
+                  </a:lnTo>
+                  <a:lnTo>
+                    <a:pt x="4941954" y="722948"/>
+                  </a:lnTo>
+                  <a:lnTo>
+                    <a:pt x="4870331" y="710455"/>
+                  </a:lnTo>
+                  <a:lnTo>
+                    <a:pt x="4798709" y="697620"/>
+                  </a:lnTo>
+                  <a:lnTo>
+                    <a:pt x="4727086" y="684432"/>
+                  </a:lnTo>
+                  <a:lnTo>
+                    <a:pt x="4655464" y="670882"/>
+                  </a:lnTo>
+                  <a:lnTo>
+                    <a:pt x="4583841" y="656961"/>
+                  </a:lnTo>
+                  <a:lnTo>
+                    <a:pt x="4512219" y="642658"/>
+                  </a:lnTo>
+                  <a:lnTo>
+                    <a:pt x="4440596" y="627962"/>
+                  </a:lnTo>
+                  <a:lnTo>
+                    <a:pt x="4368974" y="612863"/>
+                  </a:lnTo>
+                  <a:lnTo>
+                    <a:pt x="4297351" y="597350"/>
+                  </a:lnTo>
+                  <a:lnTo>
+                    <a:pt x="4225729" y="581411"/>
+                  </a:lnTo>
+                  <a:lnTo>
+                    <a:pt x="4154106" y="565034"/>
+                  </a:lnTo>
+                  <a:lnTo>
+                    <a:pt x="4082483" y="548209"/>
+                  </a:lnTo>
+                  <a:lnTo>
+                    <a:pt x="4010861" y="530922"/>
+                  </a:lnTo>
+                  <a:lnTo>
+                    <a:pt x="3939238" y="513160"/>
+                  </a:lnTo>
+                  <a:lnTo>
+                    <a:pt x="3867616" y="494911"/>
+                  </a:lnTo>
+                  <a:lnTo>
+                    <a:pt x="3795993" y="476161"/>
+                  </a:lnTo>
+                  <a:lnTo>
+                    <a:pt x="3724371" y="456897"/>
+                  </a:lnTo>
+                  <a:lnTo>
+                    <a:pt x="3652748" y="437105"/>
+                  </a:lnTo>
+                  <a:lnTo>
+                    <a:pt x="3581126" y="416769"/>
+                  </a:lnTo>
+                  <a:lnTo>
+                    <a:pt x="3509503" y="395875"/>
+                  </a:lnTo>
+                  <a:lnTo>
+                    <a:pt x="3437881" y="374409"/>
+                  </a:lnTo>
+                  <a:lnTo>
+                    <a:pt x="3366258" y="352353"/>
+                  </a:lnTo>
+                  <a:lnTo>
+                    <a:pt x="3294636" y="343554"/>
+                  </a:lnTo>
+                  <a:lnTo>
+                    <a:pt x="3223013" y="337276"/>
+                  </a:lnTo>
+                  <a:lnTo>
+                    <a:pt x="3151391" y="330950"/>
+                  </a:lnTo>
+                  <a:lnTo>
+                    <a:pt x="3079768" y="324576"/>
+                  </a:lnTo>
+                  <a:lnTo>
+                    <a:pt x="3008146" y="318155"/>
+                  </a:lnTo>
+                  <a:lnTo>
+                    <a:pt x="2936523" y="311685"/>
+                  </a:lnTo>
+                  <a:lnTo>
+                    <a:pt x="2864901" y="305167"/>
+                  </a:lnTo>
+                  <a:lnTo>
+                    <a:pt x="2793278" y="298600"/>
+                  </a:lnTo>
+                  <a:lnTo>
+                    <a:pt x="2721655" y="291983"/>
+                  </a:lnTo>
+                  <a:lnTo>
+                    <a:pt x="2650033" y="285316"/>
+                  </a:lnTo>
+                  <a:lnTo>
+                    <a:pt x="2578410" y="278600"/>
+                  </a:lnTo>
+                  <a:lnTo>
+                    <a:pt x="2506788" y="271832"/>
+                  </a:lnTo>
+                  <a:lnTo>
+                    <a:pt x="2435165" y="265014"/>
+                  </a:lnTo>
+                  <a:lnTo>
+                    <a:pt x="2363543" y="258145"/>
+                  </a:lnTo>
+                  <a:lnTo>
+                    <a:pt x="2291920" y="251224"/>
+                  </a:lnTo>
+                  <a:lnTo>
+                    <a:pt x="2220298" y="244251"/>
+                  </a:lnTo>
+                  <a:lnTo>
+                    <a:pt x="2148675" y="237225"/>
+                  </a:lnTo>
+                  <a:lnTo>
+                    <a:pt x="2077053" y="230147"/>
+                  </a:lnTo>
+                  <a:lnTo>
+                    <a:pt x="2005430" y="223015"/>
+                  </a:lnTo>
+                  <a:lnTo>
+                    <a:pt x="1933808" y="215830"/>
+                  </a:lnTo>
+                  <a:lnTo>
+                    <a:pt x="1862185" y="208590"/>
+                  </a:lnTo>
+                  <a:lnTo>
+                    <a:pt x="1790563" y="201297"/>
+                  </a:lnTo>
+                  <a:lnTo>
+                    <a:pt x="1718940" y="193948"/>
+                  </a:lnTo>
+                  <a:lnTo>
+                    <a:pt x="1647318" y="186544"/>
+                  </a:lnTo>
+                  <a:lnTo>
+                    <a:pt x="1575695" y="179084"/>
+                  </a:lnTo>
+                  <a:lnTo>
+                    <a:pt x="1504073" y="171569"/>
+                  </a:lnTo>
+                  <a:lnTo>
+                    <a:pt x="1432450" y="163996"/>
+                  </a:lnTo>
+                  <a:lnTo>
+                    <a:pt x="1360827" y="156367"/>
+                  </a:lnTo>
+                  <a:lnTo>
+                    <a:pt x="1289205" y="148680"/>
+                  </a:lnTo>
+                  <a:lnTo>
+                    <a:pt x="1217582" y="140936"/>
+                  </a:lnTo>
+                  <a:lnTo>
+                    <a:pt x="1145960" y="133133"/>
+                  </a:lnTo>
+                  <a:lnTo>
+                    <a:pt x="1074337" y="125272"/>
+                  </a:lnTo>
+                  <a:lnTo>
+                    <a:pt x="1002715" y="117351"/>
+                  </a:lnTo>
+                  <a:lnTo>
+                    <a:pt x="931092" y="109371"/>
+                  </a:lnTo>
+                  <a:lnTo>
+                    <a:pt x="859470" y="101331"/>
+                  </a:lnTo>
+                  <a:lnTo>
+                    <a:pt x="787847" y="93230"/>
+                  </a:lnTo>
+                  <a:lnTo>
+                    <a:pt x="716225" y="85069"/>
+                  </a:lnTo>
+                  <a:lnTo>
+                    <a:pt x="644602" y="76846"/>
+                  </a:lnTo>
+                  <a:lnTo>
+                    <a:pt x="572980" y="68561"/>
+                  </a:lnTo>
+                  <a:lnTo>
+                    <a:pt x="501357" y="60214"/>
+                  </a:lnTo>
+                  <a:lnTo>
+                    <a:pt x="429735" y="51804"/>
+                  </a:lnTo>
+                  <a:lnTo>
+                    <a:pt x="358112" y="43331"/>
+                  </a:lnTo>
+                  <a:lnTo>
+                    <a:pt x="286490" y="34794"/>
+                  </a:lnTo>
+                  <a:lnTo>
+                    <a:pt x="214867" y="26193"/>
+                  </a:lnTo>
+                  <a:lnTo>
+                    <a:pt x="143245" y="17527"/>
+                  </a:lnTo>
+                  <a:lnTo>
+                    <a:pt x="71622" y="8796"/>
+                  </a:lnTo>
+                  <a:lnTo>
                     <a:pt x="0" y="0"/>
-                  </a:moveTo>
-                  <a:lnTo>
-                    <a:pt x="47058" y="45787"/>
-                  </a:lnTo>
-                  <a:lnTo>
-                    <a:pt x="123691" y="118358"/>
-                  </a:lnTo>
-                  <a:lnTo>
-                    <a:pt x="200323" y="188992"/>
-                  </a:lnTo>
-                  <a:lnTo>
-                    <a:pt x="276956" y="257739"/>
-                  </a:lnTo>
-                  <a:lnTo>
-                    <a:pt x="353588" y="324650"/>
-                  </a:lnTo>
-                  <a:lnTo>
-                    <a:pt x="430221" y="389775"/>
-                  </a:lnTo>
-                  <a:lnTo>
-                    <a:pt x="506853" y="453160"/>
-                  </a:lnTo>
-                  <a:lnTo>
-                    <a:pt x="583486" y="514852"/>
-                  </a:lnTo>
-                  <a:lnTo>
-                    <a:pt x="660118" y="574898"/>
-                  </a:lnTo>
-                  <a:lnTo>
-                    <a:pt x="736751" y="633339"/>
-                  </a:lnTo>
-                  <a:lnTo>
-                    <a:pt x="813384" y="690220"/>
-                  </a:lnTo>
-                  <a:lnTo>
-                    <a:pt x="890016" y="745582"/>
-                  </a:lnTo>
-                  <a:lnTo>
-                    <a:pt x="966649" y="799465"/>
-                  </a:lnTo>
-                  <a:lnTo>
-                    <a:pt x="1043281" y="851910"/>
-                  </a:lnTo>
-                  <a:lnTo>
-                    <a:pt x="1119914" y="902954"/>
-                  </a:lnTo>
-                  <a:lnTo>
-                    <a:pt x="1196546" y="952635"/>
-                  </a:lnTo>
-                  <a:lnTo>
-                    <a:pt x="1273179" y="1000989"/>
-                  </a:lnTo>
-                  <a:lnTo>
-                    <a:pt x="1349811" y="1048052"/>
-                  </a:lnTo>
-                  <a:lnTo>
-                    <a:pt x="1426444" y="1093858"/>
-                  </a:lnTo>
-                  <a:lnTo>
-                    <a:pt x="1503076" y="1138441"/>
-                  </a:lnTo>
-                  <a:lnTo>
-                    <a:pt x="1579709" y="1181833"/>
-                  </a:lnTo>
-                  <a:lnTo>
-                    <a:pt x="1656342" y="1224066"/>
-                  </a:lnTo>
-                  <a:lnTo>
-                    <a:pt x="1732974" y="1265172"/>
-                  </a:lnTo>
-                  <a:lnTo>
-                    <a:pt x="1809607" y="1305180"/>
-                  </a:lnTo>
-                  <a:lnTo>
-                    <a:pt x="1886239" y="1344119"/>
-                  </a:lnTo>
-                  <a:lnTo>
-                    <a:pt x="1962872" y="1382019"/>
-                  </a:lnTo>
-                  <a:lnTo>
-                    <a:pt x="2039504" y="1418906"/>
-                  </a:lnTo>
-                  <a:lnTo>
-                    <a:pt x="2116137" y="1454809"/>
-                  </a:lnTo>
-                  <a:lnTo>
-                    <a:pt x="2192769" y="1489752"/>
-                  </a:lnTo>
-                  <a:lnTo>
-                    <a:pt x="2269402" y="1523763"/>
-                  </a:lnTo>
-                  <a:lnTo>
-                    <a:pt x="2346034" y="1556865"/>
-                  </a:lnTo>
-                  <a:lnTo>
-                    <a:pt x="2422667" y="1589083"/>
-                  </a:lnTo>
-                  <a:lnTo>
-                    <a:pt x="2499300" y="1620441"/>
-                  </a:lnTo>
-                  <a:lnTo>
-                    <a:pt x="2575932" y="1650961"/>
-                  </a:lnTo>
-                  <a:lnTo>
-                    <a:pt x="2652565" y="1680667"/>
-                  </a:lnTo>
-                  <a:lnTo>
-                    <a:pt x="2729197" y="1709579"/>
-                  </a:lnTo>
-                  <a:lnTo>
-                    <a:pt x="2805830" y="1737719"/>
-                  </a:lnTo>
-                  <a:lnTo>
-                    <a:pt x="2882462" y="1765108"/>
-                  </a:lnTo>
-                  <a:lnTo>
-                    <a:pt x="2959095" y="1791765"/>
-                  </a:lnTo>
-                  <a:lnTo>
-                    <a:pt x="3035727" y="1817710"/>
-                  </a:lnTo>
-                  <a:lnTo>
-                    <a:pt x="3112360" y="1842962"/>
-                  </a:lnTo>
-                  <a:lnTo>
-                    <a:pt x="3188993" y="1867540"/>
-                  </a:lnTo>
-                  <a:lnTo>
-                    <a:pt x="3265625" y="1891462"/>
-                  </a:lnTo>
-                  <a:lnTo>
-                    <a:pt x="3342258" y="1914745"/>
-                  </a:lnTo>
-                  <a:lnTo>
-                    <a:pt x="3418890" y="1934839"/>
-                  </a:lnTo>
-                  <a:lnTo>
-                    <a:pt x="3495523" y="1941025"/>
-                  </a:lnTo>
-                  <a:lnTo>
-                    <a:pt x="3572155" y="1947164"/>
-                  </a:lnTo>
-                  <a:lnTo>
-                    <a:pt x="3648788" y="1953257"/>
-                  </a:lnTo>
-                  <a:lnTo>
-                    <a:pt x="3725420" y="1959305"/>
-                  </a:lnTo>
-                  <a:lnTo>
-                    <a:pt x="3802053" y="1965307"/>
-                  </a:lnTo>
-                  <a:lnTo>
-                    <a:pt x="3878685" y="1971265"/>
-                  </a:lnTo>
-                  <a:lnTo>
-                    <a:pt x="3955318" y="1977178"/>
-                  </a:lnTo>
-                  <a:lnTo>
-                    <a:pt x="4031951" y="1983047"/>
-                  </a:lnTo>
-                  <a:lnTo>
-                    <a:pt x="4108583" y="1988873"/>
-                  </a:lnTo>
-                  <a:lnTo>
-                    <a:pt x="4185216" y="1994655"/>
-                  </a:lnTo>
-                  <a:lnTo>
-                    <a:pt x="4261848" y="2000393"/>
-                  </a:lnTo>
-                  <a:lnTo>
-                    <a:pt x="4338481" y="2006089"/>
-                  </a:lnTo>
-                  <a:lnTo>
-                    <a:pt x="4415113" y="2011742"/>
-                  </a:lnTo>
-                  <a:lnTo>
-                    <a:pt x="4491746" y="2017353"/>
-                  </a:lnTo>
-                  <a:lnTo>
-                    <a:pt x="4568378" y="2022923"/>
-                  </a:lnTo>
-                  <a:lnTo>
-                    <a:pt x="4645011" y="2028450"/>
-                  </a:lnTo>
-                  <a:lnTo>
-                    <a:pt x="4721644" y="2033937"/>
-                  </a:lnTo>
-                  <a:lnTo>
-                    <a:pt x="4798276" y="2039382"/>
-                  </a:lnTo>
-                  <a:lnTo>
-                    <a:pt x="4874909" y="2044787"/>
-                  </a:lnTo>
-                  <a:lnTo>
-                    <a:pt x="4951541" y="2050151"/>
-                  </a:lnTo>
-                  <a:lnTo>
-                    <a:pt x="5028174" y="2055476"/>
-                  </a:lnTo>
-                  <a:lnTo>
-                    <a:pt x="5104806" y="2060760"/>
-                  </a:lnTo>
-                  <a:lnTo>
-                    <a:pt x="5181439" y="2066005"/>
-                  </a:lnTo>
-                  <a:lnTo>
-                    <a:pt x="5258071" y="2071211"/>
-                  </a:lnTo>
-                  <a:lnTo>
-                    <a:pt x="5334704" y="2076378"/>
-                  </a:lnTo>
-                  <a:lnTo>
-                    <a:pt x="5411336" y="2081507"/>
-                  </a:lnTo>
-                  <a:lnTo>
-                    <a:pt x="5487969" y="2086597"/>
-                  </a:lnTo>
-                  <a:lnTo>
-                    <a:pt x="5564602" y="2091649"/>
-                  </a:lnTo>
-                  <a:lnTo>
-                    <a:pt x="5641234" y="2096664"/>
-                  </a:lnTo>
-                  <a:lnTo>
-                    <a:pt x="5717867" y="2101641"/>
-                  </a:lnTo>
-                  <a:lnTo>
-                    <a:pt x="5794499" y="2106581"/>
-                  </a:lnTo>
-                  <a:lnTo>
-                    <a:pt x="5871132" y="2111484"/>
-                  </a:lnTo>
-                  <a:lnTo>
-                    <a:pt x="5947764" y="2116350"/>
-                  </a:lnTo>
-                  <a:lnTo>
-                    <a:pt x="6024397" y="2121181"/>
-                  </a:lnTo>
-                  <a:lnTo>
-                    <a:pt x="6101029" y="2125975"/>
-                  </a:lnTo>
-                  <a:lnTo>
-                    <a:pt x="6177662" y="2130733"/>
-                  </a:lnTo>
-                  <a:lnTo>
-                    <a:pt x="6254294" y="2135456"/>
-                  </a:lnTo>
-                  <a:lnTo>
-                    <a:pt x="6330927" y="2140143"/>
-                  </a:lnTo>
-                  <a:lnTo>
-                    <a:pt x="6407560" y="2144796"/>
-                  </a:lnTo>
-                  <a:lnTo>
-                    <a:pt x="6484192" y="2149413"/>
-                  </a:lnTo>
-                  <a:lnTo>
-                    <a:pt x="6560825" y="2153997"/>
-                  </a:lnTo>
-                  <a:lnTo>
-                    <a:pt x="6637457" y="2158546"/>
-                  </a:lnTo>
-                  <a:lnTo>
-                    <a:pt x="6714090" y="2163061"/>
-                  </a:lnTo>
-                  <a:lnTo>
-                    <a:pt x="6790722" y="2167542"/>
-                  </a:lnTo>
-                  <a:lnTo>
-                    <a:pt x="6867355" y="2171990"/>
-                  </a:lnTo>
-                  <a:lnTo>
-                    <a:pt x="6943987" y="2176405"/>
-                  </a:lnTo>
-                  <a:lnTo>
-                    <a:pt x="7020620" y="2180786"/>
-                  </a:lnTo>
-                  <a:lnTo>
-                    <a:pt x="7097253" y="2185136"/>
-                  </a:lnTo>
-                  <a:lnTo>
-                    <a:pt x="7173885" y="2189452"/>
-                  </a:lnTo>
-                  <a:lnTo>
-                    <a:pt x="7250518" y="2193736"/>
-                  </a:lnTo>
-                  <a:lnTo>
-                    <a:pt x="7327150" y="2197989"/>
-                  </a:lnTo>
-                  <a:lnTo>
-                    <a:pt x="7403783" y="2202209"/>
                   </a:lnTo>
                 </a:path>
               </a:pathLst>
@@ -3940,625 +4240,312 @@
           </p:nvSpPr>
           <p:spPr>
             <a:xfrm>
-              <a:off x="817517" y="4399856"/>
-              <a:ext cx="7403783" cy="955254"/>
+              <a:off x="1172049" y="3693695"/>
+              <a:ext cx="7090630" cy="1526772"/>
             </a:xfrm>
             <a:custGeom>
               <a:avLst/>
               <a:pathLst>
-                <a:path w="7403783" h="955254">
-                  <a:moveTo>
-                    <a:pt x="7403783" y="955254"/>
-                  </a:moveTo>
-                  <a:lnTo>
-                    <a:pt x="7327150" y="949708"/>
-                  </a:lnTo>
-                  <a:lnTo>
-                    <a:pt x="7250518" y="944010"/>
-                  </a:lnTo>
-                  <a:lnTo>
-                    <a:pt x="7173885" y="938155"/>
-                  </a:lnTo>
-                  <a:lnTo>
-                    <a:pt x="7097253" y="932140"/>
-                  </a:lnTo>
-                  <a:lnTo>
-                    <a:pt x="7020620" y="925959"/>
-                  </a:lnTo>
-                  <a:lnTo>
-                    <a:pt x="6943987" y="919609"/>
-                  </a:lnTo>
-                  <a:lnTo>
-                    <a:pt x="6867355" y="913085"/>
-                  </a:lnTo>
-                  <a:lnTo>
-                    <a:pt x="6790722" y="906382"/>
-                  </a:lnTo>
-                  <a:lnTo>
-                    <a:pt x="6714090" y="899495"/>
-                  </a:lnTo>
-                  <a:lnTo>
-                    <a:pt x="6637457" y="892418"/>
-                  </a:lnTo>
-                  <a:lnTo>
-                    <a:pt x="6560825" y="885148"/>
-                  </a:lnTo>
-                  <a:lnTo>
-                    <a:pt x="6484192" y="877678"/>
-                  </a:lnTo>
-                  <a:lnTo>
-                    <a:pt x="6407560" y="870004"/>
-                  </a:lnTo>
-                  <a:lnTo>
-                    <a:pt x="6330927" y="862118"/>
-                  </a:lnTo>
-                  <a:lnTo>
-                    <a:pt x="6254294" y="854017"/>
-                  </a:lnTo>
-                  <a:lnTo>
-                    <a:pt x="6177662" y="845693"/>
-                  </a:lnTo>
-                  <a:lnTo>
-                    <a:pt x="6101029" y="837141"/>
-                  </a:lnTo>
-                  <a:lnTo>
-                    <a:pt x="6024397" y="828354"/>
-                  </a:lnTo>
-                  <a:lnTo>
-                    <a:pt x="5947764" y="819326"/>
-                  </a:lnTo>
-                  <a:lnTo>
-                    <a:pt x="5871132" y="810050"/>
-                  </a:lnTo>
-                  <a:lnTo>
-                    <a:pt x="5794499" y="800519"/>
-                  </a:lnTo>
-                  <a:lnTo>
-                    <a:pt x="5717867" y="790728"/>
-                  </a:lnTo>
-                  <a:lnTo>
-                    <a:pt x="5641234" y="780667"/>
-                  </a:lnTo>
-                  <a:lnTo>
-                    <a:pt x="5564602" y="770331"/>
-                  </a:lnTo>
-                  <a:lnTo>
-                    <a:pt x="5487969" y="759711"/>
-                  </a:lnTo>
-                  <a:lnTo>
-                    <a:pt x="5411336" y="748799"/>
-                  </a:lnTo>
-                  <a:lnTo>
-                    <a:pt x="5334704" y="737588"/>
-                  </a:lnTo>
-                  <a:lnTo>
-                    <a:pt x="5258071" y="726070"/>
-                  </a:lnTo>
-                  <a:lnTo>
-                    <a:pt x="5181439" y="714235"/>
-                  </a:lnTo>
-                  <a:lnTo>
-                    <a:pt x="5104806" y="702076"/>
-                  </a:lnTo>
-                  <a:lnTo>
-                    <a:pt x="5028174" y="689583"/>
-                  </a:lnTo>
-                  <a:lnTo>
-                    <a:pt x="4951541" y="676748"/>
-                  </a:lnTo>
-                  <a:lnTo>
-                    <a:pt x="4874909" y="663560"/>
-                  </a:lnTo>
-                  <a:lnTo>
-                    <a:pt x="4798276" y="650011"/>
-                  </a:lnTo>
-                  <a:lnTo>
-                    <a:pt x="4721644" y="636089"/>
-                  </a:lnTo>
-                  <a:lnTo>
-                    <a:pt x="4645011" y="621786"/>
-                  </a:lnTo>
-                  <a:lnTo>
-                    <a:pt x="4568378" y="607090"/>
-                  </a:lnTo>
-                  <a:lnTo>
-                    <a:pt x="4491746" y="591991"/>
-                  </a:lnTo>
-                  <a:lnTo>
-                    <a:pt x="4415113" y="576478"/>
-                  </a:lnTo>
-                  <a:lnTo>
-                    <a:pt x="4338481" y="560539"/>
-                  </a:lnTo>
-                  <a:lnTo>
-                    <a:pt x="4261848" y="544162"/>
-                  </a:lnTo>
-                  <a:lnTo>
-                    <a:pt x="4185216" y="527337"/>
-                  </a:lnTo>
-                  <a:lnTo>
-                    <a:pt x="4108583" y="510050"/>
-                  </a:lnTo>
-                  <a:lnTo>
-                    <a:pt x="4031951" y="492288"/>
-                  </a:lnTo>
-                  <a:lnTo>
-                    <a:pt x="3955318" y="474039"/>
-                  </a:lnTo>
-                  <a:lnTo>
-                    <a:pt x="3878685" y="455290"/>
-                  </a:lnTo>
-                  <a:lnTo>
-                    <a:pt x="3802053" y="436025"/>
-                  </a:lnTo>
-                  <a:lnTo>
-                    <a:pt x="3725420" y="416233"/>
-                  </a:lnTo>
-                  <a:lnTo>
-                    <a:pt x="3648788" y="395897"/>
-                  </a:lnTo>
-                  <a:lnTo>
-                    <a:pt x="3572155" y="375004"/>
-                  </a:lnTo>
-                  <a:lnTo>
-                    <a:pt x="3495523" y="353537"/>
-                  </a:lnTo>
-                  <a:lnTo>
-                    <a:pt x="3418890" y="331481"/>
-                  </a:lnTo>
-                  <a:lnTo>
-                    <a:pt x="3342258" y="322682"/>
-                  </a:lnTo>
-                  <a:lnTo>
-                    <a:pt x="3265625" y="316404"/>
-                  </a:lnTo>
-                  <a:lnTo>
-                    <a:pt x="3188993" y="310078"/>
-                  </a:lnTo>
-                  <a:lnTo>
-                    <a:pt x="3112360" y="303705"/>
-                  </a:lnTo>
-                  <a:lnTo>
-                    <a:pt x="3035727" y="297283"/>
-                  </a:lnTo>
-                  <a:lnTo>
-                    <a:pt x="2959095" y="290813"/>
-                  </a:lnTo>
-                  <a:lnTo>
-                    <a:pt x="2882462" y="284295"/>
-                  </a:lnTo>
-                  <a:lnTo>
-                    <a:pt x="2805830" y="277728"/>
-                  </a:lnTo>
-                  <a:lnTo>
-                    <a:pt x="2729197" y="271111"/>
-                  </a:lnTo>
-                  <a:lnTo>
-                    <a:pt x="2652565" y="264444"/>
-                  </a:lnTo>
-                  <a:lnTo>
-                    <a:pt x="2575932" y="257728"/>
-                  </a:lnTo>
-                  <a:lnTo>
-                    <a:pt x="2499300" y="250961"/>
-                  </a:lnTo>
-                  <a:lnTo>
-                    <a:pt x="2422667" y="244142"/>
-                  </a:lnTo>
-                  <a:lnTo>
-                    <a:pt x="2346034" y="237273"/>
-                  </a:lnTo>
-                  <a:lnTo>
-                    <a:pt x="2269402" y="230352"/>
-                  </a:lnTo>
-                  <a:lnTo>
-                    <a:pt x="2192769" y="223379"/>
-                  </a:lnTo>
-                  <a:lnTo>
-                    <a:pt x="2116137" y="216353"/>
-                  </a:lnTo>
-                  <a:lnTo>
-                    <a:pt x="2039504" y="209275"/>
-                  </a:lnTo>
-                  <a:lnTo>
-                    <a:pt x="1962872" y="202143"/>
-                  </a:lnTo>
-                  <a:lnTo>
-                    <a:pt x="1886239" y="194958"/>
-                  </a:lnTo>
-                  <a:lnTo>
-                    <a:pt x="1809607" y="187718"/>
-                  </a:lnTo>
-                  <a:lnTo>
-                    <a:pt x="1732974" y="180425"/>
-                  </a:lnTo>
-                  <a:lnTo>
-                    <a:pt x="1656342" y="173076"/>
-                  </a:lnTo>
-                  <a:lnTo>
-                    <a:pt x="1579709" y="165672"/>
-                  </a:lnTo>
-                  <a:lnTo>
-                    <a:pt x="1503076" y="158212"/>
-                  </a:lnTo>
-                  <a:lnTo>
-                    <a:pt x="1426444" y="150697"/>
-                  </a:lnTo>
-                  <a:lnTo>
-                    <a:pt x="1349811" y="143124"/>
-                  </a:lnTo>
-                  <a:lnTo>
-                    <a:pt x="1273179" y="135495"/>
-                  </a:lnTo>
-                  <a:lnTo>
-                    <a:pt x="1196546" y="127808"/>
-                  </a:lnTo>
-                  <a:lnTo>
-                    <a:pt x="1119914" y="120064"/>
-                  </a:lnTo>
-                  <a:lnTo>
-                    <a:pt x="1043281" y="112261"/>
-                  </a:lnTo>
-                  <a:lnTo>
-                    <a:pt x="966649" y="104400"/>
-                  </a:lnTo>
-                  <a:lnTo>
-                    <a:pt x="890016" y="96479"/>
-                  </a:lnTo>
-                  <a:lnTo>
-                    <a:pt x="813384" y="88499"/>
-                  </a:lnTo>
-                  <a:lnTo>
-                    <a:pt x="736751" y="80459"/>
-                  </a:lnTo>
-                  <a:lnTo>
-                    <a:pt x="660118" y="72358"/>
-                  </a:lnTo>
-                  <a:lnTo>
-                    <a:pt x="583486" y="64197"/>
-                  </a:lnTo>
-                  <a:lnTo>
-                    <a:pt x="506853" y="55974"/>
-                  </a:lnTo>
-                  <a:lnTo>
-                    <a:pt x="430221" y="47689"/>
-                  </a:lnTo>
-                  <a:lnTo>
-                    <a:pt x="353588" y="39342"/>
-                  </a:lnTo>
-                  <a:lnTo>
-                    <a:pt x="276956" y="30932"/>
-                  </a:lnTo>
-                  <a:lnTo>
-                    <a:pt x="200323" y="22459"/>
-                  </a:lnTo>
-                  <a:lnTo>
-                    <a:pt x="123691" y="13922"/>
-                  </a:lnTo>
-                  <a:lnTo>
-                    <a:pt x="47058" y="5321"/>
-                  </a:lnTo>
-                  <a:lnTo>
-                    <a:pt x="0" y="0"/>
-                  </a:lnTo>
-                </a:path>
-              </a:pathLst>
-            </a:custGeom>
-          </p:spPr>
-          <p:txBody>
-            <a:bodyPr/>
-            <a:lstStyle/>
-            <a:p/>
-          </p:txBody>
-        </p:sp>
-        <p:sp>
-          <p:nvSpPr>
-            <p:cNvPr id="24" name="pl24"/>
-            <p:cNvSpPr/>
-            <p:nvPr/>
-          </p:nvSpPr>
-          <p:spPr>
-            <a:xfrm>
-              <a:off x="817517" y="3768905"/>
-              <a:ext cx="7403783" cy="1451562"/>
-            </a:xfrm>
-            <a:custGeom>
-              <a:avLst/>
-              <a:pathLst>
-                <a:path w="7403783" h="1451562">
+                <a:path w="7090630" h="1526772">
                   <a:moveTo>
                     <a:pt x="0" y="0"/>
                   </a:moveTo>
                   <a:lnTo>
-                    <a:pt x="47058" y="18939"/>
-                  </a:lnTo>
-                  <a:lnTo>
-                    <a:pt x="123691" y="49253"/>
-                  </a:lnTo>
-                  <a:lnTo>
-                    <a:pt x="200323" y="79048"/>
-                  </a:lnTo>
-                  <a:lnTo>
-                    <a:pt x="276956" y="108333"/>
-                  </a:lnTo>
-                  <a:lnTo>
-                    <a:pt x="353588" y="137115"/>
-                  </a:lnTo>
-                  <a:lnTo>
-                    <a:pt x="430221" y="165405"/>
-                  </a:lnTo>
-                  <a:lnTo>
-                    <a:pt x="506853" y="193210"/>
-                  </a:lnTo>
-                  <a:lnTo>
-                    <a:pt x="583486" y="220538"/>
-                  </a:lnTo>
-                  <a:lnTo>
-                    <a:pt x="660118" y="247398"/>
-                  </a:lnTo>
-                  <a:lnTo>
-                    <a:pt x="736751" y="273799"/>
-                  </a:lnTo>
-                  <a:lnTo>
-                    <a:pt x="813384" y="299746"/>
-                  </a:lnTo>
-                  <a:lnTo>
-                    <a:pt x="890016" y="325250"/>
-                  </a:lnTo>
-                  <a:lnTo>
-                    <a:pt x="966649" y="350316"/>
-                  </a:lnTo>
-                  <a:lnTo>
-                    <a:pt x="1043281" y="374953"/>
-                  </a:lnTo>
-                  <a:lnTo>
-                    <a:pt x="1119914" y="399168"/>
-                  </a:lnTo>
-                  <a:lnTo>
-                    <a:pt x="1196546" y="422968"/>
-                  </a:lnTo>
-                  <a:lnTo>
-                    <a:pt x="1273179" y="446360"/>
-                  </a:lnTo>
-                  <a:lnTo>
-                    <a:pt x="1349811" y="469351"/>
-                  </a:lnTo>
-                  <a:lnTo>
-                    <a:pt x="1426444" y="491949"/>
-                  </a:lnTo>
-                  <a:lnTo>
-                    <a:pt x="1503076" y="514159"/>
-                  </a:lnTo>
-                  <a:lnTo>
-                    <a:pt x="1579709" y="535989"/>
-                  </a:lnTo>
-                  <a:lnTo>
-                    <a:pt x="1656342" y="557445"/>
-                  </a:lnTo>
-                  <a:lnTo>
-                    <a:pt x="1732974" y="578533"/>
-                  </a:lnTo>
-                  <a:lnTo>
-                    <a:pt x="1809607" y="599260"/>
-                  </a:lnTo>
-                  <a:lnTo>
-                    <a:pt x="1886239" y="619632"/>
-                  </a:lnTo>
-                  <a:lnTo>
-                    <a:pt x="1962872" y="639655"/>
-                  </a:lnTo>
-                  <a:lnTo>
-                    <a:pt x="2039504" y="659335"/>
-                  </a:lnTo>
-                  <a:lnTo>
-                    <a:pt x="2116137" y="678677"/>
-                  </a:lnTo>
-                  <a:lnTo>
-                    <a:pt x="2192769" y="697689"/>
-                  </a:lnTo>
-                  <a:lnTo>
-                    <a:pt x="2269402" y="716374"/>
-                  </a:lnTo>
-                  <a:lnTo>
-                    <a:pt x="2346034" y="734740"/>
-                  </a:lnTo>
-                  <a:lnTo>
-                    <a:pt x="2422667" y="752790"/>
-                  </a:lnTo>
-                  <a:lnTo>
-                    <a:pt x="2499300" y="770532"/>
-                  </a:lnTo>
-                  <a:lnTo>
-                    <a:pt x="2575932" y="787969"/>
-                  </a:lnTo>
-                  <a:lnTo>
-                    <a:pt x="2652565" y="805108"/>
-                  </a:lnTo>
-                  <a:lnTo>
-                    <a:pt x="2729197" y="821953"/>
-                  </a:lnTo>
-                  <a:lnTo>
-                    <a:pt x="2805830" y="838510"/>
-                  </a:lnTo>
-                  <a:lnTo>
-                    <a:pt x="2882462" y="854783"/>
-                  </a:lnTo>
-                  <a:lnTo>
-                    <a:pt x="2959095" y="870777"/>
-                  </a:lnTo>
-                  <a:lnTo>
-                    <a:pt x="3035727" y="886497"/>
-                  </a:lnTo>
-                  <a:lnTo>
-                    <a:pt x="3112360" y="901948"/>
-                  </a:lnTo>
-                  <a:lnTo>
-                    <a:pt x="3188993" y="917134"/>
-                  </a:lnTo>
-                  <a:lnTo>
-                    <a:pt x="3265625" y="932060"/>
-                  </a:lnTo>
-                  <a:lnTo>
-                    <a:pt x="3342258" y="946730"/>
-                  </a:lnTo>
-                  <a:lnTo>
-                    <a:pt x="3418890" y="961149"/>
-                  </a:lnTo>
-                  <a:lnTo>
-                    <a:pt x="3495523" y="975321"/>
-                  </a:lnTo>
-                  <a:lnTo>
-                    <a:pt x="3572155" y="989250"/>
-                  </a:lnTo>
-                  <a:lnTo>
-                    <a:pt x="3648788" y="1002940"/>
-                  </a:lnTo>
-                  <a:lnTo>
-                    <a:pt x="3725420" y="1016396"/>
-                  </a:lnTo>
-                  <a:lnTo>
-                    <a:pt x="3802053" y="1029622"/>
-                  </a:lnTo>
-                  <a:lnTo>
-                    <a:pt x="3878685" y="1042620"/>
-                  </a:lnTo>
-                  <a:lnTo>
-                    <a:pt x="3955318" y="1055396"/>
-                  </a:lnTo>
-                  <a:lnTo>
-                    <a:pt x="4031951" y="1067954"/>
-                  </a:lnTo>
-                  <a:lnTo>
-                    <a:pt x="4108583" y="1080296"/>
-                  </a:lnTo>
-                  <a:lnTo>
-                    <a:pt x="4185216" y="1092426"/>
-                  </a:lnTo>
-                  <a:lnTo>
-                    <a:pt x="4261848" y="1104349"/>
-                  </a:lnTo>
-                  <a:lnTo>
-                    <a:pt x="4338481" y="1116067"/>
-                  </a:lnTo>
-                  <a:lnTo>
-                    <a:pt x="4415113" y="1127585"/>
-                  </a:lnTo>
-                  <a:lnTo>
-                    <a:pt x="4491746" y="1138905"/>
-                  </a:lnTo>
-                  <a:lnTo>
-                    <a:pt x="4568378" y="1150032"/>
-                  </a:lnTo>
-                  <a:lnTo>
-                    <a:pt x="4645011" y="1160968"/>
-                  </a:lnTo>
-                  <a:lnTo>
-                    <a:pt x="4721644" y="1171716"/>
-                  </a:lnTo>
-                  <a:lnTo>
-                    <a:pt x="4798276" y="1182281"/>
-                  </a:lnTo>
-                  <a:lnTo>
-                    <a:pt x="4874909" y="1192664"/>
-                  </a:lnTo>
-                  <a:lnTo>
-                    <a:pt x="4951541" y="1202869"/>
-                  </a:lnTo>
-                  <a:lnTo>
-                    <a:pt x="5028174" y="1212900"/>
-                  </a:lnTo>
-                  <a:lnTo>
-                    <a:pt x="5104806" y="1222759"/>
-                  </a:lnTo>
-                  <a:lnTo>
-                    <a:pt x="5181439" y="1232448"/>
-                  </a:lnTo>
-                  <a:lnTo>
-                    <a:pt x="5258071" y="1241972"/>
-                  </a:lnTo>
-                  <a:lnTo>
-                    <a:pt x="5334704" y="1251333"/>
-                  </a:lnTo>
-                  <a:lnTo>
-                    <a:pt x="5411336" y="1260533"/>
-                  </a:lnTo>
-                  <a:lnTo>
-                    <a:pt x="5487969" y="1269576"/>
-                  </a:lnTo>
-                  <a:lnTo>
-                    <a:pt x="5564602" y="1278464"/>
-                  </a:lnTo>
-                  <a:lnTo>
-                    <a:pt x="5641234" y="1287199"/>
-                  </a:lnTo>
-                  <a:lnTo>
-                    <a:pt x="5717867" y="1295785"/>
-                  </a:lnTo>
-                  <a:lnTo>
-                    <a:pt x="5794499" y="1304224"/>
-                  </a:lnTo>
-                  <a:lnTo>
-                    <a:pt x="5871132" y="1312518"/>
-                  </a:lnTo>
-                  <a:lnTo>
-                    <a:pt x="5947764" y="1320670"/>
-                  </a:lnTo>
-                  <a:lnTo>
-                    <a:pt x="6024397" y="1328682"/>
-                  </a:lnTo>
-                  <a:lnTo>
-                    <a:pt x="6101029" y="1336557"/>
-                  </a:lnTo>
-                  <a:lnTo>
-                    <a:pt x="6177662" y="1344298"/>
-                  </a:lnTo>
-                  <a:lnTo>
-                    <a:pt x="6254294" y="1351905"/>
-                  </a:lnTo>
-                  <a:lnTo>
-                    <a:pt x="6330927" y="1359382"/>
-                  </a:lnTo>
-                  <a:lnTo>
-                    <a:pt x="6407560" y="1366732"/>
-                  </a:lnTo>
-                  <a:lnTo>
-                    <a:pt x="6484192" y="1373955"/>
-                  </a:lnTo>
-                  <a:lnTo>
-                    <a:pt x="6560825" y="1381054"/>
-                  </a:lnTo>
-                  <a:lnTo>
-                    <a:pt x="6637457" y="1388032"/>
-                  </a:lnTo>
-                  <a:lnTo>
-                    <a:pt x="6714090" y="1394890"/>
-                  </a:lnTo>
-                  <a:lnTo>
-                    <a:pt x="6790722" y="1401631"/>
-                  </a:lnTo>
-                  <a:lnTo>
-                    <a:pt x="6867355" y="1408257"/>
-                  </a:lnTo>
-                  <a:lnTo>
-                    <a:pt x="6943987" y="1414768"/>
-                  </a:lnTo>
-                  <a:lnTo>
-                    <a:pt x="7020620" y="1421169"/>
-                  </a:lnTo>
-                  <a:lnTo>
-                    <a:pt x="7097253" y="1427459"/>
-                  </a:lnTo>
-                  <a:lnTo>
-                    <a:pt x="7173885" y="1433642"/>
-                  </a:lnTo>
-                  <a:lnTo>
-                    <a:pt x="7250518" y="1439719"/>
-                  </a:lnTo>
-                  <a:lnTo>
-                    <a:pt x="7327150" y="1445692"/>
-                  </a:lnTo>
-                  <a:lnTo>
-                    <a:pt x="7403783" y="1451562"/>
+                    <a:pt x="71622" y="31927"/>
+                  </a:lnTo>
+                  <a:lnTo>
+                    <a:pt x="143245" y="63307"/>
+                  </a:lnTo>
+                  <a:lnTo>
+                    <a:pt x="214867" y="94149"/>
+                  </a:lnTo>
+                  <a:lnTo>
+                    <a:pt x="286490" y="124464"/>
+                  </a:lnTo>
+                  <a:lnTo>
+                    <a:pt x="358112" y="154258"/>
+                  </a:lnTo>
+                  <a:lnTo>
+                    <a:pt x="429735" y="183543"/>
+                  </a:lnTo>
+                  <a:lnTo>
+                    <a:pt x="501357" y="212325"/>
+                  </a:lnTo>
+                  <a:lnTo>
+                    <a:pt x="572980" y="240615"/>
+                  </a:lnTo>
+                  <a:lnTo>
+                    <a:pt x="644602" y="268420"/>
+                  </a:lnTo>
+                  <a:lnTo>
+                    <a:pt x="716225" y="295748"/>
+                  </a:lnTo>
+                  <a:lnTo>
+                    <a:pt x="787847" y="322609"/>
+                  </a:lnTo>
+                  <a:lnTo>
+                    <a:pt x="859470" y="349009"/>
+                  </a:lnTo>
+                  <a:lnTo>
+                    <a:pt x="931092" y="374957"/>
+                  </a:lnTo>
+                  <a:lnTo>
+                    <a:pt x="1002715" y="400460"/>
+                  </a:lnTo>
+                  <a:lnTo>
+                    <a:pt x="1074337" y="425526"/>
+                  </a:lnTo>
+                  <a:lnTo>
+                    <a:pt x="1145960" y="450163"/>
+                  </a:lnTo>
+                  <a:lnTo>
+                    <a:pt x="1217582" y="474378"/>
+                  </a:lnTo>
+                  <a:lnTo>
+                    <a:pt x="1289205" y="498178"/>
+                  </a:lnTo>
+                  <a:lnTo>
+                    <a:pt x="1360827" y="521570"/>
+                  </a:lnTo>
+                  <a:lnTo>
+                    <a:pt x="1432450" y="544561"/>
+                  </a:lnTo>
+                  <a:lnTo>
+                    <a:pt x="1504073" y="567159"/>
+                  </a:lnTo>
+                  <a:lnTo>
+                    <a:pt x="1575695" y="589369"/>
+                  </a:lnTo>
+                  <a:lnTo>
+                    <a:pt x="1647318" y="611199"/>
+                  </a:lnTo>
+                  <a:lnTo>
+                    <a:pt x="1718940" y="632655"/>
+                  </a:lnTo>
+                  <a:lnTo>
+                    <a:pt x="1790563" y="653743"/>
+                  </a:lnTo>
+                  <a:lnTo>
+                    <a:pt x="1862185" y="674470"/>
+                  </a:lnTo>
+                  <a:lnTo>
+                    <a:pt x="1933808" y="694842"/>
+                  </a:lnTo>
+                  <a:lnTo>
+                    <a:pt x="2005430" y="714865"/>
+                  </a:lnTo>
+                  <a:lnTo>
+                    <a:pt x="2077053" y="734545"/>
+                  </a:lnTo>
+                  <a:lnTo>
+                    <a:pt x="2148675" y="753887"/>
+                  </a:lnTo>
+                  <a:lnTo>
+                    <a:pt x="2220298" y="772899"/>
+                  </a:lnTo>
+                  <a:lnTo>
+                    <a:pt x="2291920" y="791584"/>
+                  </a:lnTo>
+                  <a:lnTo>
+                    <a:pt x="2363543" y="809950"/>
+                  </a:lnTo>
+                  <a:lnTo>
+                    <a:pt x="2435165" y="828000"/>
+                  </a:lnTo>
+                  <a:lnTo>
+                    <a:pt x="2506788" y="845742"/>
+                  </a:lnTo>
+                  <a:lnTo>
+                    <a:pt x="2578410" y="863180"/>
+                  </a:lnTo>
+                  <a:lnTo>
+                    <a:pt x="2650033" y="880318"/>
+                  </a:lnTo>
+                  <a:lnTo>
+                    <a:pt x="2721655" y="897164"/>
+                  </a:lnTo>
+                  <a:lnTo>
+                    <a:pt x="2793278" y="913720"/>
+                  </a:lnTo>
+                  <a:lnTo>
+                    <a:pt x="2864901" y="929993"/>
+                  </a:lnTo>
+                  <a:lnTo>
+                    <a:pt x="2936523" y="945987"/>
+                  </a:lnTo>
+                  <a:lnTo>
+                    <a:pt x="3008146" y="961707"/>
+                  </a:lnTo>
+                  <a:lnTo>
+                    <a:pt x="3079768" y="977158"/>
+                  </a:lnTo>
+                  <a:lnTo>
+                    <a:pt x="3151391" y="992344"/>
+                  </a:lnTo>
+                  <a:lnTo>
+                    <a:pt x="3223013" y="1007270"/>
+                  </a:lnTo>
+                  <a:lnTo>
+                    <a:pt x="3294636" y="1021940"/>
+                  </a:lnTo>
+                  <a:lnTo>
+                    <a:pt x="3366258" y="1036359"/>
+                  </a:lnTo>
+                  <a:lnTo>
+                    <a:pt x="3437881" y="1050531"/>
+                  </a:lnTo>
+                  <a:lnTo>
+                    <a:pt x="3509503" y="1064460"/>
+                  </a:lnTo>
+                  <a:lnTo>
+                    <a:pt x="3581126" y="1078151"/>
+                  </a:lnTo>
+                  <a:lnTo>
+                    <a:pt x="3652748" y="1091606"/>
+                  </a:lnTo>
+                  <a:lnTo>
+                    <a:pt x="3724371" y="1104832"/>
+                  </a:lnTo>
+                  <a:lnTo>
+                    <a:pt x="3795993" y="1117830"/>
+                  </a:lnTo>
+                  <a:lnTo>
+                    <a:pt x="3867616" y="1130607"/>
+                  </a:lnTo>
+                  <a:lnTo>
+                    <a:pt x="3939238" y="1143164"/>
+                  </a:lnTo>
+                  <a:lnTo>
+                    <a:pt x="4010861" y="1155506"/>
+                  </a:lnTo>
+                  <a:lnTo>
+                    <a:pt x="4082483" y="1167636"/>
+                  </a:lnTo>
+                  <a:lnTo>
+                    <a:pt x="4154106" y="1179559"/>
+                  </a:lnTo>
+                  <a:lnTo>
+                    <a:pt x="4225729" y="1191278"/>
+                  </a:lnTo>
+                  <a:lnTo>
+                    <a:pt x="4297351" y="1202795"/>
+                  </a:lnTo>
+                  <a:lnTo>
+                    <a:pt x="4368974" y="1214116"/>
+                  </a:lnTo>
+                  <a:lnTo>
+                    <a:pt x="4440596" y="1225242"/>
+                  </a:lnTo>
+                  <a:lnTo>
+                    <a:pt x="4512219" y="1236178"/>
+                  </a:lnTo>
+                  <a:lnTo>
+                    <a:pt x="4583841" y="1246926"/>
+                  </a:lnTo>
+                  <a:lnTo>
+                    <a:pt x="4655464" y="1257491"/>
+                  </a:lnTo>
+                  <a:lnTo>
+                    <a:pt x="4727086" y="1267874"/>
+                  </a:lnTo>
+                  <a:lnTo>
+                    <a:pt x="4798709" y="1278079"/>
+                  </a:lnTo>
+                  <a:lnTo>
+                    <a:pt x="4870331" y="1288110"/>
+                  </a:lnTo>
+                  <a:lnTo>
+                    <a:pt x="4941954" y="1297969"/>
+                  </a:lnTo>
+                  <a:lnTo>
+                    <a:pt x="5013576" y="1307659"/>
+                  </a:lnTo>
+                  <a:lnTo>
+                    <a:pt x="5085199" y="1317182"/>
+                  </a:lnTo>
+                  <a:lnTo>
+                    <a:pt x="5156821" y="1326543"/>
+                  </a:lnTo>
+                  <a:lnTo>
+                    <a:pt x="5228444" y="1335743"/>
+                  </a:lnTo>
+                  <a:lnTo>
+                    <a:pt x="5300066" y="1344786"/>
+                  </a:lnTo>
+                  <a:lnTo>
+                    <a:pt x="5371689" y="1353674"/>
+                  </a:lnTo>
+                  <a:lnTo>
+                    <a:pt x="5443311" y="1362409"/>
+                  </a:lnTo>
+                  <a:lnTo>
+                    <a:pt x="5514934" y="1370995"/>
+                  </a:lnTo>
+                  <a:lnTo>
+                    <a:pt x="5586557" y="1379434"/>
+                  </a:lnTo>
+                  <a:lnTo>
+                    <a:pt x="5658179" y="1387728"/>
+                  </a:lnTo>
+                  <a:lnTo>
+                    <a:pt x="5729802" y="1395880"/>
+                  </a:lnTo>
+                  <a:lnTo>
+                    <a:pt x="5801424" y="1403892"/>
+                  </a:lnTo>
+                  <a:lnTo>
+                    <a:pt x="5873047" y="1411767"/>
+                  </a:lnTo>
+                  <a:lnTo>
+                    <a:pt x="5944669" y="1419508"/>
+                  </a:lnTo>
+                  <a:lnTo>
+                    <a:pt x="6016292" y="1427115"/>
+                  </a:lnTo>
+                  <a:lnTo>
+                    <a:pt x="6087914" y="1434593"/>
+                  </a:lnTo>
+                  <a:lnTo>
+                    <a:pt x="6159537" y="1441942"/>
+                  </a:lnTo>
+                  <a:lnTo>
+                    <a:pt x="6231159" y="1449165"/>
+                  </a:lnTo>
+                  <a:lnTo>
+                    <a:pt x="6302782" y="1456264"/>
+                  </a:lnTo>
+                  <a:lnTo>
+                    <a:pt x="6374404" y="1463242"/>
+                  </a:lnTo>
+                  <a:lnTo>
+                    <a:pt x="6446027" y="1470101"/>
+                  </a:lnTo>
+                  <a:lnTo>
+                    <a:pt x="6517649" y="1476841"/>
+                  </a:lnTo>
+                  <a:lnTo>
+                    <a:pt x="6589272" y="1483467"/>
+                  </a:lnTo>
+                  <a:lnTo>
+                    <a:pt x="6660894" y="1489978"/>
+                  </a:lnTo>
+                  <a:lnTo>
+                    <a:pt x="6732517" y="1496379"/>
+                  </a:lnTo>
+                  <a:lnTo>
+                    <a:pt x="6804139" y="1502669"/>
+                  </a:lnTo>
+                  <a:lnTo>
+                    <a:pt x="6875762" y="1508852"/>
+                  </a:lnTo>
+                  <a:lnTo>
+                    <a:pt x="6947385" y="1514929"/>
+                  </a:lnTo>
+                  <a:lnTo>
+                    <a:pt x="7019007" y="1520902"/>
+                  </a:lnTo>
+                  <a:lnTo>
+                    <a:pt x="7090630" y="1526772"/>
                   </a:lnTo>
                 </a:path>
               </a:pathLst>
@@ -4581,7 +4568,7 @@
         </p:sp>
         <p:sp>
           <p:nvSpPr>
-            <p:cNvPr id="25" name="pl25"/>
+            <p:cNvPr id="24" name="pl24"/>
             <p:cNvSpPr/>
             <p:nvPr/>
           </p:nvSpPr>
@@ -4624,13 +4611,13 @@
         </p:sp>
         <p:sp>
           <p:nvSpPr>
-            <p:cNvPr id="26" name="pl26"/>
+            <p:cNvPr id="25" name="pl25"/>
             <p:cNvSpPr/>
             <p:nvPr/>
           </p:nvSpPr>
           <p:spPr>
             <a:xfrm>
-              <a:off x="4224261" y="2073503"/>
+              <a:off x="4526955" y="2073503"/>
               <a:ext cx="0" cy="3649639"/>
             </a:xfrm>
             <a:custGeom>
@@ -4667,7 +4654,7 @@
         </p:sp>
         <p:sp>
           <p:nvSpPr>
-            <p:cNvPr id="27" name="tx27"/>
+            <p:cNvPr id="26" name="tx26"/>
             <p:cNvSpPr/>
             <p:nvPr/>
           </p:nvSpPr>
@@ -4713,7 +4700,7 @@
         </p:sp>
         <p:sp>
           <p:nvSpPr>
-            <p:cNvPr id="28" name="tx28"/>
+            <p:cNvPr id="27" name="tx27"/>
             <p:cNvSpPr/>
             <p:nvPr/>
           </p:nvSpPr>
@@ -4759,7 +4746,7 @@
         </p:sp>
         <p:sp>
           <p:nvSpPr>
-            <p:cNvPr id="29" name="tx29"/>
+            <p:cNvPr id="28" name="tx28"/>
             <p:cNvSpPr/>
             <p:nvPr/>
           </p:nvSpPr>
@@ -4805,7 +4792,7 @@
         </p:sp>
         <p:sp>
           <p:nvSpPr>
-            <p:cNvPr id="30" name="tx30"/>
+            <p:cNvPr id="29" name="tx29"/>
             <p:cNvSpPr/>
             <p:nvPr/>
           </p:nvSpPr>
@@ -4851,7 +4838,7 @@
         </p:sp>
         <p:sp>
           <p:nvSpPr>
-            <p:cNvPr id="31" name="tx31"/>
+            <p:cNvPr id="30" name="tx30"/>
             <p:cNvSpPr/>
             <p:nvPr/>
           </p:nvSpPr>
@@ -4897,14 +4884,14 @@
         </p:sp>
         <p:sp>
           <p:nvSpPr>
-            <p:cNvPr id="32" name="tx32"/>
+            <p:cNvPr id="31" name="tx31"/>
             <p:cNvSpPr/>
             <p:nvPr/>
           </p:nvSpPr>
           <p:spPr>
             <a:xfrm>
-              <a:off x="2423864" y="5785772"/>
-              <a:ext cx="155356" cy="80101"/>
+              <a:off x="2421884" y="5785772"/>
+              <a:ext cx="161574" cy="80101"/>
             </a:xfrm>
             <a:prstGeom prst="rect">
               <a:avLst/>
@@ -4936,21 +4923,21 @@
                   <a:latin typeface="Helvetica"/>
                   <a:cs typeface="Helvetica"/>
                 </a:rPr>
-                <a:t>0.8</a:t>
+                <a:t>-25</a:t>
               </a:r>
             </a:p>
           </p:txBody>
         </p:sp>
         <p:sp>
           <p:nvSpPr>
-            <p:cNvPr id="33" name="tx33"/>
+            <p:cNvPr id="32" name="tx32"/>
             <p:cNvSpPr/>
             <p:nvPr/>
           </p:nvSpPr>
           <p:spPr>
             <a:xfrm>
-              <a:off x="4196521" y="5785772"/>
-              <a:ext cx="155356" cy="80101"/>
+              <a:off x="4542539" y="5785772"/>
+              <a:ext cx="62179" cy="80101"/>
             </a:xfrm>
             <a:prstGeom prst="rect">
               <a:avLst/>
@@ -4982,21 +4969,21 @@
                   <a:latin typeface="Helvetica"/>
                   <a:cs typeface="Helvetica"/>
                 </a:rPr>
-                <a:t>1.0</a:t>
+                <a:t>0</a:t>
               </a:r>
             </a:p>
           </p:txBody>
         </p:sp>
         <p:sp>
           <p:nvSpPr>
-            <p:cNvPr id="34" name="tx34"/>
+            <p:cNvPr id="33" name="tx33"/>
             <p:cNvSpPr/>
             <p:nvPr/>
           </p:nvSpPr>
           <p:spPr>
             <a:xfrm>
-              <a:off x="5969179" y="5785772"/>
-              <a:ext cx="155356" cy="80101"/>
+              <a:off x="6582407" y="5785772"/>
+              <a:ext cx="124358" cy="80101"/>
             </a:xfrm>
             <a:prstGeom prst="rect">
               <a:avLst/>
@@ -5028,67 +5015,21 @@
                   <a:latin typeface="Helvetica"/>
                   <a:cs typeface="Helvetica"/>
                 </a:rPr>
-                <a:t>1.2</a:t>
+                <a:t>25</a:t>
               </a:r>
             </a:p>
           </p:txBody>
         </p:sp>
         <p:sp>
           <p:nvSpPr>
-            <p:cNvPr id="35" name="tx35"/>
+            <p:cNvPr id="34" name="tx34"/>
             <p:cNvSpPr/>
             <p:nvPr/>
           </p:nvSpPr>
           <p:spPr>
             <a:xfrm>
-              <a:off x="7741836" y="5785772"/>
-              <a:ext cx="155356" cy="80101"/>
-            </a:xfrm>
-            <a:prstGeom prst="rect">
-              <a:avLst/>
-            </a:prstGeom>
-            <a:noFill/>
-          </p:spPr>
-          <p:txBody>
-            <a:bodyPr lIns="0" rIns="0" tIns="0" bIns="0" anchorCtr="1" anchor="ctr" wrap="none"/>
-            <a:lstStyle/>
-            <a:p>
-              <a:pPr algn="l" marL="0" marR="0" indent="0">
-                <a:lnSpc>
-                  <a:spcPts val="880"/>
-                </a:lnSpc>
-                <a:spcBef>
-                  <a:spcPts val="0"/>
-                </a:spcBef>
-                <a:spcAft>
-                  <a:spcPts val="0"/>
-                </a:spcAft>
-              </a:pPr>
-              <a:r>
-                <a:rPr sz="880">
-                  <a:solidFill>
-                    <a:srgbClr val="4D4D4D">
-                      <a:alpha val="100000"/>
-                    </a:srgbClr>
-                  </a:solidFill>
-                  <a:latin typeface="Helvetica"/>
-                  <a:cs typeface="Helvetica"/>
-                </a:rPr>
-                <a:t>1.4</a:t>
-              </a:r>
-            </a:p>
-          </p:txBody>
-        </p:sp>
-        <p:sp>
-          <p:nvSpPr>
-            <p:cNvPr id="36" name="tx36"/>
-            <p:cNvSpPr/>
-            <p:nvPr/>
-          </p:nvSpPr>
-          <p:spPr>
-            <a:xfrm>
-              <a:off x="3879271" y="5925448"/>
-              <a:ext cx="1676186" cy="100218"/>
+              <a:off x="2928340" y="5925448"/>
+              <a:ext cx="3578047" cy="100218"/>
             </a:xfrm>
             <a:prstGeom prst="rect">
               <a:avLst/>
@@ -5120,14 +5061,14 @@
                   <a:latin typeface="Helvetica"/>
                   <a:cs typeface="Helvetica"/>
                 </a:rPr>
-                <a:t>CKD-EPI Cr-Cys / CG ratio</a:t>
+                <a:t>eGFR difference (%): 100 × (CKD-EPI Cr-Cys − CG) / CG</a:t>
               </a:r>
             </a:p>
           </p:txBody>
         </p:sp>
         <p:sp>
           <p:nvSpPr>
-            <p:cNvPr id="37" name="tx37"/>
+            <p:cNvPr id="35" name="tx35"/>
             <p:cNvSpPr/>
             <p:nvPr/>
           </p:nvSpPr>
@@ -5173,14 +5114,14 @@
         </p:sp>
         <p:sp>
           <p:nvSpPr>
-            <p:cNvPr id="38" name="tx38"/>
+            <p:cNvPr id="36" name="tx36"/>
             <p:cNvSpPr/>
             <p:nvPr/>
           </p:nvSpPr>
           <p:spPr>
             <a:xfrm>
               <a:off x="817517" y="1896563"/>
-              <a:ext cx="6833128" cy="82021"/>
+              <a:ext cx="6985375" cy="82021"/>
             </a:xfrm>
             <a:prstGeom prst="rect">
               <a:avLst/>
@@ -5212,14 +5153,14 @@
                   <a:latin typeface="Helvetica"/>
                   <a:cs typeface="Helvetica"/>
                 </a:rPr>
-                <a:t>subHR per 0.1 ratio decline: 1.22 (1.09-1.37), p_Bonf = 0.003 (n = 6)  |  per IQR decline (Δ = 0.30): 1.82 (1.30-2.55)  |  IQR: [0.85, 1.15]</a:t>
+                <a:t>subHR per 10 % decline: 1.22 (1.09-1.37), p_Bonf = 0.003 (n = 6)  |  per IQR decline (Δ = 29.9 %): 1.82 (1.30-2.55)  |  IQR: [-15.0, 14.9] %</a:t>
               </a:r>
             </a:p>
           </p:txBody>
         </p:sp>
         <p:sp>
           <p:nvSpPr>
-            <p:cNvPr id="39" name="tx39"/>
+            <p:cNvPr id="37" name="tx37"/>
             <p:cNvSpPr/>
             <p:nvPr/>
           </p:nvSpPr>

--- a/docs/pptx/carbo/jx-carbo-linsubhr-ratio-anyhosp.pptx
+++ b/docs/pptx/carbo/jx-carbo-linsubhr-ratio-anyhosp.pptx
@@ -2265,34 +2265,26 @@
         </p:sp>
         <p:sp>
           <p:nvSpPr>
-            <p:cNvPr id="4" name="pl4"/>
+            <p:cNvPr id="4" name="rc4"/>
             <p:cNvSpPr/>
             <p:nvPr/>
           </p:nvSpPr>
           <p:spPr>
             <a:xfrm>
-              <a:off x="817517" y="5142518"/>
-              <a:ext cx="7799693" cy="0"/>
+              <a:off x="457200" y="1600200"/>
+              <a:ext cx="8229600" cy="4525962"/>
             </a:xfrm>
-            <a:custGeom>
+            <a:prstGeom prst="rect">
               <a:avLst/>
-              <a:pathLst>
-                <a:path w="7799693" h="0">
-                  <a:moveTo>
-                    <a:pt x="0" y="0"/>
-                  </a:moveTo>
-                  <a:lnTo>
-                    <a:pt x="7799693" y="0"/>
-                  </a:lnTo>
-                  <a:lnTo>
-                    <a:pt x="7799693" y="0"/>
-                  </a:lnTo>
-                </a:path>
-              </a:pathLst>
-            </a:custGeom>
-            <a:ln w="6775" cap="flat">
+            </a:prstGeom>
+            <a:solidFill>
+              <a:srgbClr val="FFFFFF">
+                <a:alpha val="100000"/>
+              </a:srgbClr>
+            </a:solidFill>
+            <a:ln w="13550" cap="rnd">
               <a:solidFill>
-                <a:srgbClr val="EBEBEB">
+                <a:srgbClr val="FFFFFF">
                   <a:alpha val="100000"/>
                 </a:srgbClr>
               </a:solidFill>
@@ -2314,21 +2306,21 @@
           </p:nvSpPr>
           <p:spPr>
             <a:xfrm>
-              <a:off x="817517" y="4313054"/>
-              <a:ext cx="7799693" cy="0"/>
+              <a:off x="887106" y="3250627"/>
+              <a:ext cx="7660515" cy="0"/>
             </a:xfrm>
             <a:custGeom>
               <a:avLst/>
               <a:pathLst>
-                <a:path w="7799693" h="0">
+                <a:path w="7660515" h="0">
                   <a:moveTo>
                     <a:pt x="0" y="0"/>
                   </a:moveTo>
                   <a:lnTo>
-                    <a:pt x="7799693" y="0"/>
-                  </a:lnTo>
-                  <a:lnTo>
-                    <a:pt x="7799693" y="0"/>
+                    <a:pt x="7660515" y="0"/>
+                  </a:lnTo>
+                  <a:lnTo>
+                    <a:pt x="7660515" y="0"/>
                   </a:lnTo>
                 </a:path>
               </a:pathLst>
@@ -2357,21 +2349,21 @@
           </p:nvSpPr>
           <p:spPr>
             <a:xfrm>
-              <a:off x="817517" y="3483591"/>
-              <a:ext cx="7799693" cy="0"/>
+              <a:off x="887106" y="2951293"/>
+              <a:ext cx="7660515" cy="0"/>
             </a:xfrm>
             <a:custGeom>
               <a:avLst/>
               <a:pathLst>
-                <a:path w="7799693" h="0">
+                <a:path w="7660515" h="0">
                   <a:moveTo>
                     <a:pt x="0" y="0"/>
                   </a:moveTo>
                   <a:lnTo>
-                    <a:pt x="7799693" y="0"/>
-                  </a:lnTo>
-                  <a:lnTo>
-                    <a:pt x="7799693" y="0"/>
+                    <a:pt x="7660515" y="0"/>
+                  </a:lnTo>
+                  <a:lnTo>
+                    <a:pt x="7660515" y="0"/>
                   </a:lnTo>
                 </a:path>
               </a:pathLst>
@@ -2400,21 +2392,21 @@
           </p:nvSpPr>
           <p:spPr>
             <a:xfrm>
-              <a:off x="817517" y="2654127"/>
-              <a:ext cx="7799693" cy="0"/>
+              <a:off x="887106" y="2651959"/>
+              <a:ext cx="7660515" cy="0"/>
             </a:xfrm>
             <a:custGeom>
               <a:avLst/>
               <a:pathLst>
-                <a:path w="7799693" h="0">
+                <a:path w="7660515" h="0">
                   <a:moveTo>
                     <a:pt x="0" y="0"/>
                   </a:moveTo>
                   <a:lnTo>
-                    <a:pt x="7799693" y="0"/>
-                  </a:lnTo>
-                  <a:lnTo>
-                    <a:pt x="7799693" y="0"/>
+                    <a:pt x="7660515" y="0"/>
+                  </a:lnTo>
+                  <a:lnTo>
+                    <a:pt x="7660515" y="0"/>
                   </a:lnTo>
                 </a:path>
               </a:pathLst>
@@ -2443,21 +2435,21 @@
           </p:nvSpPr>
           <p:spPr>
             <a:xfrm>
-              <a:off x="1467192" y="2073503"/>
-              <a:ext cx="0" cy="3649639"/>
+              <a:off x="887106" y="2352625"/>
+              <a:ext cx="7660515" cy="0"/>
             </a:xfrm>
             <a:custGeom>
               <a:avLst/>
               <a:pathLst>
-                <a:path w="0" h="3649639">
+                <a:path w="7660515" h="0">
                   <a:moveTo>
-                    <a:pt x="0" y="3649639"/>
+                    <a:pt x="0" y="0"/>
                   </a:moveTo>
                   <a:lnTo>
-                    <a:pt x="0" y="0"/>
-                  </a:lnTo>
-                  <a:lnTo>
-                    <a:pt x="0" y="0"/>
+                    <a:pt x="7660515" y="0"/>
+                  </a:lnTo>
+                  <a:lnTo>
+                    <a:pt x="7660515" y="0"/>
                   </a:lnTo>
                 </a:path>
               </a:pathLst>
@@ -2486,15 +2478,15 @@
           </p:nvSpPr>
           <p:spPr>
             <a:xfrm>
-              <a:off x="3538150" y="2073503"/>
-              <a:ext cx="0" cy="3649639"/>
+              <a:off x="1525188" y="2143092"/>
+              <a:ext cx="0" cy="1317069"/>
             </a:xfrm>
             <a:custGeom>
               <a:avLst/>
               <a:pathLst>
-                <a:path w="0" h="3649639">
+                <a:path w="0" h="1317069">
                   <a:moveTo>
-                    <a:pt x="0" y="3649639"/>
+                    <a:pt x="0" y="1317069"/>
                   </a:moveTo>
                   <a:lnTo>
                     <a:pt x="0" y="0"/>
@@ -2529,15 +2521,15 @@
           </p:nvSpPr>
           <p:spPr>
             <a:xfrm>
-              <a:off x="5609107" y="2073503"/>
-              <a:ext cx="0" cy="3649639"/>
+              <a:off x="3559192" y="2143092"/>
+              <a:ext cx="0" cy="1317069"/>
             </a:xfrm>
             <a:custGeom>
               <a:avLst/>
               <a:pathLst>
-                <a:path w="0" h="3649639">
+                <a:path w="0" h="1317069">
                   <a:moveTo>
-                    <a:pt x="0" y="3649639"/>
+                    <a:pt x="0" y="1317069"/>
                   </a:moveTo>
                   <a:lnTo>
                     <a:pt x="0" y="0"/>
@@ -2572,15 +2564,15 @@
           </p:nvSpPr>
           <p:spPr>
             <a:xfrm>
-              <a:off x="7680065" y="2073503"/>
-              <a:ext cx="0" cy="3649639"/>
+              <a:off x="5593195" y="2143092"/>
+              <a:ext cx="0" cy="1317069"/>
             </a:xfrm>
             <a:custGeom>
               <a:avLst/>
               <a:pathLst>
-                <a:path w="0" h="3649639">
+                <a:path w="0" h="1317069">
                   <a:moveTo>
-                    <a:pt x="0" y="3649639"/>
+                    <a:pt x="0" y="1317069"/>
                   </a:moveTo>
                   <a:lnTo>
                     <a:pt x="0" y="0"/>
@@ -2615,26 +2607,26 @@
           </p:nvSpPr>
           <p:spPr>
             <a:xfrm>
-              <a:off x="817517" y="5557249"/>
-              <a:ext cx="7799693" cy="0"/>
+              <a:off x="7627198" y="2143092"/>
+              <a:ext cx="0" cy="1317069"/>
             </a:xfrm>
             <a:custGeom>
               <a:avLst/>
               <a:pathLst>
-                <a:path w="7799693" h="0">
+                <a:path w="0" h="1317069">
                   <a:moveTo>
+                    <a:pt x="0" y="1317069"/>
+                  </a:moveTo>
+                  <a:lnTo>
                     <a:pt x="0" y="0"/>
-                  </a:moveTo>
-                  <a:lnTo>
-                    <a:pt x="7799693" y="0"/>
-                  </a:lnTo>
-                  <a:lnTo>
-                    <a:pt x="7799693" y="0"/>
+                  </a:lnTo>
+                  <a:lnTo>
+                    <a:pt x="0" y="0"/>
                   </a:lnTo>
                 </a:path>
               </a:pathLst>
             </a:custGeom>
-            <a:ln w="13550" cap="flat">
+            <a:ln w="6775" cap="flat">
               <a:solidFill>
                 <a:srgbClr val="EBEBEB">
                   <a:alpha val="100000"/>
@@ -2658,21 +2650,21 @@
           </p:nvSpPr>
           <p:spPr>
             <a:xfrm>
-              <a:off x="817517" y="4727786"/>
-              <a:ext cx="7799693" cy="0"/>
+              <a:off x="887106" y="3400294"/>
+              <a:ext cx="7660515" cy="0"/>
             </a:xfrm>
             <a:custGeom>
               <a:avLst/>
               <a:pathLst>
-                <a:path w="7799693" h="0">
+                <a:path w="7660515" h="0">
                   <a:moveTo>
                     <a:pt x="0" y="0"/>
                   </a:moveTo>
                   <a:lnTo>
-                    <a:pt x="7799693" y="0"/>
-                  </a:lnTo>
-                  <a:lnTo>
-                    <a:pt x="7799693" y="0"/>
+                    <a:pt x="7660515" y="0"/>
+                  </a:lnTo>
+                  <a:lnTo>
+                    <a:pt x="7660515" y="0"/>
                   </a:lnTo>
                 </a:path>
               </a:pathLst>
@@ -2701,21 +2693,21 @@
           </p:nvSpPr>
           <p:spPr>
             <a:xfrm>
-              <a:off x="817517" y="3898322"/>
-              <a:ext cx="7799693" cy="0"/>
+              <a:off x="887106" y="3100960"/>
+              <a:ext cx="7660515" cy="0"/>
             </a:xfrm>
             <a:custGeom>
               <a:avLst/>
               <a:pathLst>
-                <a:path w="7799693" h="0">
+                <a:path w="7660515" h="0">
                   <a:moveTo>
                     <a:pt x="0" y="0"/>
                   </a:moveTo>
                   <a:lnTo>
-                    <a:pt x="7799693" y="0"/>
-                  </a:lnTo>
-                  <a:lnTo>
-                    <a:pt x="7799693" y="0"/>
+                    <a:pt x="7660515" y="0"/>
+                  </a:lnTo>
+                  <a:lnTo>
+                    <a:pt x="7660515" y="0"/>
                   </a:lnTo>
                 </a:path>
               </a:pathLst>
@@ -2744,21 +2736,21 @@
           </p:nvSpPr>
           <p:spPr>
             <a:xfrm>
-              <a:off x="817517" y="3068859"/>
-              <a:ext cx="7799693" cy="0"/>
+              <a:off x="887106" y="2801626"/>
+              <a:ext cx="7660515" cy="0"/>
             </a:xfrm>
             <a:custGeom>
               <a:avLst/>
               <a:pathLst>
-                <a:path w="7799693" h="0">
+                <a:path w="7660515" h="0">
                   <a:moveTo>
                     <a:pt x="0" y="0"/>
                   </a:moveTo>
                   <a:lnTo>
-                    <a:pt x="7799693" y="0"/>
-                  </a:lnTo>
-                  <a:lnTo>
-                    <a:pt x="7799693" y="0"/>
+                    <a:pt x="7660515" y="0"/>
+                  </a:lnTo>
+                  <a:lnTo>
+                    <a:pt x="7660515" y="0"/>
                   </a:lnTo>
                 </a:path>
               </a:pathLst>
@@ -2787,21 +2779,21 @@
           </p:nvSpPr>
           <p:spPr>
             <a:xfrm>
-              <a:off x="817517" y="2239395"/>
-              <a:ext cx="7799693" cy="0"/>
+              <a:off x="887106" y="2502292"/>
+              <a:ext cx="7660515" cy="0"/>
             </a:xfrm>
             <a:custGeom>
               <a:avLst/>
               <a:pathLst>
-                <a:path w="7799693" h="0">
+                <a:path w="7660515" h="0">
                   <a:moveTo>
                     <a:pt x="0" y="0"/>
                   </a:moveTo>
                   <a:lnTo>
-                    <a:pt x="7799693" y="0"/>
-                  </a:lnTo>
-                  <a:lnTo>
-                    <a:pt x="7799693" y="0"/>
+                    <a:pt x="7660515" y="0"/>
+                  </a:lnTo>
+                  <a:lnTo>
+                    <a:pt x="7660515" y="0"/>
                   </a:lnTo>
                 </a:path>
               </a:pathLst>
@@ -2830,21 +2822,21 @@
           </p:nvSpPr>
           <p:spPr>
             <a:xfrm>
-              <a:off x="2502671" y="2073503"/>
-              <a:ext cx="0" cy="3649639"/>
+              <a:off x="887106" y="2202958"/>
+              <a:ext cx="7660515" cy="0"/>
             </a:xfrm>
             <a:custGeom>
               <a:avLst/>
               <a:pathLst>
-                <a:path w="0" h="3649639">
+                <a:path w="7660515" h="0">
                   <a:moveTo>
-                    <a:pt x="0" y="3649639"/>
+                    <a:pt x="0" y="0"/>
                   </a:moveTo>
                   <a:lnTo>
-                    <a:pt x="0" y="0"/>
-                  </a:lnTo>
-                  <a:lnTo>
-                    <a:pt x="0" y="0"/>
+                    <a:pt x="7660515" y="0"/>
+                  </a:lnTo>
+                  <a:lnTo>
+                    <a:pt x="7660515" y="0"/>
                   </a:lnTo>
                 </a:path>
               </a:pathLst>
@@ -2873,15 +2865,15 @@
           </p:nvSpPr>
           <p:spPr>
             <a:xfrm>
-              <a:off x="4573628" y="2073503"/>
-              <a:ext cx="0" cy="3649639"/>
+              <a:off x="2542190" y="2143092"/>
+              <a:ext cx="0" cy="1317069"/>
             </a:xfrm>
             <a:custGeom>
               <a:avLst/>
               <a:pathLst>
-                <a:path w="0" h="3649639">
+                <a:path w="0" h="1317069">
                   <a:moveTo>
-                    <a:pt x="0" y="3649639"/>
+                    <a:pt x="0" y="1317069"/>
                   </a:moveTo>
                   <a:lnTo>
                     <a:pt x="0" y="0"/>
@@ -2916,15 +2908,15 @@
           </p:nvSpPr>
           <p:spPr>
             <a:xfrm>
-              <a:off x="6644586" y="2073503"/>
-              <a:ext cx="0" cy="3649639"/>
+              <a:off x="4576193" y="2143092"/>
+              <a:ext cx="0" cy="1317069"/>
             </a:xfrm>
             <a:custGeom>
               <a:avLst/>
               <a:pathLst>
-                <a:path w="0" h="3649639">
+                <a:path w="0" h="1317069">
                   <a:moveTo>
-                    <a:pt x="0" y="3649639"/>
+                    <a:pt x="0" y="1317069"/>
                   </a:moveTo>
                   <a:lnTo>
                     <a:pt x="0" y="0"/>
@@ -2953,618 +2945,661 @@
         </p:sp>
         <p:sp>
           <p:nvSpPr>
-            <p:cNvPr id="20" name="pg20"/>
+            <p:cNvPr id="20" name="pl20"/>
             <p:cNvSpPr/>
             <p:nvPr/>
           </p:nvSpPr>
           <p:spPr>
             <a:xfrm>
-              <a:off x="1172049" y="2609837"/>
-              <a:ext cx="7090630" cy="2745274"/>
+              <a:off x="6610197" y="2143092"/>
+              <a:ext cx="0" cy="1317069"/>
             </a:xfrm>
             <a:custGeom>
               <a:avLst/>
               <a:pathLst>
-                <a:path w="7090630" h="2745274">
+                <a:path w="0" h="1317069">
+                  <a:moveTo>
+                    <a:pt x="0" y="1317069"/>
+                  </a:moveTo>
+                  <a:lnTo>
+                    <a:pt x="0" y="0"/>
+                  </a:lnTo>
+                  <a:lnTo>
+                    <a:pt x="0" y="0"/>
+                  </a:lnTo>
+                </a:path>
+              </a:pathLst>
+            </a:custGeom>
+            <a:ln w="13550" cap="flat">
+              <a:solidFill>
+                <a:srgbClr val="EBEBEB">
+                  <a:alpha val="100000"/>
+                </a:srgbClr>
+              </a:solidFill>
+              <a:prstDash val="solid"/>
+              <a:round/>
+            </a:ln>
+          </p:spPr>
+          <p:txBody>
+            <a:bodyPr/>
+            <a:lstStyle/>
+            <a:p/>
+          </p:txBody>
+        </p:sp>
+        <p:sp>
+          <p:nvSpPr>
+            <p:cNvPr id="21" name="pg21"/>
+            <p:cNvSpPr/>
+            <p:nvPr/>
+          </p:nvSpPr>
+          <p:spPr>
+            <a:xfrm>
+              <a:off x="1235312" y="2336642"/>
+              <a:ext cx="6964104" cy="990704"/>
+            </a:xfrm>
+            <a:custGeom>
+              <a:avLst/>
+              <a:pathLst>
+                <a:path w="6964104" h="990704">
                   <a:moveTo>
                     <a:pt x="0" y="0"/>
                   </a:moveTo>
                   <a:lnTo>
-                    <a:pt x="71622" y="78710"/>
-                  </a:lnTo>
-                  <a:lnTo>
-                    <a:pt x="143245" y="155318"/>
-                  </a:lnTo>
-                  <a:lnTo>
-                    <a:pt x="214867" y="229881"/>
-                  </a:lnTo>
-                  <a:lnTo>
-                    <a:pt x="286490" y="302452"/>
-                  </a:lnTo>
-                  <a:lnTo>
-                    <a:pt x="358112" y="373086"/>
-                  </a:lnTo>
-                  <a:lnTo>
-                    <a:pt x="429735" y="441833"/>
-                  </a:lnTo>
-                  <a:lnTo>
-                    <a:pt x="501357" y="508744"/>
-                  </a:lnTo>
-                  <a:lnTo>
-                    <a:pt x="572980" y="573869"/>
-                  </a:lnTo>
-                  <a:lnTo>
-                    <a:pt x="644602" y="637254"/>
-                  </a:lnTo>
-                  <a:lnTo>
-                    <a:pt x="716225" y="698947"/>
-                  </a:lnTo>
-                  <a:lnTo>
-                    <a:pt x="787847" y="758992"/>
-                  </a:lnTo>
-                  <a:lnTo>
-                    <a:pt x="859470" y="817433"/>
-                  </a:lnTo>
-                  <a:lnTo>
-                    <a:pt x="931092" y="874314"/>
-                  </a:lnTo>
-                  <a:lnTo>
-                    <a:pt x="1002715" y="929676"/>
-                  </a:lnTo>
-                  <a:lnTo>
-                    <a:pt x="1074337" y="983559"/>
-                  </a:lnTo>
-                  <a:lnTo>
-                    <a:pt x="1145960" y="1036004"/>
-                  </a:lnTo>
-                  <a:lnTo>
-                    <a:pt x="1217582" y="1087048"/>
-                  </a:lnTo>
-                  <a:lnTo>
-                    <a:pt x="1289205" y="1136729"/>
-                  </a:lnTo>
-                  <a:lnTo>
-                    <a:pt x="1360827" y="1185083"/>
-                  </a:lnTo>
-                  <a:lnTo>
-                    <a:pt x="1432450" y="1232146"/>
-                  </a:lnTo>
-                  <a:lnTo>
-                    <a:pt x="1504073" y="1277952"/>
-                  </a:lnTo>
-                  <a:lnTo>
-                    <a:pt x="1575695" y="1322535"/>
-                  </a:lnTo>
-                  <a:lnTo>
-                    <a:pt x="1647318" y="1365927"/>
-                  </a:lnTo>
-                  <a:lnTo>
-                    <a:pt x="1718940" y="1408160"/>
-                  </a:lnTo>
-                  <a:lnTo>
-                    <a:pt x="1790563" y="1449266"/>
-                  </a:lnTo>
-                  <a:lnTo>
-                    <a:pt x="1862185" y="1489274"/>
-                  </a:lnTo>
-                  <a:lnTo>
-                    <a:pt x="1933808" y="1528213"/>
-                  </a:lnTo>
-                  <a:lnTo>
-                    <a:pt x="2005430" y="1566113"/>
-                  </a:lnTo>
-                  <a:lnTo>
-                    <a:pt x="2077053" y="1603000"/>
-                  </a:lnTo>
-                  <a:lnTo>
-                    <a:pt x="2148675" y="1638903"/>
-                  </a:lnTo>
-                  <a:lnTo>
-                    <a:pt x="2220298" y="1673846"/>
-                  </a:lnTo>
-                  <a:lnTo>
-                    <a:pt x="2291920" y="1707857"/>
-                  </a:lnTo>
-                  <a:lnTo>
-                    <a:pt x="2363543" y="1740959"/>
-                  </a:lnTo>
-                  <a:lnTo>
-                    <a:pt x="2435165" y="1773177"/>
-                  </a:lnTo>
-                  <a:lnTo>
-                    <a:pt x="2506788" y="1804535"/>
-                  </a:lnTo>
-                  <a:lnTo>
-                    <a:pt x="2578410" y="1835056"/>
-                  </a:lnTo>
-                  <a:lnTo>
-                    <a:pt x="2650033" y="1864761"/>
-                  </a:lnTo>
-                  <a:lnTo>
-                    <a:pt x="2721655" y="1893673"/>
-                  </a:lnTo>
-                  <a:lnTo>
-                    <a:pt x="2793278" y="1921813"/>
-                  </a:lnTo>
-                  <a:lnTo>
-                    <a:pt x="2864901" y="1949202"/>
-                  </a:lnTo>
-                  <a:lnTo>
-                    <a:pt x="2936523" y="1975859"/>
-                  </a:lnTo>
-                  <a:lnTo>
-                    <a:pt x="3008146" y="2001804"/>
-                  </a:lnTo>
-                  <a:lnTo>
-                    <a:pt x="3079768" y="2027056"/>
-                  </a:lnTo>
-                  <a:lnTo>
-                    <a:pt x="3151391" y="2051634"/>
-                  </a:lnTo>
-                  <a:lnTo>
-                    <a:pt x="3223013" y="2075556"/>
-                  </a:lnTo>
-                  <a:lnTo>
-                    <a:pt x="3294636" y="2098839"/>
-                  </a:lnTo>
-                  <a:lnTo>
-                    <a:pt x="3366258" y="2118934"/>
-                  </a:lnTo>
-                  <a:lnTo>
-                    <a:pt x="3437881" y="2125119"/>
-                  </a:lnTo>
-                  <a:lnTo>
-                    <a:pt x="3509503" y="2131258"/>
-                  </a:lnTo>
-                  <a:lnTo>
-                    <a:pt x="3581126" y="2137351"/>
-                  </a:lnTo>
-                  <a:lnTo>
-                    <a:pt x="3652748" y="2143399"/>
-                  </a:lnTo>
-                  <a:lnTo>
-                    <a:pt x="3724371" y="2149401"/>
-                  </a:lnTo>
-                  <a:lnTo>
-                    <a:pt x="3795993" y="2155359"/>
-                  </a:lnTo>
-                  <a:lnTo>
-                    <a:pt x="3867616" y="2161272"/>
-                  </a:lnTo>
-                  <a:lnTo>
-                    <a:pt x="3939238" y="2167142"/>
-                  </a:lnTo>
-                  <a:lnTo>
-                    <a:pt x="4010861" y="2172967"/>
-                  </a:lnTo>
-                  <a:lnTo>
-                    <a:pt x="4082483" y="2178749"/>
-                  </a:lnTo>
-                  <a:lnTo>
-                    <a:pt x="4154106" y="2184487"/>
-                  </a:lnTo>
-                  <a:lnTo>
-                    <a:pt x="4225729" y="2190183"/>
-                  </a:lnTo>
-                  <a:lnTo>
-                    <a:pt x="4297351" y="2195836"/>
-                  </a:lnTo>
-                  <a:lnTo>
-                    <a:pt x="4368974" y="2201448"/>
-                  </a:lnTo>
-                  <a:lnTo>
-                    <a:pt x="4440596" y="2207017"/>
-                  </a:lnTo>
-                  <a:lnTo>
-                    <a:pt x="4512219" y="2212544"/>
-                  </a:lnTo>
-                  <a:lnTo>
-                    <a:pt x="4583841" y="2218031"/>
-                  </a:lnTo>
-                  <a:lnTo>
-                    <a:pt x="4655464" y="2223476"/>
-                  </a:lnTo>
-                  <a:lnTo>
-                    <a:pt x="4727086" y="2228881"/>
-                  </a:lnTo>
-                  <a:lnTo>
-                    <a:pt x="4798709" y="2234245"/>
-                  </a:lnTo>
-                  <a:lnTo>
-                    <a:pt x="4870331" y="2239570"/>
-                  </a:lnTo>
-                  <a:lnTo>
-                    <a:pt x="4941954" y="2244854"/>
-                  </a:lnTo>
-                  <a:lnTo>
-                    <a:pt x="5013576" y="2250099"/>
-                  </a:lnTo>
-                  <a:lnTo>
-                    <a:pt x="5085199" y="2255305"/>
-                  </a:lnTo>
-                  <a:lnTo>
-                    <a:pt x="5156821" y="2260472"/>
-                  </a:lnTo>
-                  <a:lnTo>
-                    <a:pt x="5228444" y="2265601"/>
-                  </a:lnTo>
-                  <a:lnTo>
-                    <a:pt x="5300066" y="2270691"/>
-                  </a:lnTo>
-                  <a:lnTo>
-                    <a:pt x="5371689" y="2275743"/>
-                  </a:lnTo>
-                  <a:lnTo>
-                    <a:pt x="5443311" y="2280758"/>
-                  </a:lnTo>
-                  <a:lnTo>
-                    <a:pt x="5514934" y="2285735"/>
-                  </a:lnTo>
-                  <a:lnTo>
-                    <a:pt x="5586557" y="2290675"/>
-                  </a:lnTo>
-                  <a:lnTo>
-                    <a:pt x="5658179" y="2295578"/>
-                  </a:lnTo>
-                  <a:lnTo>
-                    <a:pt x="5729802" y="2300444"/>
-                  </a:lnTo>
-                  <a:lnTo>
-                    <a:pt x="5801424" y="2305275"/>
-                  </a:lnTo>
-                  <a:lnTo>
-                    <a:pt x="5873047" y="2310069"/>
-                  </a:lnTo>
-                  <a:lnTo>
-                    <a:pt x="5944669" y="2314827"/>
-                  </a:lnTo>
-                  <a:lnTo>
-                    <a:pt x="6016292" y="2319550"/>
-                  </a:lnTo>
-                  <a:lnTo>
-                    <a:pt x="6087914" y="2324237"/>
-                  </a:lnTo>
-                  <a:lnTo>
-                    <a:pt x="6159537" y="2328890"/>
-                  </a:lnTo>
-                  <a:lnTo>
-                    <a:pt x="6231159" y="2333507"/>
-                  </a:lnTo>
-                  <a:lnTo>
-                    <a:pt x="6302782" y="2338091"/>
-                  </a:lnTo>
-                  <a:lnTo>
-                    <a:pt x="6374404" y="2342640"/>
-                  </a:lnTo>
-                  <a:lnTo>
-                    <a:pt x="6446027" y="2347155"/>
-                  </a:lnTo>
-                  <a:lnTo>
-                    <a:pt x="6517649" y="2351636"/>
-                  </a:lnTo>
-                  <a:lnTo>
-                    <a:pt x="6589272" y="2356084"/>
-                  </a:lnTo>
-                  <a:lnTo>
-                    <a:pt x="6660894" y="2360499"/>
-                  </a:lnTo>
-                  <a:lnTo>
-                    <a:pt x="6732517" y="2364881"/>
-                  </a:lnTo>
-                  <a:lnTo>
-                    <a:pt x="6804139" y="2369230"/>
-                  </a:lnTo>
-                  <a:lnTo>
-                    <a:pt x="6875762" y="2373546"/>
-                  </a:lnTo>
-                  <a:lnTo>
-                    <a:pt x="6947385" y="2377830"/>
-                  </a:lnTo>
-                  <a:lnTo>
-                    <a:pt x="7019007" y="2382083"/>
-                  </a:lnTo>
-                  <a:lnTo>
-                    <a:pt x="7090630" y="2386303"/>
-                  </a:lnTo>
-                  <a:lnTo>
-                    <a:pt x="7090630" y="2745274"/>
-                  </a:lnTo>
-                  <a:lnTo>
-                    <a:pt x="7019007" y="2739727"/>
-                  </a:lnTo>
-                  <a:lnTo>
-                    <a:pt x="6947385" y="2734029"/>
-                  </a:lnTo>
-                  <a:lnTo>
-                    <a:pt x="6875762" y="2728174"/>
-                  </a:lnTo>
-                  <a:lnTo>
-                    <a:pt x="6804139" y="2722159"/>
-                  </a:lnTo>
-                  <a:lnTo>
-                    <a:pt x="6732517" y="2715978"/>
-                  </a:lnTo>
-                  <a:lnTo>
-                    <a:pt x="6660894" y="2709628"/>
-                  </a:lnTo>
-                  <a:lnTo>
-                    <a:pt x="6589272" y="2703104"/>
-                  </a:lnTo>
-                  <a:lnTo>
-                    <a:pt x="6517649" y="2696401"/>
-                  </a:lnTo>
-                  <a:lnTo>
-                    <a:pt x="6446027" y="2689514"/>
-                  </a:lnTo>
-                  <a:lnTo>
-                    <a:pt x="6374404" y="2682438"/>
-                  </a:lnTo>
-                  <a:lnTo>
-                    <a:pt x="6302782" y="2675167"/>
-                  </a:lnTo>
-                  <a:lnTo>
-                    <a:pt x="6231159" y="2667698"/>
-                  </a:lnTo>
-                  <a:lnTo>
-                    <a:pt x="6159537" y="2660023"/>
-                  </a:lnTo>
-                  <a:lnTo>
-                    <a:pt x="6087914" y="2652138"/>
-                  </a:lnTo>
-                  <a:lnTo>
-                    <a:pt x="6016292" y="2644036"/>
-                  </a:lnTo>
-                  <a:lnTo>
-                    <a:pt x="5944669" y="2635712"/>
-                  </a:lnTo>
-                  <a:lnTo>
-                    <a:pt x="5873047" y="2627160"/>
-                  </a:lnTo>
-                  <a:lnTo>
-                    <a:pt x="5801424" y="2618373"/>
-                  </a:lnTo>
-                  <a:lnTo>
-                    <a:pt x="5729802" y="2609345"/>
-                  </a:lnTo>
-                  <a:lnTo>
-                    <a:pt x="5658179" y="2600069"/>
-                  </a:lnTo>
-                  <a:lnTo>
-                    <a:pt x="5586557" y="2590539"/>
-                  </a:lnTo>
-                  <a:lnTo>
-                    <a:pt x="5514934" y="2580747"/>
-                  </a:lnTo>
-                  <a:lnTo>
-                    <a:pt x="5443311" y="2570687"/>
-                  </a:lnTo>
-                  <a:lnTo>
-                    <a:pt x="5371689" y="2560350"/>
-                  </a:lnTo>
-                  <a:lnTo>
-                    <a:pt x="5300066" y="2549730"/>
-                  </a:lnTo>
-                  <a:lnTo>
-                    <a:pt x="5228444" y="2538819"/>
-                  </a:lnTo>
-                  <a:lnTo>
-                    <a:pt x="5156821" y="2527608"/>
-                  </a:lnTo>
-                  <a:lnTo>
-                    <a:pt x="5085199" y="2516089"/>
-                  </a:lnTo>
-                  <a:lnTo>
-                    <a:pt x="5013576" y="2504255"/>
-                  </a:lnTo>
-                  <a:lnTo>
-                    <a:pt x="4941954" y="2492096"/>
-                  </a:lnTo>
-                  <a:lnTo>
-                    <a:pt x="4870331" y="2479603"/>
-                  </a:lnTo>
-                  <a:lnTo>
-                    <a:pt x="4798709" y="2466767"/>
-                  </a:lnTo>
-                  <a:lnTo>
-                    <a:pt x="4727086" y="2453579"/>
-                  </a:lnTo>
-                  <a:lnTo>
-                    <a:pt x="4655464" y="2440030"/>
-                  </a:lnTo>
-                  <a:lnTo>
-                    <a:pt x="4583841" y="2426108"/>
-                  </a:lnTo>
-                  <a:lnTo>
-                    <a:pt x="4512219" y="2411805"/>
-                  </a:lnTo>
-                  <a:lnTo>
-                    <a:pt x="4440596" y="2397109"/>
-                  </a:lnTo>
-                  <a:lnTo>
-                    <a:pt x="4368974" y="2382010"/>
-                  </a:lnTo>
-                  <a:lnTo>
-                    <a:pt x="4297351" y="2366497"/>
-                  </a:lnTo>
-                  <a:lnTo>
-                    <a:pt x="4225729" y="2350558"/>
-                  </a:lnTo>
-                  <a:lnTo>
-                    <a:pt x="4154106" y="2334182"/>
-                  </a:lnTo>
-                  <a:lnTo>
-                    <a:pt x="4082483" y="2317356"/>
-                  </a:lnTo>
-                  <a:lnTo>
-                    <a:pt x="4010861" y="2300069"/>
-                  </a:lnTo>
-                  <a:lnTo>
-                    <a:pt x="3939238" y="2282307"/>
-                  </a:lnTo>
-                  <a:lnTo>
-                    <a:pt x="3867616" y="2264058"/>
-                  </a:lnTo>
-                  <a:lnTo>
-                    <a:pt x="3795993" y="2245309"/>
-                  </a:lnTo>
-                  <a:lnTo>
-                    <a:pt x="3724371" y="2226045"/>
-                  </a:lnTo>
-                  <a:lnTo>
-                    <a:pt x="3652748" y="2206252"/>
-                  </a:lnTo>
-                  <a:lnTo>
-                    <a:pt x="3581126" y="2185916"/>
-                  </a:lnTo>
-                  <a:lnTo>
-                    <a:pt x="3509503" y="2165023"/>
-                  </a:lnTo>
-                  <a:lnTo>
-                    <a:pt x="3437881" y="2143556"/>
-                  </a:lnTo>
-                  <a:lnTo>
-                    <a:pt x="3366258" y="2121500"/>
-                  </a:lnTo>
-                  <a:lnTo>
-                    <a:pt x="3294636" y="2112702"/>
-                  </a:lnTo>
-                  <a:lnTo>
-                    <a:pt x="3223013" y="2106423"/>
-                  </a:lnTo>
-                  <a:lnTo>
-                    <a:pt x="3151391" y="2100097"/>
-                  </a:lnTo>
-                  <a:lnTo>
-                    <a:pt x="3079768" y="2093724"/>
-                  </a:lnTo>
-                  <a:lnTo>
-                    <a:pt x="3008146" y="2087302"/>
-                  </a:lnTo>
-                  <a:lnTo>
-                    <a:pt x="2936523" y="2080833"/>
-                  </a:lnTo>
-                  <a:lnTo>
-                    <a:pt x="2864901" y="2074314"/>
-                  </a:lnTo>
-                  <a:lnTo>
-                    <a:pt x="2793278" y="2067747"/>
-                  </a:lnTo>
-                  <a:lnTo>
-                    <a:pt x="2721655" y="2061130"/>
-                  </a:lnTo>
-                  <a:lnTo>
-                    <a:pt x="2650033" y="2054464"/>
-                  </a:lnTo>
-                  <a:lnTo>
-                    <a:pt x="2578410" y="2047747"/>
-                  </a:lnTo>
-                  <a:lnTo>
-                    <a:pt x="2506788" y="2040980"/>
-                  </a:lnTo>
-                  <a:lnTo>
-                    <a:pt x="2435165" y="2034162"/>
-                  </a:lnTo>
-                  <a:lnTo>
-                    <a:pt x="2363543" y="2027292"/>
-                  </a:lnTo>
-                  <a:lnTo>
-                    <a:pt x="2291920" y="2020371"/>
-                  </a:lnTo>
-                  <a:lnTo>
-                    <a:pt x="2220298" y="2013398"/>
-                  </a:lnTo>
-                  <a:lnTo>
-                    <a:pt x="2148675" y="2006373"/>
-                  </a:lnTo>
-                  <a:lnTo>
-                    <a:pt x="2077053" y="1999294"/>
-                  </a:lnTo>
-                  <a:lnTo>
-                    <a:pt x="2005430" y="1992162"/>
-                  </a:lnTo>
-                  <a:lnTo>
-                    <a:pt x="1933808" y="1984977"/>
-                  </a:lnTo>
-                  <a:lnTo>
-                    <a:pt x="1862185" y="1977738"/>
-                  </a:lnTo>
-                  <a:lnTo>
-                    <a:pt x="1790563" y="1970444"/>
-                  </a:lnTo>
-                  <a:lnTo>
-                    <a:pt x="1718940" y="1963095"/>
-                  </a:lnTo>
-                  <a:lnTo>
-                    <a:pt x="1647318" y="1955691"/>
-                  </a:lnTo>
-                  <a:lnTo>
-                    <a:pt x="1575695" y="1948232"/>
-                  </a:lnTo>
-                  <a:lnTo>
-                    <a:pt x="1504073" y="1940716"/>
-                  </a:lnTo>
-                  <a:lnTo>
-                    <a:pt x="1432450" y="1933144"/>
-                  </a:lnTo>
-                  <a:lnTo>
-                    <a:pt x="1360827" y="1925514"/>
-                  </a:lnTo>
-                  <a:lnTo>
-                    <a:pt x="1289205" y="1917828"/>
-                  </a:lnTo>
-                  <a:lnTo>
-                    <a:pt x="1217582" y="1910083"/>
-                  </a:lnTo>
-                  <a:lnTo>
-                    <a:pt x="1145960" y="1902281"/>
-                  </a:lnTo>
-                  <a:lnTo>
-                    <a:pt x="1074337" y="1894419"/>
-                  </a:lnTo>
-                  <a:lnTo>
-                    <a:pt x="1002715" y="1886499"/>
-                  </a:lnTo>
-                  <a:lnTo>
-                    <a:pt x="931092" y="1878518"/>
-                  </a:lnTo>
-                  <a:lnTo>
-                    <a:pt x="859470" y="1870478"/>
-                  </a:lnTo>
-                  <a:lnTo>
-                    <a:pt x="787847" y="1862378"/>
-                  </a:lnTo>
-                  <a:lnTo>
-                    <a:pt x="716225" y="1854216"/>
-                  </a:lnTo>
-                  <a:lnTo>
-                    <a:pt x="644602" y="1845993"/>
-                  </a:lnTo>
-                  <a:lnTo>
-                    <a:pt x="572980" y="1837708"/>
-                  </a:lnTo>
-                  <a:lnTo>
-                    <a:pt x="501357" y="1829361"/>
-                  </a:lnTo>
-                  <a:lnTo>
-                    <a:pt x="429735" y="1820951"/>
-                  </a:lnTo>
-                  <a:lnTo>
-                    <a:pt x="358112" y="1812478"/>
-                  </a:lnTo>
-                  <a:lnTo>
-                    <a:pt x="286490" y="1803941"/>
-                  </a:lnTo>
-                  <a:lnTo>
-                    <a:pt x="214867" y="1795340"/>
-                  </a:lnTo>
-                  <a:lnTo>
-                    <a:pt x="143245" y="1786674"/>
-                  </a:lnTo>
-                  <a:lnTo>
-                    <a:pt x="71622" y="1777944"/>
-                  </a:lnTo>
-                  <a:lnTo>
-                    <a:pt x="0" y="1769147"/>
+                    <a:pt x="70344" y="28404"/>
+                  </a:lnTo>
+                  <a:lnTo>
+                    <a:pt x="140688" y="56050"/>
+                  </a:lnTo>
+                  <a:lnTo>
+                    <a:pt x="211033" y="82958"/>
+                  </a:lnTo>
+                  <a:lnTo>
+                    <a:pt x="281377" y="109148"/>
+                  </a:lnTo>
+                  <a:lnTo>
+                    <a:pt x="351722" y="134638"/>
+                  </a:lnTo>
+                  <a:lnTo>
+                    <a:pt x="422066" y="159447"/>
+                  </a:lnTo>
+                  <a:lnTo>
+                    <a:pt x="492411" y="183594"/>
+                  </a:lnTo>
+                  <a:lnTo>
+                    <a:pt x="562755" y="207095"/>
+                  </a:lnTo>
+                  <a:lnTo>
+                    <a:pt x="633100" y="229970"/>
+                  </a:lnTo>
+                  <a:lnTo>
+                    <a:pt x="703444" y="252233"/>
+                  </a:lnTo>
+                  <a:lnTo>
+                    <a:pt x="773789" y="273902"/>
+                  </a:lnTo>
+                  <a:lnTo>
+                    <a:pt x="844133" y="294992"/>
+                  </a:lnTo>
+                  <a:lnTo>
+                    <a:pt x="914478" y="315519"/>
+                  </a:lnTo>
+                  <a:lnTo>
+                    <a:pt x="984822" y="335498"/>
+                  </a:lnTo>
+                  <a:lnTo>
+                    <a:pt x="1055167" y="354943"/>
+                  </a:lnTo>
+                  <a:lnTo>
+                    <a:pt x="1125511" y="373869"/>
+                  </a:lnTo>
+                  <a:lnTo>
+                    <a:pt x="1195856" y="392290"/>
+                  </a:lnTo>
+                  <a:lnTo>
+                    <a:pt x="1266200" y="410218"/>
+                  </a:lnTo>
+                  <a:lnTo>
+                    <a:pt x="1336545" y="427668"/>
+                  </a:lnTo>
+                  <a:lnTo>
+                    <a:pt x="1406889" y="444652"/>
+                  </a:lnTo>
+                  <a:lnTo>
+                    <a:pt x="1477234" y="461182"/>
+                  </a:lnTo>
+                  <a:lnTo>
+                    <a:pt x="1547578" y="477271"/>
+                  </a:lnTo>
+                  <a:lnTo>
+                    <a:pt x="1617923" y="492931"/>
+                  </a:lnTo>
+                  <a:lnTo>
+                    <a:pt x="1688267" y="508172"/>
+                  </a:lnTo>
+                  <a:lnTo>
+                    <a:pt x="1758612" y="523006"/>
+                  </a:lnTo>
+                  <a:lnTo>
+                    <a:pt x="1828956" y="537444"/>
+                  </a:lnTo>
+                  <a:lnTo>
+                    <a:pt x="1899301" y="551496"/>
+                  </a:lnTo>
+                  <a:lnTo>
+                    <a:pt x="1969645" y="565173"/>
+                  </a:lnTo>
+                  <a:lnTo>
+                    <a:pt x="2039990" y="578485"/>
+                  </a:lnTo>
+                  <a:lnTo>
+                    <a:pt x="2110334" y="591441"/>
+                  </a:lnTo>
+                  <a:lnTo>
+                    <a:pt x="2180679" y="604051"/>
+                  </a:lnTo>
+                  <a:lnTo>
+                    <a:pt x="2251023" y="616325"/>
+                  </a:lnTo>
+                  <a:lnTo>
+                    <a:pt x="2321368" y="628271"/>
+                  </a:lnTo>
+                  <a:lnTo>
+                    <a:pt x="2391712" y="639898"/>
+                  </a:lnTo>
+                  <a:lnTo>
+                    <a:pt x="2462057" y="651214"/>
+                  </a:lnTo>
+                  <a:lnTo>
+                    <a:pt x="2532401" y="662228"/>
+                  </a:lnTo>
+                  <a:lnTo>
+                    <a:pt x="2602746" y="672948"/>
+                  </a:lnTo>
+                  <a:lnTo>
+                    <a:pt x="2673090" y="683382"/>
+                  </a:lnTo>
+                  <a:lnTo>
+                    <a:pt x="2743435" y="693537"/>
+                  </a:lnTo>
+                  <a:lnTo>
+                    <a:pt x="2813779" y="703421"/>
+                  </a:lnTo>
+                  <a:lnTo>
+                    <a:pt x="2884124" y="713041"/>
+                  </a:lnTo>
+                  <a:lnTo>
+                    <a:pt x="2954468" y="722404"/>
+                  </a:lnTo>
+                  <a:lnTo>
+                    <a:pt x="3024813" y="731517"/>
+                  </a:lnTo>
+                  <a:lnTo>
+                    <a:pt x="3095157" y="740386"/>
+                  </a:lnTo>
+                  <a:lnTo>
+                    <a:pt x="3165502" y="749019"/>
+                  </a:lnTo>
+                  <a:lnTo>
+                    <a:pt x="3235846" y="757421"/>
+                  </a:lnTo>
+                  <a:lnTo>
+                    <a:pt x="3306191" y="764673"/>
+                  </a:lnTo>
+                  <a:lnTo>
+                    <a:pt x="3376535" y="766905"/>
+                  </a:lnTo>
+                  <a:lnTo>
+                    <a:pt x="3446880" y="769120"/>
+                  </a:lnTo>
+                  <a:lnTo>
+                    <a:pt x="3517224" y="771319"/>
+                  </a:lnTo>
+                  <a:lnTo>
+                    <a:pt x="3587569" y="773502"/>
+                  </a:lnTo>
+                  <a:lnTo>
+                    <a:pt x="3657913" y="775668"/>
+                  </a:lnTo>
+                  <a:lnTo>
+                    <a:pt x="3728257" y="777818"/>
+                  </a:lnTo>
+                  <a:lnTo>
+                    <a:pt x="3798602" y="779952"/>
+                  </a:lnTo>
+                  <a:lnTo>
+                    <a:pt x="3868946" y="782070"/>
+                  </a:lnTo>
+                  <a:lnTo>
+                    <a:pt x="3939291" y="784172"/>
+                  </a:lnTo>
+                  <a:lnTo>
+                    <a:pt x="4009635" y="786259"/>
+                  </a:lnTo>
+                  <a:lnTo>
+                    <a:pt x="4079980" y="788330"/>
+                  </a:lnTo>
+                  <a:lnTo>
+                    <a:pt x="4150324" y="790385"/>
+                  </a:lnTo>
+                  <a:lnTo>
+                    <a:pt x="4220669" y="792425"/>
+                  </a:lnTo>
+                  <a:lnTo>
+                    <a:pt x="4291013" y="794450"/>
+                  </a:lnTo>
+                  <a:lnTo>
+                    <a:pt x="4361358" y="796460"/>
+                  </a:lnTo>
+                  <a:lnTo>
+                    <a:pt x="4431702" y="798455"/>
+                  </a:lnTo>
+                  <a:lnTo>
+                    <a:pt x="4502047" y="800435"/>
+                  </a:lnTo>
+                  <a:lnTo>
+                    <a:pt x="4572391" y="802400"/>
+                  </a:lnTo>
+                  <a:lnTo>
+                    <a:pt x="4642736" y="804350"/>
+                  </a:lnTo>
+                  <a:lnTo>
+                    <a:pt x="4713080" y="806286"/>
+                  </a:lnTo>
+                  <a:lnTo>
+                    <a:pt x="4783425" y="808208"/>
+                  </a:lnTo>
+                  <a:lnTo>
+                    <a:pt x="4853769" y="810115"/>
+                  </a:lnTo>
+                  <a:lnTo>
+                    <a:pt x="4924114" y="812008"/>
+                  </a:lnTo>
+                  <a:lnTo>
+                    <a:pt x="4994458" y="813886"/>
+                  </a:lnTo>
+                  <a:lnTo>
+                    <a:pt x="5064803" y="815751"/>
+                  </a:lnTo>
+                  <a:lnTo>
+                    <a:pt x="5135147" y="817602"/>
+                  </a:lnTo>
+                  <a:lnTo>
+                    <a:pt x="5205492" y="819439"/>
+                  </a:lnTo>
+                  <a:lnTo>
+                    <a:pt x="5275836" y="821262"/>
+                  </a:lnTo>
+                  <a:lnTo>
+                    <a:pt x="5346181" y="823072"/>
+                  </a:lnTo>
+                  <a:lnTo>
+                    <a:pt x="5416525" y="824868"/>
+                  </a:lnTo>
+                  <a:lnTo>
+                    <a:pt x="5486870" y="826650"/>
+                  </a:lnTo>
+                  <a:lnTo>
+                    <a:pt x="5557214" y="828420"/>
+                  </a:lnTo>
+                  <a:lnTo>
+                    <a:pt x="5627559" y="830176"/>
+                  </a:lnTo>
+                  <a:lnTo>
+                    <a:pt x="5697903" y="831919"/>
+                  </a:lnTo>
+                  <a:lnTo>
+                    <a:pt x="5768248" y="833649"/>
+                  </a:lnTo>
+                  <a:lnTo>
+                    <a:pt x="5838592" y="835366"/>
+                  </a:lnTo>
+                  <a:lnTo>
+                    <a:pt x="5908937" y="837071"/>
+                  </a:lnTo>
+                  <a:lnTo>
+                    <a:pt x="5979281" y="838762"/>
+                  </a:lnTo>
+                  <a:lnTo>
+                    <a:pt x="6049626" y="840441"/>
+                  </a:lnTo>
+                  <a:lnTo>
+                    <a:pt x="6119970" y="842108"/>
+                  </a:lnTo>
+                  <a:lnTo>
+                    <a:pt x="6190315" y="843762"/>
+                  </a:lnTo>
+                  <a:lnTo>
+                    <a:pt x="6260659" y="845403"/>
+                  </a:lnTo>
+                  <a:lnTo>
+                    <a:pt x="6331004" y="847033"/>
+                  </a:lnTo>
+                  <a:lnTo>
+                    <a:pt x="6401348" y="848650"/>
+                  </a:lnTo>
+                  <a:lnTo>
+                    <a:pt x="6471693" y="850255"/>
+                  </a:lnTo>
+                  <a:lnTo>
+                    <a:pt x="6542037" y="851848"/>
+                  </a:lnTo>
+                  <a:lnTo>
+                    <a:pt x="6612382" y="853429"/>
+                  </a:lnTo>
+                  <a:lnTo>
+                    <a:pt x="6682726" y="854999"/>
+                  </a:lnTo>
+                  <a:lnTo>
+                    <a:pt x="6753071" y="856557"/>
+                  </a:lnTo>
+                  <a:lnTo>
+                    <a:pt x="6823415" y="858103"/>
+                  </a:lnTo>
+                  <a:lnTo>
+                    <a:pt x="6893760" y="859637"/>
+                  </a:lnTo>
+                  <a:lnTo>
+                    <a:pt x="6964104" y="861160"/>
+                  </a:lnTo>
+                  <a:lnTo>
+                    <a:pt x="6964104" y="990704"/>
+                  </a:lnTo>
+                  <a:lnTo>
+                    <a:pt x="6893760" y="988703"/>
+                  </a:lnTo>
+                  <a:lnTo>
+                    <a:pt x="6823415" y="986646"/>
+                  </a:lnTo>
+                  <a:lnTo>
+                    <a:pt x="6753071" y="984534"/>
+                  </a:lnTo>
+                  <a:lnTo>
+                    <a:pt x="6682726" y="982363"/>
+                  </a:lnTo>
+                  <a:lnTo>
+                    <a:pt x="6612382" y="980132"/>
+                  </a:lnTo>
+                  <a:lnTo>
+                    <a:pt x="6542037" y="977841"/>
+                  </a:lnTo>
+                  <a:lnTo>
+                    <a:pt x="6471693" y="975486"/>
+                  </a:lnTo>
+                  <a:lnTo>
+                    <a:pt x="6401348" y="973067"/>
+                  </a:lnTo>
+                  <a:lnTo>
+                    <a:pt x="6331004" y="970582"/>
+                  </a:lnTo>
+                  <a:lnTo>
+                    <a:pt x="6260659" y="968028"/>
+                  </a:lnTo>
+                  <a:lnTo>
+                    <a:pt x="6190315" y="965405"/>
+                  </a:lnTo>
+                  <a:lnTo>
+                    <a:pt x="6119970" y="962709"/>
+                  </a:lnTo>
+                  <a:lnTo>
+                    <a:pt x="6049626" y="959939"/>
+                  </a:lnTo>
+                  <a:lnTo>
+                    <a:pt x="5979281" y="957094"/>
+                  </a:lnTo>
+                  <a:lnTo>
+                    <a:pt x="5908937" y="954170"/>
+                  </a:lnTo>
+                  <a:lnTo>
+                    <a:pt x="5838592" y="951166"/>
+                  </a:lnTo>
+                  <a:lnTo>
+                    <a:pt x="5768248" y="948080"/>
+                  </a:lnTo>
+                  <a:lnTo>
+                    <a:pt x="5697903" y="944909"/>
+                  </a:lnTo>
+                  <a:lnTo>
+                    <a:pt x="5627559" y="941651"/>
+                  </a:lnTo>
+                  <a:lnTo>
+                    <a:pt x="5557214" y="938303"/>
+                  </a:lnTo>
+                  <a:lnTo>
+                    <a:pt x="5486870" y="934864"/>
+                  </a:lnTo>
+                  <a:lnTo>
+                    <a:pt x="5416525" y="931331"/>
+                  </a:lnTo>
+                  <a:lnTo>
+                    <a:pt x="5346181" y="927700"/>
+                  </a:lnTo>
+                  <a:lnTo>
+                    <a:pt x="5275836" y="923970"/>
+                  </a:lnTo>
+                  <a:lnTo>
+                    <a:pt x="5205492" y="920137"/>
+                  </a:lnTo>
+                  <a:lnTo>
+                    <a:pt x="5135147" y="916200"/>
+                  </a:lnTo>
+                  <a:lnTo>
+                    <a:pt x="5064803" y="912154"/>
+                  </a:lnTo>
+                  <a:lnTo>
+                    <a:pt x="4994458" y="907997"/>
+                  </a:lnTo>
+                  <a:lnTo>
+                    <a:pt x="4924114" y="903726"/>
+                  </a:lnTo>
+                  <a:lnTo>
+                    <a:pt x="4853769" y="899338"/>
+                  </a:lnTo>
+                  <a:lnTo>
+                    <a:pt x="4783425" y="894830"/>
+                  </a:lnTo>
+                  <a:lnTo>
+                    <a:pt x="4713080" y="890198"/>
+                  </a:lnTo>
+                  <a:lnTo>
+                    <a:pt x="4642736" y="885439"/>
+                  </a:lnTo>
+                  <a:lnTo>
+                    <a:pt x="4572391" y="880549"/>
+                  </a:lnTo>
+                  <a:lnTo>
+                    <a:pt x="4502047" y="875525"/>
+                  </a:lnTo>
+                  <a:lnTo>
+                    <a:pt x="4431702" y="870363"/>
+                  </a:lnTo>
+                  <a:lnTo>
+                    <a:pt x="4361358" y="865060"/>
+                  </a:lnTo>
+                  <a:lnTo>
+                    <a:pt x="4291013" y="859611"/>
+                  </a:lnTo>
+                  <a:lnTo>
+                    <a:pt x="4220669" y="854013"/>
+                  </a:lnTo>
+                  <a:lnTo>
+                    <a:pt x="4150324" y="848261"/>
+                  </a:lnTo>
+                  <a:lnTo>
+                    <a:pt x="4079980" y="842351"/>
+                  </a:lnTo>
+                  <a:lnTo>
+                    <a:pt x="4009635" y="836279"/>
+                  </a:lnTo>
+                  <a:lnTo>
+                    <a:pt x="3939291" y="830040"/>
+                  </a:lnTo>
+                  <a:lnTo>
+                    <a:pt x="3868946" y="823631"/>
+                  </a:lnTo>
+                  <a:lnTo>
+                    <a:pt x="3798602" y="817045"/>
+                  </a:lnTo>
+                  <a:lnTo>
+                    <a:pt x="3728257" y="810279"/>
+                  </a:lnTo>
+                  <a:lnTo>
+                    <a:pt x="3657913" y="803327"/>
+                  </a:lnTo>
+                  <a:lnTo>
+                    <a:pt x="3587569" y="796184"/>
+                  </a:lnTo>
+                  <a:lnTo>
+                    <a:pt x="3517224" y="788846"/>
+                  </a:lnTo>
+                  <a:lnTo>
+                    <a:pt x="3446880" y="781305"/>
+                  </a:lnTo>
+                  <a:lnTo>
+                    <a:pt x="3376535" y="773559"/>
+                  </a:lnTo>
+                  <a:lnTo>
+                    <a:pt x="3306191" y="765599"/>
+                  </a:lnTo>
+                  <a:lnTo>
+                    <a:pt x="3235846" y="762424"/>
+                  </a:lnTo>
+                  <a:lnTo>
+                    <a:pt x="3165502" y="760158"/>
+                  </a:lnTo>
+                  <a:lnTo>
+                    <a:pt x="3095157" y="757875"/>
+                  </a:lnTo>
+                  <a:lnTo>
+                    <a:pt x="3024813" y="755575"/>
+                  </a:lnTo>
+                  <a:lnTo>
+                    <a:pt x="2954468" y="753258"/>
+                  </a:lnTo>
+                  <a:lnTo>
+                    <a:pt x="2884124" y="750923"/>
+                  </a:lnTo>
+                  <a:lnTo>
+                    <a:pt x="2813779" y="748571"/>
+                  </a:lnTo>
+                  <a:lnTo>
+                    <a:pt x="2743435" y="746201"/>
+                  </a:lnTo>
+                  <a:lnTo>
+                    <a:pt x="2673090" y="743813"/>
+                  </a:lnTo>
+                  <a:lnTo>
+                    <a:pt x="2602746" y="741407"/>
+                  </a:lnTo>
+                  <a:lnTo>
+                    <a:pt x="2532401" y="738983"/>
+                  </a:lnTo>
+                  <a:lnTo>
+                    <a:pt x="2462057" y="736541"/>
+                  </a:lnTo>
+                  <a:lnTo>
+                    <a:pt x="2391712" y="734081"/>
+                  </a:lnTo>
+                  <a:lnTo>
+                    <a:pt x="2321368" y="731602"/>
+                  </a:lnTo>
+                  <a:lnTo>
+                    <a:pt x="2251023" y="729104"/>
+                  </a:lnTo>
+                  <a:lnTo>
+                    <a:pt x="2180679" y="726588"/>
+                  </a:lnTo>
+                  <a:lnTo>
+                    <a:pt x="2110334" y="724052"/>
+                  </a:lnTo>
+                  <a:lnTo>
+                    <a:pt x="2039990" y="721498"/>
+                  </a:lnTo>
+                  <a:lnTo>
+                    <a:pt x="1969645" y="718924"/>
+                  </a:lnTo>
+                  <a:lnTo>
+                    <a:pt x="1899301" y="716331"/>
+                  </a:lnTo>
+                  <a:lnTo>
+                    <a:pt x="1828956" y="713719"/>
+                  </a:lnTo>
+                  <a:lnTo>
+                    <a:pt x="1758612" y="711087"/>
+                  </a:lnTo>
+                  <a:lnTo>
+                    <a:pt x="1688267" y="708435"/>
+                  </a:lnTo>
+                  <a:lnTo>
+                    <a:pt x="1617923" y="705763"/>
+                  </a:lnTo>
+                  <a:lnTo>
+                    <a:pt x="1547578" y="703071"/>
+                  </a:lnTo>
+                  <a:lnTo>
+                    <a:pt x="1477234" y="700358"/>
+                  </a:lnTo>
+                  <a:lnTo>
+                    <a:pt x="1406889" y="697626"/>
+                  </a:lnTo>
+                  <a:lnTo>
+                    <a:pt x="1336545" y="694872"/>
+                  </a:lnTo>
+                  <a:lnTo>
+                    <a:pt x="1266200" y="692099"/>
+                  </a:lnTo>
+                  <a:lnTo>
+                    <a:pt x="1195856" y="689304"/>
+                  </a:lnTo>
+                  <a:lnTo>
+                    <a:pt x="1125511" y="686488"/>
+                  </a:lnTo>
+                  <a:lnTo>
+                    <a:pt x="1055167" y="683651"/>
+                  </a:lnTo>
+                  <a:lnTo>
+                    <a:pt x="984822" y="680793"/>
+                  </a:lnTo>
+                  <a:lnTo>
+                    <a:pt x="914478" y="677913"/>
+                  </a:lnTo>
+                  <a:lnTo>
+                    <a:pt x="844133" y="675011"/>
+                  </a:lnTo>
+                  <a:lnTo>
+                    <a:pt x="773789" y="672088"/>
+                  </a:lnTo>
+                  <a:lnTo>
+                    <a:pt x="703444" y="669143"/>
+                  </a:lnTo>
+                  <a:lnTo>
+                    <a:pt x="633100" y="666175"/>
+                  </a:lnTo>
+                  <a:lnTo>
+                    <a:pt x="562755" y="663185"/>
+                  </a:lnTo>
+                  <a:lnTo>
+                    <a:pt x="492411" y="660173"/>
+                  </a:lnTo>
+                  <a:lnTo>
+                    <a:pt x="422066" y="657138"/>
+                  </a:lnTo>
+                  <a:lnTo>
+                    <a:pt x="351722" y="654080"/>
+                  </a:lnTo>
+                  <a:lnTo>
+                    <a:pt x="281377" y="651000"/>
+                  </a:lnTo>
+                  <a:lnTo>
+                    <a:pt x="211033" y="647896"/>
+                  </a:lnTo>
+                  <a:lnTo>
+                    <a:pt x="140688" y="644768"/>
+                  </a:lnTo>
+                  <a:lnTo>
+                    <a:pt x="70344" y="641618"/>
+                  </a:lnTo>
+                  <a:lnTo>
+                    <a:pt x="0" y="638443"/>
                   </a:lnTo>
                   <a:close/>
                 </a:path>
@@ -3584,643 +3619,318 @@
         </p:sp>
         <p:sp>
           <p:nvSpPr>
-            <p:cNvPr id="21" name="pl21"/>
-            <p:cNvSpPr/>
-            <p:nvPr/>
-          </p:nvSpPr>
-          <p:spPr>
-            <a:xfrm>
-              <a:off x="1172049" y="2609837"/>
-              <a:ext cx="7090630" cy="2386303"/>
-            </a:xfrm>
-            <a:custGeom>
-              <a:avLst/>
-              <a:pathLst>
-                <a:path w="7090630" h="2386303">
-                  <a:moveTo>
-                    <a:pt x="0" y="0"/>
-                  </a:moveTo>
-                  <a:lnTo>
-                    <a:pt x="71622" y="78710"/>
-                  </a:lnTo>
-                  <a:lnTo>
-                    <a:pt x="143245" y="155318"/>
-                  </a:lnTo>
-                  <a:lnTo>
-                    <a:pt x="214867" y="229881"/>
-                  </a:lnTo>
-                  <a:lnTo>
-                    <a:pt x="286490" y="302452"/>
-                  </a:lnTo>
-                  <a:lnTo>
-                    <a:pt x="358112" y="373086"/>
-                  </a:lnTo>
-                  <a:lnTo>
-                    <a:pt x="429735" y="441833"/>
-                  </a:lnTo>
-                  <a:lnTo>
-                    <a:pt x="501357" y="508744"/>
-                  </a:lnTo>
-                  <a:lnTo>
-                    <a:pt x="572980" y="573869"/>
-                  </a:lnTo>
-                  <a:lnTo>
-                    <a:pt x="644602" y="637254"/>
-                  </a:lnTo>
-                  <a:lnTo>
-                    <a:pt x="716225" y="698947"/>
-                  </a:lnTo>
-                  <a:lnTo>
-                    <a:pt x="787847" y="758992"/>
-                  </a:lnTo>
-                  <a:lnTo>
-                    <a:pt x="859470" y="817433"/>
-                  </a:lnTo>
-                  <a:lnTo>
-                    <a:pt x="931092" y="874314"/>
-                  </a:lnTo>
-                  <a:lnTo>
-                    <a:pt x="1002715" y="929676"/>
-                  </a:lnTo>
-                  <a:lnTo>
-                    <a:pt x="1074337" y="983559"/>
-                  </a:lnTo>
-                  <a:lnTo>
-                    <a:pt x="1145960" y="1036004"/>
-                  </a:lnTo>
-                  <a:lnTo>
-                    <a:pt x="1217582" y="1087048"/>
-                  </a:lnTo>
-                  <a:lnTo>
-                    <a:pt x="1289205" y="1136729"/>
-                  </a:lnTo>
-                  <a:lnTo>
-                    <a:pt x="1360827" y="1185083"/>
-                  </a:lnTo>
-                  <a:lnTo>
-                    <a:pt x="1432450" y="1232146"/>
-                  </a:lnTo>
-                  <a:lnTo>
-                    <a:pt x="1504073" y="1277952"/>
-                  </a:lnTo>
-                  <a:lnTo>
-                    <a:pt x="1575695" y="1322535"/>
-                  </a:lnTo>
-                  <a:lnTo>
-                    <a:pt x="1647318" y="1365927"/>
-                  </a:lnTo>
-                  <a:lnTo>
-                    <a:pt x="1718940" y="1408160"/>
-                  </a:lnTo>
-                  <a:lnTo>
-                    <a:pt x="1790563" y="1449266"/>
-                  </a:lnTo>
-                  <a:lnTo>
-                    <a:pt x="1862185" y="1489274"/>
-                  </a:lnTo>
-                  <a:lnTo>
-                    <a:pt x="1933808" y="1528213"/>
-                  </a:lnTo>
-                  <a:lnTo>
-                    <a:pt x="2005430" y="1566113"/>
-                  </a:lnTo>
-                  <a:lnTo>
-                    <a:pt x="2077053" y="1603000"/>
-                  </a:lnTo>
-                  <a:lnTo>
-                    <a:pt x="2148675" y="1638903"/>
-                  </a:lnTo>
-                  <a:lnTo>
-                    <a:pt x="2220298" y="1673846"/>
-                  </a:lnTo>
-                  <a:lnTo>
-                    <a:pt x="2291920" y="1707857"/>
-                  </a:lnTo>
-                  <a:lnTo>
-                    <a:pt x="2363543" y="1740959"/>
-                  </a:lnTo>
-                  <a:lnTo>
-                    <a:pt x="2435165" y="1773177"/>
-                  </a:lnTo>
-                  <a:lnTo>
-                    <a:pt x="2506788" y="1804535"/>
-                  </a:lnTo>
-                  <a:lnTo>
-                    <a:pt x="2578410" y="1835056"/>
-                  </a:lnTo>
-                  <a:lnTo>
-                    <a:pt x="2650033" y="1864761"/>
-                  </a:lnTo>
-                  <a:lnTo>
-                    <a:pt x="2721655" y="1893673"/>
-                  </a:lnTo>
-                  <a:lnTo>
-                    <a:pt x="2793278" y="1921813"/>
-                  </a:lnTo>
-                  <a:lnTo>
-                    <a:pt x="2864901" y="1949202"/>
-                  </a:lnTo>
-                  <a:lnTo>
-                    <a:pt x="2936523" y="1975859"/>
-                  </a:lnTo>
-                  <a:lnTo>
-                    <a:pt x="3008146" y="2001804"/>
-                  </a:lnTo>
-                  <a:lnTo>
-                    <a:pt x="3079768" y="2027056"/>
-                  </a:lnTo>
-                  <a:lnTo>
-                    <a:pt x="3151391" y="2051634"/>
-                  </a:lnTo>
-                  <a:lnTo>
-                    <a:pt x="3223013" y="2075556"/>
-                  </a:lnTo>
-                  <a:lnTo>
-                    <a:pt x="3294636" y="2098839"/>
-                  </a:lnTo>
-                  <a:lnTo>
-                    <a:pt x="3366258" y="2118934"/>
-                  </a:lnTo>
-                  <a:lnTo>
-                    <a:pt x="3437881" y="2125119"/>
-                  </a:lnTo>
-                  <a:lnTo>
-                    <a:pt x="3509503" y="2131258"/>
-                  </a:lnTo>
-                  <a:lnTo>
-                    <a:pt x="3581126" y="2137351"/>
-                  </a:lnTo>
-                  <a:lnTo>
-                    <a:pt x="3652748" y="2143399"/>
-                  </a:lnTo>
-                  <a:lnTo>
-                    <a:pt x="3724371" y="2149401"/>
-                  </a:lnTo>
-                  <a:lnTo>
-                    <a:pt x="3795993" y="2155359"/>
-                  </a:lnTo>
-                  <a:lnTo>
-                    <a:pt x="3867616" y="2161272"/>
-                  </a:lnTo>
-                  <a:lnTo>
-                    <a:pt x="3939238" y="2167142"/>
-                  </a:lnTo>
-                  <a:lnTo>
-                    <a:pt x="4010861" y="2172967"/>
-                  </a:lnTo>
-                  <a:lnTo>
-                    <a:pt x="4082483" y="2178749"/>
-                  </a:lnTo>
-                  <a:lnTo>
-                    <a:pt x="4154106" y="2184487"/>
-                  </a:lnTo>
-                  <a:lnTo>
-                    <a:pt x="4225729" y="2190183"/>
-                  </a:lnTo>
-                  <a:lnTo>
-                    <a:pt x="4297351" y="2195836"/>
-                  </a:lnTo>
-                  <a:lnTo>
-                    <a:pt x="4368974" y="2201448"/>
-                  </a:lnTo>
-                  <a:lnTo>
-                    <a:pt x="4440596" y="2207017"/>
-                  </a:lnTo>
-                  <a:lnTo>
-                    <a:pt x="4512219" y="2212544"/>
-                  </a:lnTo>
-                  <a:lnTo>
-                    <a:pt x="4583841" y="2218031"/>
-                  </a:lnTo>
-                  <a:lnTo>
-                    <a:pt x="4655464" y="2223476"/>
-                  </a:lnTo>
-                  <a:lnTo>
-                    <a:pt x="4727086" y="2228881"/>
-                  </a:lnTo>
-                  <a:lnTo>
-                    <a:pt x="4798709" y="2234245"/>
-                  </a:lnTo>
-                  <a:lnTo>
-                    <a:pt x="4870331" y="2239570"/>
-                  </a:lnTo>
-                  <a:lnTo>
-                    <a:pt x="4941954" y="2244854"/>
-                  </a:lnTo>
-                  <a:lnTo>
-                    <a:pt x="5013576" y="2250099"/>
-                  </a:lnTo>
-                  <a:lnTo>
-                    <a:pt x="5085199" y="2255305"/>
-                  </a:lnTo>
-                  <a:lnTo>
-                    <a:pt x="5156821" y="2260472"/>
-                  </a:lnTo>
-                  <a:lnTo>
-                    <a:pt x="5228444" y="2265601"/>
-                  </a:lnTo>
-                  <a:lnTo>
-                    <a:pt x="5300066" y="2270691"/>
-                  </a:lnTo>
-                  <a:lnTo>
-                    <a:pt x="5371689" y="2275743"/>
-                  </a:lnTo>
-                  <a:lnTo>
-                    <a:pt x="5443311" y="2280758"/>
-                  </a:lnTo>
-                  <a:lnTo>
-                    <a:pt x="5514934" y="2285735"/>
-                  </a:lnTo>
-                  <a:lnTo>
-                    <a:pt x="5586557" y="2290675"/>
-                  </a:lnTo>
-                  <a:lnTo>
-                    <a:pt x="5658179" y="2295578"/>
-                  </a:lnTo>
-                  <a:lnTo>
-                    <a:pt x="5729802" y="2300444"/>
-                  </a:lnTo>
-                  <a:lnTo>
-                    <a:pt x="5801424" y="2305275"/>
-                  </a:lnTo>
-                  <a:lnTo>
-                    <a:pt x="5873047" y="2310069"/>
-                  </a:lnTo>
-                  <a:lnTo>
-                    <a:pt x="5944669" y="2314827"/>
-                  </a:lnTo>
-                  <a:lnTo>
-                    <a:pt x="6016292" y="2319550"/>
-                  </a:lnTo>
-                  <a:lnTo>
-                    <a:pt x="6087914" y="2324237"/>
-                  </a:lnTo>
-                  <a:lnTo>
-                    <a:pt x="6159537" y="2328890"/>
-                  </a:lnTo>
-                  <a:lnTo>
-                    <a:pt x="6231159" y="2333507"/>
-                  </a:lnTo>
-                  <a:lnTo>
-                    <a:pt x="6302782" y="2338091"/>
-                  </a:lnTo>
-                  <a:lnTo>
-                    <a:pt x="6374404" y="2342640"/>
-                  </a:lnTo>
-                  <a:lnTo>
-                    <a:pt x="6446027" y="2347155"/>
-                  </a:lnTo>
-                  <a:lnTo>
-                    <a:pt x="6517649" y="2351636"/>
-                  </a:lnTo>
-                  <a:lnTo>
-                    <a:pt x="6589272" y="2356084"/>
-                  </a:lnTo>
-                  <a:lnTo>
-                    <a:pt x="6660894" y="2360499"/>
-                  </a:lnTo>
-                  <a:lnTo>
-                    <a:pt x="6732517" y="2364881"/>
-                  </a:lnTo>
-                  <a:lnTo>
-                    <a:pt x="6804139" y="2369230"/>
-                  </a:lnTo>
-                  <a:lnTo>
-                    <a:pt x="6875762" y="2373546"/>
-                  </a:lnTo>
-                  <a:lnTo>
-                    <a:pt x="6947385" y="2377830"/>
-                  </a:lnTo>
-                  <a:lnTo>
-                    <a:pt x="7019007" y="2382083"/>
-                  </a:lnTo>
-                  <a:lnTo>
-                    <a:pt x="7090630" y="2386303"/>
-                  </a:lnTo>
-                </a:path>
-              </a:pathLst>
-            </a:custGeom>
-          </p:spPr>
-          <p:txBody>
-            <a:bodyPr/>
-            <a:lstStyle/>
-            <a:p/>
-          </p:txBody>
-        </p:sp>
-        <p:sp>
-          <p:nvSpPr>
             <p:cNvPr id="22" name="pl22"/>
             <p:cNvSpPr/>
             <p:nvPr/>
           </p:nvSpPr>
           <p:spPr>
             <a:xfrm>
-              <a:off x="1172049" y="4378984"/>
-              <a:ext cx="7090630" cy="976126"/>
+              <a:off x="1235312" y="2336642"/>
+              <a:ext cx="6964104" cy="861160"/>
             </a:xfrm>
             <a:custGeom>
               <a:avLst/>
               <a:pathLst>
-                <a:path w="7090630" h="976126">
+                <a:path w="6964104" h="861160">
                   <a:moveTo>
-                    <a:pt x="7090630" y="976126"/>
+                    <a:pt x="0" y="0"/>
                   </a:moveTo>
                   <a:lnTo>
-                    <a:pt x="7019007" y="970580"/>
-                  </a:lnTo>
-                  <a:lnTo>
-                    <a:pt x="6947385" y="964882"/>
-                  </a:lnTo>
-                  <a:lnTo>
-                    <a:pt x="6875762" y="959027"/>
-                  </a:lnTo>
-                  <a:lnTo>
-                    <a:pt x="6804139" y="953012"/>
-                  </a:lnTo>
-                  <a:lnTo>
-                    <a:pt x="6732517" y="946831"/>
-                  </a:lnTo>
-                  <a:lnTo>
-                    <a:pt x="6660894" y="940481"/>
-                  </a:lnTo>
-                  <a:lnTo>
-                    <a:pt x="6589272" y="933957"/>
-                  </a:lnTo>
-                  <a:lnTo>
-                    <a:pt x="6517649" y="927254"/>
-                  </a:lnTo>
-                  <a:lnTo>
-                    <a:pt x="6446027" y="920367"/>
-                  </a:lnTo>
-                  <a:lnTo>
-                    <a:pt x="6374404" y="913290"/>
-                  </a:lnTo>
-                  <a:lnTo>
-                    <a:pt x="6302782" y="906020"/>
-                  </a:lnTo>
-                  <a:lnTo>
-                    <a:pt x="6231159" y="898550"/>
-                  </a:lnTo>
-                  <a:lnTo>
-                    <a:pt x="6159537" y="890876"/>
-                  </a:lnTo>
-                  <a:lnTo>
-                    <a:pt x="6087914" y="882990"/>
-                  </a:lnTo>
-                  <a:lnTo>
-                    <a:pt x="6016292" y="874889"/>
-                  </a:lnTo>
-                  <a:lnTo>
-                    <a:pt x="5944669" y="866565"/>
-                  </a:lnTo>
-                  <a:lnTo>
-                    <a:pt x="5873047" y="858012"/>
-                  </a:lnTo>
-                  <a:lnTo>
-                    <a:pt x="5801424" y="849226"/>
-                  </a:lnTo>
-                  <a:lnTo>
-                    <a:pt x="5729802" y="840197"/>
-                  </a:lnTo>
-                  <a:lnTo>
-                    <a:pt x="5658179" y="830922"/>
-                  </a:lnTo>
-                  <a:lnTo>
-                    <a:pt x="5586557" y="821391"/>
-                  </a:lnTo>
-                  <a:lnTo>
-                    <a:pt x="5514934" y="811600"/>
-                  </a:lnTo>
-                  <a:lnTo>
-                    <a:pt x="5443311" y="801539"/>
-                  </a:lnTo>
-                  <a:lnTo>
-                    <a:pt x="5371689" y="791203"/>
-                  </a:lnTo>
-                  <a:lnTo>
-                    <a:pt x="5300066" y="780583"/>
-                  </a:lnTo>
-                  <a:lnTo>
-                    <a:pt x="5228444" y="769671"/>
-                  </a:lnTo>
-                  <a:lnTo>
-                    <a:pt x="5156821" y="758460"/>
-                  </a:lnTo>
-                  <a:lnTo>
-                    <a:pt x="5085199" y="746942"/>
-                  </a:lnTo>
-                  <a:lnTo>
-                    <a:pt x="5013576" y="735107"/>
-                  </a:lnTo>
-                  <a:lnTo>
-                    <a:pt x="4941954" y="722948"/>
-                  </a:lnTo>
-                  <a:lnTo>
-                    <a:pt x="4870331" y="710455"/>
-                  </a:lnTo>
-                  <a:lnTo>
-                    <a:pt x="4798709" y="697620"/>
-                  </a:lnTo>
-                  <a:lnTo>
-                    <a:pt x="4727086" y="684432"/>
-                  </a:lnTo>
-                  <a:lnTo>
-                    <a:pt x="4655464" y="670882"/>
-                  </a:lnTo>
-                  <a:lnTo>
-                    <a:pt x="4583841" y="656961"/>
-                  </a:lnTo>
-                  <a:lnTo>
-                    <a:pt x="4512219" y="642658"/>
-                  </a:lnTo>
-                  <a:lnTo>
-                    <a:pt x="4440596" y="627962"/>
-                  </a:lnTo>
-                  <a:lnTo>
-                    <a:pt x="4368974" y="612863"/>
-                  </a:lnTo>
-                  <a:lnTo>
-                    <a:pt x="4297351" y="597350"/>
-                  </a:lnTo>
-                  <a:lnTo>
-                    <a:pt x="4225729" y="581411"/>
-                  </a:lnTo>
-                  <a:lnTo>
-                    <a:pt x="4154106" y="565034"/>
-                  </a:lnTo>
-                  <a:lnTo>
-                    <a:pt x="4082483" y="548209"/>
-                  </a:lnTo>
-                  <a:lnTo>
-                    <a:pt x="4010861" y="530922"/>
-                  </a:lnTo>
-                  <a:lnTo>
-                    <a:pt x="3939238" y="513160"/>
-                  </a:lnTo>
-                  <a:lnTo>
-                    <a:pt x="3867616" y="494911"/>
-                  </a:lnTo>
-                  <a:lnTo>
-                    <a:pt x="3795993" y="476161"/>
-                  </a:lnTo>
-                  <a:lnTo>
-                    <a:pt x="3724371" y="456897"/>
-                  </a:lnTo>
-                  <a:lnTo>
-                    <a:pt x="3652748" y="437105"/>
-                  </a:lnTo>
-                  <a:lnTo>
-                    <a:pt x="3581126" y="416769"/>
-                  </a:lnTo>
-                  <a:lnTo>
-                    <a:pt x="3509503" y="395875"/>
-                  </a:lnTo>
-                  <a:lnTo>
-                    <a:pt x="3437881" y="374409"/>
-                  </a:lnTo>
-                  <a:lnTo>
-                    <a:pt x="3366258" y="352353"/>
-                  </a:lnTo>
-                  <a:lnTo>
-                    <a:pt x="3294636" y="343554"/>
-                  </a:lnTo>
-                  <a:lnTo>
-                    <a:pt x="3223013" y="337276"/>
-                  </a:lnTo>
-                  <a:lnTo>
-                    <a:pt x="3151391" y="330950"/>
-                  </a:lnTo>
-                  <a:lnTo>
-                    <a:pt x="3079768" y="324576"/>
-                  </a:lnTo>
-                  <a:lnTo>
-                    <a:pt x="3008146" y="318155"/>
-                  </a:lnTo>
-                  <a:lnTo>
-                    <a:pt x="2936523" y="311685"/>
-                  </a:lnTo>
-                  <a:lnTo>
-                    <a:pt x="2864901" y="305167"/>
-                  </a:lnTo>
-                  <a:lnTo>
-                    <a:pt x="2793278" y="298600"/>
-                  </a:lnTo>
-                  <a:lnTo>
-                    <a:pt x="2721655" y="291983"/>
-                  </a:lnTo>
-                  <a:lnTo>
-                    <a:pt x="2650033" y="285316"/>
-                  </a:lnTo>
-                  <a:lnTo>
-                    <a:pt x="2578410" y="278600"/>
-                  </a:lnTo>
-                  <a:lnTo>
-                    <a:pt x="2506788" y="271832"/>
-                  </a:lnTo>
-                  <a:lnTo>
-                    <a:pt x="2435165" y="265014"/>
-                  </a:lnTo>
-                  <a:lnTo>
-                    <a:pt x="2363543" y="258145"/>
-                  </a:lnTo>
-                  <a:lnTo>
-                    <a:pt x="2291920" y="251224"/>
-                  </a:lnTo>
-                  <a:lnTo>
-                    <a:pt x="2220298" y="244251"/>
-                  </a:lnTo>
-                  <a:lnTo>
-                    <a:pt x="2148675" y="237225"/>
-                  </a:lnTo>
-                  <a:lnTo>
-                    <a:pt x="2077053" y="230147"/>
-                  </a:lnTo>
-                  <a:lnTo>
-                    <a:pt x="2005430" y="223015"/>
-                  </a:lnTo>
-                  <a:lnTo>
-                    <a:pt x="1933808" y="215830"/>
-                  </a:lnTo>
-                  <a:lnTo>
-                    <a:pt x="1862185" y="208590"/>
-                  </a:lnTo>
-                  <a:lnTo>
-                    <a:pt x="1790563" y="201297"/>
-                  </a:lnTo>
-                  <a:lnTo>
-                    <a:pt x="1718940" y="193948"/>
-                  </a:lnTo>
-                  <a:lnTo>
-                    <a:pt x="1647318" y="186544"/>
-                  </a:lnTo>
-                  <a:lnTo>
-                    <a:pt x="1575695" y="179084"/>
-                  </a:lnTo>
-                  <a:lnTo>
-                    <a:pt x="1504073" y="171569"/>
-                  </a:lnTo>
-                  <a:lnTo>
-                    <a:pt x="1432450" y="163996"/>
-                  </a:lnTo>
-                  <a:lnTo>
-                    <a:pt x="1360827" y="156367"/>
-                  </a:lnTo>
-                  <a:lnTo>
-                    <a:pt x="1289205" y="148680"/>
-                  </a:lnTo>
-                  <a:lnTo>
-                    <a:pt x="1217582" y="140936"/>
-                  </a:lnTo>
-                  <a:lnTo>
-                    <a:pt x="1145960" y="133133"/>
-                  </a:lnTo>
-                  <a:lnTo>
-                    <a:pt x="1074337" y="125272"/>
-                  </a:lnTo>
-                  <a:lnTo>
-                    <a:pt x="1002715" y="117351"/>
-                  </a:lnTo>
-                  <a:lnTo>
-                    <a:pt x="931092" y="109371"/>
-                  </a:lnTo>
-                  <a:lnTo>
-                    <a:pt x="859470" y="101331"/>
-                  </a:lnTo>
-                  <a:lnTo>
-                    <a:pt x="787847" y="93230"/>
-                  </a:lnTo>
-                  <a:lnTo>
-                    <a:pt x="716225" y="85069"/>
-                  </a:lnTo>
-                  <a:lnTo>
-                    <a:pt x="644602" y="76846"/>
-                  </a:lnTo>
-                  <a:lnTo>
-                    <a:pt x="572980" y="68561"/>
-                  </a:lnTo>
-                  <a:lnTo>
-                    <a:pt x="501357" y="60214"/>
-                  </a:lnTo>
-                  <a:lnTo>
-                    <a:pt x="429735" y="51804"/>
-                  </a:lnTo>
-                  <a:lnTo>
-                    <a:pt x="358112" y="43331"/>
-                  </a:lnTo>
-                  <a:lnTo>
-                    <a:pt x="286490" y="34794"/>
-                  </a:lnTo>
-                  <a:lnTo>
-                    <a:pt x="214867" y="26193"/>
-                  </a:lnTo>
-                  <a:lnTo>
-                    <a:pt x="143245" y="17527"/>
-                  </a:lnTo>
-                  <a:lnTo>
-                    <a:pt x="71622" y="8796"/>
-                  </a:lnTo>
-                  <a:lnTo>
-                    <a:pt x="0" y="0"/>
+                    <a:pt x="70344" y="28404"/>
+                  </a:lnTo>
+                  <a:lnTo>
+                    <a:pt x="140688" y="56050"/>
+                  </a:lnTo>
+                  <a:lnTo>
+                    <a:pt x="211033" y="82958"/>
+                  </a:lnTo>
+                  <a:lnTo>
+                    <a:pt x="281377" y="109148"/>
+                  </a:lnTo>
+                  <a:lnTo>
+                    <a:pt x="351722" y="134638"/>
+                  </a:lnTo>
+                  <a:lnTo>
+                    <a:pt x="422066" y="159447"/>
+                  </a:lnTo>
+                  <a:lnTo>
+                    <a:pt x="492411" y="183594"/>
+                  </a:lnTo>
+                  <a:lnTo>
+                    <a:pt x="562755" y="207095"/>
+                  </a:lnTo>
+                  <a:lnTo>
+                    <a:pt x="633100" y="229970"/>
+                  </a:lnTo>
+                  <a:lnTo>
+                    <a:pt x="703444" y="252233"/>
+                  </a:lnTo>
+                  <a:lnTo>
+                    <a:pt x="773789" y="273902"/>
+                  </a:lnTo>
+                  <a:lnTo>
+                    <a:pt x="844133" y="294992"/>
+                  </a:lnTo>
+                  <a:lnTo>
+                    <a:pt x="914478" y="315519"/>
+                  </a:lnTo>
+                  <a:lnTo>
+                    <a:pt x="984822" y="335498"/>
+                  </a:lnTo>
+                  <a:lnTo>
+                    <a:pt x="1055167" y="354943"/>
+                  </a:lnTo>
+                  <a:lnTo>
+                    <a:pt x="1125511" y="373869"/>
+                  </a:lnTo>
+                  <a:lnTo>
+                    <a:pt x="1195856" y="392290"/>
+                  </a:lnTo>
+                  <a:lnTo>
+                    <a:pt x="1266200" y="410218"/>
+                  </a:lnTo>
+                  <a:lnTo>
+                    <a:pt x="1336545" y="427668"/>
+                  </a:lnTo>
+                  <a:lnTo>
+                    <a:pt x="1406889" y="444652"/>
+                  </a:lnTo>
+                  <a:lnTo>
+                    <a:pt x="1477234" y="461182"/>
+                  </a:lnTo>
+                  <a:lnTo>
+                    <a:pt x="1547578" y="477271"/>
+                  </a:lnTo>
+                  <a:lnTo>
+                    <a:pt x="1617923" y="492931"/>
+                  </a:lnTo>
+                  <a:lnTo>
+                    <a:pt x="1688267" y="508172"/>
+                  </a:lnTo>
+                  <a:lnTo>
+                    <a:pt x="1758612" y="523006"/>
+                  </a:lnTo>
+                  <a:lnTo>
+                    <a:pt x="1828956" y="537444"/>
+                  </a:lnTo>
+                  <a:lnTo>
+                    <a:pt x="1899301" y="551496"/>
+                  </a:lnTo>
+                  <a:lnTo>
+                    <a:pt x="1969645" y="565173"/>
+                  </a:lnTo>
+                  <a:lnTo>
+                    <a:pt x="2039990" y="578485"/>
+                  </a:lnTo>
+                  <a:lnTo>
+                    <a:pt x="2110334" y="591441"/>
+                  </a:lnTo>
+                  <a:lnTo>
+                    <a:pt x="2180679" y="604051"/>
+                  </a:lnTo>
+                  <a:lnTo>
+                    <a:pt x="2251023" y="616325"/>
+                  </a:lnTo>
+                  <a:lnTo>
+                    <a:pt x="2321368" y="628271"/>
+                  </a:lnTo>
+                  <a:lnTo>
+                    <a:pt x="2391712" y="639898"/>
+                  </a:lnTo>
+                  <a:lnTo>
+                    <a:pt x="2462057" y="651214"/>
+                  </a:lnTo>
+                  <a:lnTo>
+                    <a:pt x="2532401" y="662228"/>
+                  </a:lnTo>
+                  <a:lnTo>
+                    <a:pt x="2602746" y="672948"/>
+                  </a:lnTo>
+                  <a:lnTo>
+                    <a:pt x="2673090" y="683382"/>
+                  </a:lnTo>
+                  <a:lnTo>
+                    <a:pt x="2743435" y="693537"/>
+                  </a:lnTo>
+                  <a:lnTo>
+                    <a:pt x="2813779" y="703421"/>
+                  </a:lnTo>
+                  <a:lnTo>
+                    <a:pt x="2884124" y="713041"/>
+                  </a:lnTo>
+                  <a:lnTo>
+                    <a:pt x="2954468" y="722404"/>
+                  </a:lnTo>
+                  <a:lnTo>
+                    <a:pt x="3024813" y="731517"/>
+                  </a:lnTo>
+                  <a:lnTo>
+                    <a:pt x="3095157" y="740386"/>
+                  </a:lnTo>
+                  <a:lnTo>
+                    <a:pt x="3165502" y="749019"/>
+                  </a:lnTo>
+                  <a:lnTo>
+                    <a:pt x="3235846" y="757421"/>
+                  </a:lnTo>
+                  <a:lnTo>
+                    <a:pt x="3306191" y="764673"/>
+                  </a:lnTo>
+                  <a:lnTo>
+                    <a:pt x="3376535" y="766905"/>
+                  </a:lnTo>
+                  <a:lnTo>
+                    <a:pt x="3446880" y="769120"/>
+                  </a:lnTo>
+                  <a:lnTo>
+                    <a:pt x="3517224" y="771319"/>
+                  </a:lnTo>
+                  <a:lnTo>
+                    <a:pt x="3587569" y="773502"/>
+                  </a:lnTo>
+                  <a:lnTo>
+                    <a:pt x="3657913" y="775668"/>
+                  </a:lnTo>
+                  <a:lnTo>
+                    <a:pt x="3728257" y="777818"/>
+                  </a:lnTo>
+                  <a:lnTo>
+                    <a:pt x="3798602" y="779952"/>
+                  </a:lnTo>
+                  <a:lnTo>
+                    <a:pt x="3868946" y="782070"/>
+                  </a:lnTo>
+                  <a:lnTo>
+                    <a:pt x="3939291" y="784172"/>
+                  </a:lnTo>
+                  <a:lnTo>
+                    <a:pt x="4009635" y="786259"/>
+                  </a:lnTo>
+                  <a:lnTo>
+                    <a:pt x="4079980" y="788330"/>
+                  </a:lnTo>
+                  <a:lnTo>
+                    <a:pt x="4150324" y="790385"/>
+                  </a:lnTo>
+                  <a:lnTo>
+                    <a:pt x="4220669" y="792425"/>
+                  </a:lnTo>
+                  <a:lnTo>
+                    <a:pt x="4291013" y="794450"/>
+                  </a:lnTo>
+                  <a:lnTo>
+                    <a:pt x="4361358" y="796460"/>
+                  </a:lnTo>
+                  <a:lnTo>
+                    <a:pt x="4431702" y="798455"/>
+                  </a:lnTo>
+                  <a:lnTo>
+                    <a:pt x="4502047" y="800435"/>
+                  </a:lnTo>
+                  <a:lnTo>
+                    <a:pt x="4572391" y="802400"/>
+                  </a:lnTo>
+                  <a:lnTo>
+                    <a:pt x="4642736" y="804350"/>
+                  </a:lnTo>
+                  <a:lnTo>
+                    <a:pt x="4713080" y="806286"/>
+                  </a:lnTo>
+                  <a:lnTo>
+                    <a:pt x="4783425" y="808208"/>
+                  </a:lnTo>
+                  <a:lnTo>
+                    <a:pt x="4853769" y="810115"/>
+                  </a:lnTo>
+                  <a:lnTo>
+                    <a:pt x="4924114" y="812008"/>
+                  </a:lnTo>
+                  <a:lnTo>
+                    <a:pt x="4994458" y="813886"/>
+                  </a:lnTo>
+                  <a:lnTo>
+                    <a:pt x="5064803" y="815751"/>
+                  </a:lnTo>
+                  <a:lnTo>
+                    <a:pt x="5135147" y="817602"/>
+                  </a:lnTo>
+                  <a:lnTo>
+                    <a:pt x="5205492" y="819439"/>
+                  </a:lnTo>
+                  <a:lnTo>
+                    <a:pt x="5275836" y="821262"/>
+                  </a:lnTo>
+                  <a:lnTo>
+                    <a:pt x="5346181" y="823072"/>
+                  </a:lnTo>
+                  <a:lnTo>
+                    <a:pt x="5416525" y="824868"/>
+                  </a:lnTo>
+                  <a:lnTo>
+                    <a:pt x="5486870" y="826650"/>
+                  </a:lnTo>
+                  <a:lnTo>
+                    <a:pt x="5557214" y="828420"/>
+                  </a:lnTo>
+                  <a:lnTo>
+                    <a:pt x="5627559" y="830176"/>
+                  </a:lnTo>
+                  <a:lnTo>
+                    <a:pt x="5697903" y="831919"/>
+                  </a:lnTo>
+                  <a:lnTo>
+                    <a:pt x="5768248" y="833649"/>
+                  </a:lnTo>
+                  <a:lnTo>
+                    <a:pt x="5838592" y="835366"/>
+                  </a:lnTo>
+                  <a:lnTo>
+                    <a:pt x="5908937" y="837071"/>
+                  </a:lnTo>
+                  <a:lnTo>
+                    <a:pt x="5979281" y="838762"/>
+                  </a:lnTo>
+                  <a:lnTo>
+                    <a:pt x="6049626" y="840441"/>
+                  </a:lnTo>
+                  <a:lnTo>
+                    <a:pt x="6119970" y="842108"/>
+                  </a:lnTo>
+                  <a:lnTo>
+                    <a:pt x="6190315" y="843762"/>
+                  </a:lnTo>
+                  <a:lnTo>
+                    <a:pt x="6260659" y="845403"/>
+                  </a:lnTo>
+                  <a:lnTo>
+                    <a:pt x="6331004" y="847033"/>
+                  </a:lnTo>
+                  <a:lnTo>
+                    <a:pt x="6401348" y="848650"/>
+                  </a:lnTo>
+                  <a:lnTo>
+                    <a:pt x="6471693" y="850255"/>
+                  </a:lnTo>
+                  <a:lnTo>
+                    <a:pt x="6542037" y="851848"/>
+                  </a:lnTo>
+                  <a:lnTo>
+                    <a:pt x="6612382" y="853429"/>
+                  </a:lnTo>
+                  <a:lnTo>
+                    <a:pt x="6682726" y="854999"/>
+                  </a:lnTo>
+                  <a:lnTo>
+                    <a:pt x="6753071" y="856557"/>
+                  </a:lnTo>
+                  <a:lnTo>
+                    <a:pt x="6823415" y="858103"/>
+                  </a:lnTo>
+                  <a:lnTo>
+                    <a:pt x="6893760" y="859637"/>
+                  </a:lnTo>
+                  <a:lnTo>
+                    <a:pt x="6964104" y="861160"/>
                   </a:lnTo>
                 </a:path>
               </a:pathLst>
@@ -4240,312 +3950,637 @@
           </p:nvSpPr>
           <p:spPr>
             <a:xfrm>
-              <a:off x="1172049" y="3693695"/>
-              <a:ext cx="7090630" cy="1526772"/>
+              <a:off x="1235312" y="2975086"/>
+              <a:ext cx="6964104" cy="352261"/>
             </a:xfrm>
             <a:custGeom>
               <a:avLst/>
               <a:pathLst>
-                <a:path w="7090630" h="1526772">
+                <a:path w="6964104" h="352261">
+                  <a:moveTo>
+                    <a:pt x="6964104" y="352261"/>
+                  </a:moveTo>
+                  <a:lnTo>
+                    <a:pt x="6893760" y="350259"/>
+                  </a:lnTo>
+                  <a:lnTo>
+                    <a:pt x="6823415" y="348203"/>
+                  </a:lnTo>
+                  <a:lnTo>
+                    <a:pt x="6753071" y="346090"/>
+                  </a:lnTo>
+                  <a:lnTo>
+                    <a:pt x="6682726" y="343919"/>
+                  </a:lnTo>
+                  <a:lnTo>
+                    <a:pt x="6612382" y="341689"/>
+                  </a:lnTo>
+                  <a:lnTo>
+                    <a:pt x="6542037" y="339397"/>
+                  </a:lnTo>
+                  <a:lnTo>
+                    <a:pt x="6471693" y="337043"/>
+                  </a:lnTo>
+                  <a:lnTo>
+                    <a:pt x="6401348" y="334624"/>
+                  </a:lnTo>
+                  <a:lnTo>
+                    <a:pt x="6331004" y="332138"/>
+                  </a:lnTo>
+                  <a:lnTo>
+                    <a:pt x="6260659" y="329585"/>
+                  </a:lnTo>
+                  <a:lnTo>
+                    <a:pt x="6190315" y="326961"/>
+                  </a:lnTo>
+                  <a:lnTo>
+                    <a:pt x="6119970" y="324265"/>
+                  </a:lnTo>
+                  <a:lnTo>
+                    <a:pt x="6049626" y="321496"/>
+                  </a:lnTo>
+                  <a:lnTo>
+                    <a:pt x="5979281" y="318650"/>
+                  </a:lnTo>
+                  <a:lnTo>
+                    <a:pt x="5908937" y="315726"/>
+                  </a:lnTo>
+                  <a:lnTo>
+                    <a:pt x="5838592" y="312723"/>
+                  </a:lnTo>
+                  <a:lnTo>
+                    <a:pt x="5768248" y="309636"/>
+                  </a:lnTo>
+                  <a:lnTo>
+                    <a:pt x="5697903" y="306465"/>
+                  </a:lnTo>
+                  <a:lnTo>
+                    <a:pt x="5627559" y="303207"/>
+                  </a:lnTo>
+                  <a:lnTo>
+                    <a:pt x="5557214" y="299860"/>
+                  </a:lnTo>
+                  <a:lnTo>
+                    <a:pt x="5486870" y="296421"/>
+                  </a:lnTo>
+                  <a:lnTo>
+                    <a:pt x="5416525" y="292887"/>
+                  </a:lnTo>
+                  <a:lnTo>
+                    <a:pt x="5346181" y="289256"/>
+                  </a:lnTo>
+                  <a:lnTo>
+                    <a:pt x="5275836" y="285526"/>
+                  </a:lnTo>
+                  <a:lnTo>
+                    <a:pt x="5205492" y="281694"/>
+                  </a:lnTo>
+                  <a:lnTo>
+                    <a:pt x="5135147" y="277756"/>
+                  </a:lnTo>
+                  <a:lnTo>
+                    <a:pt x="5064803" y="273710"/>
+                  </a:lnTo>
+                  <a:lnTo>
+                    <a:pt x="4994458" y="269553"/>
+                  </a:lnTo>
+                  <a:lnTo>
+                    <a:pt x="4924114" y="265283"/>
+                  </a:lnTo>
+                  <a:lnTo>
+                    <a:pt x="4853769" y="260895"/>
+                  </a:lnTo>
+                  <a:lnTo>
+                    <a:pt x="4783425" y="256386"/>
+                  </a:lnTo>
+                  <a:lnTo>
+                    <a:pt x="4713080" y="251754"/>
+                  </a:lnTo>
+                  <a:lnTo>
+                    <a:pt x="4642736" y="246995"/>
+                  </a:lnTo>
+                  <a:lnTo>
+                    <a:pt x="4572391" y="242105"/>
+                  </a:lnTo>
+                  <a:lnTo>
+                    <a:pt x="4502047" y="237081"/>
+                  </a:lnTo>
+                  <a:lnTo>
+                    <a:pt x="4431702" y="231920"/>
+                  </a:lnTo>
+                  <a:lnTo>
+                    <a:pt x="4361358" y="226616"/>
+                  </a:lnTo>
+                  <a:lnTo>
+                    <a:pt x="4291013" y="221167"/>
+                  </a:lnTo>
+                  <a:lnTo>
+                    <a:pt x="4220669" y="215569"/>
+                  </a:lnTo>
+                  <a:lnTo>
+                    <a:pt x="4150324" y="209817"/>
+                  </a:lnTo>
+                  <a:lnTo>
+                    <a:pt x="4079980" y="203907"/>
+                  </a:lnTo>
+                  <a:lnTo>
+                    <a:pt x="4009635" y="197835"/>
+                  </a:lnTo>
+                  <a:lnTo>
+                    <a:pt x="3939291" y="191597"/>
+                  </a:lnTo>
+                  <a:lnTo>
+                    <a:pt x="3868946" y="185187"/>
+                  </a:lnTo>
+                  <a:lnTo>
+                    <a:pt x="3798602" y="178601"/>
+                  </a:lnTo>
+                  <a:lnTo>
+                    <a:pt x="3728257" y="171835"/>
+                  </a:lnTo>
+                  <a:lnTo>
+                    <a:pt x="3657913" y="164883"/>
+                  </a:lnTo>
+                  <a:lnTo>
+                    <a:pt x="3587569" y="157741"/>
+                  </a:lnTo>
+                  <a:lnTo>
+                    <a:pt x="3517224" y="150402"/>
+                  </a:lnTo>
+                  <a:lnTo>
+                    <a:pt x="3446880" y="142862"/>
+                  </a:lnTo>
+                  <a:lnTo>
+                    <a:pt x="3376535" y="135115"/>
+                  </a:lnTo>
+                  <a:lnTo>
+                    <a:pt x="3306191" y="127155"/>
+                  </a:lnTo>
+                  <a:lnTo>
+                    <a:pt x="3235846" y="123980"/>
+                  </a:lnTo>
+                  <a:lnTo>
+                    <a:pt x="3165502" y="121715"/>
+                  </a:lnTo>
+                  <a:lnTo>
+                    <a:pt x="3095157" y="119432"/>
+                  </a:lnTo>
+                  <a:lnTo>
+                    <a:pt x="3024813" y="117132"/>
+                  </a:lnTo>
+                  <a:lnTo>
+                    <a:pt x="2954468" y="114814"/>
+                  </a:lnTo>
+                  <a:lnTo>
+                    <a:pt x="2884124" y="112480"/>
+                  </a:lnTo>
+                  <a:lnTo>
+                    <a:pt x="2813779" y="110127"/>
+                  </a:lnTo>
+                  <a:lnTo>
+                    <a:pt x="2743435" y="107757"/>
+                  </a:lnTo>
+                  <a:lnTo>
+                    <a:pt x="2673090" y="105369"/>
+                  </a:lnTo>
+                  <a:lnTo>
+                    <a:pt x="2602746" y="102964"/>
+                  </a:lnTo>
+                  <a:lnTo>
+                    <a:pt x="2532401" y="100540"/>
+                  </a:lnTo>
+                  <a:lnTo>
+                    <a:pt x="2462057" y="98098"/>
+                  </a:lnTo>
+                  <a:lnTo>
+                    <a:pt x="2391712" y="95637"/>
+                  </a:lnTo>
+                  <a:lnTo>
+                    <a:pt x="2321368" y="93158"/>
+                  </a:lnTo>
+                  <a:lnTo>
+                    <a:pt x="2251023" y="90660"/>
+                  </a:lnTo>
+                  <a:lnTo>
+                    <a:pt x="2180679" y="88144"/>
+                  </a:lnTo>
+                  <a:lnTo>
+                    <a:pt x="2110334" y="85609"/>
+                  </a:lnTo>
+                  <a:lnTo>
+                    <a:pt x="2039990" y="83054"/>
+                  </a:lnTo>
+                  <a:lnTo>
+                    <a:pt x="1969645" y="80481"/>
+                  </a:lnTo>
+                  <a:lnTo>
+                    <a:pt x="1899301" y="77888"/>
+                  </a:lnTo>
+                  <a:lnTo>
+                    <a:pt x="1828956" y="75275"/>
+                  </a:lnTo>
+                  <a:lnTo>
+                    <a:pt x="1758612" y="72643"/>
+                  </a:lnTo>
+                  <a:lnTo>
+                    <a:pt x="1688267" y="69991"/>
+                  </a:lnTo>
+                  <a:lnTo>
+                    <a:pt x="1617923" y="67319"/>
+                  </a:lnTo>
+                  <a:lnTo>
+                    <a:pt x="1547578" y="64627"/>
+                  </a:lnTo>
+                  <a:lnTo>
+                    <a:pt x="1477234" y="61915"/>
+                  </a:lnTo>
+                  <a:lnTo>
+                    <a:pt x="1406889" y="59182"/>
+                  </a:lnTo>
+                  <a:lnTo>
+                    <a:pt x="1336545" y="56429"/>
+                  </a:lnTo>
+                  <a:lnTo>
+                    <a:pt x="1266200" y="53655"/>
+                  </a:lnTo>
+                  <a:lnTo>
+                    <a:pt x="1195856" y="50860"/>
+                  </a:lnTo>
+                  <a:lnTo>
+                    <a:pt x="1125511" y="48044"/>
+                  </a:lnTo>
+                  <a:lnTo>
+                    <a:pt x="1055167" y="45207"/>
+                  </a:lnTo>
+                  <a:lnTo>
+                    <a:pt x="984822" y="42349"/>
+                  </a:lnTo>
+                  <a:lnTo>
+                    <a:pt x="914478" y="39469"/>
+                  </a:lnTo>
+                  <a:lnTo>
+                    <a:pt x="844133" y="36568"/>
+                  </a:lnTo>
+                  <a:lnTo>
+                    <a:pt x="773789" y="33644"/>
+                  </a:lnTo>
+                  <a:lnTo>
+                    <a:pt x="703444" y="30699"/>
+                  </a:lnTo>
+                  <a:lnTo>
+                    <a:pt x="633100" y="27732"/>
+                  </a:lnTo>
+                  <a:lnTo>
+                    <a:pt x="562755" y="24742"/>
+                  </a:lnTo>
+                  <a:lnTo>
+                    <a:pt x="492411" y="21729"/>
+                  </a:lnTo>
+                  <a:lnTo>
+                    <a:pt x="422066" y="18695"/>
+                  </a:lnTo>
+                  <a:lnTo>
+                    <a:pt x="351722" y="15637"/>
+                  </a:lnTo>
+                  <a:lnTo>
+                    <a:pt x="281377" y="12556"/>
+                  </a:lnTo>
+                  <a:lnTo>
+                    <a:pt x="211033" y="9452"/>
+                  </a:lnTo>
+                  <a:lnTo>
+                    <a:pt x="140688" y="6325"/>
+                  </a:lnTo>
+                  <a:lnTo>
+                    <a:pt x="70344" y="3174"/>
+                  </a:lnTo>
+                  <a:lnTo>
+                    <a:pt x="0" y="0"/>
+                  </a:lnTo>
+                </a:path>
+              </a:pathLst>
+            </a:custGeom>
+          </p:spPr>
+          <p:txBody>
+            <a:bodyPr/>
+            <a:lstStyle/>
+            <a:p/>
+          </p:txBody>
+        </p:sp>
+        <p:sp>
+          <p:nvSpPr>
+            <p:cNvPr id="24" name="pl24"/>
+            <p:cNvSpPr/>
+            <p:nvPr/>
+          </p:nvSpPr>
+          <p:spPr>
+            <a:xfrm>
+              <a:off x="1235312" y="2727781"/>
+              <a:ext cx="6964104" cy="550976"/>
+            </a:xfrm>
+            <a:custGeom>
+              <a:avLst/>
+              <a:pathLst>
+                <a:path w="6964104" h="550976">
                   <a:moveTo>
                     <a:pt x="0" y="0"/>
                   </a:moveTo>
                   <a:lnTo>
-                    <a:pt x="71622" y="31927"/>
-                  </a:lnTo>
-                  <a:lnTo>
-                    <a:pt x="143245" y="63307"/>
-                  </a:lnTo>
-                  <a:lnTo>
-                    <a:pt x="214867" y="94149"/>
-                  </a:lnTo>
-                  <a:lnTo>
-                    <a:pt x="286490" y="124464"/>
-                  </a:lnTo>
-                  <a:lnTo>
-                    <a:pt x="358112" y="154258"/>
-                  </a:lnTo>
-                  <a:lnTo>
-                    <a:pt x="429735" y="183543"/>
-                  </a:lnTo>
-                  <a:lnTo>
-                    <a:pt x="501357" y="212325"/>
-                  </a:lnTo>
-                  <a:lnTo>
-                    <a:pt x="572980" y="240615"/>
-                  </a:lnTo>
-                  <a:lnTo>
-                    <a:pt x="644602" y="268420"/>
-                  </a:lnTo>
-                  <a:lnTo>
-                    <a:pt x="716225" y="295748"/>
-                  </a:lnTo>
-                  <a:lnTo>
-                    <a:pt x="787847" y="322609"/>
-                  </a:lnTo>
-                  <a:lnTo>
-                    <a:pt x="859470" y="349009"/>
-                  </a:lnTo>
-                  <a:lnTo>
-                    <a:pt x="931092" y="374957"/>
-                  </a:lnTo>
-                  <a:lnTo>
-                    <a:pt x="1002715" y="400460"/>
-                  </a:lnTo>
-                  <a:lnTo>
-                    <a:pt x="1074337" y="425526"/>
-                  </a:lnTo>
-                  <a:lnTo>
-                    <a:pt x="1145960" y="450163"/>
-                  </a:lnTo>
-                  <a:lnTo>
-                    <a:pt x="1217582" y="474378"/>
-                  </a:lnTo>
-                  <a:lnTo>
-                    <a:pt x="1289205" y="498178"/>
-                  </a:lnTo>
-                  <a:lnTo>
-                    <a:pt x="1360827" y="521570"/>
-                  </a:lnTo>
-                  <a:lnTo>
-                    <a:pt x="1432450" y="544561"/>
-                  </a:lnTo>
-                  <a:lnTo>
-                    <a:pt x="1504073" y="567159"/>
-                  </a:lnTo>
-                  <a:lnTo>
-                    <a:pt x="1575695" y="589369"/>
-                  </a:lnTo>
-                  <a:lnTo>
-                    <a:pt x="1647318" y="611199"/>
-                  </a:lnTo>
-                  <a:lnTo>
-                    <a:pt x="1718940" y="632655"/>
-                  </a:lnTo>
-                  <a:lnTo>
-                    <a:pt x="1790563" y="653743"/>
-                  </a:lnTo>
-                  <a:lnTo>
-                    <a:pt x="1862185" y="674470"/>
-                  </a:lnTo>
-                  <a:lnTo>
-                    <a:pt x="1933808" y="694842"/>
-                  </a:lnTo>
-                  <a:lnTo>
-                    <a:pt x="2005430" y="714865"/>
-                  </a:lnTo>
-                  <a:lnTo>
-                    <a:pt x="2077053" y="734545"/>
-                  </a:lnTo>
-                  <a:lnTo>
-                    <a:pt x="2148675" y="753887"/>
-                  </a:lnTo>
-                  <a:lnTo>
-                    <a:pt x="2220298" y="772899"/>
-                  </a:lnTo>
-                  <a:lnTo>
-                    <a:pt x="2291920" y="791584"/>
-                  </a:lnTo>
-                  <a:lnTo>
-                    <a:pt x="2363543" y="809950"/>
-                  </a:lnTo>
-                  <a:lnTo>
-                    <a:pt x="2435165" y="828000"/>
-                  </a:lnTo>
-                  <a:lnTo>
-                    <a:pt x="2506788" y="845742"/>
-                  </a:lnTo>
-                  <a:lnTo>
-                    <a:pt x="2578410" y="863180"/>
-                  </a:lnTo>
-                  <a:lnTo>
-                    <a:pt x="2650033" y="880318"/>
-                  </a:lnTo>
-                  <a:lnTo>
-                    <a:pt x="2721655" y="897164"/>
-                  </a:lnTo>
-                  <a:lnTo>
-                    <a:pt x="2793278" y="913720"/>
-                  </a:lnTo>
-                  <a:lnTo>
-                    <a:pt x="2864901" y="929993"/>
-                  </a:lnTo>
-                  <a:lnTo>
-                    <a:pt x="2936523" y="945987"/>
-                  </a:lnTo>
-                  <a:lnTo>
-                    <a:pt x="3008146" y="961707"/>
-                  </a:lnTo>
-                  <a:lnTo>
-                    <a:pt x="3079768" y="977158"/>
-                  </a:lnTo>
-                  <a:lnTo>
-                    <a:pt x="3151391" y="992344"/>
-                  </a:lnTo>
-                  <a:lnTo>
-                    <a:pt x="3223013" y="1007270"/>
-                  </a:lnTo>
-                  <a:lnTo>
-                    <a:pt x="3294636" y="1021940"/>
-                  </a:lnTo>
-                  <a:lnTo>
-                    <a:pt x="3366258" y="1036359"/>
-                  </a:lnTo>
-                  <a:lnTo>
-                    <a:pt x="3437881" y="1050531"/>
-                  </a:lnTo>
-                  <a:lnTo>
-                    <a:pt x="3509503" y="1064460"/>
-                  </a:lnTo>
-                  <a:lnTo>
-                    <a:pt x="3581126" y="1078151"/>
-                  </a:lnTo>
-                  <a:lnTo>
-                    <a:pt x="3652748" y="1091606"/>
-                  </a:lnTo>
-                  <a:lnTo>
-                    <a:pt x="3724371" y="1104832"/>
-                  </a:lnTo>
-                  <a:lnTo>
-                    <a:pt x="3795993" y="1117830"/>
-                  </a:lnTo>
-                  <a:lnTo>
-                    <a:pt x="3867616" y="1130607"/>
-                  </a:lnTo>
-                  <a:lnTo>
-                    <a:pt x="3939238" y="1143164"/>
-                  </a:lnTo>
-                  <a:lnTo>
-                    <a:pt x="4010861" y="1155506"/>
-                  </a:lnTo>
-                  <a:lnTo>
-                    <a:pt x="4082483" y="1167636"/>
-                  </a:lnTo>
-                  <a:lnTo>
-                    <a:pt x="4154106" y="1179559"/>
-                  </a:lnTo>
-                  <a:lnTo>
-                    <a:pt x="4225729" y="1191278"/>
-                  </a:lnTo>
-                  <a:lnTo>
-                    <a:pt x="4297351" y="1202795"/>
-                  </a:lnTo>
-                  <a:lnTo>
-                    <a:pt x="4368974" y="1214116"/>
-                  </a:lnTo>
-                  <a:lnTo>
-                    <a:pt x="4440596" y="1225242"/>
-                  </a:lnTo>
-                  <a:lnTo>
-                    <a:pt x="4512219" y="1236178"/>
-                  </a:lnTo>
-                  <a:lnTo>
-                    <a:pt x="4583841" y="1246926"/>
-                  </a:lnTo>
-                  <a:lnTo>
-                    <a:pt x="4655464" y="1257491"/>
-                  </a:lnTo>
-                  <a:lnTo>
-                    <a:pt x="4727086" y="1267874"/>
-                  </a:lnTo>
-                  <a:lnTo>
-                    <a:pt x="4798709" y="1278079"/>
-                  </a:lnTo>
-                  <a:lnTo>
-                    <a:pt x="4870331" y="1288110"/>
-                  </a:lnTo>
-                  <a:lnTo>
-                    <a:pt x="4941954" y="1297969"/>
-                  </a:lnTo>
-                  <a:lnTo>
-                    <a:pt x="5013576" y="1307659"/>
-                  </a:lnTo>
-                  <a:lnTo>
-                    <a:pt x="5085199" y="1317182"/>
-                  </a:lnTo>
-                  <a:lnTo>
-                    <a:pt x="5156821" y="1326543"/>
-                  </a:lnTo>
-                  <a:lnTo>
-                    <a:pt x="5228444" y="1335743"/>
-                  </a:lnTo>
-                  <a:lnTo>
-                    <a:pt x="5300066" y="1344786"/>
-                  </a:lnTo>
-                  <a:lnTo>
-                    <a:pt x="5371689" y="1353674"/>
-                  </a:lnTo>
-                  <a:lnTo>
-                    <a:pt x="5443311" y="1362409"/>
-                  </a:lnTo>
-                  <a:lnTo>
-                    <a:pt x="5514934" y="1370995"/>
-                  </a:lnTo>
-                  <a:lnTo>
-                    <a:pt x="5586557" y="1379434"/>
-                  </a:lnTo>
-                  <a:lnTo>
-                    <a:pt x="5658179" y="1387728"/>
-                  </a:lnTo>
-                  <a:lnTo>
-                    <a:pt x="5729802" y="1395880"/>
-                  </a:lnTo>
-                  <a:lnTo>
-                    <a:pt x="5801424" y="1403892"/>
-                  </a:lnTo>
-                  <a:lnTo>
-                    <a:pt x="5873047" y="1411767"/>
-                  </a:lnTo>
-                  <a:lnTo>
-                    <a:pt x="5944669" y="1419508"/>
-                  </a:lnTo>
-                  <a:lnTo>
-                    <a:pt x="6016292" y="1427115"/>
-                  </a:lnTo>
-                  <a:lnTo>
-                    <a:pt x="6087914" y="1434593"/>
-                  </a:lnTo>
-                  <a:lnTo>
-                    <a:pt x="6159537" y="1441942"/>
-                  </a:lnTo>
-                  <a:lnTo>
-                    <a:pt x="6231159" y="1449165"/>
-                  </a:lnTo>
-                  <a:lnTo>
-                    <a:pt x="6302782" y="1456264"/>
-                  </a:lnTo>
-                  <a:lnTo>
-                    <a:pt x="6374404" y="1463242"/>
-                  </a:lnTo>
-                  <a:lnTo>
-                    <a:pt x="6446027" y="1470101"/>
-                  </a:lnTo>
-                  <a:lnTo>
-                    <a:pt x="6517649" y="1476841"/>
-                  </a:lnTo>
-                  <a:lnTo>
-                    <a:pt x="6589272" y="1483467"/>
-                  </a:lnTo>
-                  <a:lnTo>
-                    <a:pt x="6660894" y="1489978"/>
-                  </a:lnTo>
-                  <a:lnTo>
-                    <a:pt x="6732517" y="1496379"/>
-                  </a:lnTo>
-                  <a:lnTo>
-                    <a:pt x="6804139" y="1502669"/>
-                  </a:lnTo>
-                  <a:lnTo>
-                    <a:pt x="6875762" y="1508852"/>
-                  </a:lnTo>
-                  <a:lnTo>
-                    <a:pt x="6947385" y="1514929"/>
-                  </a:lnTo>
-                  <a:lnTo>
-                    <a:pt x="7019007" y="1520902"/>
-                  </a:lnTo>
-                  <a:lnTo>
-                    <a:pt x="7090630" y="1526772"/>
+                    <a:pt x="70344" y="11521"/>
+                  </a:lnTo>
+                  <a:lnTo>
+                    <a:pt x="140688" y="22846"/>
+                  </a:lnTo>
+                  <a:lnTo>
+                    <a:pt x="211033" y="33976"/>
+                  </a:lnTo>
+                  <a:lnTo>
+                    <a:pt x="281377" y="44916"/>
+                  </a:lnTo>
+                  <a:lnTo>
+                    <a:pt x="351722" y="55668"/>
+                  </a:lnTo>
+                  <a:lnTo>
+                    <a:pt x="422066" y="66236"/>
+                  </a:lnTo>
+                  <a:lnTo>
+                    <a:pt x="492411" y="76623"/>
+                  </a:lnTo>
+                  <a:lnTo>
+                    <a:pt x="562755" y="86832"/>
+                  </a:lnTo>
+                  <a:lnTo>
+                    <a:pt x="633100" y="96866"/>
+                  </a:lnTo>
+                  <a:lnTo>
+                    <a:pt x="703444" y="106728"/>
+                  </a:lnTo>
+                  <a:lnTo>
+                    <a:pt x="773789" y="116422"/>
+                  </a:lnTo>
+                  <a:lnTo>
+                    <a:pt x="844133" y="125949"/>
+                  </a:lnTo>
+                  <a:lnTo>
+                    <a:pt x="914478" y="135313"/>
+                  </a:lnTo>
+                  <a:lnTo>
+                    <a:pt x="984822" y="144516"/>
+                  </a:lnTo>
+                  <a:lnTo>
+                    <a:pt x="1055167" y="153562"/>
+                  </a:lnTo>
+                  <a:lnTo>
+                    <a:pt x="1125511" y="162453"/>
+                  </a:lnTo>
+                  <a:lnTo>
+                    <a:pt x="1195856" y="171191"/>
+                  </a:lnTo>
+                  <a:lnTo>
+                    <a:pt x="1266200" y="179780"/>
+                  </a:lnTo>
+                  <a:lnTo>
+                    <a:pt x="1336545" y="188222"/>
+                  </a:lnTo>
+                  <a:lnTo>
+                    <a:pt x="1406889" y="196519"/>
+                  </a:lnTo>
+                  <a:lnTo>
+                    <a:pt x="1477234" y="204674"/>
+                  </a:lnTo>
+                  <a:lnTo>
+                    <a:pt x="1547578" y="212689"/>
+                  </a:lnTo>
+                  <a:lnTo>
+                    <a:pt x="1617923" y="220567"/>
+                  </a:lnTo>
+                  <a:lnTo>
+                    <a:pt x="1688267" y="228310"/>
+                  </a:lnTo>
+                  <a:lnTo>
+                    <a:pt x="1758612" y="235920"/>
+                  </a:lnTo>
+                  <a:lnTo>
+                    <a:pt x="1828956" y="243400"/>
+                  </a:lnTo>
+                  <a:lnTo>
+                    <a:pt x="1899301" y="250752"/>
+                  </a:lnTo>
+                  <a:lnTo>
+                    <a:pt x="1969645" y="257978"/>
+                  </a:lnTo>
+                  <a:lnTo>
+                    <a:pt x="2039990" y="265080"/>
+                  </a:lnTo>
+                  <a:lnTo>
+                    <a:pt x="2110334" y="272060"/>
+                  </a:lnTo>
+                  <a:lnTo>
+                    <a:pt x="2180679" y="278921"/>
+                  </a:lnTo>
+                  <a:lnTo>
+                    <a:pt x="2251023" y="285664"/>
+                  </a:lnTo>
+                  <a:lnTo>
+                    <a:pt x="2321368" y="292291"/>
+                  </a:lnTo>
+                  <a:lnTo>
+                    <a:pt x="2391712" y="298806"/>
+                  </a:lnTo>
+                  <a:lnTo>
+                    <a:pt x="2462057" y="305208"/>
+                  </a:lnTo>
+                  <a:lnTo>
+                    <a:pt x="2532401" y="311501"/>
+                  </a:lnTo>
+                  <a:lnTo>
+                    <a:pt x="2602746" y="317686"/>
+                  </a:lnTo>
+                  <a:lnTo>
+                    <a:pt x="2673090" y="323765"/>
+                  </a:lnTo>
+                  <a:lnTo>
+                    <a:pt x="2743435" y="329740"/>
+                  </a:lnTo>
+                  <a:lnTo>
+                    <a:pt x="2813779" y="335612"/>
+                  </a:lnTo>
+                  <a:lnTo>
+                    <a:pt x="2884124" y="341384"/>
+                  </a:lnTo>
+                  <a:lnTo>
+                    <a:pt x="2954468" y="347057"/>
+                  </a:lnTo>
+                  <a:lnTo>
+                    <a:pt x="3024813" y="352633"/>
+                  </a:lnTo>
+                  <a:lnTo>
+                    <a:pt x="3095157" y="358113"/>
+                  </a:lnTo>
+                  <a:lnTo>
+                    <a:pt x="3165502" y="363500"/>
+                  </a:lnTo>
+                  <a:lnTo>
+                    <a:pt x="3235846" y="368794"/>
+                  </a:lnTo>
+                  <a:lnTo>
+                    <a:pt x="3306191" y="373997"/>
+                  </a:lnTo>
+                  <a:lnTo>
+                    <a:pt x="3376535" y="379112"/>
+                  </a:lnTo>
+                  <a:lnTo>
+                    <a:pt x="3446880" y="384138"/>
+                  </a:lnTo>
+                  <a:lnTo>
+                    <a:pt x="3517224" y="389079"/>
+                  </a:lnTo>
+                  <a:lnTo>
+                    <a:pt x="3587569" y="393935"/>
+                  </a:lnTo>
+                  <a:lnTo>
+                    <a:pt x="3657913" y="398707"/>
+                  </a:lnTo>
+                  <a:lnTo>
+                    <a:pt x="3728257" y="403398"/>
+                  </a:lnTo>
+                  <a:lnTo>
+                    <a:pt x="3798602" y="408009"/>
+                  </a:lnTo>
+                  <a:lnTo>
+                    <a:pt x="3868946" y="412541"/>
+                  </a:lnTo>
+                  <a:lnTo>
+                    <a:pt x="3939291" y="416995"/>
+                  </a:lnTo>
+                  <a:lnTo>
+                    <a:pt x="4009635" y="421372"/>
+                  </a:lnTo>
+                  <a:lnTo>
+                    <a:pt x="4079980" y="425675"/>
+                  </a:lnTo>
+                  <a:lnTo>
+                    <a:pt x="4150324" y="429904"/>
+                  </a:lnTo>
+                  <a:lnTo>
+                    <a:pt x="4220669" y="434060"/>
+                  </a:lnTo>
+                  <a:lnTo>
+                    <a:pt x="4291013" y="438145"/>
+                  </a:lnTo>
+                  <a:lnTo>
+                    <a:pt x="4361358" y="442161"/>
+                  </a:lnTo>
+                  <a:lnTo>
+                    <a:pt x="4431702" y="446107"/>
+                  </a:lnTo>
+                  <a:lnTo>
+                    <a:pt x="4502047" y="449986"/>
+                  </a:lnTo>
+                  <a:lnTo>
+                    <a:pt x="4572391" y="453798"/>
+                  </a:lnTo>
+                  <a:lnTo>
+                    <a:pt x="4642736" y="457546"/>
+                  </a:lnTo>
+                  <a:lnTo>
+                    <a:pt x="4713080" y="461228"/>
+                  </a:lnTo>
+                  <a:lnTo>
+                    <a:pt x="4783425" y="464848"/>
+                  </a:lnTo>
+                  <a:lnTo>
+                    <a:pt x="4853769" y="468406"/>
+                  </a:lnTo>
+                  <a:lnTo>
+                    <a:pt x="4924114" y="471903"/>
+                  </a:lnTo>
+                  <a:lnTo>
+                    <a:pt x="4994458" y="475340"/>
+                  </a:lnTo>
+                  <a:lnTo>
+                    <a:pt x="5064803" y="478718"/>
+                  </a:lnTo>
+                  <a:lnTo>
+                    <a:pt x="5135147" y="482038"/>
+                  </a:lnTo>
+                  <a:lnTo>
+                    <a:pt x="5205492" y="485301"/>
+                  </a:lnTo>
+                  <a:lnTo>
+                    <a:pt x="5275836" y="488509"/>
+                  </a:lnTo>
+                  <a:lnTo>
+                    <a:pt x="5346181" y="491661"/>
+                  </a:lnTo>
+                  <a:lnTo>
+                    <a:pt x="5416525" y="494760"/>
+                  </a:lnTo>
+                  <a:lnTo>
+                    <a:pt x="5486870" y="497805"/>
+                  </a:lnTo>
+                  <a:lnTo>
+                    <a:pt x="5557214" y="500798"/>
+                  </a:lnTo>
+                  <a:lnTo>
+                    <a:pt x="5627559" y="503740"/>
+                  </a:lnTo>
+                  <a:lnTo>
+                    <a:pt x="5697903" y="506631"/>
+                  </a:lnTo>
+                  <a:lnTo>
+                    <a:pt x="5768248" y="509473"/>
+                  </a:lnTo>
+                  <a:lnTo>
+                    <a:pt x="5838592" y="512267"/>
+                  </a:lnTo>
+                  <a:lnTo>
+                    <a:pt x="5908937" y="515012"/>
+                  </a:lnTo>
+                  <a:lnTo>
+                    <a:pt x="5979281" y="517710"/>
+                  </a:lnTo>
+                  <a:lnTo>
+                    <a:pt x="6049626" y="520363"/>
+                  </a:lnTo>
+                  <a:lnTo>
+                    <a:pt x="6119970" y="522969"/>
+                  </a:lnTo>
+                  <a:lnTo>
+                    <a:pt x="6190315" y="525531"/>
+                  </a:lnTo>
+                  <a:lnTo>
+                    <a:pt x="6260659" y="528049"/>
+                  </a:lnTo>
+                  <a:lnTo>
+                    <a:pt x="6331004" y="530524"/>
+                  </a:lnTo>
+                  <a:lnTo>
+                    <a:pt x="6401348" y="532957"/>
+                  </a:lnTo>
+                  <a:lnTo>
+                    <a:pt x="6471693" y="535348"/>
+                  </a:lnTo>
+                  <a:lnTo>
+                    <a:pt x="6542037" y="537698"/>
+                  </a:lnTo>
+                  <a:lnTo>
+                    <a:pt x="6612382" y="540008"/>
+                  </a:lnTo>
+                  <a:lnTo>
+                    <a:pt x="6682726" y="542278"/>
+                  </a:lnTo>
+                  <a:lnTo>
+                    <a:pt x="6753071" y="544509"/>
+                  </a:lnTo>
+                  <a:lnTo>
+                    <a:pt x="6823415" y="546702"/>
+                  </a:lnTo>
+                  <a:lnTo>
+                    <a:pt x="6893760" y="548857"/>
+                  </a:lnTo>
+                  <a:lnTo>
+                    <a:pt x="6964104" y="550976"/>
                   </a:lnTo>
                 </a:path>
               </a:pathLst>
@@ -4568,27 +4603,27 @@
         </p:sp>
         <p:sp>
           <p:nvSpPr>
-            <p:cNvPr id="24" name="pl24"/>
+            <p:cNvPr id="25" name="pl25"/>
             <p:cNvSpPr/>
             <p:nvPr/>
           </p:nvSpPr>
           <p:spPr>
             <a:xfrm>
-              <a:off x="817517" y="4727786"/>
-              <a:ext cx="7799693" cy="0"/>
+              <a:off x="887106" y="3100960"/>
+              <a:ext cx="7660515" cy="0"/>
             </a:xfrm>
             <a:custGeom>
               <a:avLst/>
               <a:pathLst>
-                <a:path w="7799693" h="0">
+                <a:path w="7660515" h="0">
                   <a:moveTo>
                     <a:pt x="0" y="0"/>
                   </a:moveTo>
                   <a:lnTo>
-                    <a:pt x="7799693" y="0"/>
-                  </a:lnTo>
-                  <a:lnTo>
-                    <a:pt x="7799693" y="0"/>
+                    <a:pt x="7660515" y="0"/>
+                  </a:lnTo>
+                  <a:lnTo>
+                    <a:pt x="7660515" y="0"/>
                   </a:lnTo>
                 </a:path>
               </a:pathLst>
@@ -4611,21 +4646,21 @@
         </p:sp>
         <p:sp>
           <p:nvSpPr>
-            <p:cNvPr id="25" name="pl25"/>
+            <p:cNvPr id="26" name="pl26"/>
             <p:cNvSpPr/>
             <p:nvPr/>
           </p:nvSpPr>
           <p:spPr>
             <a:xfrm>
-              <a:off x="4526955" y="2073503"/>
-              <a:ext cx="0" cy="3649639"/>
+              <a:off x="4530353" y="2143092"/>
+              <a:ext cx="0" cy="1317069"/>
             </a:xfrm>
             <a:custGeom>
               <a:avLst/>
               <a:pathLst>
-                <a:path w="0" h="3649639">
+                <a:path w="0" h="1317069">
                   <a:moveTo>
-                    <a:pt x="0" y="3649639"/>
+                    <a:pt x="0" y="1317069"/>
                   </a:moveTo>
                   <a:lnTo>
                     <a:pt x="0" y="0"/>
@@ -4654,13 +4689,13 @@
         </p:sp>
         <p:sp>
           <p:nvSpPr>
-            <p:cNvPr id="26" name="tx26"/>
+            <p:cNvPr id="27" name="tx27"/>
             <p:cNvSpPr/>
             <p:nvPr/>
           </p:nvSpPr>
           <p:spPr>
             <a:xfrm>
-              <a:off x="692708" y="5517199"/>
+              <a:off x="762297" y="3360243"/>
               <a:ext cx="62179" cy="80101"/>
             </a:xfrm>
             <a:prstGeom prst="rect">
@@ -4700,13 +4735,13 @@
         </p:sp>
         <p:sp>
           <p:nvSpPr>
-            <p:cNvPr id="27" name="tx27"/>
+            <p:cNvPr id="28" name="tx28"/>
             <p:cNvSpPr/>
             <p:nvPr/>
           </p:nvSpPr>
           <p:spPr>
             <a:xfrm>
-              <a:off x="692708" y="4687735"/>
+              <a:off x="762297" y="3060909"/>
               <a:ext cx="62179" cy="80101"/>
             </a:xfrm>
             <a:prstGeom prst="rect">
@@ -4746,13 +4781,13 @@
         </p:sp>
         <p:sp>
           <p:nvSpPr>
-            <p:cNvPr id="28" name="tx28"/>
+            <p:cNvPr id="29" name="tx29"/>
             <p:cNvSpPr/>
             <p:nvPr/>
           </p:nvSpPr>
           <p:spPr>
             <a:xfrm>
-              <a:off x="692708" y="3858272"/>
+              <a:off x="762297" y="2761575"/>
               <a:ext cx="62179" cy="80101"/>
             </a:xfrm>
             <a:prstGeom prst="rect">
@@ -4792,13 +4827,13 @@
         </p:sp>
         <p:sp>
           <p:nvSpPr>
-            <p:cNvPr id="29" name="tx29"/>
+            <p:cNvPr id="30" name="tx30"/>
             <p:cNvSpPr/>
             <p:nvPr/>
           </p:nvSpPr>
           <p:spPr>
             <a:xfrm>
-              <a:off x="692708" y="3028808"/>
+              <a:off x="762297" y="2462242"/>
               <a:ext cx="62179" cy="80101"/>
             </a:xfrm>
             <a:prstGeom prst="rect">
@@ -4838,13 +4873,13 @@
         </p:sp>
         <p:sp>
           <p:nvSpPr>
-            <p:cNvPr id="30" name="tx30"/>
+            <p:cNvPr id="31" name="tx31"/>
             <p:cNvSpPr/>
             <p:nvPr/>
           </p:nvSpPr>
           <p:spPr>
             <a:xfrm>
-              <a:off x="692708" y="2199345"/>
+              <a:off x="762297" y="2162908"/>
               <a:ext cx="62179" cy="80101"/>
             </a:xfrm>
             <a:prstGeom prst="rect">
@@ -4884,13 +4919,13 @@
         </p:sp>
         <p:sp>
           <p:nvSpPr>
-            <p:cNvPr id="31" name="tx31"/>
+            <p:cNvPr id="32" name="tx32"/>
             <p:cNvSpPr/>
             <p:nvPr/>
           </p:nvSpPr>
           <p:spPr>
             <a:xfrm>
-              <a:off x="2421884" y="5785772"/>
+              <a:off x="2461403" y="3522791"/>
               <a:ext cx="161574" cy="80101"/>
             </a:xfrm>
             <a:prstGeom prst="rect">
@@ -4930,13 +4965,13 @@
         </p:sp>
         <p:sp>
           <p:nvSpPr>
-            <p:cNvPr id="32" name="tx32"/>
+            <p:cNvPr id="33" name="tx33"/>
             <p:cNvSpPr/>
             <p:nvPr/>
           </p:nvSpPr>
           <p:spPr>
             <a:xfrm>
-              <a:off x="4542539" y="5785772"/>
+              <a:off x="4545104" y="3522791"/>
               <a:ext cx="62179" cy="80101"/>
             </a:xfrm>
             <a:prstGeom prst="rect">
@@ -4976,13 +5011,13 @@
         </p:sp>
         <p:sp>
           <p:nvSpPr>
-            <p:cNvPr id="33" name="tx33"/>
+            <p:cNvPr id="34" name="tx34"/>
             <p:cNvSpPr/>
             <p:nvPr/>
           </p:nvSpPr>
           <p:spPr>
             <a:xfrm>
-              <a:off x="6582407" y="5785772"/>
+              <a:off x="6548017" y="3522791"/>
               <a:ext cx="124358" cy="80101"/>
             </a:xfrm>
             <a:prstGeom prst="rect">
@@ -5022,13 +5057,13 @@
         </p:sp>
         <p:sp>
           <p:nvSpPr>
-            <p:cNvPr id="34" name="tx34"/>
+            <p:cNvPr id="35" name="tx35"/>
             <p:cNvSpPr/>
             <p:nvPr/>
           </p:nvSpPr>
           <p:spPr>
             <a:xfrm>
-              <a:off x="2928340" y="5925448"/>
+              <a:off x="2928340" y="3662467"/>
               <a:ext cx="3578047" cy="100218"/>
             </a:xfrm>
             <a:prstGeom prst="rect">
@@ -5068,13 +5103,13 @@
         </p:sp>
         <p:sp>
           <p:nvSpPr>
-            <p:cNvPr id="35" name="tx35"/>
+            <p:cNvPr id="36" name="tx36"/>
             <p:cNvSpPr/>
             <p:nvPr/>
           </p:nvSpPr>
           <p:spPr>
             <a:xfrm rot="-5400000">
-              <a:off x="68446" y="3848213"/>
+              <a:off x="138035" y="2751517"/>
               <a:ext cx="1016904" cy="100218"/>
             </a:xfrm>
             <a:prstGeom prst="rect">
@@ -5114,13 +5149,13 @@
         </p:sp>
         <p:sp>
           <p:nvSpPr>
-            <p:cNvPr id="36" name="tx36"/>
+            <p:cNvPr id="37" name="tx37"/>
             <p:cNvSpPr/>
             <p:nvPr/>
           </p:nvSpPr>
           <p:spPr>
             <a:xfrm>
-              <a:off x="817517" y="1896563"/>
+              <a:off x="887106" y="1966152"/>
               <a:ext cx="6985375" cy="82021"/>
             </a:xfrm>
             <a:prstGeom prst="rect">
@@ -5160,13 +5195,3746 @@
         </p:sp>
         <p:sp>
           <p:nvSpPr>
-            <p:cNvPr id="37" name="tx37"/>
+            <p:cNvPr id="38" name="tx38"/>
             <p:cNvSpPr/>
             <p:nvPr/>
           </p:nvSpPr>
           <p:spPr>
             <a:xfrm>
-              <a:off x="817517" y="1669789"/>
+              <a:off x="887106" y="1739378"/>
+              <a:ext cx="2681569" cy="120152"/>
+            </a:xfrm>
+            <a:prstGeom prst="rect">
+              <a:avLst/>
+            </a:prstGeom>
+            <a:noFill/>
+          </p:spPr>
+          <p:txBody>
+            <a:bodyPr lIns="0" rIns="0" tIns="0" bIns="0" anchorCtr="1" anchor="ctr" wrap="none"/>
+            <a:lstStyle/>
+            <a:p>
+              <a:pPr algn="l" marL="0" marR="0" indent="0">
+                <a:lnSpc>
+                  <a:spcPts val="1320"/>
+                </a:lnSpc>
+                <a:spcBef>
+                  <a:spcPts val="0"/>
+                </a:spcBef>
+                <a:spcAft>
+                  <a:spcPts val="0"/>
+                </a:spcAft>
+              </a:pPr>
+              <a:r>
+                <a:rPr sz="1320">
+                  <a:solidFill>
+                    <a:srgbClr val="000000">
+                      <a:alpha val="100000"/>
+                    </a:srgbClr>
+                  </a:solidFill>
+                  <a:latin typeface="Helvetica"/>
+                  <a:cs typeface="Helvetica"/>
+                </a:rPr>
+                <a:t>Overall Hospitalization (Carboplatin)</a:t>
+              </a:r>
+            </a:p>
+          </p:txBody>
+        </p:sp>
+        <p:sp>
+          <p:nvSpPr>
+            <p:cNvPr id="39" name="pl39"/>
+            <p:cNvSpPr/>
+            <p:nvPr/>
+          </p:nvSpPr>
+          <p:spPr>
+            <a:xfrm>
+              <a:off x="887106" y="5444019"/>
+              <a:ext cx="7660515" cy="0"/>
+            </a:xfrm>
+            <a:custGeom>
+              <a:avLst/>
+              <a:pathLst>
+                <a:path w="7660515" h="0">
+                  <a:moveTo>
+                    <a:pt x="0" y="0"/>
+                  </a:moveTo>
+                  <a:lnTo>
+                    <a:pt x="7660515" y="0"/>
+                  </a:lnTo>
+                  <a:lnTo>
+                    <a:pt x="7660515" y="0"/>
+                  </a:lnTo>
+                </a:path>
+              </a:pathLst>
+            </a:custGeom>
+            <a:ln w="6775" cap="flat">
+              <a:solidFill>
+                <a:srgbClr val="EBEBEB">
+                  <a:alpha val="100000"/>
+                </a:srgbClr>
+              </a:solidFill>
+              <a:prstDash val="solid"/>
+              <a:round/>
+            </a:ln>
+          </p:spPr>
+          <p:txBody>
+            <a:bodyPr/>
+            <a:lstStyle/>
+            <a:p/>
+          </p:txBody>
+        </p:sp>
+        <p:sp>
+          <p:nvSpPr>
+            <p:cNvPr id="40" name="pl40"/>
+            <p:cNvSpPr/>
+            <p:nvPr/>
+          </p:nvSpPr>
+          <p:spPr>
+            <a:xfrm>
+              <a:off x="887106" y="5144686"/>
+              <a:ext cx="7660515" cy="0"/>
+            </a:xfrm>
+            <a:custGeom>
+              <a:avLst/>
+              <a:pathLst>
+                <a:path w="7660515" h="0">
+                  <a:moveTo>
+                    <a:pt x="0" y="0"/>
+                  </a:moveTo>
+                  <a:lnTo>
+                    <a:pt x="7660515" y="0"/>
+                  </a:lnTo>
+                  <a:lnTo>
+                    <a:pt x="7660515" y="0"/>
+                  </a:lnTo>
+                </a:path>
+              </a:pathLst>
+            </a:custGeom>
+            <a:ln w="6775" cap="flat">
+              <a:solidFill>
+                <a:srgbClr val="EBEBEB">
+                  <a:alpha val="100000"/>
+                </a:srgbClr>
+              </a:solidFill>
+              <a:prstDash val="solid"/>
+              <a:round/>
+            </a:ln>
+          </p:spPr>
+          <p:txBody>
+            <a:bodyPr/>
+            <a:lstStyle/>
+            <a:p/>
+          </p:txBody>
+        </p:sp>
+        <p:sp>
+          <p:nvSpPr>
+            <p:cNvPr id="41" name="pl41"/>
+            <p:cNvSpPr/>
+            <p:nvPr/>
+          </p:nvSpPr>
+          <p:spPr>
+            <a:xfrm>
+              <a:off x="887106" y="4845352"/>
+              <a:ext cx="7660515" cy="0"/>
+            </a:xfrm>
+            <a:custGeom>
+              <a:avLst/>
+              <a:pathLst>
+                <a:path w="7660515" h="0">
+                  <a:moveTo>
+                    <a:pt x="0" y="0"/>
+                  </a:moveTo>
+                  <a:lnTo>
+                    <a:pt x="7660515" y="0"/>
+                  </a:lnTo>
+                  <a:lnTo>
+                    <a:pt x="7660515" y="0"/>
+                  </a:lnTo>
+                </a:path>
+              </a:pathLst>
+            </a:custGeom>
+            <a:ln w="6775" cap="flat">
+              <a:solidFill>
+                <a:srgbClr val="EBEBEB">
+                  <a:alpha val="100000"/>
+                </a:srgbClr>
+              </a:solidFill>
+              <a:prstDash val="solid"/>
+              <a:round/>
+            </a:ln>
+          </p:spPr>
+          <p:txBody>
+            <a:bodyPr/>
+            <a:lstStyle/>
+            <a:p/>
+          </p:txBody>
+        </p:sp>
+        <p:sp>
+          <p:nvSpPr>
+            <p:cNvPr id="42" name="pl42"/>
+            <p:cNvSpPr/>
+            <p:nvPr/>
+          </p:nvSpPr>
+          <p:spPr>
+            <a:xfrm>
+              <a:off x="887106" y="4546018"/>
+              <a:ext cx="7660515" cy="0"/>
+            </a:xfrm>
+            <a:custGeom>
+              <a:avLst/>
+              <a:pathLst>
+                <a:path w="7660515" h="0">
+                  <a:moveTo>
+                    <a:pt x="0" y="0"/>
+                  </a:moveTo>
+                  <a:lnTo>
+                    <a:pt x="7660515" y="0"/>
+                  </a:lnTo>
+                  <a:lnTo>
+                    <a:pt x="7660515" y="0"/>
+                  </a:lnTo>
+                </a:path>
+              </a:pathLst>
+            </a:custGeom>
+            <a:ln w="6775" cap="flat">
+              <a:solidFill>
+                <a:srgbClr val="EBEBEB">
+                  <a:alpha val="100000"/>
+                </a:srgbClr>
+              </a:solidFill>
+              <a:prstDash val="solid"/>
+              <a:round/>
+            </a:ln>
+          </p:spPr>
+          <p:txBody>
+            <a:bodyPr/>
+            <a:lstStyle/>
+            <a:p/>
+          </p:txBody>
+        </p:sp>
+        <p:sp>
+          <p:nvSpPr>
+            <p:cNvPr id="43" name="pl43"/>
+            <p:cNvSpPr/>
+            <p:nvPr/>
+          </p:nvSpPr>
+          <p:spPr>
+            <a:xfrm>
+              <a:off x="914987" y="4336484"/>
+              <a:ext cx="0" cy="1317069"/>
+            </a:xfrm>
+            <a:custGeom>
+              <a:avLst/>
+              <a:pathLst>
+                <a:path w="0" h="1317069">
+                  <a:moveTo>
+                    <a:pt x="0" y="1317069"/>
+                  </a:moveTo>
+                  <a:lnTo>
+                    <a:pt x="0" y="0"/>
+                  </a:lnTo>
+                  <a:lnTo>
+                    <a:pt x="0" y="0"/>
+                  </a:lnTo>
+                </a:path>
+              </a:pathLst>
+            </a:custGeom>
+            <a:ln w="6775" cap="flat">
+              <a:solidFill>
+                <a:srgbClr val="EBEBEB">
+                  <a:alpha val="100000"/>
+                </a:srgbClr>
+              </a:solidFill>
+              <a:prstDash val="solid"/>
+              <a:round/>
+            </a:ln>
+          </p:spPr>
+          <p:txBody>
+            <a:bodyPr/>
+            <a:lstStyle/>
+            <a:p/>
+          </p:txBody>
+        </p:sp>
+        <p:sp>
+          <p:nvSpPr>
+            <p:cNvPr id="44" name="pl44"/>
+            <p:cNvSpPr/>
+            <p:nvPr/>
+          </p:nvSpPr>
+          <p:spPr>
+            <a:xfrm>
+              <a:off x="1728588" y="4336484"/>
+              <a:ext cx="0" cy="1317069"/>
+            </a:xfrm>
+            <a:custGeom>
+              <a:avLst/>
+              <a:pathLst>
+                <a:path w="0" h="1317069">
+                  <a:moveTo>
+                    <a:pt x="0" y="1317069"/>
+                  </a:moveTo>
+                  <a:lnTo>
+                    <a:pt x="0" y="0"/>
+                  </a:lnTo>
+                  <a:lnTo>
+                    <a:pt x="0" y="0"/>
+                  </a:lnTo>
+                </a:path>
+              </a:pathLst>
+            </a:custGeom>
+            <a:ln w="6775" cap="flat">
+              <a:solidFill>
+                <a:srgbClr val="EBEBEB">
+                  <a:alpha val="100000"/>
+                </a:srgbClr>
+              </a:solidFill>
+              <a:prstDash val="solid"/>
+              <a:round/>
+            </a:ln>
+          </p:spPr>
+          <p:txBody>
+            <a:bodyPr/>
+            <a:lstStyle/>
+            <a:p/>
+          </p:txBody>
+        </p:sp>
+        <p:sp>
+          <p:nvSpPr>
+            <p:cNvPr id="45" name="pl45"/>
+            <p:cNvSpPr/>
+            <p:nvPr/>
+          </p:nvSpPr>
+          <p:spPr>
+            <a:xfrm>
+              <a:off x="2542190" y="4336484"/>
+              <a:ext cx="0" cy="1317069"/>
+            </a:xfrm>
+            <a:custGeom>
+              <a:avLst/>
+              <a:pathLst>
+                <a:path w="0" h="1317069">
+                  <a:moveTo>
+                    <a:pt x="0" y="1317069"/>
+                  </a:moveTo>
+                  <a:lnTo>
+                    <a:pt x="0" y="0"/>
+                  </a:lnTo>
+                  <a:lnTo>
+                    <a:pt x="0" y="0"/>
+                  </a:lnTo>
+                </a:path>
+              </a:pathLst>
+            </a:custGeom>
+            <a:ln w="6775" cap="flat">
+              <a:solidFill>
+                <a:srgbClr val="EBEBEB">
+                  <a:alpha val="100000"/>
+                </a:srgbClr>
+              </a:solidFill>
+              <a:prstDash val="solid"/>
+              <a:round/>
+            </a:ln>
+          </p:spPr>
+          <p:txBody>
+            <a:bodyPr/>
+            <a:lstStyle/>
+            <a:p/>
+          </p:txBody>
+        </p:sp>
+        <p:sp>
+          <p:nvSpPr>
+            <p:cNvPr id="46" name="pl46"/>
+            <p:cNvSpPr/>
+            <p:nvPr/>
+          </p:nvSpPr>
+          <p:spPr>
+            <a:xfrm>
+              <a:off x="3355791" y="4336484"/>
+              <a:ext cx="0" cy="1317069"/>
+            </a:xfrm>
+            <a:custGeom>
+              <a:avLst/>
+              <a:pathLst>
+                <a:path w="0" h="1317069">
+                  <a:moveTo>
+                    <a:pt x="0" y="1317069"/>
+                  </a:moveTo>
+                  <a:lnTo>
+                    <a:pt x="0" y="0"/>
+                  </a:lnTo>
+                  <a:lnTo>
+                    <a:pt x="0" y="0"/>
+                  </a:lnTo>
+                </a:path>
+              </a:pathLst>
+            </a:custGeom>
+            <a:ln w="6775" cap="flat">
+              <a:solidFill>
+                <a:srgbClr val="EBEBEB">
+                  <a:alpha val="100000"/>
+                </a:srgbClr>
+              </a:solidFill>
+              <a:prstDash val="solid"/>
+              <a:round/>
+            </a:ln>
+          </p:spPr>
+          <p:txBody>
+            <a:bodyPr/>
+            <a:lstStyle/>
+            <a:p/>
+          </p:txBody>
+        </p:sp>
+        <p:sp>
+          <p:nvSpPr>
+            <p:cNvPr id="47" name="pl47"/>
+            <p:cNvSpPr/>
+            <p:nvPr/>
+          </p:nvSpPr>
+          <p:spPr>
+            <a:xfrm>
+              <a:off x="4169393" y="4336484"/>
+              <a:ext cx="0" cy="1317069"/>
+            </a:xfrm>
+            <a:custGeom>
+              <a:avLst/>
+              <a:pathLst>
+                <a:path w="0" h="1317069">
+                  <a:moveTo>
+                    <a:pt x="0" y="1317069"/>
+                  </a:moveTo>
+                  <a:lnTo>
+                    <a:pt x="0" y="0"/>
+                  </a:lnTo>
+                  <a:lnTo>
+                    <a:pt x="0" y="0"/>
+                  </a:lnTo>
+                </a:path>
+              </a:pathLst>
+            </a:custGeom>
+            <a:ln w="6775" cap="flat">
+              <a:solidFill>
+                <a:srgbClr val="EBEBEB">
+                  <a:alpha val="100000"/>
+                </a:srgbClr>
+              </a:solidFill>
+              <a:prstDash val="solid"/>
+              <a:round/>
+            </a:ln>
+          </p:spPr>
+          <p:txBody>
+            <a:bodyPr/>
+            <a:lstStyle/>
+            <a:p/>
+          </p:txBody>
+        </p:sp>
+        <p:sp>
+          <p:nvSpPr>
+            <p:cNvPr id="48" name="pl48"/>
+            <p:cNvSpPr/>
+            <p:nvPr/>
+          </p:nvSpPr>
+          <p:spPr>
+            <a:xfrm>
+              <a:off x="4982994" y="4336484"/>
+              <a:ext cx="0" cy="1317069"/>
+            </a:xfrm>
+            <a:custGeom>
+              <a:avLst/>
+              <a:pathLst>
+                <a:path w="0" h="1317069">
+                  <a:moveTo>
+                    <a:pt x="0" y="1317069"/>
+                  </a:moveTo>
+                  <a:lnTo>
+                    <a:pt x="0" y="0"/>
+                  </a:lnTo>
+                  <a:lnTo>
+                    <a:pt x="0" y="0"/>
+                  </a:lnTo>
+                </a:path>
+              </a:pathLst>
+            </a:custGeom>
+            <a:ln w="6775" cap="flat">
+              <a:solidFill>
+                <a:srgbClr val="EBEBEB">
+                  <a:alpha val="100000"/>
+                </a:srgbClr>
+              </a:solidFill>
+              <a:prstDash val="solid"/>
+              <a:round/>
+            </a:ln>
+          </p:spPr>
+          <p:txBody>
+            <a:bodyPr/>
+            <a:lstStyle/>
+            <a:p/>
+          </p:txBody>
+        </p:sp>
+        <p:sp>
+          <p:nvSpPr>
+            <p:cNvPr id="49" name="pl49"/>
+            <p:cNvSpPr/>
+            <p:nvPr/>
+          </p:nvSpPr>
+          <p:spPr>
+            <a:xfrm>
+              <a:off x="5796595" y="4336484"/>
+              <a:ext cx="0" cy="1317069"/>
+            </a:xfrm>
+            <a:custGeom>
+              <a:avLst/>
+              <a:pathLst>
+                <a:path w="0" h="1317069">
+                  <a:moveTo>
+                    <a:pt x="0" y="1317069"/>
+                  </a:moveTo>
+                  <a:lnTo>
+                    <a:pt x="0" y="0"/>
+                  </a:lnTo>
+                  <a:lnTo>
+                    <a:pt x="0" y="0"/>
+                  </a:lnTo>
+                </a:path>
+              </a:pathLst>
+            </a:custGeom>
+            <a:ln w="6775" cap="flat">
+              <a:solidFill>
+                <a:srgbClr val="EBEBEB">
+                  <a:alpha val="100000"/>
+                </a:srgbClr>
+              </a:solidFill>
+              <a:prstDash val="solid"/>
+              <a:round/>
+            </a:ln>
+          </p:spPr>
+          <p:txBody>
+            <a:bodyPr/>
+            <a:lstStyle/>
+            <a:p/>
+          </p:txBody>
+        </p:sp>
+        <p:sp>
+          <p:nvSpPr>
+            <p:cNvPr id="50" name="pl50"/>
+            <p:cNvSpPr/>
+            <p:nvPr/>
+          </p:nvSpPr>
+          <p:spPr>
+            <a:xfrm>
+              <a:off x="6610197" y="4336484"/>
+              <a:ext cx="0" cy="1317069"/>
+            </a:xfrm>
+            <a:custGeom>
+              <a:avLst/>
+              <a:pathLst>
+                <a:path w="0" h="1317069">
+                  <a:moveTo>
+                    <a:pt x="0" y="1317069"/>
+                  </a:moveTo>
+                  <a:lnTo>
+                    <a:pt x="0" y="0"/>
+                  </a:lnTo>
+                  <a:lnTo>
+                    <a:pt x="0" y="0"/>
+                  </a:lnTo>
+                </a:path>
+              </a:pathLst>
+            </a:custGeom>
+            <a:ln w="6775" cap="flat">
+              <a:solidFill>
+                <a:srgbClr val="EBEBEB">
+                  <a:alpha val="100000"/>
+                </a:srgbClr>
+              </a:solidFill>
+              <a:prstDash val="solid"/>
+              <a:round/>
+            </a:ln>
+          </p:spPr>
+          <p:txBody>
+            <a:bodyPr/>
+            <a:lstStyle/>
+            <a:p/>
+          </p:txBody>
+        </p:sp>
+        <p:sp>
+          <p:nvSpPr>
+            <p:cNvPr id="51" name="pl51"/>
+            <p:cNvSpPr/>
+            <p:nvPr/>
+          </p:nvSpPr>
+          <p:spPr>
+            <a:xfrm>
+              <a:off x="7423798" y="4336484"/>
+              <a:ext cx="0" cy="1317069"/>
+            </a:xfrm>
+            <a:custGeom>
+              <a:avLst/>
+              <a:pathLst>
+                <a:path w="0" h="1317069">
+                  <a:moveTo>
+                    <a:pt x="0" y="1317069"/>
+                  </a:moveTo>
+                  <a:lnTo>
+                    <a:pt x="0" y="0"/>
+                  </a:lnTo>
+                  <a:lnTo>
+                    <a:pt x="0" y="0"/>
+                  </a:lnTo>
+                </a:path>
+              </a:pathLst>
+            </a:custGeom>
+            <a:ln w="6775" cap="flat">
+              <a:solidFill>
+                <a:srgbClr val="EBEBEB">
+                  <a:alpha val="100000"/>
+                </a:srgbClr>
+              </a:solidFill>
+              <a:prstDash val="solid"/>
+              <a:round/>
+            </a:ln>
+          </p:spPr>
+          <p:txBody>
+            <a:bodyPr/>
+            <a:lstStyle/>
+            <a:p/>
+          </p:txBody>
+        </p:sp>
+        <p:sp>
+          <p:nvSpPr>
+            <p:cNvPr id="52" name="pl52"/>
+            <p:cNvSpPr/>
+            <p:nvPr/>
+          </p:nvSpPr>
+          <p:spPr>
+            <a:xfrm>
+              <a:off x="8237399" y="4336484"/>
+              <a:ext cx="0" cy="1317069"/>
+            </a:xfrm>
+            <a:custGeom>
+              <a:avLst/>
+              <a:pathLst>
+                <a:path w="0" h="1317069">
+                  <a:moveTo>
+                    <a:pt x="0" y="1317069"/>
+                  </a:moveTo>
+                  <a:lnTo>
+                    <a:pt x="0" y="0"/>
+                  </a:lnTo>
+                  <a:lnTo>
+                    <a:pt x="0" y="0"/>
+                  </a:lnTo>
+                </a:path>
+              </a:pathLst>
+            </a:custGeom>
+            <a:ln w="6775" cap="flat">
+              <a:solidFill>
+                <a:srgbClr val="EBEBEB">
+                  <a:alpha val="100000"/>
+                </a:srgbClr>
+              </a:solidFill>
+              <a:prstDash val="solid"/>
+              <a:round/>
+            </a:ln>
+          </p:spPr>
+          <p:txBody>
+            <a:bodyPr/>
+            <a:lstStyle/>
+            <a:p/>
+          </p:txBody>
+        </p:sp>
+        <p:sp>
+          <p:nvSpPr>
+            <p:cNvPr id="53" name="pl53"/>
+            <p:cNvSpPr/>
+            <p:nvPr/>
+          </p:nvSpPr>
+          <p:spPr>
+            <a:xfrm>
+              <a:off x="887106" y="5593686"/>
+              <a:ext cx="7660515" cy="0"/>
+            </a:xfrm>
+            <a:custGeom>
+              <a:avLst/>
+              <a:pathLst>
+                <a:path w="7660515" h="0">
+                  <a:moveTo>
+                    <a:pt x="0" y="0"/>
+                  </a:moveTo>
+                  <a:lnTo>
+                    <a:pt x="7660515" y="0"/>
+                  </a:lnTo>
+                  <a:lnTo>
+                    <a:pt x="7660515" y="0"/>
+                  </a:lnTo>
+                </a:path>
+              </a:pathLst>
+            </a:custGeom>
+            <a:ln w="13550" cap="flat">
+              <a:solidFill>
+                <a:srgbClr val="EBEBEB">
+                  <a:alpha val="100000"/>
+                </a:srgbClr>
+              </a:solidFill>
+              <a:prstDash val="solid"/>
+              <a:round/>
+            </a:ln>
+          </p:spPr>
+          <p:txBody>
+            <a:bodyPr/>
+            <a:lstStyle/>
+            <a:p/>
+          </p:txBody>
+        </p:sp>
+        <p:sp>
+          <p:nvSpPr>
+            <p:cNvPr id="54" name="pl54"/>
+            <p:cNvSpPr/>
+            <p:nvPr/>
+          </p:nvSpPr>
+          <p:spPr>
+            <a:xfrm>
+              <a:off x="887106" y="5294352"/>
+              <a:ext cx="7660515" cy="0"/>
+            </a:xfrm>
+            <a:custGeom>
+              <a:avLst/>
+              <a:pathLst>
+                <a:path w="7660515" h="0">
+                  <a:moveTo>
+                    <a:pt x="0" y="0"/>
+                  </a:moveTo>
+                  <a:lnTo>
+                    <a:pt x="7660515" y="0"/>
+                  </a:lnTo>
+                  <a:lnTo>
+                    <a:pt x="7660515" y="0"/>
+                  </a:lnTo>
+                </a:path>
+              </a:pathLst>
+            </a:custGeom>
+            <a:ln w="13550" cap="flat">
+              <a:solidFill>
+                <a:srgbClr val="EBEBEB">
+                  <a:alpha val="100000"/>
+                </a:srgbClr>
+              </a:solidFill>
+              <a:prstDash val="solid"/>
+              <a:round/>
+            </a:ln>
+          </p:spPr>
+          <p:txBody>
+            <a:bodyPr/>
+            <a:lstStyle/>
+            <a:p/>
+          </p:txBody>
+        </p:sp>
+        <p:sp>
+          <p:nvSpPr>
+            <p:cNvPr id="55" name="pl55"/>
+            <p:cNvSpPr/>
+            <p:nvPr/>
+          </p:nvSpPr>
+          <p:spPr>
+            <a:xfrm>
+              <a:off x="887106" y="4995019"/>
+              <a:ext cx="7660515" cy="0"/>
+            </a:xfrm>
+            <a:custGeom>
+              <a:avLst/>
+              <a:pathLst>
+                <a:path w="7660515" h="0">
+                  <a:moveTo>
+                    <a:pt x="0" y="0"/>
+                  </a:moveTo>
+                  <a:lnTo>
+                    <a:pt x="7660515" y="0"/>
+                  </a:lnTo>
+                  <a:lnTo>
+                    <a:pt x="7660515" y="0"/>
+                  </a:lnTo>
+                </a:path>
+              </a:pathLst>
+            </a:custGeom>
+            <a:ln w="13550" cap="flat">
+              <a:solidFill>
+                <a:srgbClr val="EBEBEB">
+                  <a:alpha val="100000"/>
+                </a:srgbClr>
+              </a:solidFill>
+              <a:prstDash val="solid"/>
+              <a:round/>
+            </a:ln>
+          </p:spPr>
+          <p:txBody>
+            <a:bodyPr/>
+            <a:lstStyle/>
+            <a:p/>
+          </p:txBody>
+        </p:sp>
+        <p:sp>
+          <p:nvSpPr>
+            <p:cNvPr id="56" name="pl56"/>
+            <p:cNvSpPr/>
+            <p:nvPr/>
+          </p:nvSpPr>
+          <p:spPr>
+            <a:xfrm>
+              <a:off x="887106" y="4695685"/>
+              <a:ext cx="7660515" cy="0"/>
+            </a:xfrm>
+            <a:custGeom>
+              <a:avLst/>
+              <a:pathLst>
+                <a:path w="7660515" h="0">
+                  <a:moveTo>
+                    <a:pt x="0" y="0"/>
+                  </a:moveTo>
+                  <a:lnTo>
+                    <a:pt x="7660515" y="0"/>
+                  </a:lnTo>
+                  <a:lnTo>
+                    <a:pt x="7660515" y="0"/>
+                  </a:lnTo>
+                </a:path>
+              </a:pathLst>
+            </a:custGeom>
+            <a:ln w="13550" cap="flat">
+              <a:solidFill>
+                <a:srgbClr val="EBEBEB">
+                  <a:alpha val="100000"/>
+                </a:srgbClr>
+              </a:solidFill>
+              <a:prstDash val="solid"/>
+              <a:round/>
+            </a:ln>
+          </p:spPr>
+          <p:txBody>
+            <a:bodyPr/>
+            <a:lstStyle/>
+            <a:p/>
+          </p:txBody>
+        </p:sp>
+        <p:sp>
+          <p:nvSpPr>
+            <p:cNvPr id="57" name="pl57"/>
+            <p:cNvSpPr/>
+            <p:nvPr/>
+          </p:nvSpPr>
+          <p:spPr>
+            <a:xfrm>
+              <a:off x="887106" y="4396351"/>
+              <a:ext cx="7660515" cy="0"/>
+            </a:xfrm>
+            <a:custGeom>
+              <a:avLst/>
+              <a:pathLst>
+                <a:path w="7660515" h="0">
+                  <a:moveTo>
+                    <a:pt x="0" y="0"/>
+                  </a:moveTo>
+                  <a:lnTo>
+                    <a:pt x="7660515" y="0"/>
+                  </a:lnTo>
+                  <a:lnTo>
+                    <a:pt x="7660515" y="0"/>
+                  </a:lnTo>
+                </a:path>
+              </a:pathLst>
+            </a:custGeom>
+            <a:ln w="13550" cap="flat">
+              <a:solidFill>
+                <a:srgbClr val="EBEBEB">
+                  <a:alpha val="100000"/>
+                </a:srgbClr>
+              </a:solidFill>
+              <a:prstDash val="solid"/>
+              <a:round/>
+            </a:ln>
+          </p:spPr>
+          <p:txBody>
+            <a:bodyPr/>
+            <a:lstStyle/>
+            <a:p/>
+          </p:txBody>
+        </p:sp>
+        <p:sp>
+          <p:nvSpPr>
+            <p:cNvPr id="58" name="pl58"/>
+            <p:cNvSpPr/>
+            <p:nvPr/>
+          </p:nvSpPr>
+          <p:spPr>
+            <a:xfrm>
+              <a:off x="1321788" y="4336484"/>
+              <a:ext cx="0" cy="1317069"/>
+            </a:xfrm>
+            <a:custGeom>
+              <a:avLst/>
+              <a:pathLst>
+                <a:path w="0" h="1317069">
+                  <a:moveTo>
+                    <a:pt x="0" y="1317069"/>
+                  </a:moveTo>
+                  <a:lnTo>
+                    <a:pt x="0" y="0"/>
+                  </a:lnTo>
+                  <a:lnTo>
+                    <a:pt x="0" y="0"/>
+                  </a:lnTo>
+                </a:path>
+              </a:pathLst>
+            </a:custGeom>
+            <a:ln w="13550" cap="flat">
+              <a:solidFill>
+                <a:srgbClr val="EBEBEB">
+                  <a:alpha val="100000"/>
+                </a:srgbClr>
+              </a:solidFill>
+              <a:prstDash val="solid"/>
+              <a:round/>
+            </a:ln>
+          </p:spPr>
+          <p:txBody>
+            <a:bodyPr/>
+            <a:lstStyle/>
+            <a:p/>
+          </p:txBody>
+        </p:sp>
+        <p:sp>
+          <p:nvSpPr>
+            <p:cNvPr id="59" name="pl59"/>
+            <p:cNvSpPr/>
+            <p:nvPr/>
+          </p:nvSpPr>
+          <p:spPr>
+            <a:xfrm>
+              <a:off x="2135389" y="4336484"/>
+              <a:ext cx="0" cy="1317069"/>
+            </a:xfrm>
+            <a:custGeom>
+              <a:avLst/>
+              <a:pathLst>
+                <a:path w="0" h="1317069">
+                  <a:moveTo>
+                    <a:pt x="0" y="1317069"/>
+                  </a:moveTo>
+                  <a:lnTo>
+                    <a:pt x="0" y="0"/>
+                  </a:lnTo>
+                  <a:lnTo>
+                    <a:pt x="0" y="0"/>
+                  </a:lnTo>
+                </a:path>
+              </a:pathLst>
+            </a:custGeom>
+            <a:ln w="13550" cap="flat">
+              <a:solidFill>
+                <a:srgbClr val="EBEBEB">
+                  <a:alpha val="100000"/>
+                </a:srgbClr>
+              </a:solidFill>
+              <a:prstDash val="solid"/>
+              <a:round/>
+            </a:ln>
+          </p:spPr>
+          <p:txBody>
+            <a:bodyPr/>
+            <a:lstStyle/>
+            <a:p/>
+          </p:txBody>
+        </p:sp>
+        <p:sp>
+          <p:nvSpPr>
+            <p:cNvPr id="60" name="pl60"/>
+            <p:cNvSpPr/>
+            <p:nvPr/>
+          </p:nvSpPr>
+          <p:spPr>
+            <a:xfrm>
+              <a:off x="2948991" y="4336484"/>
+              <a:ext cx="0" cy="1317069"/>
+            </a:xfrm>
+            <a:custGeom>
+              <a:avLst/>
+              <a:pathLst>
+                <a:path w="0" h="1317069">
+                  <a:moveTo>
+                    <a:pt x="0" y="1317069"/>
+                  </a:moveTo>
+                  <a:lnTo>
+                    <a:pt x="0" y="0"/>
+                  </a:lnTo>
+                  <a:lnTo>
+                    <a:pt x="0" y="0"/>
+                  </a:lnTo>
+                </a:path>
+              </a:pathLst>
+            </a:custGeom>
+            <a:ln w="13550" cap="flat">
+              <a:solidFill>
+                <a:srgbClr val="EBEBEB">
+                  <a:alpha val="100000"/>
+                </a:srgbClr>
+              </a:solidFill>
+              <a:prstDash val="solid"/>
+              <a:round/>
+            </a:ln>
+          </p:spPr>
+          <p:txBody>
+            <a:bodyPr/>
+            <a:lstStyle/>
+            <a:p/>
+          </p:txBody>
+        </p:sp>
+        <p:sp>
+          <p:nvSpPr>
+            <p:cNvPr id="61" name="pl61"/>
+            <p:cNvSpPr/>
+            <p:nvPr/>
+          </p:nvSpPr>
+          <p:spPr>
+            <a:xfrm>
+              <a:off x="3762592" y="4336484"/>
+              <a:ext cx="0" cy="1317069"/>
+            </a:xfrm>
+            <a:custGeom>
+              <a:avLst/>
+              <a:pathLst>
+                <a:path w="0" h="1317069">
+                  <a:moveTo>
+                    <a:pt x="0" y="1317069"/>
+                  </a:moveTo>
+                  <a:lnTo>
+                    <a:pt x="0" y="0"/>
+                  </a:lnTo>
+                  <a:lnTo>
+                    <a:pt x="0" y="0"/>
+                  </a:lnTo>
+                </a:path>
+              </a:pathLst>
+            </a:custGeom>
+            <a:ln w="13550" cap="flat">
+              <a:solidFill>
+                <a:srgbClr val="EBEBEB">
+                  <a:alpha val="100000"/>
+                </a:srgbClr>
+              </a:solidFill>
+              <a:prstDash val="solid"/>
+              <a:round/>
+            </a:ln>
+          </p:spPr>
+          <p:txBody>
+            <a:bodyPr/>
+            <a:lstStyle/>
+            <a:p/>
+          </p:txBody>
+        </p:sp>
+        <p:sp>
+          <p:nvSpPr>
+            <p:cNvPr id="62" name="pl62"/>
+            <p:cNvSpPr/>
+            <p:nvPr/>
+          </p:nvSpPr>
+          <p:spPr>
+            <a:xfrm>
+              <a:off x="4576193" y="4336484"/>
+              <a:ext cx="0" cy="1317069"/>
+            </a:xfrm>
+            <a:custGeom>
+              <a:avLst/>
+              <a:pathLst>
+                <a:path w="0" h="1317069">
+                  <a:moveTo>
+                    <a:pt x="0" y="1317069"/>
+                  </a:moveTo>
+                  <a:lnTo>
+                    <a:pt x="0" y="0"/>
+                  </a:lnTo>
+                  <a:lnTo>
+                    <a:pt x="0" y="0"/>
+                  </a:lnTo>
+                </a:path>
+              </a:pathLst>
+            </a:custGeom>
+            <a:ln w="13550" cap="flat">
+              <a:solidFill>
+                <a:srgbClr val="EBEBEB">
+                  <a:alpha val="100000"/>
+                </a:srgbClr>
+              </a:solidFill>
+              <a:prstDash val="solid"/>
+              <a:round/>
+            </a:ln>
+          </p:spPr>
+          <p:txBody>
+            <a:bodyPr/>
+            <a:lstStyle/>
+            <a:p/>
+          </p:txBody>
+        </p:sp>
+        <p:sp>
+          <p:nvSpPr>
+            <p:cNvPr id="63" name="pl63"/>
+            <p:cNvSpPr/>
+            <p:nvPr/>
+          </p:nvSpPr>
+          <p:spPr>
+            <a:xfrm>
+              <a:off x="5389795" y="4336484"/>
+              <a:ext cx="0" cy="1317069"/>
+            </a:xfrm>
+            <a:custGeom>
+              <a:avLst/>
+              <a:pathLst>
+                <a:path w="0" h="1317069">
+                  <a:moveTo>
+                    <a:pt x="0" y="1317069"/>
+                  </a:moveTo>
+                  <a:lnTo>
+                    <a:pt x="0" y="0"/>
+                  </a:lnTo>
+                  <a:lnTo>
+                    <a:pt x="0" y="0"/>
+                  </a:lnTo>
+                </a:path>
+              </a:pathLst>
+            </a:custGeom>
+            <a:ln w="13550" cap="flat">
+              <a:solidFill>
+                <a:srgbClr val="EBEBEB">
+                  <a:alpha val="100000"/>
+                </a:srgbClr>
+              </a:solidFill>
+              <a:prstDash val="solid"/>
+              <a:round/>
+            </a:ln>
+          </p:spPr>
+          <p:txBody>
+            <a:bodyPr/>
+            <a:lstStyle/>
+            <a:p/>
+          </p:txBody>
+        </p:sp>
+        <p:sp>
+          <p:nvSpPr>
+            <p:cNvPr id="64" name="pl64"/>
+            <p:cNvSpPr/>
+            <p:nvPr/>
+          </p:nvSpPr>
+          <p:spPr>
+            <a:xfrm>
+              <a:off x="6203396" y="4336484"/>
+              <a:ext cx="0" cy="1317069"/>
+            </a:xfrm>
+            <a:custGeom>
+              <a:avLst/>
+              <a:pathLst>
+                <a:path w="0" h="1317069">
+                  <a:moveTo>
+                    <a:pt x="0" y="1317069"/>
+                  </a:moveTo>
+                  <a:lnTo>
+                    <a:pt x="0" y="0"/>
+                  </a:lnTo>
+                  <a:lnTo>
+                    <a:pt x="0" y="0"/>
+                  </a:lnTo>
+                </a:path>
+              </a:pathLst>
+            </a:custGeom>
+            <a:ln w="13550" cap="flat">
+              <a:solidFill>
+                <a:srgbClr val="EBEBEB">
+                  <a:alpha val="100000"/>
+                </a:srgbClr>
+              </a:solidFill>
+              <a:prstDash val="solid"/>
+              <a:round/>
+            </a:ln>
+          </p:spPr>
+          <p:txBody>
+            <a:bodyPr/>
+            <a:lstStyle/>
+            <a:p/>
+          </p:txBody>
+        </p:sp>
+        <p:sp>
+          <p:nvSpPr>
+            <p:cNvPr id="65" name="pl65"/>
+            <p:cNvSpPr/>
+            <p:nvPr/>
+          </p:nvSpPr>
+          <p:spPr>
+            <a:xfrm>
+              <a:off x="7016997" y="4336484"/>
+              <a:ext cx="0" cy="1317069"/>
+            </a:xfrm>
+            <a:custGeom>
+              <a:avLst/>
+              <a:pathLst>
+                <a:path w="0" h="1317069">
+                  <a:moveTo>
+                    <a:pt x="0" y="1317069"/>
+                  </a:moveTo>
+                  <a:lnTo>
+                    <a:pt x="0" y="0"/>
+                  </a:lnTo>
+                  <a:lnTo>
+                    <a:pt x="0" y="0"/>
+                  </a:lnTo>
+                </a:path>
+              </a:pathLst>
+            </a:custGeom>
+            <a:ln w="13550" cap="flat">
+              <a:solidFill>
+                <a:srgbClr val="EBEBEB">
+                  <a:alpha val="100000"/>
+                </a:srgbClr>
+              </a:solidFill>
+              <a:prstDash val="solid"/>
+              <a:round/>
+            </a:ln>
+          </p:spPr>
+          <p:txBody>
+            <a:bodyPr/>
+            <a:lstStyle/>
+            <a:p/>
+          </p:txBody>
+        </p:sp>
+        <p:sp>
+          <p:nvSpPr>
+            <p:cNvPr id="66" name="pl66"/>
+            <p:cNvSpPr/>
+            <p:nvPr/>
+          </p:nvSpPr>
+          <p:spPr>
+            <a:xfrm>
+              <a:off x="7830599" y="4336484"/>
+              <a:ext cx="0" cy="1317069"/>
+            </a:xfrm>
+            <a:custGeom>
+              <a:avLst/>
+              <a:pathLst>
+                <a:path w="0" h="1317069">
+                  <a:moveTo>
+                    <a:pt x="0" y="1317069"/>
+                  </a:moveTo>
+                  <a:lnTo>
+                    <a:pt x="0" y="0"/>
+                  </a:lnTo>
+                  <a:lnTo>
+                    <a:pt x="0" y="0"/>
+                  </a:lnTo>
+                </a:path>
+              </a:pathLst>
+            </a:custGeom>
+            <a:ln w="13550" cap="flat">
+              <a:solidFill>
+                <a:srgbClr val="EBEBEB">
+                  <a:alpha val="100000"/>
+                </a:srgbClr>
+              </a:solidFill>
+              <a:prstDash val="solid"/>
+              <a:round/>
+            </a:ln>
+          </p:spPr>
+          <p:txBody>
+            <a:bodyPr/>
+            <a:lstStyle/>
+            <a:p/>
+          </p:txBody>
+        </p:sp>
+        <p:sp>
+          <p:nvSpPr>
+            <p:cNvPr id="67" name="pg67"/>
+            <p:cNvSpPr/>
+            <p:nvPr/>
+          </p:nvSpPr>
+          <p:spPr>
+            <a:xfrm>
+              <a:off x="1235312" y="4530034"/>
+              <a:ext cx="6964104" cy="990704"/>
+            </a:xfrm>
+            <a:custGeom>
+              <a:avLst/>
+              <a:pathLst>
+                <a:path w="6964104" h="990704">
+                  <a:moveTo>
+                    <a:pt x="0" y="0"/>
+                  </a:moveTo>
+                  <a:lnTo>
+                    <a:pt x="70344" y="28404"/>
+                  </a:lnTo>
+                  <a:lnTo>
+                    <a:pt x="140688" y="56050"/>
+                  </a:lnTo>
+                  <a:lnTo>
+                    <a:pt x="211033" y="82958"/>
+                  </a:lnTo>
+                  <a:lnTo>
+                    <a:pt x="281377" y="109148"/>
+                  </a:lnTo>
+                  <a:lnTo>
+                    <a:pt x="351722" y="134638"/>
+                  </a:lnTo>
+                  <a:lnTo>
+                    <a:pt x="422066" y="159447"/>
+                  </a:lnTo>
+                  <a:lnTo>
+                    <a:pt x="492411" y="183594"/>
+                  </a:lnTo>
+                  <a:lnTo>
+                    <a:pt x="562755" y="207095"/>
+                  </a:lnTo>
+                  <a:lnTo>
+                    <a:pt x="633100" y="229970"/>
+                  </a:lnTo>
+                  <a:lnTo>
+                    <a:pt x="703444" y="252233"/>
+                  </a:lnTo>
+                  <a:lnTo>
+                    <a:pt x="773789" y="273902"/>
+                  </a:lnTo>
+                  <a:lnTo>
+                    <a:pt x="844133" y="294992"/>
+                  </a:lnTo>
+                  <a:lnTo>
+                    <a:pt x="914478" y="315519"/>
+                  </a:lnTo>
+                  <a:lnTo>
+                    <a:pt x="984822" y="335498"/>
+                  </a:lnTo>
+                  <a:lnTo>
+                    <a:pt x="1055167" y="354943"/>
+                  </a:lnTo>
+                  <a:lnTo>
+                    <a:pt x="1125511" y="373869"/>
+                  </a:lnTo>
+                  <a:lnTo>
+                    <a:pt x="1195856" y="392290"/>
+                  </a:lnTo>
+                  <a:lnTo>
+                    <a:pt x="1266200" y="410218"/>
+                  </a:lnTo>
+                  <a:lnTo>
+                    <a:pt x="1336545" y="427668"/>
+                  </a:lnTo>
+                  <a:lnTo>
+                    <a:pt x="1406889" y="444652"/>
+                  </a:lnTo>
+                  <a:lnTo>
+                    <a:pt x="1477234" y="461182"/>
+                  </a:lnTo>
+                  <a:lnTo>
+                    <a:pt x="1547578" y="477271"/>
+                  </a:lnTo>
+                  <a:lnTo>
+                    <a:pt x="1617923" y="492931"/>
+                  </a:lnTo>
+                  <a:lnTo>
+                    <a:pt x="1688267" y="508172"/>
+                  </a:lnTo>
+                  <a:lnTo>
+                    <a:pt x="1758612" y="523006"/>
+                  </a:lnTo>
+                  <a:lnTo>
+                    <a:pt x="1828956" y="537444"/>
+                  </a:lnTo>
+                  <a:lnTo>
+                    <a:pt x="1899301" y="551496"/>
+                  </a:lnTo>
+                  <a:lnTo>
+                    <a:pt x="1969645" y="565173"/>
+                  </a:lnTo>
+                  <a:lnTo>
+                    <a:pt x="2039990" y="578485"/>
+                  </a:lnTo>
+                  <a:lnTo>
+                    <a:pt x="2110334" y="591441"/>
+                  </a:lnTo>
+                  <a:lnTo>
+                    <a:pt x="2180679" y="604051"/>
+                  </a:lnTo>
+                  <a:lnTo>
+                    <a:pt x="2251023" y="616325"/>
+                  </a:lnTo>
+                  <a:lnTo>
+                    <a:pt x="2321368" y="628271"/>
+                  </a:lnTo>
+                  <a:lnTo>
+                    <a:pt x="2391712" y="639898"/>
+                  </a:lnTo>
+                  <a:lnTo>
+                    <a:pt x="2462057" y="651214"/>
+                  </a:lnTo>
+                  <a:lnTo>
+                    <a:pt x="2532401" y="662228"/>
+                  </a:lnTo>
+                  <a:lnTo>
+                    <a:pt x="2602746" y="672948"/>
+                  </a:lnTo>
+                  <a:lnTo>
+                    <a:pt x="2673090" y="683382"/>
+                  </a:lnTo>
+                  <a:lnTo>
+                    <a:pt x="2743435" y="693537"/>
+                  </a:lnTo>
+                  <a:lnTo>
+                    <a:pt x="2813779" y="703421"/>
+                  </a:lnTo>
+                  <a:lnTo>
+                    <a:pt x="2884124" y="713041"/>
+                  </a:lnTo>
+                  <a:lnTo>
+                    <a:pt x="2954468" y="722404"/>
+                  </a:lnTo>
+                  <a:lnTo>
+                    <a:pt x="3024813" y="731517"/>
+                  </a:lnTo>
+                  <a:lnTo>
+                    <a:pt x="3095157" y="740386"/>
+                  </a:lnTo>
+                  <a:lnTo>
+                    <a:pt x="3165502" y="749019"/>
+                  </a:lnTo>
+                  <a:lnTo>
+                    <a:pt x="3235846" y="757421"/>
+                  </a:lnTo>
+                  <a:lnTo>
+                    <a:pt x="3306191" y="764673"/>
+                  </a:lnTo>
+                  <a:lnTo>
+                    <a:pt x="3376535" y="766905"/>
+                  </a:lnTo>
+                  <a:lnTo>
+                    <a:pt x="3446880" y="769120"/>
+                  </a:lnTo>
+                  <a:lnTo>
+                    <a:pt x="3517224" y="771319"/>
+                  </a:lnTo>
+                  <a:lnTo>
+                    <a:pt x="3587569" y="773502"/>
+                  </a:lnTo>
+                  <a:lnTo>
+                    <a:pt x="3657913" y="775668"/>
+                  </a:lnTo>
+                  <a:lnTo>
+                    <a:pt x="3728257" y="777818"/>
+                  </a:lnTo>
+                  <a:lnTo>
+                    <a:pt x="3798602" y="779952"/>
+                  </a:lnTo>
+                  <a:lnTo>
+                    <a:pt x="3868946" y="782070"/>
+                  </a:lnTo>
+                  <a:lnTo>
+                    <a:pt x="3939291" y="784172"/>
+                  </a:lnTo>
+                  <a:lnTo>
+                    <a:pt x="4009635" y="786259"/>
+                  </a:lnTo>
+                  <a:lnTo>
+                    <a:pt x="4079980" y="788330"/>
+                  </a:lnTo>
+                  <a:lnTo>
+                    <a:pt x="4150324" y="790385"/>
+                  </a:lnTo>
+                  <a:lnTo>
+                    <a:pt x="4220669" y="792425"/>
+                  </a:lnTo>
+                  <a:lnTo>
+                    <a:pt x="4291013" y="794450"/>
+                  </a:lnTo>
+                  <a:lnTo>
+                    <a:pt x="4361358" y="796460"/>
+                  </a:lnTo>
+                  <a:lnTo>
+                    <a:pt x="4431702" y="798455"/>
+                  </a:lnTo>
+                  <a:lnTo>
+                    <a:pt x="4502047" y="800435"/>
+                  </a:lnTo>
+                  <a:lnTo>
+                    <a:pt x="4572391" y="802400"/>
+                  </a:lnTo>
+                  <a:lnTo>
+                    <a:pt x="4642736" y="804350"/>
+                  </a:lnTo>
+                  <a:lnTo>
+                    <a:pt x="4713080" y="806286"/>
+                  </a:lnTo>
+                  <a:lnTo>
+                    <a:pt x="4783425" y="808208"/>
+                  </a:lnTo>
+                  <a:lnTo>
+                    <a:pt x="4853769" y="810115"/>
+                  </a:lnTo>
+                  <a:lnTo>
+                    <a:pt x="4924114" y="812008"/>
+                  </a:lnTo>
+                  <a:lnTo>
+                    <a:pt x="4994458" y="813886"/>
+                  </a:lnTo>
+                  <a:lnTo>
+                    <a:pt x="5064803" y="815751"/>
+                  </a:lnTo>
+                  <a:lnTo>
+                    <a:pt x="5135147" y="817602"/>
+                  </a:lnTo>
+                  <a:lnTo>
+                    <a:pt x="5205492" y="819439"/>
+                  </a:lnTo>
+                  <a:lnTo>
+                    <a:pt x="5275836" y="821262"/>
+                  </a:lnTo>
+                  <a:lnTo>
+                    <a:pt x="5346181" y="823072"/>
+                  </a:lnTo>
+                  <a:lnTo>
+                    <a:pt x="5416525" y="824868"/>
+                  </a:lnTo>
+                  <a:lnTo>
+                    <a:pt x="5486870" y="826650"/>
+                  </a:lnTo>
+                  <a:lnTo>
+                    <a:pt x="5557214" y="828420"/>
+                  </a:lnTo>
+                  <a:lnTo>
+                    <a:pt x="5627559" y="830176"/>
+                  </a:lnTo>
+                  <a:lnTo>
+                    <a:pt x="5697903" y="831919"/>
+                  </a:lnTo>
+                  <a:lnTo>
+                    <a:pt x="5768248" y="833649"/>
+                  </a:lnTo>
+                  <a:lnTo>
+                    <a:pt x="5838592" y="835366"/>
+                  </a:lnTo>
+                  <a:lnTo>
+                    <a:pt x="5908937" y="837071"/>
+                  </a:lnTo>
+                  <a:lnTo>
+                    <a:pt x="5979281" y="838762"/>
+                  </a:lnTo>
+                  <a:lnTo>
+                    <a:pt x="6049626" y="840441"/>
+                  </a:lnTo>
+                  <a:lnTo>
+                    <a:pt x="6119970" y="842108"/>
+                  </a:lnTo>
+                  <a:lnTo>
+                    <a:pt x="6190315" y="843762"/>
+                  </a:lnTo>
+                  <a:lnTo>
+                    <a:pt x="6260659" y="845403"/>
+                  </a:lnTo>
+                  <a:lnTo>
+                    <a:pt x="6331004" y="847033"/>
+                  </a:lnTo>
+                  <a:lnTo>
+                    <a:pt x="6401348" y="848650"/>
+                  </a:lnTo>
+                  <a:lnTo>
+                    <a:pt x="6471693" y="850255"/>
+                  </a:lnTo>
+                  <a:lnTo>
+                    <a:pt x="6542037" y="851848"/>
+                  </a:lnTo>
+                  <a:lnTo>
+                    <a:pt x="6612382" y="853429"/>
+                  </a:lnTo>
+                  <a:lnTo>
+                    <a:pt x="6682726" y="854999"/>
+                  </a:lnTo>
+                  <a:lnTo>
+                    <a:pt x="6753071" y="856557"/>
+                  </a:lnTo>
+                  <a:lnTo>
+                    <a:pt x="6823415" y="858103"/>
+                  </a:lnTo>
+                  <a:lnTo>
+                    <a:pt x="6893760" y="859637"/>
+                  </a:lnTo>
+                  <a:lnTo>
+                    <a:pt x="6964104" y="861160"/>
+                  </a:lnTo>
+                  <a:lnTo>
+                    <a:pt x="6964104" y="990704"/>
+                  </a:lnTo>
+                  <a:lnTo>
+                    <a:pt x="6893760" y="988703"/>
+                  </a:lnTo>
+                  <a:lnTo>
+                    <a:pt x="6823415" y="986646"/>
+                  </a:lnTo>
+                  <a:lnTo>
+                    <a:pt x="6753071" y="984534"/>
+                  </a:lnTo>
+                  <a:lnTo>
+                    <a:pt x="6682726" y="982363"/>
+                  </a:lnTo>
+                  <a:lnTo>
+                    <a:pt x="6612382" y="980132"/>
+                  </a:lnTo>
+                  <a:lnTo>
+                    <a:pt x="6542037" y="977841"/>
+                  </a:lnTo>
+                  <a:lnTo>
+                    <a:pt x="6471693" y="975486"/>
+                  </a:lnTo>
+                  <a:lnTo>
+                    <a:pt x="6401348" y="973067"/>
+                  </a:lnTo>
+                  <a:lnTo>
+                    <a:pt x="6331004" y="970582"/>
+                  </a:lnTo>
+                  <a:lnTo>
+                    <a:pt x="6260659" y="968028"/>
+                  </a:lnTo>
+                  <a:lnTo>
+                    <a:pt x="6190315" y="965405"/>
+                  </a:lnTo>
+                  <a:lnTo>
+                    <a:pt x="6119970" y="962709"/>
+                  </a:lnTo>
+                  <a:lnTo>
+                    <a:pt x="6049626" y="959939"/>
+                  </a:lnTo>
+                  <a:lnTo>
+                    <a:pt x="5979281" y="957094"/>
+                  </a:lnTo>
+                  <a:lnTo>
+                    <a:pt x="5908937" y="954170"/>
+                  </a:lnTo>
+                  <a:lnTo>
+                    <a:pt x="5838592" y="951166"/>
+                  </a:lnTo>
+                  <a:lnTo>
+                    <a:pt x="5768248" y="948080"/>
+                  </a:lnTo>
+                  <a:lnTo>
+                    <a:pt x="5697903" y="944909"/>
+                  </a:lnTo>
+                  <a:lnTo>
+                    <a:pt x="5627559" y="941651"/>
+                  </a:lnTo>
+                  <a:lnTo>
+                    <a:pt x="5557214" y="938303"/>
+                  </a:lnTo>
+                  <a:lnTo>
+                    <a:pt x="5486870" y="934864"/>
+                  </a:lnTo>
+                  <a:lnTo>
+                    <a:pt x="5416525" y="931331"/>
+                  </a:lnTo>
+                  <a:lnTo>
+                    <a:pt x="5346181" y="927700"/>
+                  </a:lnTo>
+                  <a:lnTo>
+                    <a:pt x="5275836" y="923970"/>
+                  </a:lnTo>
+                  <a:lnTo>
+                    <a:pt x="5205492" y="920137"/>
+                  </a:lnTo>
+                  <a:lnTo>
+                    <a:pt x="5135147" y="916200"/>
+                  </a:lnTo>
+                  <a:lnTo>
+                    <a:pt x="5064803" y="912154"/>
+                  </a:lnTo>
+                  <a:lnTo>
+                    <a:pt x="4994458" y="907997"/>
+                  </a:lnTo>
+                  <a:lnTo>
+                    <a:pt x="4924114" y="903726"/>
+                  </a:lnTo>
+                  <a:lnTo>
+                    <a:pt x="4853769" y="899338"/>
+                  </a:lnTo>
+                  <a:lnTo>
+                    <a:pt x="4783425" y="894830"/>
+                  </a:lnTo>
+                  <a:lnTo>
+                    <a:pt x="4713080" y="890198"/>
+                  </a:lnTo>
+                  <a:lnTo>
+                    <a:pt x="4642736" y="885439"/>
+                  </a:lnTo>
+                  <a:lnTo>
+                    <a:pt x="4572391" y="880549"/>
+                  </a:lnTo>
+                  <a:lnTo>
+                    <a:pt x="4502047" y="875525"/>
+                  </a:lnTo>
+                  <a:lnTo>
+                    <a:pt x="4431702" y="870363"/>
+                  </a:lnTo>
+                  <a:lnTo>
+                    <a:pt x="4361358" y="865060"/>
+                  </a:lnTo>
+                  <a:lnTo>
+                    <a:pt x="4291013" y="859611"/>
+                  </a:lnTo>
+                  <a:lnTo>
+                    <a:pt x="4220669" y="854013"/>
+                  </a:lnTo>
+                  <a:lnTo>
+                    <a:pt x="4150324" y="848261"/>
+                  </a:lnTo>
+                  <a:lnTo>
+                    <a:pt x="4079980" y="842351"/>
+                  </a:lnTo>
+                  <a:lnTo>
+                    <a:pt x="4009635" y="836279"/>
+                  </a:lnTo>
+                  <a:lnTo>
+                    <a:pt x="3939291" y="830040"/>
+                  </a:lnTo>
+                  <a:lnTo>
+                    <a:pt x="3868946" y="823631"/>
+                  </a:lnTo>
+                  <a:lnTo>
+                    <a:pt x="3798602" y="817045"/>
+                  </a:lnTo>
+                  <a:lnTo>
+                    <a:pt x="3728257" y="810279"/>
+                  </a:lnTo>
+                  <a:lnTo>
+                    <a:pt x="3657913" y="803327"/>
+                  </a:lnTo>
+                  <a:lnTo>
+                    <a:pt x="3587569" y="796184"/>
+                  </a:lnTo>
+                  <a:lnTo>
+                    <a:pt x="3517224" y="788846"/>
+                  </a:lnTo>
+                  <a:lnTo>
+                    <a:pt x="3446880" y="781305"/>
+                  </a:lnTo>
+                  <a:lnTo>
+                    <a:pt x="3376535" y="773559"/>
+                  </a:lnTo>
+                  <a:lnTo>
+                    <a:pt x="3306191" y="765599"/>
+                  </a:lnTo>
+                  <a:lnTo>
+                    <a:pt x="3235846" y="762424"/>
+                  </a:lnTo>
+                  <a:lnTo>
+                    <a:pt x="3165502" y="760158"/>
+                  </a:lnTo>
+                  <a:lnTo>
+                    <a:pt x="3095157" y="757875"/>
+                  </a:lnTo>
+                  <a:lnTo>
+                    <a:pt x="3024813" y="755575"/>
+                  </a:lnTo>
+                  <a:lnTo>
+                    <a:pt x="2954468" y="753258"/>
+                  </a:lnTo>
+                  <a:lnTo>
+                    <a:pt x="2884124" y="750923"/>
+                  </a:lnTo>
+                  <a:lnTo>
+                    <a:pt x="2813779" y="748571"/>
+                  </a:lnTo>
+                  <a:lnTo>
+                    <a:pt x="2743435" y="746201"/>
+                  </a:lnTo>
+                  <a:lnTo>
+                    <a:pt x="2673090" y="743813"/>
+                  </a:lnTo>
+                  <a:lnTo>
+                    <a:pt x="2602746" y="741407"/>
+                  </a:lnTo>
+                  <a:lnTo>
+                    <a:pt x="2532401" y="738983"/>
+                  </a:lnTo>
+                  <a:lnTo>
+                    <a:pt x="2462057" y="736541"/>
+                  </a:lnTo>
+                  <a:lnTo>
+                    <a:pt x="2391712" y="734081"/>
+                  </a:lnTo>
+                  <a:lnTo>
+                    <a:pt x="2321368" y="731602"/>
+                  </a:lnTo>
+                  <a:lnTo>
+                    <a:pt x="2251023" y="729104"/>
+                  </a:lnTo>
+                  <a:lnTo>
+                    <a:pt x="2180679" y="726588"/>
+                  </a:lnTo>
+                  <a:lnTo>
+                    <a:pt x="2110334" y="724052"/>
+                  </a:lnTo>
+                  <a:lnTo>
+                    <a:pt x="2039990" y="721498"/>
+                  </a:lnTo>
+                  <a:lnTo>
+                    <a:pt x="1969645" y="718924"/>
+                  </a:lnTo>
+                  <a:lnTo>
+                    <a:pt x="1899301" y="716331"/>
+                  </a:lnTo>
+                  <a:lnTo>
+                    <a:pt x="1828956" y="713719"/>
+                  </a:lnTo>
+                  <a:lnTo>
+                    <a:pt x="1758612" y="711087"/>
+                  </a:lnTo>
+                  <a:lnTo>
+                    <a:pt x="1688267" y="708435"/>
+                  </a:lnTo>
+                  <a:lnTo>
+                    <a:pt x="1617923" y="705763"/>
+                  </a:lnTo>
+                  <a:lnTo>
+                    <a:pt x="1547578" y="703071"/>
+                  </a:lnTo>
+                  <a:lnTo>
+                    <a:pt x="1477234" y="700358"/>
+                  </a:lnTo>
+                  <a:lnTo>
+                    <a:pt x="1406889" y="697626"/>
+                  </a:lnTo>
+                  <a:lnTo>
+                    <a:pt x="1336545" y="694872"/>
+                  </a:lnTo>
+                  <a:lnTo>
+                    <a:pt x="1266200" y="692099"/>
+                  </a:lnTo>
+                  <a:lnTo>
+                    <a:pt x="1195856" y="689304"/>
+                  </a:lnTo>
+                  <a:lnTo>
+                    <a:pt x="1125511" y="686488"/>
+                  </a:lnTo>
+                  <a:lnTo>
+                    <a:pt x="1055167" y="683651"/>
+                  </a:lnTo>
+                  <a:lnTo>
+                    <a:pt x="984822" y="680793"/>
+                  </a:lnTo>
+                  <a:lnTo>
+                    <a:pt x="914478" y="677913"/>
+                  </a:lnTo>
+                  <a:lnTo>
+                    <a:pt x="844133" y="675011"/>
+                  </a:lnTo>
+                  <a:lnTo>
+                    <a:pt x="773789" y="672088"/>
+                  </a:lnTo>
+                  <a:lnTo>
+                    <a:pt x="703444" y="669143"/>
+                  </a:lnTo>
+                  <a:lnTo>
+                    <a:pt x="633100" y="666175"/>
+                  </a:lnTo>
+                  <a:lnTo>
+                    <a:pt x="562755" y="663185"/>
+                  </a:lnTo>
+                  <a:lnTo>
+                    <a:pt x="492411" y="660173"/>
+                  </a:lnTo>
+                  <a:lnTo>
+                    <a:pt x="422066" y="657138"/>
+                  </a:lnTo>
+                  <a:lnTo>
+                    <a:pt x="351722" y="654080"/>
+                  </a:lnTo>
+                  <a:lnTo>
+                    <a:pt x="281377" y="651000"/>
+                  </a:lnTo>
+                  <a:lnTo>
+                    <a:pt x="211033" y="647896"/>
+                  </a:lnTo>
+                  <a:lnTo>
+                    <a:pt x="140688" y="644768"/>
+                  </a:lnTo>
+                  <a:lnTo>
+                    <a:pt x="70344" y="641618"/>
+                  </a:lnTo>
+                  <a:lnTo>
+                    <a:pt x="0" y="638443"/>
+                  </a:lnTo>
+                  <a:close/>
+                </a:path>
+              </a:pathLst>
+            </a:custGeom>
+            <a:solidFill>
+              <a:srgbClr val="FF8C00">
+                <a:alpha val="20000"/>
+              </a:srgbClr>
+            </a:solidFill>
+          </p:spPr>
+          <p:txBody>
+            <a:bodyPr/>
+            <a:lstStyle/>
+            <a:p/>
+          </p:txBody>
+        </p:sp>
+        <p:sp>
+          <p:nvSpPr>
+            <p:cNvPr id="68" name="pl68"/>
+            <p:cNvSpPr/>
+            <p:nvPr/>
+          </p:nvSpPr>
+          <p:spPr>
+            <a:xfrm>
+              <a:off x="1235312" y="4530034"/>
+              <a:ext cx="6964104" cy="861160"/>
+            </a:xfrm>
+            <a:custGeom>
+              <a:avLst/>
+              <a:pathLst>
+                <a:path w="6964104" h="861160">
+                  <a:moveTo>
+                    <a:pt x="0" y="0"/>
+                  </a:moveTo>
+                  <a:lnTo>
+                    <a:pt x="70344" y="28404"/>
+                  </a:lnTo>
+                  <a:lnTo>
+                    <a:pt x="140688" y="56050"/>
+                  </a:lnTo>
+                  <a:lnTo>
+                    <a:pt x="211033" y="82958"/>
+                  </a:lnTo>
+                  <a:lnTo>
+                    <a:pt x="281377" y="109148"/>
+                  </a:lnTo>
+                  <a:lnTo>
+                    <a:pt x="351722" y="134638"/>
+                  </a:lnTo>
+                  <a:lnTo>
+                    <a:pt x="422066" y="159447"/>
+                  </a:lnTo>
+                  <a:lnTo>
+                    <a:pt x="492411" y="183594"/>
+                  </a:lnTo>
+                  <a:lnTo>
+                    <a:pt x="562755" y="207095"/>
+                  </a:lnTo>
+                  <a:lnTo>
+                    <a:pt x="633100" y="229970"/>
+                  </a:lnTo>
+                  <a:lnTo>
+                    <a:pt x="703444" y="252233"/>
+                  </a:lnTo>
+                  <a:lnTo>
+                    <a:pt x="773789" y="273902"/>
+                  </a:lnTo>
+                  <a:lnTo>
+                    <a:pt x="844133" y="294992"/>
+                  </a:lnTo>
+                  <a:lnTo>
+                    <a:pt x="914478" y="315519"/>
+                  </a:lnTo>
+                  <a:lnTo>
+                    <a:pt x="984822" y="335498"/>
+                  </a:lnTo>
+                  <a:lnTo>
+                    <a:pt x="1055167" y="354943"/>
+                  </a:lnTo>
+                  <a:lnTo>
+                    <a:pt x="1125511" y="373869"/>
+                  </a:lnTo>
+                  <a:lnTo>
+                    <a:pt x="1195856" y="392290"/>
+                  </a:lnTo>
+                  <a:lnTo>
+                    <a:pt x="1266200" y="410218"/>
+                  </a:lnTo>
+                  <a:lnTo>
+                    <a:pt x="1336545" y="427668"/>
+                  </a:lnTo>
+                  <a:lnTo>
+                    <a:pt x="1406889" y="444652"/>
+                  </a:lnTo>
+                  <a:lnTo>
+                    <a:pt x="1477234" y="461182"/>
+                  </a:lnTo>
+                  <a:lnTo>
+                    <a:pt x="1547578" y="477271"/>
+                  </a:lnTo>
+                  <a:lnTo>
+                    <a:pt x="1617923" y="492931"/>
+                  </a:lnTo>
+                  <a:lnTo>
+                    <a:pt x="1688267" y="508172"/>
+                  </a:lnTo>
+                  <a:lnTo>
+                    <a:pt x="1758612" y="523006"/>
+                  </a:lnTo>
+                  <a:lnTo>
+                    <a:pt x="1828956" y="537444"/>
+                  </a:lnTo>
+                  <a:lnTo>
+                    <a:pt x="1899301" y="551496"/>
+                  </a:lnTo>
+                  <a:lnTo>
+                    <a:pt x="1969645" y="565173"/>
+                  </a:lnTo>
+                  <a:lnTo>
+                    <a:pt x="2039990" y="578485"/>
+                  </a:lnTo>
+                  <a:lnTo>
+                    <a:pt x="2110334" y="591441"/>
+                  </a:lnTo>
+                  <a:lnTo>
+                    <a:pt x="2180679" y="604051"/>
+                  </a:lnTo>
+                  <a:lnTo>
+                    <a:pt x="2251023" y="616325"/>
+                  </a:lnTo>
+                  <a:lnTo>
+                    <a:pt x="2321368" y="628271"/>
+                  </a:lnTo>
+                  <a:lnTo>
+                    <a:pt x="2391712" y="639898"/>
+                  </a:lnTo>
+                  <a:lnTo>
+                    <a:pt x="2462057" y="651214"/>
+                  </a:lnTo>
+                  <a:lnTo>
+                    <a:pt x="2532401" y="662228"/>
+                  </a:lnTo>
+                  <a:lnTo>
+                    <a:pt x="2602746" y="672948"/>
+                  </a:lnTo>
+                  <a:lnTo>
+                    <a:pt x="2673090" y="683382"/>
+                  </a:lnTo>
+                  <a:lnTo>
+                    <a:pt x="2743435" y="693537"/>
+                  </a:lnTo>
+                  <a:lnTo>
+                    <a:pt x="2813779" y="703421"/>
+                  </a:lnTo>
+                  <a:lnTo>
+                    <a:pt x="2884124" y="713041"/>
+                  </a:lnTo>
+                  <a:lnTo>
+                    <a:pt x="2954468" y="722404"/>
+                  </a:lnTo>
+                  <a:lnTo>
+                    <a:pt x="3024813" y="731517"/>
+                  </a:lnTo>
+                  <a:lnTo>
+                    <a:pt x="3095157" y="740386"/>
+                  </a:lnTo>
+                  <a:lnTo>
+                    <a:pt x="3165502" y="749019"/>
+                  </a:lnTo>
+                  <a:lnTo>
+                    <a:pt x="3235846" y="757421"/>
+                  </a:lnTo>
+                  <a:lnTo>
+                    <a:pt x="3306191" y="764673"/>
+                  </a:lnTo>
+                  <a:lnTo>
+                    <a:pt x="3376535" y="766905"/>
+                  </a:lnTo>
+                  <a:lnTo>
+                    <a:pt x="3446880" y="769120"/>
+                  </a:lnTo>
+                  <a:lnTo>
+                    <a:pt x="3517224" y="771319"/>
+                  </a:lnTo>
+                  <a:lnTo>
+                    <a:pt x="3587569" y="773502"/>
+                  </a:lnTo>
+                  <a:lnTo>
+                    <a:pt x="3657913" y="775668"/>
+                  </a:lnTo>
+                  <a:lnTo>
+                    <a:pt x="3728257" y="777818"/>
+                  </a:lnTo>
+                  <a:lnTo>
+                    <a:pt x="3798602" y="779952"/>
+                  </a:lnTo>
+                  <a:lnTo>
+                    <a:pt x="3868946" y="782070"/>
+                  </a:lnTo>
+                  <a:lnTo>
+                    <a:pt x="3939291" y="784172"/>
+                  </a:lnTo>
+                  <a:lnTo>
+                    <a:pt x="4009635" y="786259"/>
+                  </a:lnTo>
+                  <a:lnTo>
+                    <a:pt x="4079980" y="788330"/>
+                  </a:lnTo>
+                  <a:lnTo>
+                    <a:pt x="4150324" y="790385"/>
+                  </a:lnTo>
+                  <a:lnTo>
+                    <a:pt x="4220669" y="792425"/>
+                  </a:lnTo>
+                  <a:lnTo>
+                    <a:pt x="4291013" y="794450"/>
+                  </a:lnTo>
+                  <a:lnTo>
+                    <a:pt x="4361358" y="796460"/>
+                  </a:lnTo>
+                  <a:lnTo>
+                    <a:pt x="4431702" y="798455"/>
+                  </a:lnTo>
+                  <a:lnTo>
+                    <a:pt x="4502047" y="800435"/>
+                  </a:lnTo>
+                  <a:lnTo>
+                    <a:pt x="4572391" y="802400"/>
+                  </a:lnTo>
+                  <a:lnTo>
+                    <a:pt x="4642736" y="804350"/>
+                  </a:lnTo>
+                  <a:lnTo>
+                    <a:pt x="4713080" y="806286"/>
+                  </a:lnTo>
+                  <a:lnTo>
+                    <a:pt x="4783425" y="808208"/>
+                  </a:lnTo>
+                  <a:lnTo>
+                    <a:pt x="4853769" y="810115"/>
+                  </a:lnTo>
+                  <a:lnTo>
+                    <a:pt x="4924114" y="812008"/>
+                  </a:lnTo>
+                  <a:lnTo>
+                    <a:pt x="4994458" y="813886"/>
+                  </a:lnTo>
+                  <a:lnTo>
+                    <a:pt x="5064803" y="815751"/>
+                  </a:lnTo>
+                  <a:lnTo>
+                    <a:pt x="5135147" y="817602"/>
+                  </a:lnTo>
+                  <a:lnTo>
+                    <a:pt x="5205492" y="819439"/>
+                  </a:lnTo>
+                  <a:lnTo>
+                    <a:pt x="5275836" y="821262"/>
+                  </a:lnTo>
+                  <a:lnTo>
+                    <a:pt x="5346181" y="823072"/>
+                  </a:lnTo>
+                  <a:lnTo>
+                    <a:pt x="5416525" y="824868"/>
+                  </a:lnTo>
+                  <a:lnTo>
+                    <a:pt x="5486870" y="826650"/>
+                  </a:lnTo>
+                  <a:lnTo>
+                    <a:pt x="5557214" y="828420"/>
+                  </a:lnTo>
+                  <a:lnTo>
+                    <a:pt x="5627559" y="830176"/>
+                  </a:lnTo>
+                  <a:lnTo>
+                    <a:pt x="5697903" y="831919"/>
+                  </a:lnTo>
+                  <a:lnTo>
+                    <a:pt x="5768248" y="833649"/>
+                  </a:lnTo>
+                  <a:lnTo>
+                    <a:pt x="5838592" y="835366"/>
+                  </a:lnTo>
+                  <a:lnTo>
+                    <a:pt x="5908937" y="837071"/>
+                  </a:lnTo>
+                  <a:lnTo>
+                    <a:pt x="5979281" y="838762"/>
+                  </a:lnTo>
+                  <a:lnTo>
+                    <a:pt x="6049626" y="840441"/>
+                  </a:lnTo>
+                  <a:lnTo>
+                    <a:pt x="6119970" y="842108"/>
+                  </a:lnTo>
+                  <a:lnTo>
+                    <a:pt x="6190315" y="843762"/>
+                  </a:lnTo>
+                  <a:lnTo>
+                    <a:pt x="6260659" y="845403"/>
+                  </a:lnTo>
+                  <a:lnTo>
+                    <a:pt x="6331004" y="847033"/>
+                  </a:lnTo>
+                  <a:lnTo>
+                    <a:pt x="6401348" y="848650"/>
+                  </a:lnTo>
+                  <a:lnTo>
+                    <a:pt x="6471693" y="850255"/>
+                  </a:lnTo>
+                  <a:lnTo>
+                    <a:pt x="6542037" y="851848"/>
+                  </a:lnTo>
+                  <a:lnTo>
+                    <a:pt x="6612382" y="853429"/>
+                  </a:lnTo>
+                  <a:lnTo>
+                    <a:pt x="6682726" y="854999"/>
+                  </a:lnTo>
+                  <a:lnTo>
+                    <a:pt x="6753071" y="856557"/>
+                  </a:lnTo>
+                  <a:lnTo>
+                    <a:pt x="6823415" y="858103"/>
+                  </a:lnTo>
+                  <a:lnTo>
+                    <a:pt x="6893760" y="859637"/>
+                  </a:lnTo>
+                  <a:lnTo>
+                    <a:pt x="6964104" y="861160"/>
+                  </a:lnTo>
+                </a:path>
+              </a:pathLst>
+            </a:custGeom>
+          </p:spPr>
+          <p:txBody>
+            <a:bodyPr/>
+            <a:lstStyle/>
+            <a:p/>
+          </p:txBody>
+        </p:sp>
+        <p:sp>
+          <p:nvSpPr>
+            <p:cNvPr id="69" name="pl69"/>
+            <p:cNvSpPr/>
+            <p:nvPr/>
+          </p:nvSpPr>
+          <p:spPr>
+            <a:xfrm>
+              <a:off x="1235312" y="5168478"/>
+              <a:ext cx="6964104" cy="352261"/>
+            </a:xfrm>
+            <a:custGeom>
+              <a:avLst/>
+              <a:pathLst>
+                <a:path w="6964104" h="352261">
+                  <a:moveTo>
+                    <a:pt x="6964104" y="352261"/>
+                  </a:moveTo>
+                  <a:lnTo>
+                    <a:pt x="6893760" y="350259"/>
+                  </a:lnTo>
+                  <a:lnTo>
+                    <a:pt x="6823415" y="348203"/>
+                  </a:lnTo>
+                  <a:lnTo>
+                    <a:pt x="6753071" y="346090"/>
+                  </a:lnTo>
+                  <a:lnTo>
+                    <a:pt x="6682726" y="343919"/>
+                  </a:lnTo>
+                  <a:lnTo>
+                    <a:pt x="6612382" y="341689"/>
+                  </a:lnTo>
+                  <a:lnTo>
+                    <a:pt x="6542037" y="339397"/>
+                  </a:lnTo>
+                  <a:lnTo>
+                    <a:pt x="6471693" y="337043"/>
+                  </a:lnTo>
+                  <a:lnTo>
+                    <a:pt x="6401348" y="334624"/>
+                  </a:lnTo>
+                  <a:lnTo>
+                    <a:pt x="6331004" y="332138"/>
+                  </a:lnTo>
+                  <a:lnTo>
+                    <a:pt x="6260659" y="329585"/>
+                  </a:lnTo>
+                  <a:lnTo>
+                    <a:pt x="6190315" y="326961"/>
+                  </a:lnTo>
+                  <a:lnTo>
+                    <a:pt x="6119970" y="324265"/>
+                  </a:lnTo>
+                  <a:lnTo>
+                    <a:pt x="6049626" y="321496"/>
+                  </a:lnTo>
+                  <a:lnTo>
+                    <a:pt x="5979281" y="318650"/>
+                  </a:lnTo>
+                  <a:lnTo>
+                    <a:pt x="5908937" y="315726"/>
+                  </a:lnTo>
+                  <a:lnTo>
+                    <a:pt x="5838592" y="312723"/>
+                  </a:lnTo>
+                  <a:lnTo>
+                    <a:pt x="5768248" y="309636"/>
+                  </a:lnTo>
+                  <a:lnTo>
+                    <a:pt x="5697903" y="306465"/>
+                  </a:lnTo>
+                  <a:lnTo>
+                    <a:pt x="5627559" y="303207"/>
+                  </a:lnTo>
+                  <a:lnTo>
+                    <a:pt x="5557214" y="299860"/>
+                  </a:lnTo>
+                  <a:lnTo>
+                    <a:pt x="5486870" y="296421"/>
+                  </a:lnTo>
+                  <a:lnTo>
+                    <a:pt x="5416525" y="292887"/>
+                  </a:lnTo>
+                  <a:lnTo>
+                    <a:pt x="5346181" y="289256"/>
+                  </a:lnTo>
+                  <a:lnTo>
+                    <a:pt x="5275836" y="285526"/>
+                  </a:lnTo>
+                  <a:lnTo>
+                    <a:pt x="5205492" y="281694"/>
+                  </a:lnTo>
+                  <a:lnTo>
+                    <a:pt x="5135147" y="277756"/>
+                  </a:lnTo>
+                  <a:lnTo>
+                    <a:pt x="5064803" y="273710"/>
+                  </a:lnTo>
+                  <a:lnTo>
+                    <a:pt x="4994458" y="269553"/>
+                  </a:lnTo>
+                  <a:lnTo>
+                    <a:pt x="4924114" y="265283"/>
+                  </a:lnTo>
+                  <a:lnTo>
+                    <a:pt x="4853769" y="260895"/>
+                  </a:lnTo>
+                  <a:lnTo>
+                    <a:pt x="4783425" y="256386"/>
+                  </a:lnTo>
+                  <a:lnTo>
+                    <a:pt x="4713080" y="251754"/>
+                  </a:lnTo>
+                  <a:lnTo>
+                    <a:pt x="4642736" y="246995"/>
+                  </a:lnTo>
+                  <a:lnTo>
+                    <a:pt x="4572391" y="242105"/>
+                  </a:lnTo>
+                  <a:lnTo>
+                    <a:pt x="4502047" y="237081"/>
+                  </a:lnTo>
+                  <a:lnTo>
+                    <a:pt x="4431702" y="231920"/>
+                  </a:lnTo>
+                  <a:lnTo>
+                    <a:pt x="4361358" y="226616"/>
+                  </a:lnTo>
+                  <a:lnTo>
+                    <a:pt x="4291013" y="221167"/>
+                  </a:lnTo>
+                  <a:lnTo>
+                    <a:pt x="4220669" y="215569"/>
+                  </a:lnTo>
+                  <a:lnTo>
+                    <a:pt x="4150324" y="209817"/>
+                  </a:lnTo>
+                  <a:lnTo>
+                    <a:pt x="4079980" y="203907"/>
+                  </a:lnTo>
+                  <a:lnTo>
+                    <a:pt x="4009635" y="197835"/>
+                  </a:lnTo>
+                  <a:lnTo>
+                    <a:pt x="3939291" y="191597"/>
+                  </a:lnTo>
+                  <a:lnTo>
+                    <a:pt x="3868946" y="185187"/>
+                  </a:lnTo>
+                  <a:lnTo>
+                    <a:pt x="3798602" y="178601"/>
+                  </a:lnTo>
+                  <a:lnTo>
+                    <a:pt x="3728257" y="171835"/>
+                  </a:lnTo>
+                  <a:lnTo>
+                    <a:pt x="3657913" y="164883"/>
+                  </a:lnTo>
+                  <a:lnTo>
+                    <a:pt x="3587569" y="157741"/>
+                  </a:lnTo>
+                  <a:lnTo>
+                    <a:pt x="3517224" y="150402"/>
+                  </a:lnTo>
+                  <a:lnTo>
+                    <a:pt x="3446880" y="142862"/>
+                  </a:lnTo>
+                  <a:lnTo>
+                    <a:pt x="3376535" y="135115"/>
+                  </a:lnTo>
+                  <a:lnTo>
+                    <a:pt x="3306191" y="127155"/>
+                  </a:lnTo>
+                  <a:lnTo>
+                    <a:pt x="3235846" y="123980"/>
+                  </a:lnTo>
+                  <a:lnTo>
+                    <a:pt x="3165502" y="121715"/>
+                  </a:lnTo>
+                  <a:lnTo>
+                    <a:pt x="3095157" y="119432"/>
+                  </a:lnTo>
+                  <a:lnTo>
+                    <a:pt x="3024813" y="117132"/>
+                  </a:lnTo>
+                  <a:lnTo>
+                    <a:pt x="2954468" y="114814"/>
+                  </a:lnTo>
+                  <a:lnTo>
+                    <a:pt x="2884124" y="112480"/>
+                  </a:lnTo>
+                  <a:lnTo>
+                    <a:pt x="2813779" y="110127"/>
+                  </a:lnTo>
+                  <a:lnTo>
+                    <a:pt x="2743435" y="107757"/>
+                  </a:lnTo>
+                  <a:lnTo>
+                    <a:pt x="2673090" y="105369"/>
+                  </a:lnTo>
+                  <a:lnTo>
+                    <a:pt x="2602746" y="102964"/>
+                  </a:lnTo>
+                  <a:lnTo>
+                    <a:pt x="2532401" y="100540"/>
+                  </a:lnTo>
+                  <a:lnTo>
+                    <a:pt x="2462057" y="98098"/>
+                  </a:lnTo>
+                  <a:lnTo>
+                    <a:pt x="2391712" y="95637"/>
+                  </a:lnTo>
+                  <a:lnTo>
+                    <a:pt x="2321368" y="93158"/>
+                  </a:lnTo>
+                  <a:lnTo>
+                    <a:pt x="2251023" y="90660"/>
+                  </a:lnTo>
+                  <a:lnTo>
+                    <a:pt x="2180679" y="88144"/>
+                  </a:lnTo>
+                  <a:lnTo>
+                    <a:pt x="2110334" y="85609"/>
+                  </a:lnTo>
+                  <a:lnTo>
+                    <a:pt x="2039990" y="83054"/>
+                  </a:lnTo>
+                  <a:lnTo>
+                    <a:pt x="1969645" y="80481"/>
+                  </a:lnTo>
+                  <a:lnTo>
+                    <a:pt x="1899301" y="77888"/>
+                  </a:lnTo>
+                  <a:lnTo>
+                    <a:pt x="1828956" y="75275"/>
+                  </a:lnTo>
+                  <a:lnTo>
+                    <a:pt x="1758612" y="72643"/>
+                  </a:lnTo>
+                  <a:lnTo>
+                    <a:pt x="1688267" y="69991"/>
+                  </a:lnTo>
+                  <a:lnTo>
+                    <a:pt x="1617923" y="67319"/>
+                  </a:lnTo>
+                  <a:lnTo>
+                    <a:pt x="1547578" y="64627"/>
+                  </a:lnTo>
+                  <a:lnTo>
+                    <a:pt x="1477234" y="61915"/>
+                  </a:lnTo>
+                  <a:lnTo>
+                    <a:pt x="1406889" y="59182"/>
+                  </a:lnTo>
+                  <a:lnTo>
+                    <a:pt x="1336545" y="56429"/>
+                  </a:lnTo>
+                  <a:lnTo>
+                    <a:pt x="1266200" y="53655"/>
+                  </a:lnTo>
+                  <a:lnTo>
+                    <a:pt x="1195856" y="50860"/>
+                  </a:lnTo>
+                  <a:lnTo>
+                    <a:pt x="1125511" y="48044"/>
+                  </a:lnTo>
+                  <a:lnTo>
+                    <a:pt x="1055167" y="45207"/>
+                  </a:lnTo>
+                  <a:lnTo>
+                    <a:pt x="984822" y="42349"/>
+                  </a:lnTo>
+                  <a:lnTo>
+                    <a:pt x="914478" y="39469"/>
+                  </a:lnTo>
+                  <a:lnTo>
+                    <a:pt x="844133" y="36568"/>
+                  </a:lnTo>
+                  <a:lnTo>
+                    <a:pt x="773789" y="33644"/>
+                  </a:lnTo>
+                  <a:lnTo>
+                    <a:pt x="703444" y="30699"/>
+                  </a:lnTo>
+                  <a:lnTo>
+                    <a:pt x="633100" y="27732"/>
+                  </a:lnTo>
+                  <a:lnTo>
+                    <a:pt x="562755" y="24742"/>
+                  </a:lnTo>
+                  <a:lnTo>
+                    <a:pt x="492411" y="21729"/>
+                  </a:lnTo>
+                  <a:lnTo>
+                    <a:pt x="422066" y="18695"/>
+                  </a:lnTo>
+                  <a:lnTo>
+                    <a:pt x="351722" y="15637"/>
+                  </a:lnTo>
+                  <a:lnTo>
+                    <a:pt x="281377" y="12556"/>
+                  </a:lnTo>
+                  <a:lnTo>
+                    <a:pt x="211033" y="9452"/>
+                  </a:lnTo>
+                  <a:lnTo>
+                    <a:pt x="140688" y="6325"/>
+                  </a:lnTo>
+                  <a:lnTo>
+                    <a:pt x="70344" y="3174"/>
+                  </a:lnTo>
+                  <a:lnTo>
+                    <a:pt x="0" y="0"/>
+                  </a:lnTo>
+                </a:path>
+              </a:pathLst>
+            </a:custGeom>
+          </p:spPr>
+          <p:txBody>
+            <a:bodyPr/>
+            <a:lstStyle/>
+            <a:p/>
+          </p:txBody>
+        </p:sp>
+        <p:sp>
+          <p:nvSpPr>
+            <p:cNvPr id="70" name="pl70"/>
+            <p:cNvSpPr/>
+            <p:nvPr/>
+          </p:nvSpPr>
+          <p:spPr>
+            <a:xfrm>
+              <a:off x="1235312" y="4921173"/>
+              <a:ext cx="6964104" cy="550976"/>
+            </a:xfrm>
+            <a:custGeom>
+              <a:avLst/>
+              <a:pathLst>
+                <a:path w="6964104" h="550976">
+                  <a:moveTo>
+                    <a:pt x="0" y="0"/>
+                  </a:moveTo>
+                  <a:lnTo>
+                    <a:pt x="70344" y="11521"/>
+                  </a:lnTo>
+                  <a:lnTo>
+                    <a:pt x="140688" y="22846"/>
+                  </a:lnTo>
+                  <a:lnTo>
+                    <a:pt x="211033" y="33976"/>
+                  </a:lnTo>
+                  <a:lnTo>
+                    <a:pt x="281377" y="44916"/>
+                  </a:lnTo>
+                  <a:lnTo>
+                    <a:pt x="351722" y="55668"/>
+                  </a:lnTo>
+                  <a:lnTo>
+                    <a:pt x="422066" y="66236"/>
+                  </a:lnTo>
+                  <a:lnTo>
+                    <a:pt x="492411" y="76623"/>
+                  </a:lnTo>
+                  <a:lnTo>
+                    <a:pt x="562755" y="86832"/>
+                  </a:lnTo>
+                  <a:lnTo>
+                    <a:pt x="633100" y="96866"/>
+                  </a:lnTo>
+                  <a:lnTo>
+                    <a:pt x="703444" y="106728"/>
+                  </a:lnTo>
+                  <a:lnTo>
+                    <a:pt x="773789" y="116422"/>
+                  </a:lnTo>
+                  <a:lnTo>
+                    <a:pt x="844133" y="125949"/>
+                  </a:lnTo>
+                  <a:lnTo>
+                    <a:pt x="914478" y="135313"/>
+                  </a:lnTo>
+                  <a:lnTo>
+                    <a:pt x="984822" y="144516"/>
+                  </a:lnTo>
+                  <a:lnTo>
+                    <a:pt x="1055167" y="153562"/>
+                  </a:lnTo>
+                  <a:lnTo>
+                    <a:pt x="1125511" y="162453"/>
+                  </a:lnTo>
+                  <a:lnTo>
+                    <a:pt x="1195856" y="171191"/>
+                  </a:lnTo>
+                  <a:lnTo>
+                    <a:pt x="1266200" y="179780"/>
+                  </a:lnTo>
+                  <a:lnTo>
+                    <a:pt x="1336545" y="188222"/>
+                  </a:lnTo>
+                  <a:lnTo>
+                    <a:pt x="1406889" y="196519"/>
+                  </a:lnTo>
+                  <a:lnTo>
+                    <a:pt x="1477234" y="204674"/>
+                  </a:lnTo>
+                  <a:lnTo>
+                    <a:pt x="1547578" y="212689"/>
+                  </a:lnTo>
+                  <a:lnTo>
+                    <a:pt x="1617923" y="220567"/>
+                  </a:lnTo>
+                  <a:lnTo>
+                    <a:pt x="1688267" y="228310"/>
+                  </a:lnTo>
+                  <a:lnTo>
+                    <a:pt x="1758612" y="235920"/>
+                  </a:lnTo>
+                  <a:lnTo>
+                    <a:pt x="1828956" y="243400"/>
+                  </a:lnTo>
+                  <a:lnTo>
+                    <a:pt x="1899301" y="250752"/>
+                  </a:lnTo>
+                  <a:lnTo>
+                    <a:pt x="1969645" y="257978"/>
+                  </a:lnTo>
+                  <a:lnTo>
+                    <a:pt x="2039990" y="265080"/>
+                  </a:lnTo>
+                  <a:lnTo>
+                    <a:pt x="2110334" y="272060"/>
+                  </a:lnTo>
+                  <a:lnTo>
+                    <a:pt x="2180679" y="278921"/>
+                  </a:lnTo>
+                  <a:lnTo>
+                    <a:pt x="2251023" y="285664"/>
+                  </a:lnTo>
+                  <a:lnTo>
+                    <a:pt x="2321368" y="292291"/>
+                  </a:lnTo>
+                  <a:lnTo>
+                    <a:pt x="2391712" y="298806"/>
+                  </a:lnTo>
+                  <a:lnTo>
+                    <a:pt x="2462057" y="305208"/>
+                  </a:lnTo>
+                  <a:lnTo>
+                    <a:pt x="2532401" y="311501"/>
+                  </a:lnTo>
+                  <a:lnTo>
+                    <a:pt x="2602746" y="317686"/>
+                  </a:lnTo>
+                  <a:lnTo>
+                    <a:pt x="2673090" y="323765"/>
+                  </a:lnTo>
+                  <a:lnTo>
+                    <a:pt x="2743435" y="329740"/>
+                  </a:lnTo>
+                  <a:lnTo>
+                    <a:pt x="2813779" y="335612"/>
+                  </a:lnTo>
+                  <a:lnTo>
+                    <a:pt x="2884124" y="341384"/>
+                  </a:lnTo>
+                  <a:lnTo>
+                    <a:pt x="2954468" y="347057"/>
+                  </a:lnTo>
+                  <a:lnTo>
+                    <a:pt x="3024813" y="352633"/>
+                  </a:lnTo>
+                  <a:lnTo>
+                    <a:pt x="3095157" y="358113"/>
+                  </a:lnTo>
+                  <a:lnTo>
+                    <a:pt x="3165502" y="363500"/>
+                  </a:lnTo>
+                  <a:lnTo>
+                    <a:pt x="3235846" y="368794"/>
+                  </a:lnTo>
+                  <a:lnTo>
+                    <a:pt x="3306191" y="373997"/>
+                  </a:lnTo>
+                  <a:lnTo>
+                    <a:pt x="3376535" y="379112"/>
+                  </a:lnTo>
+                  <a:lnTo>
+                    <a:pt x="3446880" y="384138"/>
+                  </a:lnTo>
+                  <a:lnTo>
+                    <a:pt x="3517224" y="389079"/>
+                  </a:lnTo>
+                  <a:lnTo>
+                    <a:pt x="3587569" y="393935"/>
+                  </a:lnTo>
+                  <a:lnTo>
+                    <a:pt x="3657913" y="398707"/>
+                  </a:lnTo>
+                  <a:lnTo>
+                    <a:pt x="3728257" y="403398"/>
+                  </a:lnTo>
+                  <a:lnTo>
+                    <a:pt x="3798602" y="408009"/>
+                  </a:lnTo>
+                  <a:lnTo>
+                    <a:pt x="3868946" y="412541"/>
+                  </a:lnTo>
+                  <a:lnTo>
+                    <a:pt x="3939291" y="416995"/>
+                  </a:lnTo>
+                  <a:lnTo>
+                    <a:pt x="4009635" y="421372"/>
+                  </a:lnTo>
+                  <a:lnTo>
+                    <a:pt x="4079980" y="425675"/>
+                  </a:lnTo>
+                  <a:lnTo>
+                    <a:pt x="4150324" y="429904"/>
+                  </a:lnTo>
+                  <a:lnTo>
+                    <a:pt x="4220669" y="434060"/>
+                  </a:lnTo>
+                  <a:lnTo>
+                    <a:pt x="4291013" y="438145"/>
+                  </a:lnTo>
+                  <a:lnTo>
+                    <a:pt x="4361358" y="442161"/>
+                  </a:lnTo>
+                  <a:lnTo>
+                    <a:pt x="4431702" y="446107"/>
+                  </a:lnTo>
+                  <a:lnTo>
+                    <a:pt x="4502047" y="449986"/>
+                  </a:lnTo>
+                  <a:lnTo>
+                    <a:pt x="4572391" y="453798"/>
+                  </a:lnTo>
+                  <a:lnTo>
+                    <a:pt x="4642736" y="457546"/>
+                  </a:lnTo>
+                  <a:lnTo>
+                    <a:pt x="4713080" y="461228"/>
+                  </a:lnTo>
+                  <a:lnTo>
+                    <a:pt x="4783425" y="464848"/>
+                  </a:lnTo>
+                  <a:lnTo>
+                    <a:pt x="4853769" y="468406"/>
+                  </a:lnTo>
+                  <a:lnTo>
+                    <a:pt x="4924114" y="471903"/>
+                  </a:lnTo>
+                  <a:lnTo>
+                    <a:pt x="4994458" y="475340"/>
+                  </a:lnTo>
+                  <a:lnTo>
+                    <a:pt x="5064803" y="478718"/>
+                  </a:lnTo>
+                  <a:lnTo>
+                    <a:pt x="5135147" y="482038"/>
+                  </a:lnTo>
+                  <a:lnTo>
+                    <a:pt x="5205492" y="485301"/>
+                  </a:lnTo>
+                  <a:lnTo>
+                    <a:pt x="5275836" y="488509"/>
+                  </a:lnTo>
+                  <a:lnTo>
+                    <a:pt x="5346181" y="491661"/>
+                  </a:lnTo>
+                  <a:lnTo>
+                    <a:pt x="5416525" y="494760"/>
+                  </a:lnTo>
+                  <a:lnTo>
+                    <a:pt x="5486870" y="497805"/>
+                  </a:lnTo>
+                  <a:lnTo>
+                    <a:pt x="5557214" y="500798"/>
+                  </a:lnTo>
+                  <a:lnTo>
+                    <a:pt x="5627559" y="503740"/>
+                  </a:lnTo>
+                  <a:lnTo>
+                    <a:pt x="5697903" y="506631"/>
+                  </a:lnTo>
+                  <a:lnTo>
+                    <a:pt x="5768248" y="509473"/>
+                  </a:lnTo>
+                  <a:lnTo>
+                    <a:pt x="5838592" y="512267"/>
+                  </a:lnTo>
+                  <a:lnTo>
+                    <a:pt x="5908937" y="515012"/>
+                  </a:lnTo>
+                  <a:lnTo>
+                    <a:pt x="5979281" y="517710"/>
+                  </a:lnTo>
+                  <a:lnTo>
+                    <a:pt x="6049626" y="520363"/>
+                  </a:lnTo>
+                  <a:lnTo>
+                    <a:pt x="6119970" y="522969"/>
+                  </a:lnTo>
+                  <a:lnTo>
+                    <a:pt x="6190315" y="525531"/>
+                  </a:lnTo>
+                  <a:lnTo>
+                    <a:pt x="6260659" y="528049"/>
+                  </a:lnTo>
+                  <a:lnTo>
+                    <a:pt x="6331004" y="530524"/>
+                  </a:lnTo>
+                  <a:lnTo>
+                    <a:pt x="6401348" y="532957"/>
+                  </a:lnTo>
+                  <a:lnTo>
+                    <a:pt x="6471693" y="535348"/>
+                  </a:lnTo>
+                  <a:lnTo>
+                    <a:pt x="6542037" y="537698"/>
+                  </a:lnTo>
+                  <a:lnTo>
+                    <a:pt x="6612382" y="540008"/>
+                  </a:lnTo>
+                  <a:lnTo>
+                    <a:pt x="6682726" y="542278"/>
+                  </a:lnTo>
+                  <a:lnTo>
+                    <a:pt x="6753071" y="544509"/>
+                  </a:lnTo>
+                  <a:lnTo>
+                    <a:pt x="6823415" y="546702"/>
+                  </a:lnTo>
+                  <a:lnTo>
+                    <a:pt x="6893760" y="548857"/>
+                  </a:lnTo>
+                  <a:lnTo>
+                    <a:pt x="6964104" y="550976"/>
+                  </a:lnTo>
+                </a:path>
+              </a:pathLst>
+            </a:custGeom>
+            <a:ln w="27101" cap="flat">
+              <a:solidFill>
+                <a:srgbClr val="FF8C00">
+                  <a:alpha val="100000"/>
+                </a:srgbClr>
+              </a:solidFill>
+              <a:prstDash val="solid"/>
+              <a:round/>
+            </a:ln>
+          </p:spPr>
+          <p:txBody>
+            <a:bodyPr/>
+            <a:lstStyle/>
+            <a:p/>
+          </p:txBody>
+        </p:sp>
+        <p:sp>
+          <p:nvSpPr>
+            <p:cNvPr id="71" name="pl71"/>
+            <p:cNvSpPr/>
+            <p:nvPr/>
+          </p:nvSpPr>
+          <p:spPr>
+            <a:xfrm>
+              <a:off x="887106" y="5294352"/>
+              <a:ext cx="7660515" cy="0"/>
+            </a:xfrm>
+            <a:custGeom>
+              <a:avLst/>
+              <a:pathLst>
+                <a:path w="7660515" h="0">
+                  <a:moveTo>
+                    <a:pt x="0" y="0"/>
+                  </a:moveTo>
+                  <a:lnTo>
+                    <a:pt x="7660515" y="0"/>
+                  </a:lnTo>
+                  <a:lnTo>
+                    <a:pt x="7660515" y="0"/>
+                  </a:lnTo>
+                </a:path>
+              </a:pathLst>
+            </a:custGeom>
+            <a:ln w="13550" cap="flat">
+              <a:solidFill>
+                <a:srgbClr val="7F7F7F">
+                  <a:alpha val="100000"/>
+                </a:srgbClr>
+              </a:solidFill>
+              <a:prstDash val="dash"/>
+              <a:round/>
+            </a:ln>
+          </p:spPr>
+          <p:txBody>
+            <a:bodyPr/>
+            <a:lstStyle/>
+            <a:p/>
+          </p:txBody>
+        </p:sp>
+        <p:sp>
+          <p:nvSpPr>
+            <p:cNvPr id="72" name="pl72"/>
+            <p:cNvSpPr/>
+            <p:nvPr/>
+          </p:nvSpPr>
+          <p:spPr>
+            <a:xfrm>
+              <a:off x="4530353" y="4336484"/>
+              <a:ext cx="0" cy="1317069"/>
+            </a:xfrm>
+            <a:custGeom>
+              <a:avLst/>
+              <a:pathLst>
+                <a:path w="0" h="1317069">
+                  <a:moveTo>
+                    <a:pt x="0" y="1317069"/>
+                  </a:moveTo>
+                  <a:lnTo>
+                    <a:pt x="0" y="0"/>
+                  </a:lnTo>
+                  <a:lnTo>
+                    <a:pt x="0" y="0"/>
+                  </a:lnTo>
+                </a:path>
+              </a:pathLst>
+            </a:custGeom>
+            <a:ln w="13550" cap="flat">
+              <a:solidFill>
+                <a:srgbClr val="666666">
+                  <a:alpha val="100000"/>
+                </a:srgbClr>
+              </a:solidFill>
+              <a:prstDash val="dot"/>
+              <a:round/>
+            </a:ln>
+          </p:spPr>
+          <p:txBody>
+            <a:bodyPr/>
+            <a:lstStyle/>
+            <a:p/>
+          </p:txBody>
+        </p:sp>
+        <p:sp>
+          <p:nvSpPr>
+            <p:cNvPr id="73" name="tx73"/>
+            <p:cNvSpPr/>
+            <p:nvPr/>
+          </p:nvSpPr>
+          <p:spPr>
+            <a:xfrm>
+              <a:off x="762297" y="5553636"/>
+              <a:ext cx="62179" cy="80101"/>
+            </a:xfrm>
+            <a:prstGeom prst="rect">
+              <a:avLst/>
+            </a:prstGeom>
+            <a:noFill/>
+          </p:spPr>
+          <p:txBody>
+            <a:bodyPr lIns="0" rIns="0" tIns="0" bIns="0" anchorCtr="1" anchor="ctr" wrap="none"/>
+            <a:lstStyle/>
+            <a:p>
+              <a:pPr algn="l" marL="0" marR="0" indent="0">
+                <a:lnSpc>
+                  <a:spcPts val="880"/>
+                </a:lnSpc>
+                <a:spcBef>
+                  <a:spcPts val="0"/>
+                </a:spcBef>
+                <a:spcAft>
+                  <a:spcPts val="0"/>
+                </a:spcAft>
+              </a:pPr>
+              <a:r>
+                <a:rPr sz="880">
+                  <a:solidFill>
+                    <a:srgbClr val="4D4D4D">
+                      <a:alpha val="100000"/>
+                    </a:srgbClr>
+                  </a:solidFill>
+                  <a:latin typeface="Helvetica"/>
+                  <a:cs typeface="Helvetica"/>
+                </a:rPr>
+                <a:t>0</a:t>
+              </a:r>
+            </a:p>
+          </p:txBody>
+        </p:sp>
+        <p:sp>
+          <p:nvSpPr>
+            <p:cNvPr id="74" name="tx74"/>
+            <p:cNvSpPr/>
+            <p:nvPr/>
+          </p:nvSpPr>
+          <p:spPr>
+            <a:xfrm>
+              <a:off x="762297" y="5254302"/>
+              <a:ext cx="62179" cy="80101"/>
+            </a:xfrm>
+            <a:prstGeom prst="rect">
+              <a:avLst/>
+            </a:prstGeom>
+            <a:noFill/>
+          </p:spPr>
+          <p:txBody>
+            <a:bodyPr lIns="0" rIns="0" tIns="0" bIns="0" anchorCtr="1" anchor="ctr" wrap="none"/>
+            <a:lstStyle/>
+            <a:p>
+              <a:pPr algn="l" marL="0" marR="0" indent="0">
+                <a:lnSpc>
+                  <a:spcPts val="880"/>
+                </a:lnSpc>
+                <a:spcBef>
+                  <a:spcPts val="0"/>
+                </a:spcBef>
+                <a:spcAft>
+                  <a:spcPts val="0"/>
+                </a:spcAft>
+              </a:pPr>
+              <a:r>
+                <a:rPr sz="880">
+                  <a:solidFill>
+                    <a:srgbClr val="4D4D4D">
+                      <a:alpha val="100000"/>
+                    </a:srgbClr>
+                  </a:solidFill>
+                  <a:latin typeface="Helvetica"/>
+                  <a:cs typeface="Helvetica"/>
+                </a:rPr>
+                <a:t>1</a:t>
+              </a:r>
+            </a:p>
+          </p:txBody>
+        </p:sp>
+        <p:sp>
+          <p:nvSpPr>
+            <p:cNvPr id="75" name="tx75"/>
+            <p:cNvSpPr/>
+            <p:nvPr/>
+          </p:nvSpPr>
+          <p:spPr>
+            <a:xfrm>
+              <a:off x="762297" y="4954968"/>
+              <a:ext cx="62179" cy="80101"/>
+            </a:xfrm>
+            <a:prstGeom prst="rect">
+              <a:avLst/>
+            </a:prstGeom>
+            <a:noFill/>
+          </p:spPr>
+          <p:txBody>
+            <a:bodyPr lIns="0" rIns="0" tIns="0" bIns="0" anchorCtr="1" anchor="ctr" wrap="none"/>
+            <a:lstStyle/>
+            <a:p>
+              <a:pPr algn="l" marL="0" marR="0" indent="0">
+                <a:lnSpc>
+                  <a:spcPts val="880"/>
+                </a:lnSpc>
+                <a:spcBef>
+                  <a:spcPts val="0"/>
+                </a:spcBef>
+                <a:spcAft>
+                  <a:spcPts val="0"/>
+                </a:spcAft>
+              </a:pPr>
+              <a:r>
+                <a:rPr sz="880">
+                  <a:solidFill>
+                    <a:srgbClr val="4D4D4D">
+                      <a:alpha val="100000"/>
+                    </a:srgbClr>
+                  </a:solidFill>
+                  <a:latin typeface="Helvetica"/>
+                  <a:cs typeface="Helvetica"/>
+                </a:rPr>
+                <a:t>2</a:t>
+              </a:r>
+            </a:p>
+          </p:txBody>
+        </p:sp>
+        <p:sp>
+          <p:nvSpPr>
+            <p:cNvPr id="76" name="tx76"/>
+            <p:cNvSpPr/>
+            <p:nvPr/>
+          </p:nvSpPr>
+          <p:spPr>
+            <a:xfrm>
+              <a:off x="762297" y="4655634"/>
+              <a:ext cx="62179" cy="80101"/>
+            </a:xfrm>
+            <a:prstGeom prst="rect">
+              <a:avLst/>
+            </a:prstGeom>
+            <a:noFill/>
+          </p:spPr>
+          <p:txBody>
+            <a:bodyPr lIns="0" rIns="0" tIns="0" bIns="0" anchorCtr="1" anchor="ctr" wrap="none"/>
+            <a:lstStyle/>
+            <a:p>
+              <a:pPr algn="l" marL="0" marR="0" indent="0">
+                <a:lnSpc>
+                  <a:spcPts val="880"/>
+                </a:lnSpc>
+                <a:spcBef>
+                  <a:spcPts val="0"/>
+                </a:spcBef>
+                <a:spcAft>
+                  <a:spcPts val="0"/>
+                </a:spcAft>
+              </a:pPr>
+              <a:r>
+                <a:rPr sz="880">
+                  <a:solidFill>
+                    <a:srgbClr val="4D4D4D">
+                      <a:alpha val="100000"/>
+                    </a:srgbClr>
+                  </a:solidFill>
+                  <a:latin typeface="Helvetica"/>
+                  <a:cs typeface="Helvetica"/>
+                </a:rPr>
+                <a:t>3</a:t>
+              </a:r>
+            </a:p>
+          </p:txBody>
+        </p:sp>
+        <p:sp>
+          <p:nvSpPr>
+            <p:cNvPr id="77" name="tx77"/>
+            <p:cNvSpPr/>
+            <p:nvPr/>
+          </p:nvSpPr>
+          <p:spPr>
+            <a:xfrm>
+              <a:off x="762297" y="4356300"/>
+              <a:ext cx="62179" cy="80101"/>
+            </a:xfrm>
+            <a:prstGeom prst="rect">
+              <a:avLst/>
+            </a:prstGeom>
+            <a:noFill/>
+          </p:spPr>
+          <p:txBody>
+            <a:bodyPr lIns="0" rIns="0" tIns="0" bIns="0" anchorCtr="1" anchor="ctr" wrap="none"/>
+            <a:lstStyle/>
+            <a:p>
+              <a:pPr algn="l" marL="0" marR="0" indent="0">
+                <a:lnSpc>
+                  <a:spcPts val="880"/>
+                </a:lnSpc>
+                <a:spcBef>
+                  <a:spcPts val="0"/>
+                </a:spcBef>
+                <a:spcAft>
+                  <a:spcPts val="0"/>
+                </a:spcAft>
+              </a:pPr>
+              <a:r>
+                <a:rPr sz="880">
+                  <a:solidFill>
+                    <a:srgbClr val="4D4D4D">
+                      <a:alpha val="100000"/>
+                    </a:srgbClr>
+                  </a:solidFill>
+                  <a:latin typeface="Helvetica"/>
+                  <a:cs typeface="Helvetica"/>
+                </a:rPr>
+                <a:t>4</a:t>
+              </a:r>
+            </a:p>
+          </p:txBody>
+        </p:sp>
+        <p:sp>
+          <p:nvSpPr>
+            <p:cNvPr id="78" name="tx78"/>
+            <p:cNvSpPr/>
+            <p:nvPr/>
+          </p:nvSpPr>
+          <p:spPr>
+            <a:xfrm>
+              <a:off x="1241001" y="5716183"/>
+              <a:ext cx="161574" cy="80101"/>
+            </a:xfrm>
+            <a:prstGeom prst="rect">
+              <a:avLst/>
+            </a:prstGeom>
+            <a:noFill/>
+          </p:spPr>
+          <p:txBody>
+            <a:bodyPr lIns="0" rIns="0" tIns="0" bIns="0" anchorCtr="1" anchor="ctr" wrap="none"/>
+            <a:lstStyle/>
+            <a:p>
+              <a:pPr algn="l" marL="0" marR="0" indent="0">
+                <a:lnSpc>
+                  <a:spcPts val="880"/>
+                </a:lnSpc>
+                <a:spcBef>
+                  <a:spcPts val="0"/>
+                </a:spcBef>
+                <a:spcAft>
+                  <a:spcPts val="0"/>
+                </a:spcAft>
+              </a:pPr>
+              <a:r>
+                <a:rPr sz="880">
+                  <a:solidFill>
+                    <a:srgbClr val="4D4D4D">
+                      <a:alpha val="100000"/>
+                    </a:srgbClr>
+                  </a:solidFill>
+                  <a:latin typeface="Helvetica"/>
+                  <a:cs typeface="Helvetica"/>
+                </a:rPr>
+                <a:t>-40</a:t>
+              </a:r>
+            </a:p>
+          </p:txBody>
+        </p:sp>
+        <p:sp>
+          <p:nvSpPr>
+            <p:cNvPr id="79" name="tx79"/>
+            <p:cNvSpPr/>
+            <p:nvPr/>
+          </p:nvSpPr>
+          <p:spPr>
+            <a:xfrm>
+              <a:off x="2054602" y="5716183"/>
+              <a:ext cx="161574" cy="80101"/>
+            </a:xfrm>
+            <a:prstGeom prst="rect">
+              <a:avLst/>
+            </a:prstGeom>
+            <a:noFill/>
+          </p:spPr>
+          <p:txBody>
+            <a:bodyPr lIns="0" rIns="0" tIns="0" bIns="0" anchorCtr="1" anchor="ctr" wrap="none"/>
+            <a:lstStyle/>
+            <a:p>
+              <a:pPr algn="l" marL="0" marR="0" indent="0">
+                <a:lnSpc>
+                  <a:spcPts val="880"/>
+                </a:lnSpc>
+                <a:spcBef>
+                  <a:spcPts val="0"/>
+                </a:spcBef>
+                <a:spcAft>
+                  <a:spcPts val="0"/>
+                </a:spcAft>
+              </a:pPr>
+              <a:r>
+                <a:rPr sz="880">
+                  <a:solidFill>
+                    <a:srgbClr val="4D4D4D">
+                      <a:alpha val="100000"/>
+                    </a:srgbClr>
+                  </a:solidFill>
+                  <a:latin typeface="Helvetica"/>
+                  <a:cs typeface="Helvetica"/>
+                </a:rPr>
+                <a:t>-30</a:t>
+              </a:r>
+            </a:p>
+          </p:txBody>
+        </p:sp>
+        <p:sp>
+          <p:nvSpPr>
+            <p:cNvPr id="80" name="tx80"/>
+            <p:cNvSpPr/>
+            <p:nvPr/>
+          </p:nvSpPr>
+          <p:spPr>
+            <a:xfrm>
+              <a:off x="2868203" y="5716183"/>
+              <a:ext cx="161574" cy="80101"/>
+            </a:xfrm>
+            <a:prstGeom prst="rect">
+              <a:avLst/>
+            </a:prstGeom>
+            <a:noFill/>
+          </p:spPr>
+          <p:txBody>
+            <a:bodyPr lIns="0" rIns="0" tIns="0" bIns="0" anchorCtr="1" anchor="ctr" wrap="none"/>
+            <a:lstStyle/>
+            <a:p>
+              <a:pPr algn="l" marL="0" marR="0" indent="0">
+                <a:lnSpc>
+                  <a:spcPts val="880"/>
+                </a:lnSpc>
+                <a:spcBef>
+                  <a:spcPts val="0"/>
+                </a:spcBef>
+                <a:spcAft>
+                  <a:spcPts val="0"/>
+                </a:spcAft>
+              </a:pPr>
+              <a:r>
+                <a:rPr sz="880">
+                  <a:solidFill>
+                    <a:srgbClr val="4D4D4D">
+                      <a:alpha val="100000"/>
+                    </a:srgbClr>
+                  </a:solidFill>
+                  <a:latin typeface="Helvetica"/>
+                  <a:cs typeface="Helvetica"/>
+                </a:rPr>
+                <a:t>-20</a:t>
+              </a:r>
+            </a:p>
+          </p:txBody>
+        </p:sp>
+        <p:sp>
+          <p:nvSpPr>
+            <p:cNvPr id="81" name="tx81"/>
+            <p:cNvSpPr/>
+            <p:nvPr/>
+          </p:nvSpPr>
+          <p:spPr>
+            <a:xfrm>
+              <a:off x="3681805" y="5716183"/>
+              <a:ext cx="161574" cy="80101"/>
+            </a:xfrm>
+            <a:prstGeom prst="rect">
+              <a:avLst/>
+            </a:prstGeom>
+            <a:noFill/>
+          </p:spPr>
+          <p:txBody>
+            <a:bodyPr lIns="0" rIns="0" tIns="0" bIns="0" anchorCtr="1" anchor="ctr" wrap="none"/>
+            <a:lstStyle/>
+            <a:p>
+              <a:pPr algn="l" marL="0" marR="0" indent="0">
+                <a:lnSpc>
+                  <a:spcPts val="880"/>
+                </a:lnSpc>
+                <a:spcBef>
+                  <a:spcPts val="0"/>
+                </a:spcBef>
+                <a:spcAft>
+                  <a:spcPts val="0"/>
+                </a:spcAft>
+              </a:pPr>
+              <a:r>
+                <a:rPr sz="880">
+                  <a:solidFill>
+                    <a:srgbClr val="4D4D4D">
+                      <a:alpha val="100000"/>
+                    </a:srgbClr>
+                  </a:solidFill>
+                  <a:latin typeface="Helvetica"/>
+                  <a:cs typeface="Helvetica"/>
+                </a:rPr>
+                <a:t>-10</a:t>
+              </a:r>
+            </a:p>
+          </p:txBody>
+        </p:sp>
+        <p:sp>
+          <p:nvSpPr>
+            <p:cNvPr id="82" name="tx82"/>
+            <p:cNvSpPr/>
+            <p:nvPr/>
+          </p:nvSpPr>
+          <p:spPr>
+            <a:xfrm>
+              <a:off x="4545104" y="5716183"/>
+              <a:ext cx="62179" cy="80101"/>
+            </a:xfrm>
+            <a:prstGeom prst="rect">
+              <a:avLst/>
+            </a:prstGeom>
+            <a:noFill/>
+          </p:spPr>
+          <p:txBody>
+            <a:bodyPr lIns="0" rIns="0" tIns="0" bIns="0" anchorCtr="1" anchor="ctr" wrap="none"/>
+            <a:lstStyle/>
+            <a:p>
+              <a:pPr algn="l" marL="0" marR="0" indent="0">
+                <a:lnSpc>
+                  <a:spcPts val="880"/>
+                </a:lnSpc>
+                <a:spcBef>
+                  <a:spcPts val="0"/>
+                </a:spcBef>
+                <a:spcAft>
+                  <a:spcPts val="0"/>
+                </a:spcAft>
+              </a:pPr>
+              <a:r>
+                <a:rPr sz="880">
+                  <a:solidFill>
+                    <a:srgbClr val="4D4D4D">
+                      <a:alpha val="100000"/>
+                    </a:srgbClr>
+                  </a:solidFill>
+                  <a:latin typeface="Helvetica"/>
+                  <a:cs typeface="Helvetica"/>
+                </a:rPr>
+                <a:t>0</a:t>
+              </a:r>
+            </a:p>
+          </p:txBody>
+        </p:sp>
+        <p:sp>
+          <p:nvSpPr>
+            <p:cNvPr id="83" name="tx83"/>
+            <p:cNvSpPr/>
+            <p:nvPr/>
+          </p:nvSpPr>
+          <p:spPr>
+            <a:xfrm>
+              <a:off x="5327615" y="5716183"/>
+              <a:ext cx="124358" cy="80101"/>
+            </a:xfrm>
+            <a:prstGeom prst="rect">
+              <a:avLst/>
+            </a:prstGeom>
+            <a:noFill/>
+          </p:spPr>
+          <p:txBody>
+            <a:bodyPr lIns="0" rIns="0" tIns="0" bIns="0" anchorCtr="1" anchor="ctr" wrap="none"/>
+            <a:lstStyle/>
+            <a:p>
+              <a:pPr algn="l" marL="0" marR="0" indent="0">
+                <a:lnSpc>
+                  <a:spcPts val="880"/>
+                </a:lnSpc>
+                <a:spcBef>
+                  <a:spcPts val="0"/>
+                </a:spcBef>
+                <a:spcAft>
+                  <a:spcPts val="0"/>
+                </a:spcAft>
+              </a:pPr>
+              <a:r>
+                <a:rPr sz="880">
+                  <a:solidFill>
+                    <a:srgbClr val="4D4D4D">
+                      <a:alpha val="100000"/>
+                    </a:srgbClr>
+                  </a:solidFill>
+                  <a:latin typeface="Helvetica"/>
+                  <a:cs typeface="Helvetica"/>
+                </a:rPr>
+                <a:t>10</a:t>
+              </a:r>
+            </a:p>
+          </p:txBody>
+        </p:sp>
+        <p:sp>
+          <p:nvSpPr>
+            <p:cNvPr id="84" name="tx84"/>
+            <p:cNvSpPr/>
+            <p:nvPr/>
+          </p:nvSpPr>
+          <p:spPr>
+            <a:xfrm>
+              <a:off x="6141217" y="5716183"/>
+              <a:ext cx="124358" cy="80101"/>
+            </a:xfrm>
+            <a:prstGeom prst="rect">
+              <a:avLst/>
+            </a:prstGeom>
+            <a:noFill/>
+          </p:spPr>
+          <p:txBody>
+            <a:bodyPr lIns="0" rIns="0" tIns="0" bIns="0" anchorCtr="1" anchor="ctr" wrap="none"/>
+            <a:lstStyle/>
+            <a:p>
+              <a:pPr algn="l" marL="0" marR="0" indent="0">
+                <a:lnSpc>
+                  <a:spcPts val="880"/>
+                </a:lnSpc>
+                <a:spcBef>
+                  <a:spcPts val="0"/>
+                </a:spcBef>
+                <a:spcAft>
+                  <a:spcPts val="0"/>
+                </a:spcAft>
+              </a:pPr>
+              <a:r>
+                <a:rPr sz="880">
+                  <a:solidFill>
+                    <a:srgbClr val="4D4D4D">
+                      <a:alpha val="100000"/>
+                    </a:srgbClr>
+                  </a:solidFill>
+                  <a:latin typeface="Helvetica"/>
+                  <a:cs typeface="Helvetica"/>
+                </a:rPr>
+                <a:t>20</a:t>
+              </a:r>
+            </a:p>
+          </p:txBody>
+        </p:sp>
+        <p:sp>
+          <p:nvSpPr>
+            <p:cNvPr id="85" name="tx85"/>
+            <p:cNvSpPr/>
+            <p:nvPr/>
+          </p:nvSpPr>
+          <p:spPr>
+            <a:xfrm>
+              <a:off x="6954818" y="5716183"/>
+              <a:ext cx="124358" cy="80101"/>
+            </a:xfrm>
+            <a:prstGeom prst="rect">
+              <a:avLst/>
+            </a:prstGeom>
+            <a:noFill/>
+          </p:spPr>
+          <p:txBody>
+            <a:bodyPr lIns="0" rIns="0" tIns="0" bIns="0" anchorCtr="1" anchor="ctr" wrap="none"/>
+            <a:lstStyle/>
+            <a:p>
+              <a:pPr algn="l" marL="0" marR="0" indent="0">
+                <a:lnSpc>
+                  <a:spcPts val="880"/>
+                </a:lnSpc>
+                <a:spcBef>
+                  <a:spcPts val="0"/>
+                </a:spcBef>
+                <a:spcAft>
+                  <a:spcPts val="0"/>
+                </a:spcAft>
+              </a:pPr>
+              <a:r>
+                <a:rPr sz="880">
+                  <a:solidFill>
+                    <a:srgbClr val="4D4D4D">
+                      <a:alpha val="100000"/>
+                    </a:srgbClr>
+                  </a:solidFill>
+                  <a:latin typeface="Helvetica"/>
+                  <a:cs typeface="Helvetica"/>
+                </a:rPr>
+                <a:t>30</a:t>
+              </a:r>
+            </a:p>
+          </p:txBody>
+        </p:sp>
+        <p:sp>
+          <p:nvSpPr>
+            <p:cNvPr id="86" name="tx86"/>
+            <p:cNvSpPr/>
+            <p:nvPr/>
+          </p:nvSpPr>
+          <p:spPr>
+            <a:xfrm>
+              <a:off x="7768419" y="5716183"/>
+              <a:ext cx="124358" cy="80101"/>
+            </a:xfrm>
+            <a:prstGeom prst="rect">
+              <a:avLst/>
+            </a:prstGeom>
+            <a:noFill/>
+          </p:spPr>
+          <p:txBody>
+            <a:bodyPr lIns="0" rIns="0" tIns="0" bIns="0" anchorCtr="1" anchor="ctr" wrap="none"/>
+            <a:lstStyle/>
+            <a:p>
+              <a:pPr algn="l" marL="0" marR="0" indent="0">
+                <a:lnSpc>
+                  <a:spcPts val="880"/>
+                </a:lnSpc>
+                <a:spcBef>
+                  <a:spcPts val="0"/>
+                </a:spcBef>
+                <a:spcAft>
+                  <a:spcPts val="0"/>
+                </a:spcAft>
+              </a:pPr>
+              <a:r>
+                <a:rPr sz="880">
+                  <a:solidFill>
+                    <a:srgbClr val="4D4D4D">
+                      <a:alpha val="100000"/>
+                    </a:srgbClr>
+                  </a:solidFill>
+                  <a:latin typeface="Helvetica"/>
+                  <a:cs typeface="Helvetica"/>
+                </a:rPr>
+                <a:t>40</a:t>
+              </a:r>
+            </a:p>
+          </p:txBody>
+        </p:sp>
+        <p:sp>
+          <p:nvSpPr>
+            <p:cNvPr id="87" name="tx87"/>
+            <p:cNvSpPr/>
+            <p:nvPr/>
+          </p:nvSpPr>
+          <p:spPr>
+            <a:xfrm>
+              <a:off x="2928340" y="5855859"/>
+              <a:ext cx="3578047" cy="100218"/>
+            </a:xfrm>
+            <a:prstGeom prst="rect">
+              <a:avLst/>
+            </a:prstGeom>
+            <a:noFill/>
+          </p:spPr>
+          <p:txBody>
+            <a:bodyPr lIns="0" rIns="0" tIns="0" bIns="0" anchorCtr="1" anchor="ctr" wrap="none"/>
+            <a:lstStyle/>
+            <a:p>
+              <a:pPr algn="l" marL="0" marR="0" indent="0">
+                <a:lnSpc>
+                  <a:spcPts val="1100"/>
+                </a:lnSpc>
+                <a:spcBef>
+                  <a:spcPts val="0"/>
+                </a:spcBef>
+                <a:spcAft>
+                  <a:spcPts val="0"/>
+                </a:spcAft>
+              </a:pPr>
+              <a:r>
+                <a:rPr sz="1100">
+                  <a:solidFill>
+                    <a:srgbClr val="000000">
+                      <a:alpha val="100000"/>
+                    </a:srgbClr>
+                  </a:solidFill>
+                  <a:latin typeface="Helvetica"/>
+                  <a:cs typeface="Helvetica"/>
+                </a:rPr>
+                <a:t>eGFR difference (%): 100 × (CKD-EPI Cr-Cys − CG) / CG</a:t>
+              </a:r>
+            </a:p>
+          </p:txBody>
+        </p:sp>
+        <p:sp>
+          <p:nvSpPr>
+            <p:cNvPr id="88" name="tx88"/>
+            <p:cNvSpPr/>
+            <p:nvPr/>
+          </p:nvSpPr>
+          <p:spPr>
+            <a:xfrm rot="-5400000">
+              <a:off x="138035" y="4944909"/>
+              <a:ext cx="1016904" cy="100218"/>
+            </a:xfrm>
+            <a:prstGeom prst="rect">
+              <a:avLst/>
+            </a:prstGeom>
+            <a:noFill/>
+          </p:spPr>
+          <p:txBody>
+            <a:bodyPr lIns="0" rIns="0" tIns="0" bIns="0" anchorCtr="1" anchor="ctr" wrap="none"/>
+            <a:lstStyle/>
+            <a:p>
+              <a:pPr algn="l" marL="0" marR="0" indent="0">
+                <a:lnSpc>
+                  <a:spcPts val="1100"/>
+                </a:lnSpc>
+                <a:spcBef>
+                  <a:spcPts val="0"/>
+                </a:spcBef>
+                <a:spcAft>
+                  <a:spcPts val="0"/>
+                </a:spcAft>
+              </a:pPr>
+              <a:r>
+                <a:rPr sz="1100">
+                  <a:solidFill>
+                    <a:srgbClr val="000000">
+                      <a:alpha val="100000"/>
+                    </a:srgbClr>
+                  </a:solidFill>
+                  <a:latin typeface="Helvetica"/>
+                  <a:cs typeface="Helvetica"/>
+                </a:rPr>
+                <a:t>subHR (95% CI)</a:t>
+              </a:r>
+            </a:p>
+          </p:txBody>
+        </p:sp>
+        <p:sp>
+          <p:nvSpPr>
+            <p:cNvPr id="89" name="tx89"/>
+            <p:cNvSpPr/>
+            <p:nvPr/>
+          </p:nvSpPr>
+          <p:spPr>
+            <a:xfrm>
+              <a:off x="887106" y="4159544"/>
+              <a:ext cx="6985375" cy="82021"/>
+            </a:xfrm>
+            <a:prstGeom prst="rect">
+              <a:avLst/>
+            </a:prstGeom>
+            <a:noFill/>
+          </p:spPr>
+          <p:txBody>
+            <a:bodyPr lIns="0" rIns="0" tIns="0" bIns="0" anchorCtr="1" anchor="ctr" wrap="none"/>
+            <a:lstStyle/>
+            <a:p>
+              <a:pPr algn="l" marL="0" marR="0" indent="0">
+                <a:lnSpc>
+                  <a:spcPts val="900"/>
+                </a:lnSpc>
+                <a:spcBef>
+                  <a:spcPts val="0"/>
+                </a:spcBef>
+                <a:spcAft>
+                  <a:spcPts val="0"/>
+                </a:spcAft>
+              </a:pPr>
+              <a:r>
+                <a:rPr sz="900">
+                  <a:solidFill>
+                    <a:srgbClr val="404040">
+                      <a:alpha val="100000"/>
+                    </a:srgbClr>
+                  </a:solidFill>
+                  <a:latin typeface="Helvetica"/>
+                  <a:cs typeface="Helvetica"/>
+                </a:rPr>
+                <a:t>subHR per 10 % decline: 1.22 (1.09-1.37), p_Bonf = 0.003 (n = 6)  |  per IQR decline (Δ = 29.9 %): 1.82 (1.30-2.55)  |  IQR: [-15.0, 14.9] %</a:t>
+              </a:r>
+            </a:p>
+          </p:txBody>
+        </p:sp>
+        <p:sp>
+          <p:nvSpPr>
+            <p:cNvPr id="90" name="tx90"/>
+            <p:cNvSpPr/>
+            <p:nvPr/>
+          </p:nvSpPr>
+          <p:spPr>
+            <a:xfrm>
+              <a:off x="887106" y="3932770"/>
               <a:ext cx="2681569" cy="120152"/>
             </a:xfrm>
             <a:prstGeom prst="rect">
